--- a/slides/20260722_progress.pptx
+++ b/slides/20260722_progress.pptx
@@ -20,6 +20,7 @@
     <p:sldId id="268" r:id="rId19"/>
     <p:sldId id="269" r:id="rId20"/>
     <p:sldId id="270" r:id="rId21"/>
+    <p:sldId id="271" r:id="rId22"/>
   </p:sldIdLst>
   <p:sldSz cx="12191695" cy="6858000" type="screen4x3"/>
   <p:notesSz cx="6858000" cy="9144000"/>
@@ -4424,6 +4425,353 @@
 </file>
 
 <file path=ppt/slides/slide13.xml><?xml version="1.0" encoding="utf-8"?>
+<p:sld xmlns:a="http://schemas.openxmlformats.org/drawingml/2006/main" xmlns:p="http://schemas.openxmlformats.org/presentationml/2006/main" xmlns:r="http://schemas.openxmlformats.org/officeDocument/2006/relationships">
+  <p:cSld>
+    <p:spTree>
+      <p:nvGrpSpPr>
+        <p:cNvPr id="1" name=""/>
+        <p:cNvGrpSpPr/>
+        <p:nvPr/>
+      </p:nvGrpSpPr>
+      <p:grpSpPr/>
+      <p:sp>
+        <p:nvSpPr>
+          <p:cNvPr id="2" name="Rectangle 1"/>
+          <p:cNvSpPr/>
+          <p:nvPr/>
+        </p:nvSpPr>
+        <p:spPr>
+          <a:xfrm>
+            <a:off x="0" y="0"/>
+            <a:ext cx="12191695" cy="146304"/>
+          </a:xfrm>
+          <a:prstGeom prst="rect">
+            <a:avLst/>
+          </a:prstGeom>
+          <a:solidFill>
+            <a:srgbClr val="0E7C66"/>
+          </a:solidFill>
+          <a:ln>
+            <a:noFill/>
+          </a:ln>
+        </p:spPr>
+        <p:style>
+          <a:lnRef idx="1">
+            <a:schemeClr val="accent1"/>
+          </a:lnRef>
+          <a:fillRef idx="3">
+            <a:schemeClr val="accent1"/>
+          </a:fillRef>
+          <a:effectRef idx="2">
+            <a:schemeClr val="accent1"/>
+          </a:effectRef>
+          <a:fontRef idx="minor">
+            <a:schemeClr val="lt1"/>
+          </a:fontRef>
+        </p:style>
+        <p:txBody>
+          <a:bodyPr rtlCol="0" anchor="ctr"/>
+          <a:lstStyle/>
+          <a:p>
+            <a:pPr algn="ctr"/>
+          </a:p>
+        </p:txBody>
+      </p:sp>
+      <p:sp>
+        <p:nvSpPr>
+          <p:cNvPr id="3" name="TextBox 2"/>
+          <p:cNvSpPr txBox="1"/>
+          <p:nvPr/>
+        </p:nvSpPr>
+        <p:spPr>
+          <a:xfrm>
+            <a:off x="502920" y="256032"/>
+            <a:ext cx="11247120" cy="731520"/>
+          </a:xfrm>
+          <a:prstGeom prst="rect">
+            <a:avLst/>
+          </a:prstGeom>
+          <a:noFill/>
+        </p:spPr>
+        <p:txBody>
+          <a:bodyPr wrap="square">
+            <a:spAutoFit/>
+          </a:bodyPr>
+          <a:lstStyle/>
+          <a:p>
+            <a:pPr algn="l">
+              <a:lnSpc>
+                <a:spcPct val="115000"/>
+              </a:lnSpc>
+            </a:pPr>
+            <a:r>
+              <a:rPr sz="2700" b="1">
+                <a:solidFill>
+                  <a:srgbClr val="22272E"/>
+                </a:solidFill>
+                <a:latin typeface="Meiryo"/>
+              </a:rPr>
+              <a:t>比較対象の詳細 — prompting(介入なしの天井)</a:t>
+            </a:r>
+          </a:p>
+        </p:txBody>
+      </p:sp>
+      <p:sp>
+        <p:nvSpPr>
+          <p:cNvPr id="4" name="TextBox 3"/>
+          <p:cNvSpPr txBox="1"/>
+          <p:nvPr/>
+        </p:nvSpPr>
+        <p:spPr>
+          <a:xfrm>
+            <a:off x="502920" y="1097280"/>
+            <a:ext cx="11247120" cy="640080"/>
+          </a:xfrm>
+          <a:prstGeom prst="rect">
+            <a:avLst/>
+          </a:prstGeom>
+          <a:noFill/>
+        </p:spPr>
+        <p:txBody>
+          <a:bodyPr wrap="square">
+            <a:spAutoFit/>
+          </a:bodyPr>
+          <a:lstStyle/>
+          <a:p>
+            <a:pPr algn="l">
+              <a:lnSpc>
+                <a:spcPct val="115000"/>
+              </a:lnSpc>
+            </a:pPr>
+            <a:r>
+              <a:rPr sz="1500" b="0">
+                <a:solidFill>
+                  <a:srgbClr val="5A6472"/>
+                </a:solidFill>
+                <a:latin typeface="Meiryo"/>
+              </a:rPr>
+              <a:t>同じ凍結LM(gemma-2-2b-it)に、指示文だけで編集させる。SAEも介入も使わない「言葉で頼む」やり方の上限を測る腕。</a:t>
+            </a:r>
+          </a:p>
+        </p:txBody>
+      </p:sp>
+      <p:sp>
+        <p:nvSpPr>
+          <p:cNvPr id="5" name="TextBox 4"/>
+          <p:cNvSpPr txBox="1"/>
+          <p:nvPr/>
+        </p:nvSpPr>
+        <p:spPr>
+          <a:xfrm>
+            <a:off x="502920" y="1828800"/>
+            <a:ext cx="11247120" cy="365760"/>
+          </a:xfrm>
+          <a:prstGeom prst="rect">
+            <a:avLst/>
+          </a:prstGeom>
+          <a:noFill/>
+        </p:spPr>
+        <p:txBody>
+          <a:bodyPr wrap="square">
+            <a:spAutoFit/>
+          </a:bodyPr>
+          <a:lstStyle/>
+          <a:p>
+            <a:pPr algn="l">
+              <a:lnSpc>
+                <a:spcPct val="115000"/>
+              </a:lnSpc>
+            </a:pPr>
+            <a:r>
+              <a:rPr sz="1600" b="1">
+                <a:solidFill>
+                  <a:srgbClr val="0E7C66"/>
+                </a:solidFill>
+                <a:latin typeface="Meiryo"/>
+              </a:rPr>
+              <a:t>実際のプロンプト(sup方向の例、greedy生成):</a:t>
+            </a:r>
+          </a:p>
+        </p:txBody>
+      </p:sp>
+      <p:sp>
+        <p:nvSpPr>
+          <p:cNvPr id="6" name="Rounded Rectangle 5"/>
+          <p:cNvSpPr/>
+          <p:nvPr/>
+        </p:nvSpPr>
+        <p:spPr>
+          <a:xfrm>
+            <a:off x="640080" y="2286000"/>
+            <a:ext cx="10881360" cy="1554480"/>
+          </a:xfrm>
+          <a:prstGeom prst="roundRect">
+            <a:avLst/>
+          </a:prstGeom>
+          <a:solidFill>
+            <a:srgbClr val="F6F7F8"/>
+          </a:solidFill>
+          <a:ln w="20320">
+            <a:solidFill>
+              <a:srgbClr val="5A6472"/>
+            </a:solidFill>
+          </a:ln>
+        </p:spPr>
+        <p:style>
+          <a:lnRef idx="1">
+            <a:schemeClr val="accent1"/>
+          </a:lnRef>
+          <a:fillRef idx="3">
+            <a:schemeClr val="accent1"/>
+          </a:fillRef>
+          <a:effectRef idx="2">
+            <a:schemeClr val="accent1"/>
+          </a:effectRef>
+          <a:fontRef idx="minor">
+            <a:schemeClr val="lt1"/>
+          </a:fontRef>
+        </p:style>
+        <p:txBody>
+          <a:bodyPr rtlCol="0" anchor="ctr" wrap="square" lIns="54864" rIns="54864" tIns="36576" bIns="36576"/>
+          <a:lstStyle/>
+          <a:p>
+            <a:pPr algn="ctr"/>
+            <a:r>
+              <a:rPr sz="1200" b="0">
+                <a:solidFill>
+                  <a:srgbClr val="22272E"/>
+                </a:solidFill>
+                <a:latin typeface="Meiryo"/>
+              </a:rPr>
+              <a:t>true(正しい特徴名): Rewrite the input sentence to remove any {特徴名: 例 superlative}. Output only the rewritten sentence.</a:t>
+            </a:r>
+          </a:p>
+          <a:p>
+            <a:pPr algn="ctr"/>
+            <a:r>
+              <a:rPr sz="1200" b="0">
+                <a:solidFill>
+                  <a:srgbClr val="22272E"/>
+                </a:solidFill>
+                <a:latin typeface="Meiryo"/>
+              </a:rPr>
+              <a:t>random(無関係な特徴名): Rewrite the input sentence to remove any {別の特徴名}. …(特異性の検算用)</a:t>
+            </a:r>
+          </a:p>
+          <a:p>
+            <a:pPr algn="ctr"/>
+            <a:r>
+              <a:rPr sz="1200" b="0">
+                <a:solidFill>
+                  <a:srgbClr val="22272E"/>
+                </a:solidFill>
+                <a:latin typeface="Meiryo"/>
+              </a:rPr>
+              <a:t>empty(特徴名なし): Rewrite the input sentence. Output only the rewritten sentence.</a:t>
+            </a:r>
+          </a:p>
+          <a:p>
+            <a:pPr algn="ctr"/>
+            <a:r>
+              <a:rPr sz="1200" b="0">
+                <a:solidFill>
+                  <a:srgbClr val="22272E"/>
+                </a:solidFill>
+                <a:latin typeface="Meiryo"/>
+              </a:rPr>
+              <a:t>※ この後に Input: {src文} を付けてチャット形式で入力。amp方向は remove → add に変わるだけ</a:t>
+            </a:r>
+          </a:p>
+        </p:txBody>
+      </p:sp>
+      <p:sp>
+        <p:nvSpPr>
+          <p:cNvPr id="7" name="TextBox 6"/>
+          <p:cNvSpPr txBox="1"/>
+          <p:nvPr/>
+        </p:nvSpPr>
+        <p:spPr>
+          <a:xfrm>
+            <a:off x="640080" y="4114800"/>
+            <a:ext cx="10972800" cy="5394960"/>
+          </a:xfrm>
+          <a:prstGeom prst="rect">
+            <a:avLst/>
+          </a:prstGeom>
+          <a:noFill/>
+        </p:spPr>
+        <p:txBody>
+          <a:bodyPr wrap="square">
+            <a:spAutoFit/>
+          </a:bodyPr>
+          <a:lstStyle/>
+          <a:p>
+            <a:pPr>
+              <a:lnSpc>
+                <a:spcPct val="116000"/>
+              </a:lnSpc>
+              <a:spcAft>
+                <a:spcPts val="800"/>
+              </a:spcAft>
+            </a:pPr>
+            <a:r>
+              <a:rPr sz="1600" b="1">
+                <a:solidFill>
+                  <a:srgbClr val="0E7C66"/>
+                </a:solidFill>
+                <a:latin typeface="Meiryo"/>
+              </a:rPr>
+              <a:t>randomの意味: </a:t>
+            </a:r>
+            <a:r>
+              <a:rPr sz="1600">
+                <a:solidFill>
+                  <a:srgbClr val="22272E"/>
+                </a:solidFill>
+                <a:latin typeface="Meiryo"/>
+              </a:rPr>
+              <a:t>無関係な特徴名で同じ指示をしたときに編集が出るか = 「指定に従っているか」の検算。ここで編集してしまうのがpromptingの弱点(失敗例スライド)</a:t>
+            </a:r>
+          </a:p>
+          <a:p>
+            <a:pPr>
+              <a:lnSpc>
+                <a:spcPct val="116000"/>
+              </a:lnSpc>
+              <a:spcAft>
+                <a:spcPts val="800"/>
+              </a:spcAft>
+            </a:pPr>
+            <a:r>
+              <a:rPr sz="1600" b="1">
+                <a:solidFill>
+                  <a:srgbClr val="0E7C66"/>
+                </a:solidFill>
+                <a:latin typeface="Meiryo"/>
+              </a:rPr>
+              <a:t>参考(付録): </a:t>
+            </a:r>
+            <a:r>
+              <a:rPr sz="1600">
+                <a:solidFill>
+                  <a:srgbClr val="22272E"/>
+                </a:solidFill>
+                <a:latin typeface="Meiryo"/>
+              </a:rPr>
+              <a:t>AxBenchの字義通りの移植 — gpt-4o-miniに生成させた長い操舵文(例:「回答には能動的な動詞の概念を織り込み…」)を前置する方式も試したが、編集タスクにはほぼ転移しなかった(exact 0.006)。上の「編集向けの自然な指示」に直した版(0.180)を本命の比較対象としている</a:t>
+            </a:r>
+          </a:p>
+        </p:txBody>
+      </p:sp>
+    </p:spTree>
+  </p:cSld>
+  <p:clrMapOvr>
+    <a:masterClrMapping/>
+  </p:clrMapOvr>
+</p:sld>
+</file>
+
+<file path=ppt/slides/slide14.xml><?xml version="1.0" encoding="utf-8"?>
 <p:sld xmlns:a="http://schemas.openxmlformats.org/drawingml/2006/main" xmlns:p="http://schemas.openxmlformats.org/presentationml/2006/main" xmlns:r="http://schemas.openxmlformats.org/officeDocument/2006/relationships">
   <p:cSld>
     <p:spTree>
@@ -5406,7 +5754,7 @@
 </p:sld>
 </file>
 
-<file path=ppt/slides/slide14.xml><?xml version="1.0" encoding="utf-8"?>
+<file path=ppt/slides/slide15.xml><?xml version="1.0" encoding="utf-8"?>
 <p:sld xmlns:a="http://schemas.openxmlformats.org/drawingml/2006/main" xmlns:p="http://schemas.openxmlformats.org/presentationml/2006/main" xmlns:r="http://schemas.openxmlformats.org/officeDocument/2006/relationships">
   <p:cSld>
     <p:spTree>
@@ -5978,7 +6326,7 @@
 </p:sld>
 </file>
 
-<file path=ppt/slides/slide15.xml><?xml version="1.0" encoding="utf-8"?>
+<file path=ppt/slides/slide16.xml><?xml version="1.0" encoding="utf-8"?>
 <p:sld xmlns:a="http://schemas.openxmlformats.org/drawingml/2006/main" xmlns:p="http://schemas.openxmlformats.org/presentationml/2006/main" xmlns:r="http://schemas.openxmlformats.org/officeDocument/2006/relationships">
   <p:cSld>
     <p:spTree>

--- a/slides/20260722_progress.pptx
+++ b/slides/20260722_progress.pptx
@@ -21,6 +21,7 @@
     <p:sldId id="269" r:id="rId20"/>
     <p:sldId id="270" r:id="rId21"/>
     <p:sldId id="271" r:id="rId22"/>
+    <p:sldId id="272" r:id="rId23"/>
   </p:sldIdLst>
   <p:sldSz cx="12191695" cy="6858000" type="screen4x3"/>
   <p:notesSz cx="6858000" cy="9144000"/>
@@ -4511,6 +4512,648 @@
                 </a:solidFill>
                 <a:latin typeface="Meiryo"/>
               </a:rPr>
+              <a:t>介入するactivationsの選び方 — 3手法の違い</a:t>
+            </a:r>
+          </a:p>
+        </p:txBody>
+      </p:sp>
+      <p:graphicFrame>
+        <p:nvGraphicFramePr>
+          <p:cNvPr id="4" name="Table 3"/>
+          <p:cNvGraphicFramePr>
+            <a:graphicFrameLocks noGrp="1"/>
+          </p:cNvGraphicFramePr>
+          <p:nvPr/>
+        </p:nvGraphicFramePr>
+        <p:xfrm>
+          <a:off x="457200" y="1188720"/>
+          <a:ext cx="11247120" cy="3931920"/>
+        </p:xfrm>
+        <a:graphic>
+          <a:graphicData uri="http://schemas.openxmlformats.org/drawingml/2006/table">
+            <a:tbl>
+              <a:tblPr firstRow="1" bandRow="1">
+                <a:tableStyleId>{5C22544A-7EE6-4342-B048-85BDC9FD1C3A}</a:tableStyleId>
+              </a:tblPr>
+              <a:tblGrid>
+                <a:gridCol w="2011680"/>
+                <a:gridCol w="3383280"/>
+                <a:gridCol w="2926080"/>
+                <a:gridCol w="2926080"/>
+              </a:tblGrid>
+              <a:tr h="561702">
+                <a:tc>
+                  <a:txBody>
+                    <a:bodyPr/>
+                    <a:lstStyle/>
+                    <a:p/>
+                  </a:txBody>
+                  <a:tcPr/>
+                </a:tc>
+                <a:tc>
+                  <a:txBody>
+                    <a:bodyPr/>
+                    <a:lstStyle/>
+                    <a:p>
+                      <a:r>
+                        <a:rPr sz="1300" b="1">
+                          <a:latin typeface="Meiryo"/>
+                        </a:rPr>
+                        <a:t>提案手法</a:t>
+                      </a:r>
+                    </a:p>
+                  </a:txBody>
+                  <a:tcPr/>
+                </a:tc>
+                <a:tc>
+                  <a:txBody>
+                    <a:bodyPr/>
+                    <a:lstStyle/>
+                    <a:p>
+                      <a:r>
+                        <a:rPr sz="1300" b="1">
+                          <a:latin typeface="Meiryo"/>
+                        </a:rPr>
+                        <a:t>LinguaLens</a:t>
+                      </a:r>
+                    </a:p>
+                  </a:txBody>
+                  <a:tcPr/>
+                </a:tc>
+                <a:tc>
+                  <a:txBody>
+                    <a:bodyPr/>
+                    <a:lstStyle/>
+                    <a:p>
+                      <a:r>
+                        <a:rPr sz="1300" b="1">
+                          <a:latin typeface="Meiryo"/>
+                        </a:rPr>
+                        <a:t>AxBench</a:t>
+                      </a:r>
+                    </a:p>
+                  </a:txBody>
+                  <a:tcPr/>
+                </a:tc>
+              </a:tr>
+              <a:tr h="561702">
+                <a:tc>
+                  <a:txBody>
+                    <a:bodyPr/>
+                    <a:lstStyle/>
+                    <a:p>
+                      <a:r>
+                        <a:rPr sz="1150" b="1">
+                          <a:latin typeface="Meiryo"/>
+                        </a:rPr>
+                        <a:t>使う統計</a:t>
+                      </a:r>
+                    </a:p>
+                  </a:txBody>
+                  <a:tcPr/>
+                </a:tc>
+                <a:tc>
+                  <a:txBody>
+                    <a:bodyPr/>
+                    <a:lstStyle/>
+                    <a:p>
+                      <a:r>
+                        <a:rPr sz="1150" b="0">
+                          <a:latin typeface="Meiryo"/>
+                        </a:rPr>
+                        <a:t>最小対のSAE差分(z_tgt−z_src)の平均</a:t>
+                      </a:r>
+                    </a:p>
+                  </a:txBody>
+                  <a:tcPr/>
+                </a:tc>
+                <a:tc>
+                  <a:txBody>
+                    <a:bodyPr/>
+                    <a:lstStyle/>
+                    <a:p>
+                      <a:r>
+                        <a:rPr sz="1150" b="0">
+                          <a:latin typeface="Meiryo"/>
+                        </a:rPr>
+                        <a:t>発火したかの二値統計</a:t>
+                      </a:r>
+                    </a:p>
+                    <a:p>
+                      <a:r>
+                        <a:rPr sz="1150" b="0">
+                          <a:latin typeface="Meiryo"/>
+                        </a:rPr>
+                        <a:t>(PS/PNの調和平均=FRC)</a:t>
+                      </a:r>
+                    </a:p>
+                  </a:txBody>
+                  <a:tcPr/>
+                </a:tc>
+                <a:tc>
+                  <a:txBody>
+                    <a:bodyPr/>
+                    <a:lstStyle/>
+                    <a:p>
+                      <a:r>
+                        <a:rPr sz="1150" b="0">
+                          <a:latin typeface="Meiryo"/>
+                        </a:rPr>
+                        <a:t>活性の大きさとラベルの</a:t>
+                      </a:r>
+                    </a:p>
+                    <a:p>
+                      <a:r>
+                        <a:rPr sz="1150" b="0">
+                          <a:latin typeface="Meiryo"/>
+                        </a:rPr>
+                        <a:t>判別力(AUROC)</a:t>
+                      </a:r>
+                    </a:p>
+                  </a:txBody>
+                  <a:tcPr/>
+                </a:tc>
+              </a:tr>
+              <a:tr h="561702">
+                <a:tc>
+                  <a:txBody>
+                    <a:bodyPr/>
+                    <a:lstStyle/>
+                    <a:p>
+                      <a:r>
+                        <a:rPr sz="1150" b="1">
+                          <a:latin typeface="Meiryo"/>
+                        </a:rPr>
+                        <a:t>選ぶ本数</a:t>
+                      </a:r>
+                    </a:p>
+                  </a:txBody>
+                  <a:tcPr/>
+                </a:tc>
+                <a:tc>
+                  <a:txBody>
+                    <a:bodyPr/>
+                    <a:lstStyle/>
+                    <a:p>
+                      <a:r>
+                        <a:rPr sz="1150" b="0">
+                          <a:latin typeface="Meiryo"/>
+                        </a:rPr>
+                        <a:t>上位64本</a:t>
+                      </a:r>
+                    </a:p>
+                  </a:txBody>
+                  <a:tcPr/>
+                </a:tc>
+                <a:tc>
+                  <a:txBody>
+                    <a:bodyPr/>
+                    <a:lstStyle/>
+                    <a:p>
+                      <a:r>
+                        <a:rPr sz="1150" b="0">
+                          <a:latin typeface="Meiryo"/>
+                        </a:rPr>
+                        <a:t>上位3本</a:t>
+                      </a:r>
+                    </a:p>
+                  </a:txBody>
+                  <a:tcPr/>
+                </a:tc>
+                <a:tc>
+                  <a:txBody>
+                    <a:bodyPr/>
+                    <a:lstStyle/>
+                    <a:p>
+                      <a:r>
+                        <a:rPr sz="1150" b="0">
+                          <a:latin typeface="Meiryo"/>
+                        </a:rPr>
+                        <a:t>上位1本</a:t>
+                      </a:r>
+                    </a:p>
+                  </a:txBody>
+                  <a:tcPr/>
+                </a:tc>
+              </a:tr>
+              <a:tr h="561702">
+                <a:tc>
+                  <a:txBody>
+                    <a:bodyPr/>
+                    <a:lstStyle/>
+                    <a:p>
+                      <a:r>
+                        <a:rPr sz="1150" b="1">
+                          <a:latin typeface="Meiryo"/>
+                        </a:rPr>
+                        <a:t>値の扱い</a:t>
+                      </a:r>
+                    </a:p>
+                  </a:txBody>
+                  <a:tcPr/>
+                </a:tc>
+                <a:tc>
+                  <a:txBody>
+                    <a:bodyPr/>
+                    <a:lstStyle/>
+                    <a:p>
+                      <a:r>
+                        <a:rPr sz="1150" b="0">
+                          <a:latin typeface="Meiryo"/>
+                        </a:rPr>
+                        <a:t>符号つきの大きさを保持</a:t>
+                      </a:r>
+                    </a:p>
+                    <a:p>
+                      <a:r>
+                        <a:rPr sz="1150" b="0">
+                          <a:latin typeface="Meiryo"/>
+                        </a:rPr>
+                        <a:t>(足す/消すを同時指定)</a:t>
+                      </a:r>
+                    </a:p>
+                  </a:txBody>
+                  <a:tcPr/>
+                </a:tc>
+                <a:tc>
+                  <a:txBody>
+                    <a:bodyPr/>
+                    <a:lstStyle/>
+                    <a:p>
+                      <a:r>
+                        <a:rPr sz="1150" b="0">
+                          <a:latin typeface="Meiryo"/>
+                        </a:rPr>
+                        <a:t>捨てる(固定値10/0に上書き)</a:t>
+                      </a:r>
+                    </a:p>
+                  </a:txBody>
+                  <a:tcPr/>
+                </a:tc>
+                <a:tc>
+                  <a:txBody>
+                    <a:bodyPr/>
+                    <a:lstStyle/>
+                    <a:p>
+                      <a:r>
+                        <a:rPr sz="1150" b="0">
+                          <a:latin typeface="Meiryo"/>
+                        </a:rPr>
+                        <a:t>max_act×係数で加算</a:t>
+                      </a:r>
+                    </a:p>
+                  </a:txBody>
+                  <a:tcPr/>
+                </a:tc>
+              </a:tr>
+              <a:tr h="561702">
+                <a:tc>
+                  <a:txBody>
+                    <a:bodyPr/>
+                    <a:lstStyle/>
+                    <a:p>
+                      <a:r>
+                        <a:rPr sz="1150" b="1">
+                          <a:latin typeface="Meiryo"/>
+                        </a:rPr>
+                        <a:t>測る場所</a:t>
+                      </a:r>
+                    </a:p>
+                  </a:txBody>
+                  <a:tcPr/>
+                </a:tc>
+                <a:tc>
+                  <a:txBody>
+                    <a:bodyPr/>
+                    <a:lstStyle/>
+                    <a:p>
+                      <a:r>
+                        <a:rPr sz="1150" b="0">
+                          <a:latin typeface="Meiryo"/>
+                        </a:rPr>
+                        <a:t>編集される箇所だけ(局所)</a:t>
+                      </a:r>
+                    </a:p>
+                  </a:txBody>
+                  <a:tcPr/>
+                </a:tc>
+                <a:tc>
+                  <a:txBody>
+                    <a:bodyPr/>
+                    <a:lstStyle/>
+                    <a:p>
+                      <a:r>
+                        <a:rPr sz="1150" b="0">
+                          <a:latin typeface="Meiryo"/>
+                        </a:rPr>
+                        <a:t>文中のどこでも</a:t>
+                      </a:r>
+                    </a:p>
+                  </a:txBody>
+                  <a:tcPr/>
+                </a:tc>
+                <a:tc>
+                  <a:txBody>
+                    <a:bodyPr/>
+                    <a:lstStyle/>
+                    <a:p>
+                      <a:r>
+                        <a:rPr sz="1150" b="0">
+                          <a:latin typeface="Meiryo"/>
+                        </a:rPr>
+                        <a:t>文全体の最大値</a:t>
+                      </a:r>
+                    </a:p>
+                  </a:txBody>
+                  <a:tcPr/>
+                </a:tc>
+              </a:tr>
+              <a:tr h="561702">
+                <a:tc>
+                  <a:txBody>
+                    <a:bodyPr/>
+                    <a:lstStyle/>
+                    <a:p>
+                      <a:r>
+                        <a:rPr sz="1150" b="1">
+                          <a:latin typeface="Meiryo"/>
+                        </a:rPr>
+                        <a:t>選び方の型</a:t>
+                      </a:r>
+                    </a:p>
+                  </a:txBody>
+                  <a:tcPr/>
+                </a:tc>
+                <a:tc>
+                  <a:txBody>
+                    <a:bodyPr/>
+                    <a:lstStyle/>
+                    <a:p>
+                      <a:r>
+                        <a:rPr sz="1150" b="0">
+                          <a:latin typeface="Meiryo"/>
+                        </a:rPr>
+                        <a:t>平均(全ペアの合意)</a:t>
+                      </a:r>
+                    </a:p>
+                  </a:txBody>
+                  <a:tcPr/>
+                </a:tc>
+                <a:tc>
+                  <a:txBody>
+                    <a:bodyPr/>
+                    <a:lstStyle/>
+                    <a:p>
+                      <a:r>
+                        <a:rPr sz="1150" b="0">
+                          <a:latin typeface="Meiryo"/>
+                        </a:rPr>
+                        <a:t>最大値の勝者総取り</a:t>
+                      </a:r>
+                    </a:p>
+                  </a:txBody>
+                  <a:tcPr/>
+                </a:tc>
+                <a:tc>
+                  <a:txBody>
+                    <a:bodyPr/>
+                    <a:lstStyle/>
+                    <a:p>
+                      <a:r>
+                        <a:rPr sz="1150" b="0">
+                          <a:latin typeface="Meiryo"/>
+                        </a:rPr>
+                        <a:t>最大値の勝者総取り</a:t>
+                      </a:r>
+                    </a:p>
+                  </a:txBody>
+                  <a:tcPr/>
+                </a:tc>
+              </a:tr>
+              <a:tr h="561708">
+                <a:tc>
+                  <a:txBody>
+                    <a:bodyPr/>
+                    <a:lstStyle/>
+                    <a:p>
+                      <a:r>
+                        <a:rPr sz="1150" b="1">
+                          <a:latin typeface="Meiryo"/>
+                        </a:rPr>
+                        <a:t>安定性(実測)</a:t>
+                      </a:r>
+                    </a:p>
+                  </a:txBody>
+                  <a:tcPr/>
+                </a:tc>
+                <a:tc>
+                  <a:txBody>
+                    <a:bodyPr/>
+                    <a:lstStyle/>
+                    <a:p>
+                      <a:r>
+                        <a:rPr sz="1150" b="0">
+                          <a:latin typeface="Meiryo"/>
+                        </a:rPr>
+                        <a:t>データ半分でもspecほぼ同じ</a:t>
+                      </a:r>
+                    </a:p>
+                    <a:p>
+                      <a:r>
+                        <a:rPr sz="1150" b="0">
+                          <a:latin typeface="Meiryo"/>
+                        </a:rPr>
+                        <a:t>(類似度0.83)</a:t>
+                      </a:r>
+                    </a:p>
+                  </a:txBody>
+                  <a:tcPr/>
+                </a:tc>
+                <a:tc>
+                  <a:txBody>
+                    <a:bodyPr/>
+                    <a:lstStyle/>
+                    <a:p>
+                      <a:r>
+                        <a:rPr sz="1150" b="0">
+                          <a:latin typeface="Meiryo"/>
+                        </a:rPr>
+                        <a:t>半分で1位の6割が入れ替わる</a:t>
+                      </a:r>
+                    </a:p>
+                  </a:txBody>
+                  <a:tcPr/>
+                </a:tc>
+                <a:tc>
+                  <a:txBody>
+                    <a:bodyPr/>
+                    <a:lstStyle/>
+                    <a:p>
+                      <a:r>
+                        <a:rPr sz="1150" b="0">
+                          <a:latin typeface="Meiryo"/>
+                        </a:rPr>
+                        <a:t>同左(勝者総取りの宿命)</a:t>
+                      </a:r>
+                    </a:p>
+                  </a:txBody>
+                  <a:tcPr/>
+                </a:tc>
+              </a:tr>
+            </a:tbl>
+          </a:graphicData>
+        </a:graphic>
+      </p:graphicFrame>
+      <p:sp>
+        <p:nvSpPr>
+          <p:cNvPr id="5" name="TextBox 4"/>
+          <p:cNvSpPr txBox="1"/>
+          <p:nvPr/>
+        </p:nvSpPr>
+        <p:spPr>
+          <a:xfrm>
+            <a:off x="502920" y="5349240"/>
+            <a:ext cx="11247120" cy="1188720"/>
+          </a:xfrm>
+          <a:prstGeom prst="rect">
+            <a:avLst/>
+          </a:prstGeom>
+          <a:noFill/>
+        </p:spPr>
+        <p:txBody>
+          <a:bodyPr wrap="square">
+            <a:spAutoFit/>
+          </a:bodyPr>
+          <a:lstStyle/>
+          <a:p>
+            <a:pPr algn="l">
+              <a:lnSpc>
+                <a:spcPct val="115000"/>
+              </a:lnSpc>
+            </a:pPr>
+            <a:r>
+              <a:rPr sz="1400" b="0">
+                <a:solidFill>
+                  <a:srgbClr val="5A6472"/>
+                </a:solidFill>
+                <a:latin typeface="Meiryo"/>
+              </a:rPr>
+              <a:t>ポイント: 上位近くにはほぼ同点の活性が多数あり(SAEのfeature分裂)、最大値で選ぶと「どれが選ばれるか」がデータ次第で入れ替わる。</a:t>
+            </a:r>
+          </a:p>
+          <a:p>
+            <a:pPr algn="l">
+              <a:lnSpc>
+                <a:spcPct val="115000"/>
+              </a:lnSpc>
+            </a:pPr>
+            <a:r>
+              <a:rPr sz="1400" b="0">
+                <a:solidFill>
+                  <a:srgbClr val="5A6472"/>
+                </a:solidFill>
+                <a:latin typeface="Meiryo"/>
+              </a:rPr>
+              <a:t>提案手法は平均で同点クラスタ全体を取り込むため安定 — かつ大きさ・符号を保持するので、編集器が「どれをどれだけ動かすか」を読める。</a:t>
+            </a:r>
+          </a:p>
+        </p:txBody>
+      </p:sp>
+    </p:spTree>
+  </p:cSld>
+  <p:clrMapOvr>
+    <a:masterClrMapping/>
+  </p:clrMapOvr>
+</p:sld>
+</file>
+
+<file path=ppt/slides/slide14.xml><?xml version="1.0" encoding="utf-8"?>
+<p:sld xmlns:a="http://schemas.openxmlformats.org/drawingml/2006/main" xmlns:p="http://schemas.openxmlformats.org/presentationml/2006/main" xmlns:r="http://schemas.openxmlformats.org/officeDocument/2006/relationships">
+  <p:cSld>
+    <p:spTree>
+      <p:nvGrpSpPr>
+        <p:cNvPr id="1" name=""/>
+        <p:cNvGrpSpPr/>
+        <p:nvPr/>
+      </p:nvGrpSpPr>
+      <p:grpSpPr/>
+      <p:sp>
+        <p:nvSpPr>
+          <p:cNvPr id="2" name="Rectangle 1"/>
+          <p:cNvSpPr/>
+          <p:nvPr/>
+        </p:nvSpPr>
+        <p:spPr>
+          <a:xfrm>
+            <a:off x="0" y="0"/>
+            <a:ext cx="12191695" cy="146304"/>
+          </a:xfrm>
+          <a:prstGeom prst="rect">
+            <a:avLst/>
+          </a:prstGeom>
+          <a:solidFill>
+            <a:srgbClr val="0E7C66"/>
+          </a:solidFill>
+          <a:ln>
+            <a:noFill/>
+          </a:ln>
+        </p:spPr>
+        <p:style>
+          <a:lnRef idx="1">
+            <a:schemeClr val="accent1"/>
+          </a:lnRef>
+          <a:fillRef idx="3">
+            <a:schemeClr val="accent1"/>
+          </a:fillRef>
+          <a:effectRef idx="2">
+            <a:schemeClr val="accent1"/>
+          </a:effectRef>
+          <a:fontRef idx="minor">
+            <a:schemeClr val="lt1"/>
+          </a:fontRef>
+        </p:style>
+        <p:txBody>
+          <a:bodyPr rtlCol="0" anchor="ctr"/>
+          <a:lstStyle/>
+          <a:p>
+            <a:pPr algn="ctr"/>
+          </a:p>
+        </p:txBody>
+      </p:sp>
+      <p:sp>
+        <p:nvSpPr>
+          <p:cNvPr id="3" name="TextBox 2"/>
+          <p:cNvSpPr txBox="1"/>
+          <p:nvPr/>
+        </p:nvSpPr>
+        <p:spPr>
+          <a:xfrm>
+            <a:off x="502920" y="256032"/>
+            <a:ext cx="11247120" cy="731520"/>
+          </a:xfrm>
+          <a:prstGeom prst="rect">
+            <a:avLst/>
+          </a:prstGeom>
+          <a:noFill/>
+        </p:spPr>
+        <p:txBody>
+          <a:bodyPr wrap="square">
+            <a:spAutoFit/>
+          </a:bodyPr>
+          <a:lstStyle/>
+          <a:p>
+            <a:pPr algn="l">
+              <a:lnSpc>
+                <a:spcPct val="115000"/>
+              </a:lnSpc>
+            </a:pPr>
+            <a:r>
+              <a:rPr sz="2700" b="1">
+                <a:solidFill>
+                  <a:srgbClr val="22272E"/>
+                </a:solidFill>
+                <a:latin typeface="Meiryo"/>
+              </a:rPr>
               <a:t>比較対象の詳細 — prompting(介入なしの天井)</a:t>
             </a:r>
           </a:p>
@@ -4771,7 +5414,7 @@
 </p:sld>
 </file>
 
-<file path=ppt/slides/slide14.xml><?xml version="1.0" encoding="utf-8"?>
+<file path=ppt/slides/slide15.xml><?xml version="1.0" encoding="utf-8"?>
 <p:sld xmlns:a="http://schemas.openxmlformats.org/drawingml/2006/main" xmlns:p="http://schemas.openxmlformats.org/presentationml/2006/main" xmlns:r="http://schemas.openxmlformats.org/officeDocument/2006/relationships">
   <p:cSld>
     <p:spTree>
@@ -5754,7 +6397,7 @@
 </p:sld>
 </file>
 
-<file path=ppt/slides/slide15.xml><?xml version="1.0" encoding="utf-8"?>
+<file path=ppt/slides/slide16.xml><?xml version="1.0" encoding="utf-8"?>
 <p:sld xmlns:a="http://schemas.openxmlformats.org/drawingml/2006/main" xmlns:p="http://schemas.openxmlformats.org/presentationml/2006/main" xmlns:r="http://schemas.openxmlformats.org/officeDocument/2006/relationships">
   <p:cSld>
     <p:spTree>
@@ -6326,7 +6969,7 @@
 </p:sld>
 </file>
 
-<file path=ppt/slides/slide16.xml><?xml version="1.0" encoding="utf-8"?>
+<file path=ppt/slides/slide17.xml><?xml version="1.0" encoding="utf-8"?>
 <p:sld xmlns:a="http://schemas.openxmlformats.org/drawingml/2006/main" xmlns:p="http://schemas.openxmlformats.org/presentationml/2006/main" xmlns:r="http://schemas.openxmlformats.org/officeDocument/2006/relationships">
   <p:cSld>
     <p:spTree>

--- a/slides/20260722_progress.pptx
+++ b/slides/20260722_progress.pptx
@@ -9864,7 +9864,7 @@
                 </a:solidFill>
                 <a:latin typeface="Meiryo"/>
               </a:rPr>
-              <a:t>学習にLinguaLens-Dataは一切使わない(ゼロショット転移)。</a:t>
+              <a:t>元コーパスはDolma v1.6サンプル(AllenAI)。学習にLinguaLens-Dataは一切使わない(ゼロショット転移)。</a:t>
             </a:r>
           </a:p>
           <a:p>
@@ -10047,7 +10047,7 @@
                 </a:solidFill>
                 <a:latin typeface="Meiryo"/>
               </a:rPr>
-              <a:t>合成データのみ(コーパスの文を確率的に壊す→直す)。LinguaLens-Dataは不使用</a:t>
+              <a:t>Dolma v1.6サンプル(AllenAI公開の英語大規模コーパス)の文を確率的に壊して作った合成データ。LinguaLens-Dataは不使用</a:t>
             </a:r>
           </a:p>
           <a:p>

--- a/slides/20260722_progress.pptx
+++ b/slides/20260722_progress.pptx
@@ -8519,526 +8519,40 @@
           </a:p>
         </p:txBody>
       </p:sp>
-      <p:sp>
-        <p:nvSpPr>
-          <p:cNvPr id="4" name="Rounded Rectangle 3"/>
-          <p:cNvSpPr/>
+      <p:pic>
+        <p:nvPicPr>
+          <p:cNvPr id="4" name="Picture 3" descr="fig_method.png"/>
+          <p:cNvPicPr>
+            <a:picLocks noChangeAspect="1"/>
+          </p:cNvPicPr>
           <p:nvPr/>
-        </p:nvSpPr>
+        </p:nvPicPr>
+        <p:blipFill>
+          <a:blip r:embed="rId2"/>
+          <a:stretch>
+            <a:fillRect/>
+          </a:stretch>
+        </p:blipFill>
         <p:spPr>
           <a:xfrm>
-            <a:off x="411480" y="2286000"/>
-            <a:ext cx="1600200" cy="1051560"/>
+            <a:off x="1874519" y="1024128"/>
+            <a:ext cx="8412480" cy="5237959"/>
           </a:xfrm>
-          <a:prstGeom prst="roundRect">
+          <a:prstGeom prst="rect">
             <a:avLst/>
           </a:prstGeom>
-          <a:solidFill>
-            <a:srgbClr val="EDF0F5"/>
-          </a:solidFill>
-          <a:ln w="20320">
-            <a:solidFill>
-              <a:srgbClr val="5E6E8C"/>
-            </a:solidFill>
-          </a:ln>
         </p:spPr>
-        <p:style>
-          <a:lnRef idx="1">
-            <a:schemeClr val="accent1"/>
-          </a:lnRef>
-          <a:fillRef idx="3">
-            <a:schemeClr val="accent1"/>
-          </a:fillRef>
-          <a:effectRef idx="2">
-            <a:schemeClr val="accent1"/>
-          </a:effectRef>
-          <a:fontRef idx="minor">
-            <a:schemeClr val="lt1"/>
-          </a:fontRef>
-        </p:style>
-        <p:txBody>
-          <a:bodyPr rtlCol="0" anchor="ctr" wrap="square" lIns="54864" rIns="54864" tIns="36576" bIns="36576"/>
-          <a:lstStyle/>
-          <a:p>
-            <a:pPr algn="ctr"/>
-            <a:r>
-              <a:rPr sz="1200" b="1">
-                <a:solidFill>
-                  <a:srgbClr val="22272E"/>
-                </a:solidFill>
-                <a:latin typeface="Meiryo"/>
-              </a:rPr>
-              <a:t>最小対</a:t>
-            </a:r>
-          </a:p>
-          <a:p>
-            <a:pPr algn="ctr"/>
-            <a:r>
-              <a:rPr sz="1200" b="1">
-                <a:solidFill>
-                  <a:srgbClr val="22272E"/>
-                </a:solidFill>
-                <a:latin typeface="Meiryo"/>
-              </a:rPr>
-              <a:t>(同定プール)</a:t>
-            </a:r>
-          </a:p>
-          <a:p>
-            <a:pPr algn="ctr"/>
-            <a:r>
-              <a:rPr sz="1200" b="1">
-                <a:solidFill>
-                  <a:srgbClr val="22272E"/>
-                </a:solidFill>
-                <a:latin typeface="Meiryo"/>
-              </a:rPr>
-              <a:t>特徴fの例文ペア</a:t>
-            </a:r>
-          </a:p>
-        </p:txBody>
-      </p:sp>
-      <p:cxnSp>
-        <p:nvCxnSpPr>
-          <p:cNvPr id="5" name="Connector 4"/>
-          <p:cNvCxnSpPr/>
+      </p:pic>
+      <p:sp>
+        <p:nvSpPr>
+          <p:cNvPr id="5" name="TextBox 4"/>
+          <p:cNvSpPr txBox="1"/>
           <p:nvPr/>
-        </p:nvCxnSpPr>
+        </p:nvSpPr>
         <p:spPr>
           <a:xfrm>
-            <a:off x="2011680" y="2807208"/>
-            <a:ext cx="502920" cy="0"/>
-          </a:xfrm>
-          <a:prstGeom prst="line">
-            <a:avLst/>
-          </a:prstGeom>
-          <a:ln w="27940">
-            <a:solidFill>
-              <a:srgbClr val="5A6472"/>
-            </a:solidFill>
-            <a:tailEnd type="arrow"/>
-          </a:ln>
-        </p:spPr>
-        <p:style>
-          <a:lnRef idx="2">
-            <a:schemeClr val="accent1"/>
-          </a:lnRef>
-          <a:fillRef idx="0">
-            <a:schemeClr val="accent1"/>
-          </a:fillRef>
-          <a:effectRef idx="1">
-            <a:schemeClr val="accent1"/>
-          </a:effectRef>
-          <a:fontRef idx="minor">
-            <a:schemeClr val="tx1"/>
-          </a:fontRef>
-        </p:style>
-      </p:cxnSp>
-      <p:sp>
-        <p:nvSpPr>
-          <p:cNvPr id="6" name="Rounded Rectangle 5"/>
-          <p:cNvSpPr/>
-          <p:nvPr/>
-        </p:nvSpPr>
-        <p:spPr>
-          <a:xfrm>
-            <a:off x="2514600" y="2286000"/>
-            <a:ext cx="1417320" cy="1051560"/>
-          </a:xfrm>
-          <a:prstGeom prst="roundRect">
-            <a:avLst/>
-          </a:prstGeom>
-          <a:solidFill>
-            <a:srgbClr val="EDF0F5"/>
-          </a:solidFill>
-          <a:ln w="20320">
-            <a:solidFill>
-              <a:srgbClr val="5E6E8C"/>
-            </a:solidFill>
-          </a:ln>
-        </p:spPr>
-        <p:style>
-          <a:lnRef idx="1">
-            <a:schemeClr val="accent1"/>
-          </a:lnRef>
-          <a:fillRef idx="3">
-            <a:schemeClr val="accent1"/>
-          </a:fillRef>
-          <a:effectRef idx="2">
-            <a:schemeClr val="accent1"/>
-          </a:effectRef>
-          <a:fontRef idx="minor">
-            <a:schemeClr val="lt1"/>
-          </a:fontRef>
-        </p:style>
-        <p:txBody>
-          <a:bodyPr rtlCol="0" anchor="ctr" wrap="square" lIns="54864" rIns="54864" tIns="36576" bIns="36576"/>
-          <a:lstStyle/>
-          <a:p>
-            <a:pPr algn="ctr"/>
-            <a:r>
-              <a:rPr sz="1300" b="1">
-                <a:solidFill>
-                  <a:srgbClr val="22272E"/>
-                </a:solidFill>
-                <a:latin typeface="Meiryo"/>
-              </a:rPr>
-              <a:t>SAE</a:t>
-            </a:r>
-          </a:p>
-          <a:p>
-            <a:pPr algn="ctr"/>
-            <a:r>
-              <a:rPr sz="1300" b="1">
-                <a:solidFill>
-                  <a:srgbClr val="22272E"/>
-                </a:solidFill>
-                <a:latin typeface="Meiryo"/>
-              </a:rPr>
-              <a:t>(凍結)</a:t>
-            </a:r>
-          </a:p>
-        </p:txBody>
-      </p:sp>
-      <p:cxnSp>
-        <p:nvCxnSpPr>
-          <p:cNvPr id="7" name="Connector 6"/>
-          <p:cNvCxnSpPr/>
-          <p:nvPr/>
-        </p:nvCxnSpPr>
-        <p:spPr>
-          <a:xfrm>
-            <a:off x="3931920" y="2807208"/>
-            <a:ext cx="502920" cy="0"/>
-          </a:xfrm>
-          <a:prstGeom prst="line">
-            <a:avLst/>
-          </a:prstGeom>
-          <a:ln w="27940">
-            <a:solidFill>
-              <a:srgbClr val="5A6472"/>
-            </a:solidFill>
-            <a:tailEnd type="arrow"/>
-          </a:ln>
-        </p:spPr>
-        <p:style>
-          <a:lnRef idx="2">
-            <a:schemeClr val="accent1"/>
-          </a:lnRef>
-          <a:fillRef idx="0">
-            <a:schemeClr val="accent1"/>
-          </a:fillRef>
-          <a:effectRef idx="1">
-            <a:schemeClr val="accent1"/>
-          </a:effectRef>
-          <a:fontRef idx="minor">
-            <a:schemeClr val="tx1"/>
-          </a:fontRef>
-        </p:style>
-      </p:cxnSp>
-      <p:sp>
-        <p:nvSpPr>
-          <p:cNvPr id="8" name="Rounded Rectangle 7"/>
-          <p:cNvSpPr/>
-          <p:nvPr/>
-        </p:nvSpPr>
-        <p:spPr>
-          <a:xfrm>
-            <a:off x="4434840" y="2286000"/>
-            <a:ext cx="1828800" cy="1051560"/>
-          </a:xfrm>
-          <a:prstGeom prst="roundRect">
-            <a:avLst/>
-          </a:prstGeom>
-          <a:solidFill>
-            <a:srgbClr val="FFFFFF"/>
-          </a:solidFill>
-          <a:ln w="20320">
-            <a:solidFill>
-              <a:srgbClr val="5A6472"/>
-            </a:solidFill>
-          </a:ln>
-        </p:spPr>
-        <p:style>
-          <a:lnRef idx="1">
-            <a:schemeClr val="accent1"/>
-          </a:lnRef>
-          <a:fillRef idx="3">
-            <a:schemeClr val="accent1"/>
-          </a:fillRef>
-          <a:effectRef idx="2">
-            <a:schemeClr val="accent1"/>
-          </a:effectRef>
-          <a:fontRef idx="minor">
-            <a:schemeClr val="lt1"/>
-          </a:fontRef>
-        </p:style>
-        <p:txBody>
-          <a:bodyPr rtlCol="0" anchor="ctr" wrap="square" lIns="54864" rIns="54864" tIns="36576" bIns="36576"/>
-          <a:lstStyle/>
-          <a:p>
-            <a:pPr algn="ctr"/>
-            <a:r>
-              <a:rPr sz="1200" b="1">
-                <a:solidFill>
-                  <a:srgbClr val="22272E"/>
-                </a:solidFill>
-                <a:latin typeface="Meiryo"/>
-              </a:rPr>
-              <a:t>feature spec</a:t>
-            </a:r>
-          </a:p>
-          <a:p>
-            <a:pPr algn="ctr"/>
-            <a:r>
-              <a:rPr sz="1200" b="1">
-                <a:solidFill>
-                  <a:srgbClr val="22272E"/>
-                </a:solidFill>
-                <a:latin typeface="Meiryo"/>
-              </a:rPr>
-              <a:t>強める/弱める</a:t>
-            </a:r>
-          </a:p>
-          <a:p>
-            <a:pPr algn="ctr"/>
-            <a:r>
-              <a:rPr sz="1200" b="1">
-                <a:solidFill>
-                  <a:srgbClr val="22272E"/>
-                </a:solidFill>
-                <a:latin typeface="Meiryo"/>
-              </a:rPr>
-              <a:t>活性の平均リスト</a:t>
-            </a:r>
-          </a:p>
-        </p:txBody>
-      </p:sp>
-      <p:cxnSp>
-        <p:nvCxnSpPr>
-          <p:cNvPr id="9" name="Connector 8"/>
-          <p:cNvCxnSpPr/>
-          <p:nvPr/>
-        </p:nvCxnSpPr>
-        <p:spPr>
-          <a:xfrm>
-            <a:off x="6263640" y="2807208"/>
-            <a:ext cx="502920" cy="0"/>
-          </a:xfrm>
-          <a:prstGeom prst="line">
-            <a:avLst/>
-          </a:prstGeom>
-          <a:ln w="27940">
-            <a:solidFill>
-              <a:srgbClr val="5A6472"/>
-            </a:solidFill>
-            <a:tailEnd type="arrow"/>
-          </a:ln>
-        </p:spPr>
-        <p:style>
-          <a:lnRef idx="2">
-            <a:schemeClr val="accent1"/>
-          </a:lnRef>
-          <a:fillRef idx="0">
-            <a:schemeClr val="accent1"/>
-          </a:fillRef>
-          <a:effectRef idx="1">
-            <a:schemeClr val="accent1"/>
-          </a:effectRef>
-          <a:fontRef idx="minor">
-            <a:schemeClr val="tx1"/>
-          </a:fontRef>
-        </p:style>
-      </p:cxnSp>
-      <p:sp>
-        <p:nvSpPr>
-          <p:cNvPr id="10" name="Rounded Rectangle 9"/>
-          <p:cNvSpPr/>
-          <p:nvPr/>
-        </p:nvSpPr>
-        <p:spPr>
-          <a:xfrm>
-            <a:off x="6766560" y="2286000"/>
-            <a:ext cx="1737360" cy="1051560"/>
-          </a:xfrm>
-          <a:prstGeom prst="roundRect">
-            <a:avLst/>
-          </a:prstGeom>
-          <a:solidFill>
-            <a:srgbClr val="E3F0EC"/>
-          </a:solidFill>
-          <a:ln w="20320">
-            <a:solidFill>
-              <a:srgbClr val="0E7C66"/>
-            </a:solidFill>
-          </a:ln>
-        </p:spPr>
-        <p:style>
-          <a:lnRef idx="1">
-            <a:schemeClr val="accent1"/>
-          </a:lnRef>
-          <a:fillRef idx="3">
-            <a:schemeClr val="accent1"/>
-          </a:fillRef>
-          <a:effectRef idx="2">
-            <a:schemeClr val="accent1"/>
-          </a:effectRef>
-          <a:fontRef idx="minor">
-            <a:schemeClr val="lt1"/>
-          </a:fontRef>
-        </p:style>
-        <p:txBody>
-          <a:bodyPr rtlCol="0" anchor="ctr" wrap="square" lIns="54864" rIns="54864" tIns="36576" bIns="36576"/>
-          <a:lstStyle/>
-          <a:p>
-            <a:pPr algn="ctr"/>
-            <a:r>
-              <a:rPr sz="1300" b="1">
-                <a:solidFill>
-                  <a:srgbClr val="22272E"/>
-                </a:solidFill>
-                <a:latin typeface="Meiryo"/>
-              </a:rPr>
-              <a:t>編集器 editor</a:t>
-            </a:r>
-          </a:p>
-          <a:p>
-            <a:pPr algn="ctr"/>
-            <a:r>
-              <a:rPr sz="1300" b="1">
-                <a:solidFill>
-                  <a:srgbClr val="22272E"/>
-                </a:solidFill>
-                <a:latin typeface="Meiryo"/>
-              </a:rPr>
-              <a:t>(学習・EF基盤)</a:t>
-            </a:r>
-          </a:p>
-        </p:txBody>
-      </p:sp>
-      <p:cxnSp>
-        <p:nvCxnSpPr>
-          <p:cNvPr id="11" name="Connector 10"/>
-          <p:cNvCxnSpPr/>
-          <p:nvPr/>
-        </p:nvCxnSpPr>
-        <p:spPr>
-          <a:xfrm>
-            <a:off x="8503920" y="2807208"/>
-            <a:ext cx="502920" cy="0"/>
-          </a:xfrm>
-          <a:prstGeom prst="line">
-            <a:avLst/>
-          </a:prstGeom>
-          <a:ln w="27940">
-            <a:solidFill>
-              <a:srgbClr val="0E7C66"/>
-            </a:solidFill>
-            <a:tailEnd type="arrow"/>
-          </a:ln>
-        </p:spPr>
-        <p:style>
-          <a:lnRef idx="2">
-            <a:schemeClr val="accent1"/>
-          </a:lnRef>
-          <a:fillRef idx="0">
-            <a:schemeClr val="accent1"/>
-          </a:fillRef>
-          <a:effectRef idx="1">
-            <a:schemeClr val="accent1"/>
-          </a:effectRef>
-          <a:fontRef idx="minor">
-            <a:schemeClr val="tx1"/>
-          </a:fontRef>
-        </p:style>
-      </p:cxnSp>
-      <p:sp>
-        <p:nvSpPr>
-          <p:cNvPr id="12" name="Rounded Rectangle 11"/>
-          <p:cNvSpPr/>
-          <p:nvPr/>
-        </p:nvSpPr>
-        <p:spPr>
-          <a:xfrm>
-            <a:off x="9006840" y="2286000"/>
-            <a:ext cx="2468880" cy="1051560"/>
-          </a:xfrm>
-          <a:prstGeom prst="roundRect">
-            <a:avLst/>
-          </a:prstGeom>
-          <a:solidFill>
-            <a:srgbClr val="EDF0F5"/>
-          </a:solidFill>
-          <a:ln w="20320">
-            <a:solidFill>
-              <a:srgbClr val="5E6E8C"/>
-            </a:solidFill>
-          </a:ln>
-        </p:spPr>
-        <p:style>
-          <a:lnRef idx="1">
-            <a:schemeClr val="accent1"/>
-          </a:lnRef>
-          <a:fillRef idx="3">
-            <a:schemeClr val="accent1"/>
-          </a:fillRef>
-          <a:effectRef idx="2">
-            <a:schemeClr val="accent1"/>
-          </a:effectRef>
-          <a:fontRef idx="minor">
-            <a:schemeClr val="lt1"/>
-          </a:fontRef>
-        </p:style>
-        <p:txBody>
-          <a:bodyPr rtlCol="0" anchor="ctr" wrap="square" lIns="54864" rIns="54864" tIns="36576" bIns="36576"/>
-          <a:lstStyle/>
-          <a:p>
-            <a:pPr algn="ctr"/>
-            <a:r>
-              <a:rPr sz="1200" b="1">
-                <a:solidFill>
-                  <a:srgbClr val="22272E"/>
-                </a:solidFill>
-                <a:latin typeface="Meiryo"/>
-              </a:rPr>
-              <a:t>凍結LM 層Lの</a:t>
-            </a:r>
-          </a:p>
-          <a:p>
-            <a:pPr algn="ctr"/>
-            <a:r>
-              <a:rPr sz="1200" b="1">
-                <a:solidFill>
-                  <a:srgbClr val="22272E"/>
-                </a:solidFill>
-                <a:latin typeface="Meiryo"/>
-              </a:rPr>
-              <a:t>residual streamに</a:t>
-            </a:r>
-          </a:p>
-          <a:p>
-            <a:pPr algn="ctr"/>
-            <a:r>
-              <a:rPr sz="1200" b="1">
-                <a:solidFill>
-                  <a:srgbClr val="22272E"/>
-                </a:solidFill>
-                <a:latin typeface="Meiryo"/>
-              </a:rPr>
-              <a:t>Δhを加算</a:t>
-            </a:r>
-          </a:p>
-        </p:txBody>
-      </p:sp>
-      <p:sp>
-        <p:nvSpPr>
-          <p:cNvPr id="13" name="TextBox 12"/>
-          <p:cNvSpPr txBox="1"/>
-          <p:nvPr/>
-        </p:nvSpPr>
-        <p:spPr>
-          <a:xfrm>
-            <a:off x="8686800" y="1901952"/>
-            <a:ext cx="1097280" cy="365760"/>
+            <a:off x="640080" y="6263640"/>
+            <a:ext cx="10972800" cy="548640"/>
           </a:xfrm>
           <a:prstGeom prst="rect">
             <a:avLst/>
@@ -9057,219 +8571,13 @@
               </a:lnSpc>
             </a:pPr>
             <a:r>
-              <a:rPr sz="1600" b="1">
-                <a:solidFill>
-                  <a:srgbClr val="0E7C66"/>
-                </a:solidFill>
-                <a:latin typeface="Meiryo"/>
-              </a:rPr>
-              <a:t>+Δh</a:t>
-            </a:r>
-          </a:p>
-        </p:txBody>
-      </p:sp>
-      <p:cxnSp>
-        <p:nvCxnSpPr>
-          <p:cNvPr id="14" name="Connector 13"/>
-          <p:cNvCxnSpPr/>
-          <p:nvPr/>
-        </p:nvCxnSpPr>
-        <p:spPr>
-          <a:xfrm>
-            <a:off x="10241280" y="3337560"/>
-            <a:ext cx="0" cy="502920"/>
-          </a:xfrm>
-          <a:prstGeom prst="line">
-            <a:avLst/>
-          </a:prstGeom>
-          <a:ln w="27940">
-            <a:solidFill>
-              <a:srgbClr val="5A6472"/>
-            </a:solidFill>
-            <a:tailEnd type="arrow"/>
-          </a:ln>
-        </p:spPr>
-        <p:style>
-          <a:lnRef idx="2">
-            <a:schemeClr val="accent1"/>
-          </a:lnRef>
-          <a:fillRef idx="0">
-            <a:schemeClr val="accent1"/>
-          </a:fillRef>
-          <a:effectRef idx="1">
-            <a:schemeClr val="accent1"/>
-          </a:effectRef>
-          <a:fontRef idx="minor">
-            <a:schemeClr val="tx1"/>
-          </a:fontRef>
-        </p:style>
-      </p:cxnSp>
-      <p:sp>
-        <p:nvSpPr>
-          <p:cNvPr id="15" name="TextBox 14"/>
-          <p:cNvSpPr txBox="1"/>
-          <p:nvPr/>
-        </p:nvSpPr>
-        <p:spPr>
-          <a:xfrm>
-            <a:off x="9144000" y="3886200"/>
-            <a:ext cx="2926080" cy="365760"/>
-          </a:xfrm>
-          <a:prstGeom prst="rect">
-            <a:avLst/>
-          </a:prstGeom>
-          <a:noFill/>
-        </p:spPr>
-        <p:txBody>
-          <a:bodyPr wrap="square">
-            <a:spAutoFit/>
-          </a:bodyPr>
-          <a:lstStyle/>
-          <a:p>
-            <a:pPr algn="l">
-              <a:lnSpc>
-                <a:spcPct val="115000"/>
-              </a:lnSpc>
-            </a:pPr>
-            <a:r>
               <a:rPr sz="1300" b="0">
                 <a:solidFill>
-                  <a:srgbClr val="22272E"/>
-                </a:solidFill>
-                <a:latin typeface="Meiryo"/>
-              </a:rPr>
-              <a:t>編集後の文(凍結LMが生成)</a:t>
-            </a:r>
-          </a:p>
-        </p:txBody>
-      </p:sp>
-      <p:cxnSp>
-        <p:nvCxnSpPr>
-          <p:cNvPr id="16" name="Connector 15"/>
-          <p:cNvCxnSpPr/>
-          <p:nvPr/>
-        </p:nvCxnSpPr>
-        <p:spPr>
-          <a:xfrm>
-            <a:off x="5349240" y="3337560"/>
-            <a:ext cx="4251960" cy="1005840"/>
-          </a:xfrm>
-          <a:prstGeom prst="line">
-            <a:avLst/>
-          </a:prstGeom>
-          <a:ln w="27940">
-            <a:prstDash val="dash"/>
-            <a:solidFill>
-              <a:srgbClr val="8A929E"/>
-            </a:solidFill>
-            <a:tailEnd type="arrow"/>
-          </a:ln>
-        </p:spPr>
-        <p:style>
-          <a:lnRef idx="2">
-            <a:schemeClr val="accent1"/>
-          </a:lnRef>
-          <a:fillRef idx="0">
-            <a:schemeClr val="accent1"/>
-          </a:fillRef>
-          <a:effectRef idx="1">
-            <a:schemeClr val="accent1"/>
-          </a:effectRef>
-          <a:fontRef idx="minor">
-            <a:schemeClr val="tx1"/>
-          </a:fontRef>
-        </p:style>
-      </p:cxnSp>
-      <p:sp>
-        <p:nvSpPr>
-          <p:cNvPr id="17" name="TextBox 16"/>
-          <p:cNvSpPr txBox="1"/>
-          <p:nvPr/>
-        </p:nvSpPr>
-        <p:spPr>
-          <a:xfrm>
-            <a:off x="4846320" y="4434840"/>
-            <a:ext cx="5486400" cy="365760"/>
-          </a:xfrm>
-          <a:prstGeom prst="rect">
-            <a:avLst/>
-          </a:prstGeom>
-          <a:noFill/>
-        </p:spPr>
-        <p:txBody>
-          <a:bodyPr wrap="square">
-            <a:spAutoFit/>
-          </a:bodyPr>
-          <a:lstStyle/>
-          <a:p>
-            <a:pPr algn="l">
-              <a:lnSpc>
-                <a:spcPct val="115000"/>
-              </a:lnSpc>
-            </a:pPr>
-            <a:r>
-              <a:rPr sz="1200" b="0">
-                <a:solidFill>
-                  <a:srgbClr val="8A929E"/>
-                </a:solidFill>
-                <a:latin typeface="Meiryo"/>
-              </a:rPr>
-              <a:t>LinguaLens: 編集器を通さず活性値を直接書き換え(0/10に固定)</a:t>
-            </a:r>
-          </a:p>
-        </p:txBody>
-      </p:sp>
-      <p:sp>
-        <p:nvSpPr>
-          <p:cNvPr id="18" name="TextBox 17"/>
-          <p:cNvSpPr txBox="1"/>
-          <p:nvPr/>
-        </p:nvSpPr>
-        <p:spPr>
-          <a:xfrm>
-            <a:off x="502920" y="1143000"/>
-            <a:ext cx="11155680" cy="914400"/>
-          </a:xfrm>
-          <a:prstGeom prst="rect">
-            <a:avLst/>
-          </a:prstGeom>
-          <a:noFill/>
-        </p:spPr>
-        <p:txBody>
-          <a:bodyPr wrap="square">
-            <a:spAutoFit/>
-          </a:bodyPr>
-          <a:lstStyle/>
-          <a:p>
-            <a:pPr algn="l">
-              <a:lnSpc>
-                <a:spcPct val="115000"/>
-              </a:lnSpc>
-            </a:pPr>
-            <a:r>
-              <a:rPr sz="1500" b="0">
-                <a:solidFill>
                   <a:srgbClr val="5A6472"/>
                 </a:solidFill>
                 <a:latin typeface="Meiryo"/>
               </a:rPr>
-              <a:t>ポイント: スペックは特徴ごとに事前に用意(同定プールの平均)— 評価する文からは作らない。</a:t>
-            </a:r>
-          </a:p>
-          <a:p>
-            <a:pPr algn="l">
-              <a:lnSpc>
-                <a:spcPct val="115000"/>
-              </a:lnSpc>
-            </a:pPr>
-            <a:r>
-              <a:rPr sz="1500" b="0">
-                <a:solidFill>
-                  <a:srgbClr val="5A6472"/>
-                </a:solidFill>
-                <a:latin typeface="Meiryo"/>
-              </a:rPr>
-              <a:t>編集器は「どこを・どれだけ直すか」を文とスペックから自分で決める。テキストは凍結LM自身が出す。</a:t>
+              <a:t>スペックは特徴ごとに同定プールの平均から事前に用意 — 評価する文からは作らない。編集器は「どこを・どれだけ直すか」を文とスペックから自分で決め、テキストは凍結LM自身が出す。</a:t>
             </a:r>
           </a:p>
         </p:txBody>
@@ -9374,472 +8682,40 @@
           </a:p>
         </p:txBody>
       </p:sp>
-      <p:sp>
-        <p:nvSpPr>
-          <p:cNvPr id="4" name="Rounded Rectangle 3"/>
-          <p:cNvSpPr/>
+      <p:pic>
+        <p:nvPicPr>
+          <p:cNvPr id="4" name="Picture 3" descr="fig_train.png"/>
+          <p:cNvPicPr>
+            <a:picLocks noChangeAspect="1"/>
+          </p:cNvPicPr>
           <p:nvPr/>
-        </p:nvSpPr>
+        </p:nvPicPr>
+        <p:blipFill>
+          <a:blip r:embed="rId2"/>
+          <a:stretch>
+            <a:fillRect/>
+          </a:stretch>
+        </p:blipFill>
         <p:spPr>
           <a:xfrm>
-            <a:off x="457200" y="1554480"/>
-            <a:ext cx="2651760" cy="1920240"/>
+            <a:off x="1280160" y="1051560"/>
+            <a:ext cx="9601200" cy="5237018"/>
           </a:xfrm>
-          <a:prstGeom prst="roundRect">
+          <a:prstGeom prst="rect">
             <a:avLst/>
           </a:prstGeom>
-          <a:solidFill>
-            <a:srgbClr val="E3F0EC"/>
-          </a:solidFill>
-          <a:ln w="20320">
-            <a:solidFill>
-              <a:srgbClr val="0E7C66"/>
-            </a:solidFill>
-          </a:ln>
         </p:spPr>
-        <p:style>
-          <a:lnRef idx="1">
-            <a:schemeClr val="accent1"/>
-          </a:lnRef>
-          <a:fillRef idx="3">
-            <a:schemeClr val="accent1"/>
-          </a:fillRef>
-          <a:effectRef idx="2">
-            <a:schemeClr val="accent1"/>
-          </a:effectRef>
-          <a:fontRef idx="minor">
-            <a:schemeClr val="lt1"/>
-          </a:fontRef>
-        </p:style>
-        <p:txBody>
-          <a:bodyPr rtlCol="0" anchor="ctr" wrap="square" lIns="54864" rIns="54864" tIns="36576" bIns="36576"/>
-          <a:lstStyle/>
-          <a:p>
-            <a:pPr algn="ctr"/>
-            <a:r>
-              <a:rPr sz="1200" b="1">
-                <a:solidFill>
-                  <a:srgbClr val="22272E"/>
-                </a:solidFill>
-                <a:latin typeface="Meiryo"/>
-              </a:rPr>
-              <a:t>① LLM2Vec学習</a:t>
-            </a:r>
-          </a:p>
-          <a:p>
-            <a:pPr algn="ctr"/>
-            <a:r>
-              <a:rPr sz="1200" b="1">
-                <a:solidFill>
-                  <a:srgbClr val="22272E"/>
-                </a:solidFill>
-                <a:latin typeface="Meiryo"/>
-              </a:rPr>
-              <a:t>Gemma-2-2Bを双方向</a:t>
-            </a:r>
-          </a:p>
-          <a:p>
-            <a:pPr algn="ctr"/>
-            <a:r>
-              <a:rPr sz="1200" b="1">
-                <a:solidFill>
-                  <a:srgbClr val="22272E"/>
-                </a:solidFill>
-                <a:latin typeface="Meiryo"/>
-              </a:rPr>
-              <a:t>エンコーダ化</a:t>
-            </a:r>
-          </a:p>
-        </p:txBody>
-      </p:sp>
-      <p:cxnSp>
-        <p:nvCxnSpPr>
-          <p:cNvPr id="5" name="Connector 4"/>
-          <p:cNvCxnSpPr/>
+      </p:pic>
+      <p:sp>
+        <p:nvSpPr>
+          <p:cNvPr id="5" name="TextBox 4"/>
+          <p:cNvSpPr txBox="1"/>
           <p:nvPr/>
-        </p:nvCxnSpPr>
+        </p:nvSpPr>
         <p:spPr>
           <a:xfrm>
-            <a:off x="3108960" y="2468880"/>
-            <a:ext cx="292608" cy="0"/>
-          </a:xfrm>
-          <a:prstGeom prst="line">
-            <a:avLst/>
-          </a:prstGeom>
-          <a:ln w="27940">
-            <a:solidFill>
-              <a:srgbClr val="5A6472"/>
-            </a:solidFill>
-            <a:tailEnd type="arrow"/>
-          </a:ln>
-        </p:spPr>
-        <p:style>
-          <a:lnRef idx="2">
-            <a:schemeClr val="accent1"/>
-          </a:lnRef>
-          <a:fillRef idx="0">
-            <a:schemeClr val="accent1"/>
-          </a:fillRef>
-          <a:effectRef idx="1">
-            <a:schemeClr val="accent1"/>
-          </a:effectRef>
-          <a:fontRef idx="minor">
-            <a:schemeClr val="tx1"/>
-          </a:fontRef>
-        </p:style>
-      </p:cxnSp>
-      <p:sp>
-        <p:nvSpPr>
-          <p:cNvPr id="6" name="Rounded Rectangle 5"/>
-          <p:cNvSpPr/>
-          <p:nvPr/>
-        </p:nvSpPr>
-        <p:spPr>
-          <a:xfrm>
-            <a:off x="3429000" y="1554480"/>
-            <a:ext cx="3108960" cy="1920240"/>
-          </a:xfrm>
-          <a:prstGeom prst="roundRect">
-            <a:avLst/>
-          </a:prstGeom>
-          <a:solidFill>
-            <a:srgbClr val="EDF0F5"/>
-          </a:solidFill>
-          <a:ln w="20320">
-            <a:solidFill>
-              <a:srgbClr val="5E6E8C"/>
-            </a:solidFill>
-          </a:ln>
-        </p:spPr>
-        <p:style>
-          <a:lnRef idx="1">
-            <a:schemeClr val="accent1"/>
-          </a:lnRef>
-          <a:fillRef idx="3">
-            <a:schemeClr val="accent1"/>
-          </a:fillRef>
-          <a:effectRef idx="2">
-            <a:schemeClr val="accent1"/>
-          </a:effectRef>
-          <a:fontRef idx="minor">
-            <a:schemeClr val="lt1"/>
-          </a:fontRef>
-        </p:style>
-        <p:txBody>
-          <a:bodyPr rtlCol="0" anchor="ctr" wrap="square" lIns="54864" rIns="54864" tIns="36576" bIns="36576"/>
-          <a:lstStyle/>
-          <a:p>
-            <a:pPr algn="ctr"/>
-            <a:r>
-              <a:rPr sz="1200" b="1">
-                <a:solidFill>
-                  <a:srgbClr val="22272E"/>
-                </a:solidFill>
-                <a:latin typeface="Meiryo"/>
-              </a:rPr>
-              <a:t>② 合成データ作成</a:t>
-            </a:r>
-          </a:p>
-          <a:p>
-            <a:pPr algn="ctr"/>
-            <a:r>
-              <a:rPr sz="1200" b="1">
-                <a:solidFill>
-                  <a:srgbClr val="22272E"/>
-                </a:solidFill>
-                <a:latin typeface="Meiryo"/>
-              </a:rPr>
-              <a:t>きれいな文をわざと壊す</a:t>
-            </a:r>
-          </a:p>
-          <a:p>
-            <a:pPr algn="ctr"/>
-            <a:r>
-              <a:rPr sz="1200" b="1">
-                <a:solidFill>
-                  <a:srgbClr val="22272E"/>
-                </a:solidFill>
-                <a:latin typeface="Meiryo"/>
-              </a:rPr>
-              <a:t>個数=幾何分布/種類=重み付き抽選</a:t>
-            </a:r>
-          </a:p>
-          <a:p>
-            <a:pPr algn="ctr"/>
-            <a:r>
-              <a:rPr sz="1200" b="1">
-                <a:solidFill>
-                  <a:srgbClr val="22272E"/>
-                </a:solidFill>
-                <a:latin typeface="Meiryo"/>
-              </a:rPr>
-              <a:t>場所=削除は壊れにくい語優先</a:t>
-            </a:r>
-          </a:p>
-          <a:p>
-            <a:pPr algn="ctr"/>
-            <a:r>
-              <a:rPr sz="1200" b="1">
-                <a:solidFill>
-                  <a:srgbClr val="22272E"/>
-                </a:solidFill>
-                <a:latin typeface="Meiryo"/>
-              </a:rPr>
-              <a:t>①のモデルで自然さを採点し選別</a:t>
-            </a:r>
-          </a:p>
-        </p:txBody>
-      </p:sp>
-      <p:cxnSp>
-        <p:nvCxnSpPr>
-          <p:cNvPr id="7" name="Connector 6"/>
-          <p:cNvCxnSpPr/>
-          <p:nvPr/>
-        </p:nvCxnSpPr>
-        <p:spPr>
-          <a:xfrm>
-            <a:off x="6537960" y="2468880"/>
-            <a:ext cx="292608" cy="0"/>
-          </a:xfrm>
-          <a:prstGeom prst="line">
-            <a:avLst/>
-          </a:prstGeom>
-          <a:ln w="27940">
-            <a:solidFill>
-              <a:srgbClr val="5A6472"/>
-            </a:solidFill>
-            <a:tailEnd type="arrow"/>
-          </a:ln>
-        </p:spPr>
-        <p:style>
-          <a:lnRef idx="2">
-            <a:schemeClr val="accent1"/>
-          </a:lnRef>
-          <a:fillRef idx="0">
-            <a:schemeClr val="accent1"/>
-          </a:fillRef>
-          <a:effectRef idx="1">
-            <a:schemeClr val="accent1"/>
-          </a:effectRef>
-          <a:fontRef idx="minor">
-            <a:schemeClr val="tx1"/>
-          </a:fontRef>
-        </p:style>
-      </p:cxnSp>
-      <p:sp>
-        <p:nvSpPr>
-          <p:cNvPr id="8" name="Rounded Rectangle 7"/>
-          <p:cNvSpPr/>
-          <p:nvPr/>
-        </p:nvSpPr>
-        <p:spPr>
-          <a:xfrm>
-            <a:off x="6858000" y="1554480"/>
-            <a:ext cx="2651760" cy="1920240"/>
-          </a:xfrm>
-          <a:prstGeom prst="roundRect">
-            <a:avLst/>
-          </a:prstGeom>
-          <a:solidFill>
-            <a:srgbClr val="E3F0EC"/>
-          </a:solidFill>
-          <a:ln w="20320">
-            <a:solidFill>
-              <a:srgbClr val="0E7C66"/>
-            </a:solidFill>
-          </a:ln>
-        </p:spPr>
-        <p:style>
-          <a:lnRef idx="1">
-            <a:schemeClr val="accent1"/>
-          </a:lnRef>
-          <a:fillRef idx="3">
-            <a:schemeClr val="accent1"/>
-          </a:fillRef>
-          <a:effectRef idx="2">
-            <a:schemeClr val="accent1"/>
-          </a:effectRef>
-          <a:fontRef idx="minor">
-            <a:schemeClr val="lt1"/>
-          </a:fontRef>
-        </p:style>
-        <p:txBody>
-          <a:bodyPr rtlCol="0" anchor="ctr" wrap="square" lIns="54864" rIns="54864" tIns="36576" bIns="36576"/>
-          <a:lstStyle/>
-          <a:p>
-            <a:pPr algn="ctr"/>
-            <a:r>
-              <a:rPr sz="1200" b="1">
-                <a:solidFill>
-                  <a:srgbClr val="22272E"/>
-                </a:solidFill>
-                <a:latin typeface="Meiryo"/>
-              </a:rPr>
-              <a:t>③ EF基盤の学習</a:t>
-            </a:r>
-          </a:p>
-          <a:p>
-            <a:pPr algn="ctr"/>
-            <a:r>
-              <a:rPr sz="1200" b="1">
-                <a:solidFill>
-                  <a:srgbClr val="22272E"/>
-                </a:solidFill>
-                <a:latin typeface="Meiryo"/>
-              </a:rPr>
-              <a:t>壊れた文→元の文へ戻す</a:t>
-            </a:r>
-          </a:p>
-          <a:p>
-            <a:pPr algn="ctr"/>
-            <a:r>
-              <a:rPr sz="1200" b="1">
-                <a:solidFill>
-                  <a:srgbClr val="22272E"/>
-                </a:solidFill>
-                <a:latin typeface="Meiryo"/>
-              </a:rPr>
-              <a:t>編集操作(挿入/削除/置換)を学習</a:t>
-            </a:r>
-          </a:p>
-        </p:txBody>
-      </p:sp>
-      <p:cxnSp>
-        <p:nvCxnSpPr>
-          <p:cNvPr id="9" name="Connector 8"/>
-          <p:cNvCxnSpPr/>
-          <p:nvPr/>
-        </p:nvCxnSpPr>
-        <p:spPr>
-          <a:xfrm>
-            <a:off x="9509760" y="2468880"/>
-            <a:ext cx="292608" cy="0"/>
-          </a:xfrm>
-          <a:prstGeom prst="line">
-            <a:avLst/>
-          </a:prstGeom>
-          <a:ln w="27940">
-            <a:solidFill>
-              <a:srgbClr val="5A6472"/>
-            </a:solidFill>
-            <a:tailEnd type="arrow"/>
-          </a:ln>
-        </p:spPr>
-        <p:style>
-          <a:lnRef idx="2">
-            <a:schemeClr val="accent1"/>
-          </a:lnRef>
-          <a:fillRef idx="0">
-            <a:schemeClr val="accent1"/>
-          </a:fillRef>
-          <a:effectRef idx="1">
-            <a:schemeClr val="accent1"/>
-          </a:effectRef>
-          <a:fontRef idx="minor">
-            <a:schemeClr val="tx1"/>
-          </a:fontRef>
-        </p:style>
-      </p:cxnSp>
-      <p:sp>
-        <p:nvSpPr>
-          <p:cNvPr id="10" name="Rounded Rectangle 9"/>
-          <p:cNvSpPr/>
-          <p:nvPr/>
-        </p:nvSpPr>
-        <p:spPr>
-          <a:xfrm>
-            <a:off x="9829800" y="1554480"/>
-            <a:ext cx="2651760" cy="1920240"/>
-          </a:xfrm>
-          <a:prstGeom prst="roundRect">
-            <a:avLst/>
-          </a:prstGeom>
-          <a:solidFill>
-            <a:srgbClr val="E3F0EC"/>
-          </a:solidFill>
-          <a:ln w="20320">
-            <a:solidFill>
-              <a:srgbClr val="0E7C66"/>
-            </a:solidFill>
-          </a:ln>
-        </p:spPr>
-        <p:style>
-          <a:lnRef idx="1">
-            <a:schemeClr val="accent1"/>
-          </a:lnRef>
-          <a:fillRef idx="3">
-            <a:schemeClr val="accent1"/>
-          </a:fillRef>
-          <a:effectRef idx="2">
-            <a:schemeClr val="accent1"/>
-          </a:effectRef>
-          <a:fontRef idx="minor">
-            <a:schemeClr val="lt1"/>
-          </a:fontRef>
-        </p:style>
-        <p:txBody>
-          <a:bodyPr rtlCol="0" anchor="ctr" wrap="square" lIns="54864" rIns="54864" tIns="36576" bIns="36576"/>
-          <a:lstStyle/>
-          <a:p>
-            <a:pPr algn="ctr"/>
-            <a:r>
-              <a:rPr sz="1200" b="1">
-                <a:solidFill>
-                  <a:srgbClr val="22272E"/>
-                </a:solidFill>
-                <a:latin typeface="Meiryo"/>
-              </a:rPr>
-              <a:t>④ 最終編集器</a:t>
-            </a:r>
-          </a:p>
-          <a:p>
-            <a:pPr algn="ctr"/>
-            <a:r>
-              <a:rPr sz="1200" b="1">
-                <a:solidFill>
-                  <a:srgbClr val="22272E"/>
-                </a:solidFill>
-                <a:latin typeface="Meiryo"/>
-              </a:rPr>
-              <a:t>出力をΔhに付け替え</a:t>
-            </a:r>
-          </a:p>
-          <a:p>
-            <a:pPr algn="ctr"/>
-            <a:r>
-              <a:rPr sz="1200" b="1">
-                <a:solidFill>
-                  <a:srgbClr val="22272E"/>
-                </a:solidFill>
-                <a:latin typeface="Meiryo"/>
-              </a:rPr>
-              <a:t>凍結LM越しの損失で学習</a:t>
-            </a:r>
-          </a:p>
-          <a:p>
-            <a:pPr algn="ctr"/>
-            <a:r>
-              <a:rPr sz="1200" b="1">
-                <a:solidFill>
-                  <a:srgbClr val="22272E"/>
-                </a:solidFill>
-                <a:latin typeface="Meiryo"/>
-              </a:rPr>
-              <a:t>(スペック誤り時は「編集しない」も教師)</a:t>
-            </a:r>
-          </a:p>
-        </p:txBody>
-      </p:sp>
-      <p:sp>
-        <p:nvSpPr>
-          <p:cNvPr id="11" name="TextBox 10"/>
-          <p:cNvSpPr txBox="1"/>
-          <p:nvPr/>
-        </p:nvSpPr>
-        <p:spPr>
-          <a:xfrm>
-            <a:off x="502920" y="3931920"/>
-            <a:ext cx="11155680" cy="1463040"/>
+            <a:off x="640080" y="6355080"/>
+            <a:ext cx="10972800" cy="457200"/>
           </a:xfrm>
           <a:prstGeom prst="rect">
             <a:avLst/>
@@ -9858,45 +8734,13 @@
               </a:lnSpc>
             </a:pPr>
             <a:r>
-              <a:rPr sz="1500" b="0">
+              <a:rPr sz="1300" b="0">
                 <a:solidFill>
                   <a:srgbClr val="5A6472"/>
                 </a:solidFill>
                 <a:latin typeface="Meiryo"/>
               </a:rPr>
               <a:t>元コーパスはDolma v1.6サンプル(AllenAI)。学習にLinguaLens-Dataは一切使わない(ゼロショット転移)。</a:t>
-            </a:r>
-          </a:p>
-          <a:p>
-            <a:pPr algn="l">
-              <a:lnSpc>
-                <a:spcPct val="115000"/>
-              </a:lnSpc>
-            </a:pPr>
-            <a:r>
-              <a:rPr sz="1500" b="0">
-                <a:solidFill>
-                  <a:srgbClr val="5A6472"/>
-                </a:solidFill>
-                <a:latin typeface="Meiryo"/>
-              </a:rPr>
-              <a:t>壊し方の3要素(いくつ・どの種類・どこ)を確率的に決め、多様な編集パターンを網羅。</a:t>
-            </a:r>
-          </a:p>
-          <a:p>
-            <a:pPr algn="l">
-              <a:lnSpc>
-                <a:spcPct val="115000"/>
-              </a:lnSpc>
-            </a:pPr>
-            <a:r>
-              <a:rPr sz="1500" b="0">
-                <a:solidFill>
-                  <a:srgbClr val="5A6472"/>
-                </a:solidFill>
-                <a:latin typeface="Meiryo"/>
-              </a:rPr>
-              <a:t>スペックは壊す前後の文のSAE差分から自動で作る — 人手ラベル不要。</a:t>
             </a:r>
           </a:p>
         </p:txBody>

--- a/slides/20260722_progress.pptx
+++ b/slides/20260722_progress.pptx
@@ -8967,6 +8967,34 @@
                 <a:latin typeface="Meiryo"/>
               </a:rPr>
               <a:t>スペックは同定プールだけから作る → 評価する文もその正解も、スペックに一切漏れない。LinguaLens原法は全ペアで同定+同じデータで検証しており、この分離がない(我々の改良点)</a:t>
+            </a:r>
+          </a:p>
+          <a:p>
+            <a:pPr>
+              <a:lnSpc>
+                <a:spcPct val="116000"/>
+              </a:lnSpc>
+              <a:spcAft>
+                <a:spcPts val="800"/>
+              </a:spcAft>
+            </a:pPr>
+            <a:r>
+              <a:rPr sz="1800" b="1">
+                <a:solidFill>
+                  <a:srgbClr val="0E7C66"/>
+                </a:solidFill>
+                <a:latin typeface="Meiryo"/>
+              </a:rPr>
+              <a:t>参考 — AxBenchの分割(公式repo確認): </a:t>
+            </a:r>
+            <a:r>
+              <a:rPr sz="1800">
+                <a:solidFill>
+                  <a:srgbClr val="22272E"/>
+                </a:solidFill>
+                <a:latin typeface="Meiryo"/>
+              </a:rPr>
+              <a:t>同定(活性選択)は概念ごとのラベル付き例文(正36/負36)、評価入力は別ソース(AlpacaEvalの命令10本/概念)。さらにその10本を半分に割り、5本で介入強度を選び残り5本で採点 — 同定/評価/強度選択の3分離を実施。我々の分割はこの流儀に揃えた形(LinguaLensのみ分離なし)</a:t>
             </a:r>
           </a:p>
           <a:p>

--- a/slides/20260722_progress.pptx
+++ b/slides/20260722_progress.pptx
@@ -5894,7 +5894,7 @@
                         <a:rPr sz="1250" b="0">
                           <a:latin typeface="Meiryo"/>
                         </a:rPr>
-                        <a:t>計測中</a:t>
+                        <a:t>0.070*</a:t>
                       </a:r>
                     </a:p>
                   </a:txBody>
@@ -5954,7 +5954,7 @@
                         <a:rPr sz="1250" b="0">
                           <a:latin typeface="Meiryo"/>
                         </a:rPr>
-                        <a:t>計測中</a:t>
+                        <a:t>0.108*</a:t>
                       </a:r>
                     </a:p>
                   </a:txBody>
@@ -6001,7 +6001,7 @@
                         <a:rPr sz="1250" b="0">
                           <a:latin typeface="Meiryo"/>
                         </a:rPr>
-                        <a:t>計測中</a:t>
+                        <a:t>0.132</a:t>
                       </a:r>
                     </a:p>
                   </a:txBody>
@@ -6031,7 +6031,7 @@
                         <a:rPr sz="1250" b="0">
                           <a:latin typeface="Meiryo"/>
                         </a:rPr>
-                        <a:t>計測中</a:t>
+                        <a:t>0.148</a:t>
                       </a:r>
                     </a:p>
                   </a:txBody>
@@ -6061,7 +6061,7 @@
                         <a:rPr sz="1250" b="0">
                           <a:latin typeface="Meiryo"/>
                         </a:rPr>
-                        <a:t>計測中</a:t>
+                        <a:t>0.110</a:t>
                       </a:r>
                     </a:p>
                   </a:txBody>
@@ -6384,7 +6384,7 @@
                 </a:solidFill>
                 <a:latin typeface="Meiryo"/>
               </a:rPr>
-              <a:t>・* LinguaLens準拠のampは修正版の暫定値(書き換え枠の床0.120と同水準=効果ほぼなし)。計測中セルは本日中に確定</a:t>
+              <a:t>・* amp書き換え枠の素の床は0.120。LinguaLens準拠ampは全層で床相当=効果なし。AxBench準拠ampはL12のみ床+0.03</a:t>
             </a:r>
           </a:p>
         </p:txBody>

--- a/slides/20260722_progress.pptx
+++ b/slides/20260722_progress.pptx
@@ -4831,7 +4831,23 @@
                         <a:rPr sz="1150" b="0">
                           <a:latin typeface="Meiryo"/>
                         </a:rPr>
-                        <a:t>編集される箇所だけ(局所)</a:t>
+                        <a:t>同定ペアの編集箇所だけ</a:t>
+                      </a:r>
+                    </a:p>
+                    <a:p>
+                      <a:r>
+                        <a:rPr sz="1150" b="0">
+                          <a:latin typeface="Meiryo"/>
+                        </a:rPr>
+                        <a:t>(局所・オフライン。推論時の場所は</a:t>
+                      </a:r>
+                    </a:p>
+                    <a:p>
+                      <a:r>
+                        <a:rPr sz="1150" b="0">
+                          <a:latin typeface="Meiryo"/>
+                        </a:rPr>
+                        <a:t>編集器が文から自分で推定)</a:t>
                       </a:r>
                     </a:p>
                   </a:txBody>

--- a/slides/20260722_progress.pptx
+++ b/slides/20260722_progress.pptx
@@ -4512,524 +4512,21 @@
                 </a:solidFill>
                 <a:latin typeface="Meiryo"/>
               </a:rPr>
-              <a:t>介入するactivationsの選び方 — 3手法の違い</a:t>
-            </a:r>
-          </a:p>
-        </p:txBody>
-      </p:sp>
-      <p:graphicFrame>
-        <p:nvGraphicFramePr>
-          <p:cNvPr id="4" name="Table 3"/>
-          <p:cNvGraphicFramePr>
-            <a:graphicFrameLocks noGrp="1"/>
-          </p:cNvGraphicFramePr>
-          <p:nvPr/>
-        </p:nvGraphicFramePr>
-        <p:xfrm>
-          <a:off x="457200" y="1188720"/>
-          <a:ext cx="11247120" cy="3931920"/>
-        </p:xfrm>
-        <a:graphic>
-          <a:graphicData uri="http://schemas.openxmlformats.org/drawingml/2006/table">
-            <a:tbl>
-              <a:tblPr firstRow="1" bandRow="1">
-                <a:tableStyleId>{5C22544A-7EE6-4342-B048-85BDC9FD1C3A}</a:tableStyleId>
-              </a:tblPr>
-              <a:tblGrid>
-                <a:gridCol w="2011680"/>
-                <a:gridCol w="3383280"/>
-                <a:gridCol w="2926080"/>
-                <a:gridCol w="2926080"/>
-              </a:tblGrid>
-              <a:tr h="561702">
-                <a:tc>
-                  <a:txBody>
-                    <a:bodyPr/>
-                    <a:lstStyle/>
-                    <a:p/>
-                  </a:txBody>
-                  <a:tcPr/>
-                </a:tc>
-                <a:tc>
-                  <a:txBody>
-                    <a:bodyPr/>
-                    <a:lstStyle/>
-                    <a:p>
-                      <a:r>
-                        <a:rPr sz="1300" b="1">
-                          <a:latin typeface="Meiryo"/>
-                        </a:rPr>
-                        <a:t>提案手法</a:t>
-                      </a:r>
-                    </a:p>
-                  </a:txBody>
-                  <a:tcPr/>
-                </a:tc>
-                <a:tc>
-                  <a:txBody>
-                    <a:bodyPr/>
-                    <a:lstStyle/>
-                    <a:p>
-                      <a:r>
-                        <a:rPr sz="1300" b="1">
-                          <a:latin typeface="Meiryo"/>
-                        </a:rPr>
-                        <a:t>LinguaLens</a:t>
-                      </a:r>
-                    </a:p>
-                  </a:txBody>
-                  <a:tcPr/>
-                </a:tc>
-                <a:tc>
-                  <a:txBody>
-                    <a:bodyPr/>
-                    <a:lstStyle/>
-                    <a:p>
-                      <a:r>
-                        <a:rPr sz="1300" b="1">
-                          <a:latin typeface="Meiryo"/>
-                        </a:rPr>
-                        <a:t>AxBench</a:t>
-                      </a:r>
-                    </a:p>
-                  </a:txBody>
-                  <a:tcPr/>
-                </a:tc>
-              </a:tr>
-              <a:tr h="561702">
-                <a:tc>
-                  <a:txBody>
-                    <a:bodyPr/>
-                    <a:lstStyle/>
-                    <a:p>
-                      <a:r>
-                        <a:rPr sz="1150" b="1">
-                          <a:latin typeface="Meiryo"/>
-                        </a:rPr>
-                        <a:t>使う統計</a:t>
-                      </a:r>
-                    </a:p>
-                  </a:txBody>
-                  <a:tcPr/>
-                </a:tc>
-                <a:tc>
-                  <a:txBody>
-                    <a:bodyPr/>
-                    <a:lstStyle/>
-                    <a:p>
-                      <a:r>
-                        <a:rPr sz="1150" b="0">
-                          <a:latin typeface="Meiryo"/>
-                        </a:rPr>
-                        <a:t>最小対のSAE差分(z_tgt−z_src)の平均</a:t>
-                      </a:r>
-                    </a:p>
-                  </a:txBody>
-                  <a:tcPr/>
-                </a:tc>
-                <a:tc>
-                  <a:txBody>
-                    <a:bodyPr/>
-                    <a:lstStyle/>
-                    <a:p>
-                      <a:r>
-                        <a:rPr sz="1150" b="0">
-                          <a:latin typeface="Meiryo"/>
-                        </a:rPr>
-                        <a:t>発火したかの二値統計</a:t>
-                      </a:r>
-                    </a:p>
-                    <a:p>
-                      <a:r>
-                        <a:rPr sz="1150" b="0">
-                          <a:latin typeface="Meiryo"/>
-                        </a:rPr>
-                        <a:t>(PS/PNの調和平均=FRC)</a:t>
-                      </a:r>
-                    </a:p>
-                  </a:txBody>
-                  <a:tcPr/>
-                </a:tc>
-                <a:tc>
-                  <a:txBody>
-                    <a:bodyPr/>
-                    <a:lstStyle/>
-                    <a:p>
-                      <a:r>
-                        <a:rPr sz="1150" b="0">
-                          <a:latin typeface="Meiryo"/>
-                        </a:rPr>
-                        <a:t>活性の大きさとラベルの</a:t>
-                      </a:r>
-                    </a:p>
-                    <a:p>
-                      <a:r>
-                        <a:rPr sz="1150" b="0">
-                          <a:latin typeface="Meiryo"/>
-                        </a:rPr>
-                        <a:t>判別力(AUROC)</a:t>
-                      </a:r>
-                    </a:p>
-                  </a:txBody>
-                  <a:tcPr/>
-                </a:tc>
-              </a:tr>
-              <a:tr h="561702">
-                <a:tc>
-                  <a:txBody>
-                    <a:bodyPr/>
-                    <a:lstStyle/>
-                    <a:p>
-                      <a:r>
-                        <a:rPr sz="1150" b="1">
-                          <a:latin typeface="Meiryo"/>
-                        </a:rPr>
-                        <a:t>選ぶ本数</a:t>
-                      </a:r>
-                    </a:p>
-                  </a:txBody>
-                  <a:tcPr/>
-                </a:tc>
-                <a:tc>
-                  <a:txBody>
-                    <a:bodyPr/>
-                    <a:lstStyle/>
-                    <a:p>
-                      <a:r>
-                        <a:rPr sz="1150" b="0">
-                          <a:latin typeface="Meiryo"/>
-                        </a:rPr>
-                        <a:t>上位64本</a:t>
-                      </a:r>
-                    </a:p>
-                  </a:txBody>
-                  <a:tcPr/>
-                </a:tc>
-                <a:tc>
-                  <a:txBody>
-                    <a:bodyPr/>
-                    <a:lstStyle/>
-                    <a:p>
-                      <a:r>
-                        <a:rPr sz="1150" b="0">
-                          <a:latin typeface="Meiryo"/>
-                        </a:rPr>
-                        <a:t>上位3本</a:t>
-                      </a:r>
-                    </a:p>
-                  </a:txBody>
-                  <a:tcPr/>
-                </a:tc>
-                <a:tc>
-                  <a:txBody>
-                    <a:bodyPr/>
-                    <a:lstStyle/>
-                    <a:p>
-                      <a:r>
-                        <a:rPr sz="1150" b="0">
-                          <a:latin typeface="Meiryo"/>
-                        </a:rPr>
-                        <a:t>上位1本</a:t>
-                      </a:r>
-                    </a:p>
-                  </a:txBody>
-                  <a:tcPr/>
-                </a:tc>
-              </a:tr>
-              <a:tr h="561702">
-                <a:tc>
-                  <a:txBody>
-                    <a:bodyPr/>
-                    <a:lstStyle/>
-                    <a:p>
-                      <a:r>
-                        <a:rPr sz="1150" b="1">
-                          <a:latin typeface="Meiryo"/>
-                        </a:rPr>
-                        <a:t>値の扱い</a:t>
-                      </a:r>
-                    </a:p>
-                  </a:txBody>
-                  <a:tcPr/>
-                </a:tc>
-                <a:tc>
-                  <a:txBody>
-                    <a:bodyPr/>
-                    <a:lstStyle/>
-                    <a:p>
-                      <a:r>
-                        <a:rPr sz="1150" b="0">
-                          <a:latin typeface="Meiryo"/>
-                        </a:rPr>
-                        <a:t>符号つきの大きさを保持</a:t>
-                      </a:r>
-                    </a:p>
-                    <a:p>
-                      <a:r>
-                        <a:rPr sz="1150" b="0">
-                          <a:latin typeface="Meiryo"/>
-                        </a:rPr>
-                        <a:t>(足す/消すを同時指定)</a:t>
-                      </a:r>
-                    </a:p>
-                  </a:txBody>
-                  <a:tcPr/>
-                </a:tc>
-                <a:tc>
-                  <a:txBody>
-                    <a:bodyPr/>
-                    <a:lstStyle/>
-                    <a:p>
-                      <a:r>
-                        <a:rPr sz="1150" b="0">
-                          <a:latin typeface="Meiryo"/>
-                        </a:rPr>
-                        <a:t>捨てる(固定値10/0に上書き)</a:t>
-                      </a:r>
-                    </a:p>
-                  </a:txBody>
-                  <a:tcPr/>
-                </a:tc>
-                <a:tc>
-                  <a:txBody>
-                    <a:bodyPr/>
-                    <a:lstStyle/>
-                    <a:p>
-                      <a:r>
-                        <a:rPr sz="1150" b="0">
-                          <a:latin typeface="Meiryo"/>
-                        </a:rPr>
-                        <a:t>max_act×係数で加算</a:t>
-                      </a:r>
-                    </a:p>
-                  </a:txBody>
-                  <a:tcPr/>
-                </a:tc>
-              </a:tr>
-              <a:tr h="561702">
-                <a:tc>
-                  <a:txBody>
-                    <a:bodyPr/>
-                    <a:lstStyle/>
-                    <a:p>
-                      <a:r>
-                        <a:rPr sz="1150" b="1">
-                          <a:latin typeface="Meiryo"/>
-                        </a:rPr>
-                        <a:t>測る場所</a:t>
-                      </a:r>
-                    </a:p>
-                  </a:txBody>
-                  <a:tcPr/>
-                </a:tc>
-                <a:tc>
-                  <a:txBody>
-                    <a:bodyPr/>
-                    <a:lstStyle/>
-                    <a:p>
-                      <a:r>
-                        <a:rPr sz="1150" b="0">
-                          <a:latin typeface="Meiryo"/>
-                        </a:rPr>
-                        <a:t>同定ペアの編集箇所だけ</a:t>
-                      </a:r>
-                    </a:p>
-                    <a:p>
-                      <a:r>
-                        <a:rPr sz="1150" b="0">
-                          <a:latin typeface="Meiryo"/>
-                        </a:rPr>
-                        <a:t>(局所・オフライン。推論時の場所は</a:t>
-                      </a:r>
-                    </a:p>
-                    <a:p>
-                      <a:r>
-                        <a:rPr sz="1150" b="0">
-                          <a:latin typeface="Meiryo"/>
-                        </a:rPr>
-                        <a:t>編集器が文から自分で推定)</a:t>
-                      </a:r>
-                    </a:p>
-                  </a:txBody>
-                  <a:tcPr/>
-                </a:tc>
-                <a:tc>
-                  <a:txBody>
-                    <a:bodyPr/>
-                    <a:lstStyle/>
-                    <a:p>
-                      <a:r>
-                        <a:rPr sz="1150" b="0">
-                          <a:latin typeface="Meiryo"/>
-                        </a:rPr>
-                        <a:t>文中のどこでも</a:t>
-                      </a:r>
-                    </a:p>
-                  </a:txBody>
-                  <a:tcPr/>
-                </a:tc>
-                <a:tc>
-                  <a:txBody>
-                    <a:bodyPr/>
-                    <a:lstStyle/>
-                    <a:p>
-                      <a:r>
-                        <a:rPr sz="1150" b="0">
-                          <a:latin typeface="Meiryo"/>
-                        </a:rPr>
-                        <a:t>文全体の最大値</a:t>
-                      </a:r>
-                    </a:p>
-                  </a:txBody>
-                  <a:tcPr/>
-                </a:tc>
-              </a:tr>
-              <a:tr h="561702">
-                <a:tc>
-                  <a:txBody>
-                    <a:bodyPr/>
-                    <a:lstStyle/>
-                    <a:p>
-                      <a:r>
-                        <a:rPr sz="1150" b="1">
-                          <a:latin typeface="Meiryo"/>
-                        </a:rPr>
-                        <a:t>選び方の型</a:t>
-                      </a:r>
-                    </a:p>
-                  </a:txBody>
-                  <a:tcPr/>
-                </a:tc>
-                <a:tc>
-                  <a:txBody>
-                    <a:bodyPr/>
-                    <a:lstStyle/>
-                    <a:p>
-                      <a:r>
-                        <a:rPr sz="1150" b="0">
-                          <a:latin typeface="Meiryo"/>
-                        </a:rPr>
-                        <a:t>平均(全ペアの合意)</a:t>
-                      </a:r>
-                    </a:p>
-                  </a:txBody>
-                  <a:tcPr/>
-                </a:tc>
-                <a:tc>
-                  <a:txBody>
-                    <a:bodyPr/>
-                    <a:lstStyle/>
-                    <a:p>
-                      <a:r>
-                        <a:rPr sz="1150" b="0">
-                          <a:latin typeface="Meiryo"/>
-                        </a:rPr>
-                        <a:t>最大値の勝者総取り</a:t>
-                      </a:r>
-                    </a:p>
-                  </a:txBody>
-                  <a:tcPr/>
-                </a:tc>
-                <a:tc>
-                  <a:txBody>
-                    <a:bodyPr/>
-                    <a:lstStyle/>
-                    <a:p>
-                      <a:r>
-                        <a:rPr sz="1150" b="0">
-                          <a:latin typeface="Meiryo"/>
-                        </a:rPr>
-                        <a:t>最大値の勝者総取り</a:t>
-                      </a:r>
-                    </a:p>
-                  </a:txBody>
-                  <a:tcPr/>
-                </a:tc>
-              </a:tr>
-              <a:tr h="561708">
-                <a:tc>
-                  <a:txBody>
-                    <a:bodyPr/>
-                    <a:lstStyle/>
-                    <a:p>
-                      <a:r>
-                        <a:rPr sz="1150" b="1">
-                          <a:latin typeface="Meiryo"/>
-                        </a:rPr>
-                        <a:t>安定性(実測)</a:t>
-                      </a:r>
-                    </a:p>
-                  </a:txBody>
-                  <a:tcPr/>
-                </a:tc>
-                <a:tc>
-                  <a:txBody>
-                    <a:bodyPr/>
-                    <a:lstStyle/>
-                    <a:p>
-                      <a:r>
-                        <a:rPr sz="1150" b="0">
-                          <a:latin typeface="Meiryo"/>
-                        </a:rPr>
-                        <a:t>データ半分でもspecほぼ同じ</a:t>
-                      </a:r>
-                    </a:p>
-                    <a:p>
-                      <a:r>
-                        <a:rPr sz="1150" b="0">
-                          <a:latin typeface="Meiryo"/>
-                        </a:rPr>
-                        <a:t>(類似度0.83)</a:t>
-                      </a:r>
-                    </a:p>
-                  </a:txBody>
-                  <a:tcPr/>
-                </a:tc>
-                <a:tc>
-                  <a:txBody>
-                    <a:bodyPr/>
-                    <a:lstStyle/>
-                    <a:p>
-                      <a:r>
-                        <a:rPr sz="1150" b="0">
-                          <a:latin typeface="Meiryo"/>
-                        </a:rPr>
-                        <a:t>半分で1位の6割が入れ替わる</a:t>
-                      </a:r>
-                    </a:p>
-                  </a:txBody>
-                  <a:tcPr/>
-                </a:tc>
-                <a:tc>
-                  <a:txBody>
-                    <a:bodyPr/>
-                    <a:lstStyle/>
-                    <a:p>
-                      <a:r>
-                        <a:rPr sz="1150" b="0">
-                          <a:latin typeface="Meiryo"/>
-                        </a:rPr>
-                        <a:t>同左(勝者総取りの宿命)</a:t>
-                      </a:r>
-                    </a:p>
-                  </a:txBody>
-                  <a:tcPr/>
-                </a:tc>
-              </a:tr>
-            </a:tbl>
-          </a:graphicData>
-        </a:graphic>
-      </p:graphicFrame>
-      <p:sp>
-        <p:nvSpPr>
-          <p:cNvPr id="5" name="TextBox 4"/>
+              <a:t>介入するactivationsの選び方 — 3手法は3つの手順で分かれる</a:t>
+            </a:r>
+          </a:p>
+        </p:txBody>
+      </p:sp>
+      <p:sp>
+        <p:nvSpPr>
+          <p:cNvPr id="4" name="TextBox 3"/>
           <p:cNvSpPr txBox="1"/>
           <p:nvPr/>
         </p:nvSpPr>
         <p:spPr>
           <a:xfrm>
-            <a:off x="502920" y="5349240"/>
-            <a:ext cx="11247120" cy="1188720"/>
+            <a:off x="502920" y="1005840"/>
+            <a:ext cx="11338560" cy="365760"/>
           </a:xfrm>
           <a:prstGeom prst="rect">
             <a:avLst/>
@@ -5048,15 +4545,145 @@
               </a:lnSpc>
             </a:pPr>
             <a:r>
-              <a:rPr sz="1400" b="0">
-                <a:solidFill>
-                  <a:srgbClr val="5A6472"/>
-                </a:solidFill>
-                <a:latin typeface="Meiryo"/>
-              </a:rPr>
-              <a:t>ポイント: 上位近くにはほぼ同点の活性が多数あり(SAEのfeature分裂)、最大値で選ぶと「どれが選ばれるか」がデータ次第で入れ替わる。</a:t>
-            </a:r>
-          </a:p>
+              <a:rPr sz="1600" b="1">
+                <a:solidFill>
+                  <a:srgbClr val="22272E"/>
+                </a:solidFill>
+                <a:latin typeface="Meiryo"/>
+              </a:rPr>
+              <a:t>手順① 例文のどこで活性を測るか — 全手法「いちばん強く光った値」(max)を拾う。違いは範囲</a:t>
+            </a:r>
+          </a:p>
+        </p:txBody>
+      </p:sp>
+      <p:sp>
+        <p:nvSpPr>
+          <p:cNvPr id="5" name="TextBox 4"/>
+          <p:cNvSpPr txBox="1"/>
+          <p:nvPr/>
+        </p:nvSpPr>
+        <p:spPr>
+          <a:xfrm>
+            <a:off x="777240" y="1389888"/>
+            <a:ext cx="10972800" cy="1143000"/>
+          </a:xfrm>
+          <a:prstGeom prst="rect">
+            <a:avLst/>
+          </a:prstGeom>
+          <a:noFill/>
+        </p:spPr>
+        <p:txBody>
+          <a:bodyPr wrap="square">
+            <a:spAutoFit/>
+          </a:bodyPr>
+          <a:lstStyle/>
+          <a:p>
+            <a:pPr>
+              <a:lnSpc>
+                <a:spcPct val="112000"/>
+              </a:lnSpc>
+              <a:spcAft>
+                <a:spcPts val="300"/>
+              </a:spcAft>
+            </a:pPr>
+            <a:r>
+              <a:rPr sz="1350" b="1">
+                <a:solidFill>
+                  <a:srgbClr val="0E7C66"/>
+                </a:solidFill>
+                <a:latin typeface="Meiryo"/>
+              </a:rPr>
+              <a:t>提案手法: </a:t>
+            </a:r>
+            <a:r>
+              <a:rPr sz="1350">
+                <a:solidFill>
+                  <a:srgbClr val="22272E"/>
+                </a:solidFill>
+                <a:latin typeface="Meiryo"/>
+              </a:rPr>
+              <a:t>同定ペアの編集された箇所だけ(答え合わせできるオフライン処理。話題語などの無関係な活性を混ぜない)</a:t>
+            </a:r>
+          </a:p>
+          <a:p>
+            <a:pPr>
+              <a:lnSpc>
+                <a:spcPct val="112000"/>
+              </a:lnSpc>
+              <a:spcAft>
+                <a:spcPts val="300"/>
+              </a:spcAft>
+            </a:pPr>
+            <a:r>
+              <a:rPr sz="1350" b="1">
+                <a:solidFill>
+                  <a:srgbClr val="5E6E8C"/>
+                </a:solidFill>
+                <a:latin typeface="Meiryo"/>
+              </a:rPr>
+              <a:t>LinguaLens: </a:t>
+            </a:r>
+            <a:r>
+              <a:rPr sz="1350">
+                <a:solidFill>
+                  <a:srgbClr val="22272E"/>
+                </a:solidFill>
+                <a:latin typeface="Meiryo"/>
+              </a:rPr>
+              <a:t>文のどこでもよい(しかも「光ったか否か」の2値に落とす)</a:t>
+            </a:r>
+          </a:p>
+          <a:p>
+            <a:pPr>
+              <a:lnSpc>
+                <a:spcPct val="112000"/>
+              </a:lnSpc>
+              <a:spcAft>
+                <a:spcPts val="300"/>
+              </a:spcAft>
+            </a:pPr>
+            <a:r>
+              <a:rPr sz="1350" b="1">
+                <a:solidFill>
+                  <a:srgbClr val="8A929E"/>
+                </a:solidFill>
+                <a:latin typeface="Meiryo"/>
+              </a:rPr>
+              <a:t>AxBench: </a:t>
+            </a:r>
+            <a:r>
+              <a:rPr sz="1350">
+                <a:solidFill>
+                  <a:srgbClr val="22272E"/>
+                </a:solidFill>
+                <a:latin typeface="Meiryo"/>
+              </a:rPr>
+              <a:t>文全体でいちばん強い値</a:t>
+            </a:r>
+          </a:p>
+        </p:txBody>
+      </p:sp>
+      <p:sp>
+        <p:nvSpPr>
+          <p:cNvPr id="6" name="TextBox 5"/>
+          <p:cNvSpPr txBox="1"/>
+          <p:nvPr/>
+        </p:nvSpPr>
+        <p:spPr>
+          <a:xfrm>
+            <a:off x="502920" y="2697480"/>
+            <a:ext cx="11338560" cy="365760"/>
+          </a:xfrm>
+          <a:prstGeom prst="rect">
+            <a:avLst/>
+          </a:prstGeom>
+          <a:noFill/>
+        </p:spPr>
+        <p:txBody>
+          <a:bodyPr wrap="square">
+            <a:spAutoFit/>
+          </a:bodyPr>
+          <a:lstStyle/>
           <a:p>
             <a:pPr algn="l">
               <a:lnSpc>
@@ -5064,13 +4691,305 @@
               </a:lnSpc>
             </a:pPr>
             <a:r>
-              <a:rPr sz="1400" b="0">
+              <a:rPr sz="1600" b="1">
+                <a:solidFill>
+                  <a:srgbClr val="22272E"/>
+                </a:solidFill>
+                <a:latin typeface="Meiryo"/>
+              </a:rPr>
+              <a:t>手順② 約45〜50ペア分をどうまとめるか</a:t>
+            </a:r>
+          </a:p>
+        </p:txBody>
+      </p:sp>
+      <p:sp>
+        <p:nvSpPr>
+          <p:cNvPr id="7" name="TextBox 6"/>
+          <p:cNvSpPr txBox="1"/>
+          <p:nvPr/>
+        </p:nvSpPr>
+        <p:spPr>
+          <a:xfrm>
+            <a:off x="777240" y="3081528"/>
+            <a:ext cx="10972800" cy="1143000"/>
+          </a:xfrm>
+          <a:prstGeom prst="rect">
+            <a:avLst/>
+          </a:prstGeom>
+          <a:noFill/>
+        </p:spPr>
+        <p:txBody>
+          <a:bodyPr wrap="square">
+            <a:spAutoFit/>
+          </a:bodyPr>
+          <a:lstStyle/>
+          <a:p>
+            <a:pPr>
+              <a:lnSpc>
+                <a:spcPct val="112000"/>
+              </a:lnSpc>
+              <a:spcAft>
+                <a:spcPts val="300"/>
+              </a:spcAft>
+            </a:pPr>
+            <a:r>
+              <a:rPr sz="1350" b="1">
+                <a:solidFill>
+                  <a:srgbClr val="0E7C66"/>
+                </a:solidFill>
+                <a:latin typeface="Meiryo"/>
+              </a:rPr>
+              <a:t>提案手法: </a:t>
+            </a:r>
+            <a:r>
+              <a:rPr sz="1350">
+                <a:solidFill>
+                  <a:srgbClr val="22272E"/>
+                </a:solidFill>
+                <a:latin typeface="Meiryo"/>
+              </a:rPr>
+              <a:t>「壊す前後で活性がどう変わったか」の差を、向き(増/減)と大きさごと平均 → 1本の平均ベクトルにする</a:t>
+            </a:r>
+          </a:p>
+          <a:p>
+            <a:pPr>
+              <a:lnSpc>
+                <a:spcPct val="112000"/>
+              </a:lnSpc>
+              <a:spcAft>
+                <a:spcPts val="300"/>
+              </a:spcAft>
+            </a:pPr>
+            <a:r>
+              <a:rPr sz="1350" b="1">
+                <a:solidFill>
+                  <a:srgbClr val="5E6E8C"/>
+                </a:solidFill>
+                <a:latin typeface="Meiryo"/>
+              </a:rPr>
+              <a:t>LinguaLens: </a:t>
+            </a:r>
+            <a:r>
+              <a:rPr sz="1350">
+                <a:solidFill>
+                  <a:srgbClr val="22272E"/>
+                </a:solidFill>
+                <a:latin typeface="Meiryo"/>
+              </a:rPr>
+              <a:t>「現象あり文で光り、なし文で光らなかったペアの割合」を数える(PS/PN → FRC点)</a:t>
+            </a:r>
+          </a:p>
+          <a:p>
+            <a:pPr>
+              <a:lnSpc>
+                <a:spcPct val="112000"/>
+              </a:lnSpc>
+              <a:spcAft>
+                <a:spcPts val="300"/>
+              </a:spcAft>
+            </a:pPr>
+            <a:r>
+              <a:rPr sz="1350" b="1">
+                <a:solidFill>
+                  <a:srgbClr val="8A929E"/>
+                </a:solidFill>
+                <a:latin typeface="Meiryo"/>
+              </a:rPr>
+              <a:t>AxBench: </a:t>
+            </a:r>
+            <a:r>
+              <a:rPr sz="1350">
+                <a:solidFill>
+                  <a:srgbClr val="22272E"/>
+                </a:solidFill>
+                <a:latin typeface="Meiryo"/>
+              </a:rPr>
+              <a:t>「現象あり/なしをどれだけ見分けられたか」を採点(AUROC点)</a:t>
+            </a:r>
+          </a:p>
+        </p:txBody>
+      </p:sp>
+      <p:sp>
+        <p:nvSpPr>
+          <p:cNvPr id="8" name="TextBox 7"/>
+          <p:cNvSpPr txBox="1"/>
+          <p:nvPr/>
+        </p:nvSpPr>
+        <p:spPr>
+          <a:xfrm>
+            <a:off x="502920" y="4389120"/>
+            <a:ext cx="11338560" cy="365760"/>
+          </a:xfrm>
+          <a:prstGeom prst="rect">
+            <a:avLst/>
+          </a:prstGeom>
+          <a:noFill/>
+        </p:spPr>
+        <p:txBody>
+          <a:bodyPr wrap="square">
+            <a:spAutoFit/>
+          </a:bodyPr>
+          <a:lstStyle/>
+          <a:p>
+            <a:pPr algn="l">
+              <a:lnSpc>
+                <a:spcPct val="115000"/>
+              </a:lnSpc>
+            </a:pPr>
+            <a:r>
+              <a:rPr sz="1600" b="1">
+                <a:solidFill>
+                  <a:srgbClr val="22272E"/>
+                </a:solidFill>
+                <a:latin typeface="Meiryo"/>
+              </a:rPr>
+              <a:t>手順③ まとめた結果をどう介入に使うか — ここが最大の分かれ目</a:t>
+            </a:r>
+          </a:p>
+        </p:txBody>
+      </p:sp>
+      <p:sp>
+        <p:nvSpPr>
+          <p:cNvPr id="9" name="TextBox 8"/>
+          <p:cNvSpPr txBox="1"/>
+          <p:nvPr/>
+        </p:nvSpPr>
+        <p:spPr>
+          <a:xfrm>
+            <a:off x="777240" y="4773168"/>
+            <a:ext cx="10972800" cy="1143000"/>
+          </a:xfrm>
+          <a:prstGeom prst="rect">
+            <a:avLst/>
+          </a:prstGeom>
+          <a:noFill/>
+        </p:spPr>
+        <p:txBody>
+          <a:bodyPr wrap="square">
+            <a:spAutoFit/>
+          </a:bodyPr>
+          <a:lstStyle/>
+          <a:p>
+            <a:pPr>
+              <a:lnSpc>
+                <a:spcPct val="112000"/>
+              </a:lnSpc>
+              <a:spcAft>
+                <a:spcPts val="300"/>
+              </a:spcAft>
+            </a:pPr>
+            <a:r>
+              <a:rPr sz="1350" b="1">
+                <a:solidFill>
+                  <a:srgbClr val="0E7C66"/>
+                </a:solidFill>
+                <a:latin typeface="Meiryo"/>
+              </a:rPr>
+              <a:t>提案手法: </a:t>
+            </a:r>
+            <a:r>
+              <a:rPr sz="1350">
+                <a:solidFill>
+                  <a:srgbClr val="22272E"/>
+                </a:solidFill>
+                <a:latin typeface="Meiryo"/>
+              </a:rPr>
+              <a:t>平均ベクトルの上位64個を大きさ・向きごと編集器に渡す(点数レースをしない)</a:t>
+            </a:r>
+          </a:p>
+          <a:p>
+            <a:pPr>
+              <a:lnSpc>
+                <a:spcPct val="112000"/>
+              </a:lnSpc>
+              <a:spcAft>
+                <a:spcPts val="300"/>
+              </a:spcAft>
+            </a:pPr>
+            <a:r>
+              <a:rPr sz="1350" b="1">
+                <a:solidFill>
+                  <a:srgbClr val="5E6E8C"/>
+                </a:solidFill>
+                <a:latin typeface="Meiryo"/>
+              </a:rPr>
+              <a:t>LinguaLens: </a:t>
+            </a:r>
+            <a:r>
+              <a:rPr sz="1350">
+                <a:solidFill>
+                  <a:srgbClr val="22272E"/>
+                </a:solidFill>
+                <a:latin typeface="Meiryo"/>
+              </a:rPr>
+              <a:t>点数上位3個の「番号」だけ選び、値は10/0に固定(点数も大きさも捨てる)</a:t>
+            </a:r>
+          </a:p>
+          <a:p>
+            <a:pPr>
+              <a:lnSpc>
+                <a:spcPct val="112000"/>
+              </a:lnSpc>
+              <a:spcAft>
+                <a:spcPts val="300"/>
+              </a:spcAft>
+            </a:pPr>
+            <a:r>
+              <a:rPr sz="1350" b="1">
+                <a:solidFill>
+                  <a:srgbClr val="8A929E"/>
+                </a:solidFill>
+                <a:latin typeface="Meiryo"/>
+              </a:rPr>
+              <a:t>AxBench: </a:t>
+            </a:r>
+            <a:r>
+              <a:rPr sz="1350">
+                <a:solidFill>
+                  <a:srgbClr val="22272E"/>
+                </a:solidFill>
+                <a:latin typeface="Meiryo"/>
+              </a:rPr>
+              <a:t>点数1位の「番号」だけ選び、強さは係数で別途調整</a:t>
+            </a:r>
+          </a:p>
+        </p:txBody>
+      </p:sp>
+      <p:sp>
+        <p:nvSpPr>
+          <p:cNvPr id="10" name="TextBox 9"/>
+          <p:cNvSpPr txBox="1"/>
+          <p:nvPr/>
+        </p:nvSpPr>
+        <p:spPr>
+          <a:xfrm>
+            <a:off x="502920" y="5989320"/>
+            <a:ext cx="11338560" cy="822960"/>
+          </a:xfrm>
+          <a:prstGeom prst="rect">
+            <a:avLst/>
+          </a:prstGeom>
+          <a:noFill/>
+        </p:spPr>
+        <p:txBody>
+          <a:bodyPr wrap="square">
+            <a:spAutoFit/>
+          </a:bodyPr>
+          <a:lstStyle/>
+          <a:p>
+            <a:pPr algn="l">
+              <a:lnSpc>
+                <a:spcPct val="115000"/>
+              </a:lnSpc>
+            </a:pPr>
+            <a:r>
+              <a:rPr sz="1350" b="0">
                 <a:solidFill>
                   <a:srgbClr val="5A6472"/>
                 </a:solidFill>
                 <a:latin typeface="Meiryo"/>
               </a:rPr>
-              <a:t>提案手法は平均で同点クラスタ全体を取り込むため安定 — かつ大きさ・符号を保持するので、編集器が「どれをどれだけ動かすか」を読める。</a:t>
+              <a:t>上位には点数がほぼ同じ活性が多数ある(SAEの特徴分裂)ため、「上位1〜3個を選ぶ」方式はデータが半分変わると選ばれる活性の4割超が入れ替わる。平均ベクトルを丸ごと使う提案手法は安定(半分でも類似度0.83)。</a:t>
             </a:r>
           </a:p>
         </p:txBody>

--- a/slides/20260722_progress.pptx
+++ b/slides/20260722_progress.pptx
@@ -22,6 +22,7 @@
     <p:sldId id="270" r:id="rId21"/>
     <p:sldId id="271" r:id="rId22"/>
     <p:sldId id="272" r:id="rId23"/>
+    <p:sldId id="273" r:id="rId24"/>
   </p:sldIdLst>
   <p:sldSz cx="12191695" cy="6858000" type="screen4x3"/>
   <p:notesSz cx="6858000" cy="9144000"/>
@@ -5436,7 +5437,7 @@
                 </a:solidFill>
                 <a:latin typeface="Meiryo"/>
               </a:rPr>
-              <a:t>実験結果(exact・進行中 — 本日朝時点)</a:t>
+              <a:t>実験結果 1/2 — L12(random併記: 「指定に従っているか」が見える)</a:t>
             </a:r>
           </a:p>
         </p:txBody>
@@ -5450,8 +5451,8 @@
           <p:nvPr/>
         </p:nvGraphicFramePr>
         <p:xfrm>
-          <a:off x="457200" y="1188720"/>
-          <a:ext cx="11247120" cy="3108960"/>
+          <a:off x="502920" y="1188720"/>
+          <a:ext cx="11155680" cy="3246120"/>
         </p:xfrm>
         <a:graphic>
           <a:graphicData uri="http://schemas.openxmlformats.org/drawingml/2006/table">
@@ -5460,13 +5461,872 @@
                 <a:tableStyleId>{5C22544A-7EE6-4342-B048-85BDC9FD1C3A}</a:tableStyleId>
               </a:tblPr>
               <a:tblGrid>
-                <a:gridCol w="1606731"/>
-                <a:gridCol w="1606731"/>
-                <a:gridCol w="1606731"/>
-                <a:gridCol w="1606731"/>
-                <a:gridCol w="1606731"/>
-                <a:gridCol w="1606731"/>
-                <a:gridCol w="1606734"/>
+                <a:gridCol w="1859280"/>
+                <a:gridCol w="1859280"/>
+                <a:gridCol w="1859280"/>
+                <a:gridCol w="1859280"/>
+                <a:gridCol w="1859280"/>
+                <a:gridCol w="1859280"/>
+              </a:tblGrid>
+              <a:tr h="463731">
+                <a:tc>
+                  <a:txBody>
+                    <a:bodyPr/>
+                    <a:lstStyle/>
+                    <a:p>
+                      <a:r>
+                        <a:rPr sz="1300" b="1">
+                          <a:latin typeface="Meiryo"/>
+                        </a:rPr>
+                        <a:t>手法</a:t>
+                      </a:r>
+                    </a:p>
+                  </a:txBody>
+                  <a:tcPr/>
+                </a:tc>
+                <a:tc>
+                  <a:txBody>
+                    <a:bodyPr/>
+                    <a:lstStyle/>
+                    <a:p>
+                      <a:r>
+                        <a:rPr sz="1300" b="1">
+                          <a:latin typeface="Meiryo"/>
+                        </a:rPr>
+                        <a:t>sup true</a:t>
+                      </a:r>
+                    </a:p>
+                  </a:txBody>
+                  <a:tcPr/>
+                </a:tc>
+                <a:tc>
+                  <a:txBody>
+                    <a:bodyPr/>
+                    <a:lstStyle/>
+                    <a:p>
+                      <a:r>
+                        <a:rPr sz="1300" b="1">
+                          <a:latin typeface="Meiryo"/>
+                        </a:rPr>
+                        <a:t>sup random</a:t>
+                      </a:r>
+                    </a:p>
+                  </a:txBody>
+                  <a:tcPr/>
+                </a:tc>
+                <a:tc>
+                  <a:txBody>
+                    <a:bodyPr/>
+                    <a:lstStyle/>
+                    <a:p>
+                      <a:r>
+                        <a:rPr sz="1300" b="1">
+                          <a:latin typeface="Meiryo"/>
+                        </a:rPr>
+                        <a:t>amp true</a:t>
+                      </a:r>
+                    </a:p>
+                  </a:txBody>
+                  <a:tcPr/>
+                </a:tc>
+                <a:tc>
+                  <a:txBody>
+                    <a:bodyPr/>
+                    <a:lstStyle/>
+                    <a:p>
+                      <a:r>
+                        <a:rPr sz="1300" b="1">
+                          <a:latin typeface="Meiryo"/>
+                        </a:rPr>
+                        <a:t>amp random</a:t>
+                      </a:r>
+                    </a:p>
+                  </a:txBody>
+                  <a:tcPr/>
+                </a:tc>
+                <a:tc>
+                  <a:txBody>
+                    <a:bodyPr/>
+                    <a:lstStyle/>
+                    <a:p>
+                      <a:r>
+                        <a:rPr sz="1300" b="1">
+                          <a:latin typeface="Meiryo"/>
+                        </a:rPr>
+                        <a:t>特異性</a:t>
+                      </a:r>
+                    </a:p>
+                  </a:txBody>
+                  <a:tcPr/>
+                </a:tc>
+              </a:tr>
+              <a:tr h="463731">
+                <a:tc>
+                  <a:txBody>
+                    <a:bodyPr/>
+                    <a:lstStyle/>
+                    <a:p>
+                      <a:r>
+                        <a:rPr sz="1250" b="1">
+                          <a:latin typeface="Meiryo"/>
+                        </a:rPr>
+                        <a:t>提案手法</a:t>
+                      </a:r>
+                    </a:p>
+                  </a:txBody>
+                  <a:tcPr/>
+                </a:tc>
+                <a:tc>
+                  <a:txBody>
+                    <a:bodyPr/>
+                    <a:lstStyle/>
+                    <a:p>
+                      <a:r>
+                        <a:rPr sz="1250" b="0">
+                          <a:latin typeface="Meiryo"/>
+                        </a:rPr>
+                        <a:t>0.128</a:t>
+                      </a:r>
+                    </a:p>
+                  </a:txBody>
+                  <a:tcPr/>
+                </a:tc>
+                <a:tc>
+                  <a:txBody>
+                    <a:bodyPr/>
+                    <a:lstStyle/>
+                    <a:p>
+                      <a:r>
+                        <a:rPr sz="1250" b="0">
+                          <a:latin typeface="Meiryo"/>
+                        </a:rPr>
+                        <a:t>0.000</a:t>
+                      </a:r>
+                    </a:p>
+                  </a:txBody>
+                  <a:tcPr/>
+                </a:tc>
+                <a:tc>
+                  <a:txBody>
+                    <a:bodyPr/>
+                    <a:lstStyle/>
+                    <a:p>
+                      <a:r>
+                        <a:rPr sz="1250" b="0">
+                          <a:latin typeface="Meiryo"/>
+                        </a:rPr>
+                        <a:t>0.148</a:t>
+                      </a:r>
+                    </a:p>
+                  </a:txBody>
+                  <a:tcPr/>
+                </a:tc>
+                <a:tc>
+                  <a:txBody>
+                    <a:bodyPr/>
+                    <a:lstStyle/>
+                    <a:p>
+                      <a:r>
+                        <a:rPr sz="1250" b="0">
+                          <a:latin typeface="Meiryo"/>
+                        </a:rPr>
+                        <a:t>0.054</a:t>
+                      </a:r>
+                    </a:p>
+                  </a:txBody>
+                  <a:tcPr/>
+                </a:tc>
+                <a:tc>
+                  <a:txBody>
+                    <a:bodyPr/>
+                    <a:lstStyle/>
+                    <a:p>
+                      <a:r>
+                        <a:rPr sz="1250" b="0">
+                          <a:latin typeface="Meiryo"/>
+                        </a:rPr>
+                        <a:t>◎ randomでは編集しない</a:t>
+                      </a:r>
+                    </a:p>
+                  </a:txBody>
+                  <a:tcPr/>
+                </a:tc>
+              </a:tr>
+              <a:tr h="463731">
+                <a:tc>
+                  <a:txBody>
+                    <a:bodyPr/>
+                    <a:lstStyle/>
+                    <a:p>
+                      <a:r>
+                        <a:rPr sz="1250" b="1">
+                          <a:latin typeface="Meiryo"/>
+                        </a:rPr>
+                        <a:t>steer(同スペック)</a:t>
+                      </a:r>
+                    </a:p>
+                  </a:txBody>
+                  <a:tcPr/>
+                </a:tc>
+                <a:tc>
+                  <a:txBody>
+                    <a:bodyPr/>
+                    <a:lstStyle/>
+                    <a:p>
+                      <a:r>
+                        <a:rPr sz="1250" b="0">
+                          <a:latin typeface="Meiryo"/>
+                        </a:rPr>
+                        <a:t>0.086</a:t>
+                      </a:r>
+                    </a:p>
+                  </a:txBody>
+                  <a:tcPr/>
+                </a:tc>
+                <a:tc>
+                  <a:txBody>
+                    <a:bodyPr/>
+                    <a:lstStyle/>
+                    <a:p>
+                      <a:r>
+                        <a:rPr sz="1250" b="0">
+                          <a:latin typeface="Meiryo"/>
+                        </a:rPr>
+                        <a:t>0.000</a:t>
+                      </a:r>
+                    </a:p>
+                  </a:txBody>
+                  <a:tcPr/>
+                </a:tc>
+                <a:tc>
+                  <a:txBody>
+                    <a:bodyPr/>
+                    <a:lstStyle/>
+                    <a:p>
+                      <a:r>
+                        <a:rPr sz="1250" b="0">
+                          <a:latin typeface="Meiryo"/>
+                        </a:rPr>
+                        <a:t>0.118</a:t>
+                      </a:r>
+                    </a:p>
+                  </a:txBody>
+                  <a:tcPr/>
+                </a:tc>
+                <a:tc>
+                  <a:txBody>
+                    <a:bodyPr/>
+                    <a:lstStyle/>
+                    <a:p>
+                      <a:r>
+                        <a:rPr sz="1250" b="0">
+                          <a:latin typeface="Meiryo"/>
+                        </a:rPr>
+                        <a:t>0.000</a:t>
+                      </a:r>
+                    </a:p>
+                  </a:txBody>
+                  <a:tcPr/>
+                </a:tc>
+                <a:tc>
+                  <a:txBody>
+                    <a:bodyPr/>
+                    <a:lstStyle/>
+                    <a:p>
+                      <a:r>
+                        <a:rPr sz="1250" b="0">
+                          <a:latin typeface="Meiryo"/>
+                        </a:rPr>
+                        <a:t>◎</a:t>
+                      </a:r>
+                    </a:p>
+                  </a:txBody>
+                  <a:tcPr/>
+                </a:tc>
+              </a:tr>
+              <a:tr h="463731">
+                <a:tc>
+                  <a:txBody>
+                    <a:bodyPr/>
+                    <a:lstStyle/>
+                    <a:p>
+                      <a:r>
+                        <a:rPr sz="1250" b="1">
+                          <a:latin typeface="Meiryo"/>
+                        </a:rPr>
+                        <a:t>prompting</a:t>
+                      </a:r>
+                    </a:p>
+                  </a:txBody>
+                  <a:tcPr/>
+                </a:tc>
+                <a:tc>
+                  <a:txBody>
+                    <a:bodyPr/>
+                    <a:lstStyle/>
+                    <a:p>
+                      <a:r>
+                        <a:rPr sz="1250" b="0">
+                          <a:latin typeface="Meiryo"/>
+                        </a:rPr>
+                        <a:t>0.180</a:t>
+                      </a:r>
+                    </a:p>
+                  </a:txBody>
+                  <a:tcPr/>
+                </a:tc>
+                <a:tc>
+                  <a:txBody>
+                    <a:bodyPr/>
+                    <a:lstStyle/>
+                    <a:p>
+                      <a:r>
+                        <a:rPr sz="1250" b="0">
+                          <a:latin typeface="Meiryo"/>
+                        </a:rPr>
+                        <a:t>0.088</a:t>
+                      </a:r>
+                    </a:p>
+                  </a:txBody>
+                  <a:tcPr/>
+                </a:tc>
+                <a:tc>
+                  <a:txBody>
+                    <a:bodyPr/>
+                    <a:lstStyle/>
+                    <a:p>
+                      <a:r>
+                        <a:rPr sz="1250" b="0">
+                          <a:latin typeface="Meiryo"/>
+                        </a:rPr>
+                        <a:t>0.227</a:t>
+                      </a:r>
+                    </a:p>
+                  </a:txBody>
+                  <a:tcPr/>
+                </a:tc>
+                <a:tc>
+                  <a:txBody>
+                    <a:bodyPr/>
+                    <a:lstStyle/>
+                    <a:p>
+                      <a:r>
+                        <a:rPr sz="1250" b="0">
+                          <a:latin typeface="Meiryo"/>
+                        </a:rPr>
+                        <a:t>0.062</a:t>
+                      </a:r>
+                    </a:p>
+                  </a:txBody>
+                  <a:tcPr/>
+                </a:tc>
+                <a:tc>
+                  <a:txBody>
+                    <a:bodyPr/>
+                    <a:lstStyle/>
+                    <a:p>
+                      <a:r>
+                        <a:rPr sz="1250" b="0">
+                          <a:latin typeface="Meiryo"/>
+                        </a:rPr>
+                        <a:t>× 誤指定でも編集</a:t>
+                      </a:r>
+                    </a:p>
+                  </a:txBody>
+                  <a:tcPr/>
+                </a:tc>
+              </a:tr>
+              <a:tr h="463731">
+                <a:tc>
+                  <a:txBody>
+                    <a:bodyPr/>
+                    <a:lstStyle/>
+                    <a:p>
+                      <a:r>
+                        <a:rPr sz="1250" b="1">
+                          <a:latin typeface="Meiryo"/>
+                        </a:rPr>
+                        <a:t>AxBench準拠 steer</a:t>
+                      </a:r>
+                    </a:p>
+                  </a:txBody>
+                  <a:tcPr/>
+                </a:tc>
+                <a:tc>
+                  <a:txBody>
+                    <a:bodyPr/>
+                    <a:lstStyle/>
+                    <a:p>
+                      <a:r>
+                        <a:rPr sz="1250" b="0">
+                          <a:latin typeface="Meiryo"/>
+                        </a:rPr>
+                        <a:t>0.070</a:t>
+                      </a:r>
+                    </a:p>
+                  </a:txBody>
+                  <a:tcPr/>
+                </a:tc>
+                <a:tc>
+                  <a:txBody>
+                    <a:bodyPr/>
+                    <a:lstStyle/>
+                    <a:p>
+                      <a:r>
+                        <a:rPr sz="1250" b="0">
+                          <a:latin typeface="Meiryo"/>
+                        </a:rPr>
+                        <a:t>0.052</a:t>
+                      </a:r>
+                    </a:p>
+                  </a:txBody>
+                  <a:tcPr/>
+                </a:tc>
+                <a:tc>
+                  <a:txBody>
+                    <a:bodyPr/>
+                    <a:lstStyle/>
+                    <a:p>
+                      <a:r>
+                        <a:rPr sz="1250" b="0">
+                          <a:latin typeface="Meiryo"/>
+                        </a:rPr>
+                        <a:t>0.148</a:t>
+                      </a:r>
+                    </a:p>
+                  </a:txBody>
+                  <a:tcPr/>
+                </a:tc>
+                <a:tc>
+                  <a:txBody>
+                    <a:bodyPr/>
+                    <a:lstStyle/>
+                    <a:p>
+                      <a:r>
+                        <a:rPr sz="1250" b="0">
+                          <a:latin typeface="Meiryo"/>
+                        </a:rPr>
+                        <a:t>0.120</a:t>
+                      </a:r>
+                    </a:p>
+                  </a:txBody>
+                  <a:tcPr/>
+                </a:tc>
+                <a:tc>
+                  <a:txBody>
+                    <a:bodyPr/>
+                    <a:lstStyle/>
+                    <a:p>
+                      <a:r>
+                        <a:rPr sz="1250" b="0">
+                          <a:latin typeface="Meiryo"/>
+                        </a:rPr>
+                        <a:t>× randomとの差 ≈0.02-0.03</a:t>
+                      </a:r>
+                    </a:p>
+                  </a:txBody>
+                  <a:tcPr/>
+                </a:tc>
+              </a:tr>
+              <a:tr h="463731">
+                <a:tc>
+                  <a:txBody>
+                    <a:bodyPr/>
+                    <a:lstStyle/>
+                    <a:p>
+                      <a:r>
+                        <a:rPr sz="1250" b="1">
+                          <a:latin typeface="Meiryo"/>
+                        </a:rPr>
+                        <a:t>LinguaLens準拠</a:t>
+                      </a:r>
+                    </a:p>
+                  </a:txBody>
+                  <a:tcPr/>
+                </a:tc>
+                <a:tc>
+                  <a:txBody>
+                    <a:bodyPr/>
+                    <a:lstStyle/>
+                    <a:p>
+                      <a:r>
+                        <a:rPr sz="1250" b="0">
+                          <a:latin typeface="Meiryo"/>
+                        </a:rPr>
+                        <a:t>0.016</a:t>
+                      </a:r>
+                    </a:p>
+                  </a:txBody>
+                  <a:tcPr/>
+                </a:tc>
+                <a:tc>
+                  <a:txBody>
+                    <a:bodyPr/>
+                    <a:lstStyle/>
+                    <a:p>
+                      <a:r>
+                        <a:rPr sz="1250" b="0">
+                          <a:latin typeface="Meiryo"/>
+                        </a:rPr>
+                        <a:t>0.010</a:t>
+                      </a:r>
+                    </a:p>
+                  </a:txBody>
+                  <a:tcPr/>
+                </a:tc>
+                <a:tc>
+                  <a:txBody>
+                    <a:bodyPr/>
+                    <a:lstStyle/>
+                    <a:p>
+                      <a:r>
+                        <a:rPr sz="1250" b="0">
+                          <a:latin typeface="Meiryo"/>
+                        </a:rPr>
+                        <a:t>0.106</a:t>
+                      </a:r>
+                    </a:p>
+                  </a:txBody>
+                  <a:tcPr/>
+                </a:tc>
+                <a:tc>
+                  <a:txBody>
+                    <a:bodyPr/>
+                    <a:lstStyle/>
+                    <a:p>
+                      <a:r>
+                        <a:rPr sz="1250" b="0">
+                          <a:latin typeface="Meiryo"/>
+                        </a:rPr>
+                        <a:t>0.094</a:t>
+                      </a:r>
+                    </a:p>
+                  </a:txBody>
+                  <a:tcPr/>
+                </a:tc>
+                <a:tc>
+                  <a:txBody>
+                    <a:bodyPr/>
+                    <a:lstStyle/>
+                    <a:p>
+                      <a:r>
+                        <a:rPr sz="1250" b="0">
+                          <a:latin typeface="Meiryo"/>
+                        </a:rPr>
+                        <a:t>× 差 ≈0.01</a:t>
+                      </a:r>
+                    </a:p>
+                  </a:txBody>
+                  <a:tcPr/>
+                </a:tc>
+              </a:tr>
+              <a:tr h="463734">
+                <a:tc>
+                  <a:txBody>
+                    <a:bodyPr/>
+                    <a:lstStyle/>
+                    <a:p>
+                      <a:r>
+                        <a:rPr sz="1250" b="1">
+                          <a:latin typeface="Meiryo"/>
+                        </a:rPr>
+                        <a:t>(参考)無介入の床</a:t>
+                      </a:r>
+                    </a:p>
+                  </a:txBody>
+                  <a:tcPr/>
+                </a:tc>
+                <a:tc>
+                  <a:txBody>
+                    <a:bodyPr/>
+                    <a:lstStyle/>
+                    <a:p>
+                      <a:r>
+                        <a:rPr sz="1250" b="0">
+                          <a:latin typeface="Meiryo"/>
+                        </a:rPr>
+                        <a:t>0.060*</a:t>
+                      </a:r>
+                    </a:p>
+                  </a:txBody>
+                  <a:tcPr/>
+                </a:tc>
+                <a:tc>
+                  <a:txBody>
+                    <a:bodyPr/>
+                    <a:lstStyle/>
+                    <a:p>
+                      <a:r>
+                        <a:rPr sz="1250" b="0">
+                          <a:latin typeface="Meiryo"/>
+                        </a:rPr>
+                        <a:t>—</a:t>
+                      </a:r>
+                    </a:p>
+                  </a:txBody>
+                  <a:tcPr/>
+                </a:tc>
+                <a:tc>
+                  <a:txBody>
+                    <a:bodyPr/>
+                    <a:lstStyle/>
+                    <a:p>
+                      <a:r>
+                        <a:rPr sz="1250" b="0">
+                          <a:latin typeface="Meiryo"/>
+                        </a:rPr>
+                        <a:t>0.120*</a:t>
+                      </a:r>
+                    </a:p>
+                  </a:txBody>
+                  <a:tcPr/>
+                </a:tc>
+                <a:tc>
+                  <a:txBody>
+                    <a:bodyPr/>
+                    <a:lstStyle/>
+                    <a:p>
+                      <a:r>
+                        <a:rPr sz="1250" b="0">
+                          <a:latin typeface="Meiryo"/>
+                        </a:rPr>
+                        <a:t>—</a:t>
+                      </a:r>
+                    </a:p>
+                  </a:txBody>
+                  <a:tcPr/>
+                </a:tc>
+                <a:tc>
+                  <a:txBody>
+                    <a:bodyPr/>
+                    <a:lstStyle/>
+                    <a:p>
+                      <a:r>
+                        <a:rPr sz="1250" b="0">
+                          <a:latin typeface="Meiryo"/>
+                        </a:rPr>
+                        <a:t>*書き換え枠のraw</a:t>
+                      </a:r>
+                    </a:p>
+                  </a:txBody>
+                  <a:tcPr/>
+                </a:tc>
+              </a:tr>
+            </a:tbl>
+          </a:graphicData>
+        </a:graphic>
+      </p:graphicFrame>
+      <p:sp>
+        <p:nvSpPr>
+          <p:cNvPr id="5" name="TextBox 4"/>
+          <p:cNvSpPr txBox="1"/>
+          <p:nvPr/>
+        </p:nvSpPr>
+        <p:spPr>
+          <a:xfrm>
+            <a:off x="502920" y="4663440"/>
+            <a:ext cx="11247120" cy="1828800"/>
+          </a:xfrm>
+          <a:prstGeom prst="rect">
+            <a:avLst/>
+          </a:prstGeom>
+          <a:noFill/>
+        </p:spPr>
+        <p:txBody>
+          <a:bodyPr wrap="square">
+            <a:spAutoFit/>
+          </a:bodyPr>
+          <a:lstStyle/>
+          <a:p>
+            <a:pPr algn="l">
+              <a:lnSpc>
+                <a:spcPct val="115000"/>
+              </a:lnSpc>
+            </a:pPr>
+            <a:r>
+              <a:rPr sz="1400" b="0">
+                <a:solidFill>
+                  <a:srgbClr val="5A6472"/>
+                </a:solidFill>
+                <a:latin typeface="Meiryo"/>
+              </a:rPr>
+              <a:t>・true−random(正味の介入効果)では: 提案 0.128/0.094 ≧ prompting 0.092/0.165 で消す方向は提案が上回る</a:t>
+            </a:r>
+          </a:p>
+          <a:p>
+            <a:pPr algn="l">
+              <a:lnSpc>
+                <a:spcPct val="115000"/>
+              </a:lnSpc>
+            </a:pPr>
+            <a:r>
+              <a:rPr sz="1400" b="0">
+                <a:solidFill>
+                  <a:srgbClr val="5A6472"/>
+                </a:solidFill>
+                <a:latin typeface="Meiryo"/>
+              </a:rPr>
+              <a:t>・promptingのtrueの高さの一部は「指示なら何でも編集する」性質(random 0.088)による — 介入としての特異性がない</a:t>
+            </a:r>
+          </a:p>
+          <a:p>
+            <a:pPr algn="l">
+              <a:lnSpc>
+                <a:spcPct val="115000"/>
+              </a:lnSpc>
+            </a:pPr>
+            <a:r>
+              <a:rPr sz="1400" b="0">
+                <a:solidFill>
+                  <a:srgbClr val="5A6472"/>
+                </a:solidFill>
+                <a:latin typeface="Meiryo"/>
+              </a:rPr>
+              <a:t>・FIC(特徴が本当に動いたかのgpt-4o判定、L12): 消す方向 提案0.94 ≫ prompting 0.42 / steer 0.15 / LinguaLens準拠 0.08</a:t>
+            </a:r>
+          </a:p>
+          <a:p>
+            <a:pPr algn="l">
+              <a:lnSpc>
+                <a:spcPct val="115000"/>
+              </a:lnSpc>
+            </a:pPr>
+            <a:r>
+              <a:rPr sz="1400" b="0">
+                <a:solidFill>
+                  <a:srgbClr val="5A6472"/>
+                </a:solidFill>
+                <a:latin typeface="Meiryo"/>
+              </a:rPr>
+              <a:t>  足す方向 prompting 0.49 &gt; 提案 0.31 ≫ steer −0.00 / LinguaLens準拠 −0.07 — 因果効果の軸では提案が最有力の介入</a:t>
+            </a:r>
+          </a:p>
+        </p:txBody>
+      </p:sp>
+    </p:spTree>
+  </p:cSld>
+  <p:clrMapOvr>
+    <a:masterClrMapping/>
+  </p:clrMapOvr>
+</p:sld>
+</file>
+
+<file path=ppt/slides/slide16.xml><?xml version="1.0" encoding="utf-8"?>
+<p:sld xmlns:a="http://schemas.openxmlformats.org/drawingml/2006/main" xmlns:p="http://schemas.openxmlformats.org/presentationml/2006/main" xmlns:r="http://schemas.openxmlformats.org/officeDocument/2006/relationships">
+  <p:cSld>
+    <p:spTree>
+      <p:nvGrpSpPr>
+        <p:cNvPr id="1" name=""/>
+        <p:cNvGrpSpPr/>
+        <p:nvPr/>
+      </p:nvGrpSpPr>
+      <p:grpSpPr/>
+      <p:sp>
+        <p:nvSpPr>
+          <p:cNvPr id="2" name="Rectangle 1"/>
+          <p:cNvSpPr/>
+          <p:nvPr/>
+        </p:nvSpPr>
+        <p:spPr>
+          <a:xfrm>
+            <a:off x="0" y="0"/>
+            <a:ext cx="12191695" cy="146304"/>
+          </a:xfrm>
+          <a:prstGeom prst="rect">
+            <a:avLst/>
+          </a:prstGeom>
+          <a:solidFill>
+            <a:srgbClr val="0E7C66"/>
+          </a:solidFill>
+          <a:ln>
+            <a:noFill/>
+          </a:ln>
+        </p:spPr>
+        <p:style>
+          <a:lnRef idx="1">
+            <a:schemeClr val="accent1"/>
+          </a:lnRef>
+          <a:fillRef idx="3">
+            <a:schemeClr val="accent1"/>
+          </a:fillRef>
+          <a:effectRef idx="2">
+            <a:schemeClr val="accent1"/>
+          </a:effectRef>
+          <a:fontRef idx="minor">
+            <a:schemeClr val="lt1"/>
+          </a:fontRef>
+        </p:style>
+        <p:txBody>
+          <a:bodyPr rtlCol="0" anchor="ctr"/>
+          <a:lstStyle/>
+          <a:p>
+            <a:pPr algn="ctr"/>
+          </a:p>
+        </p:txBody>
+      </p:sp>
+      <p:sp>
+        <p:nvSpPr>
+          <p:cNvPr id="3" name="TextBox 2"/>
+          <p:cNvSpPr txBox="1"/>
+          <p:nvPr/>
+        </p:nvSpPr>
+        <p:spPr>
+          <a:xfrm>
+            <a:off x="502920" y="256032"/>
+            <a:ext cx="11247120" cy="731520"/>
+          </a:xfrm>
+          <a:prstGeom prst="rect">
+            <a:avLst/>
+          </a:prstGeom>
+          <a:noFill/>
+        </p:spPr>
+        <p:txBody>
+          <a:bodyPr wrap="square">
+            <a:spAutoFit/>
+          </a:bodyPr>
+          <a:lstStyle/>
+          <a:p>
+            <a:pPr algn="l">
+              <a:lnSpc>
+                <a:spcPct val="115000"/>
+              </a:lnSpc>
+            </a:pPr>
+            <a:r>
+              <a:rPr sz="2700" b="1">
+                <a:solidFill>
+                  <a:srgbClr val="22272E"/>
+                </a:solidFill>
+                <a:latin typeface="Meiryo"/>
+              </a:rPr>
+              <a:t>実験結果 2/2 — L4・L20(random併記)</a:t>
+            </a:r>
+          </a:p>
+        </p:txBody>
+      </p:sp>
+      <p:graphicFrame>
+        <p:nvGraphicFramePr>
+          <p:cNvPr id="4" name="Table 3"/>
+          <p:cNvGraphicFramePr>
+            <a:graphicFrameLocks noGrp="1"/>
+          </p:cNvGraphicFramePr>
+          <p:nvPr/>
+        </p:nvGraphicFramePr>
+        <p:xfrm>
+          <a:off x="502920" y="1143000"/>
+          <a:ext cx="11155680" cy="3108960"/>
+        </p:xfrm>
+        <a:graphic>
+          <a:graphicData uri="http://schemas.openxmlformats.org/drawingml/2006/table">
+            <a:tbl>
+              <a:tblPr firstRow="1" bandRow="1">
+                <a:tableStyleId>{5C22544A-7EE6-4342-B048-85BDC9FD1C3A}</a:tableStyleId>
+              </a:tblPr>
+              <a:tblGrid>
+                <a:gridCol w="2231136"/>
+                <a:gridCol w="2231136"/>
+                <a:gridCol w="2231136"/>
+                <a:gridCol w="2231136"/>
+                <a:gridCol w="2231136"/>
               </a:tblGrid>
               <a:tr h="444137">
                 <a:tc>
@@ -5478,7 +6338,7 @@
                         <a:rPr sz="1300" b="1">
                           <a:latin typeface="Meiryo"/>
                         </a:rPr>
-                        <a:t>手法</a:t>
+                        <a:t>手法(true/random)</a:t>
                       </a:r>
                     </a:p>
                   </a:txBody>
@@ -5523,36 +6383,6 @@
                         <a:rPr sz="1300" b="1">
                           <a:latin typeface="Meiryo"/>
                         </a:rPr>
-                        <a:t>L12 sup</a:t>
-                      </a:r>
-                    </a:p>
-                  </a:txBody>
-                  <a:tcPr/>
-                </a:tc>
-                <a:tc>
-                  <a:txBody>
-                    <a:bodyPr/>
-                    <a:lstStyle/>
-                    <a:p>
-                      <a:r>
-                        <a:rPr sz="1300" b="1">
-                          <a:latin typeface="Meiryo"/>
-                        </a:rPr>
-                        <a:t>L12 amp</a:t>
-                      </a:r>
-                    </a:p>
-                  </a:txBody>
-                  <a:tcPr/>
-                </a:tc>
-                <a:tc>
-                  <a:txBody>
-                    <a:bodyPr/>
-                    <a:lstStyle/>
-                    <a:p>
-                      <a:r>
-                        <a:rPr sz="1300" b="1">
-                          <a:latin typeface="Meiryo"/>
-                        </a:rPr>
                         <a:t>L20 sup</a:t>
                       </a:r>
                     </a:p>
@@ -5582,7 +6412,7 @@
                     <a:lstStyle/>
                     <a:p>
                       <a:r>
-                        <a:rPr sz="1250" b="1">
+                        <a:rPr sz="1200" b="1">
                           <a:latin typeface="Meiryo"/>
                         </a:rPr>
                         <a:t>提案手法</a:t>
@@ -5597,10 +6427,10 @@
                     <a:lstStyle/>
                     <a:p>
                       <a:r>
-                        <a:rPr sz="1250" b="0">
+                        <a:rPr sz="1200" b="0">
                           <a:latin typeface="Meiryo"/>
                         </a:rPr>
-                        <a:t>0.086</a:t>
+                        <a:t>0.086 / 0.002</a:t>
                       </a:r>
                     </a:p>
                   </a:txBody>
@@ -5612,10 +6442,10 @@
                     <a:lstStyle/>
                     <a:p>
                       <a:r>
-                        <a:rPr sz="1250" b="0">
+                        <a:rPr sz="1200" b="0">
                           <a:latin typeface="Meiryo"/>
                         </a:rPr>
-                        <a:t>0.172</a:t>
+                        <a:t>0.172 / 0.032</a:t>
                       </a:r>
                     </a:p>
                   </a:txBody>
@@ -5627,10 +6457,10 @@
                     <a:lstStyle/>
                     <a:p>
                       <a:r>
-                        <a:rPr sz="1250" b="0">
+                        <a:rPr sz="1200" b="0">
                           <a:latin typeface="Meiryo"/>
                         </a:rPr>
-                        <a:t>0.128</a:t>
+                        <a:t>0.036 / 0.002</a:t>
                       </a:r>
                     </a:p>
                   </a:txBody>
@@ -5642,40 +6472,10 @@
                     <a:lstStyle/>
                     <a:p>
                       <a:r>
-                        <a:rPr sz="1250" b="0">
+                        <a:rPr sz="1200" b="0">
                           <a:latin typeface="Meiryo"/>
                         </a:rPr>
-                        <a:t>0.148</a:t>
-                      </a:r>
-                    </a:p>
-                  </a:txBody>
-                  <a:tcPr/>
-                </a:tc>
-                <a:tc>
-                  <a:txBody>
-                    <a:bodyPr/>
-                    <a:lstStyle/>
-                    <a:p>
-                      <a:r>
-                        <a:rPr sz="1250" b="0">
-                          <a:latin typeface="Meiryo"/>
-                        </a:rPr>
-                        <a:t>0.036</a:t>
-                      </a:r>
-                    </a:p>
-                  </a:txBody>
-                  <a:tcPr/>
-                </a:tc>
-                <a:tc>
-                  <a:txBody>
-                    <a:bodyPr/>
-                    <a:lstStyle/>
-                    <a:p>
-                      <a:r>
-                        <a:rPr sz="1250" b="0">
-                          <a:latin typeface="Meiryo"/>
-                        </a:rPr>
-                        <a:t>0.048</a:t>
+                        <a:t>0.048 / 0.030</a:t>
                       </a:r>
                     </a:p>
                   </a:txBody>
@@ -5689,7 +6489,7 @@
                     <a:lstStyle/>
                     <a:p>
                       <a:r>
-                        <a:rPr sz="1250" b="1">
+                        <a:rPr sz="1200" b="1">
                           <a:latin typeface="Meiryo"/>
                         </a:rPr>
                         <a:t>steer(同スペック)</a:t>
@@ -5704,10 +6504,10 @@
                     <a:lstStyle/>
                     <a:p>
                       <a:r>
-                        <a:rPr sz="1250" b="0">
+                        <a:rPr sz="1200" b="0">
                           <a:latin typeface="Meiryo"/>
                         </a:rPr>
-                        <a:t>0.108</a:t>
+                        <a:t>0.108 / 0.000</a:t>
                       </a:r>
                     </a:p>
                   </a:txBody>
@@ -5719,10 +6519,10 @@
                     <a:lstStyle/>
                     <a:p>
                       <a:r>
-                        <a:rPr sz="1250" b="0">
+                        <a:rPr sz="1200" b="0">
                           <a:latin typeface="Meiryo"/>
                         </a:rPr>
-                        <a:t>0.074</a:t>
+                        <a:t>0.074 / 0.006</a:t>
                       </a:r>
                     </a:p>
                   </a:txBody>
@@ -5734,10 +6534,10 @@
                     <a:lstStyle/>
                     <a:p>
                       <a:r>
-                        <a:rPr sz="1250" b="0">
+                        <a:rPr sz="1200" b="0">
                           <a:latin typeface="Meiryo"/>
                         </a:rPr>
-                        <a:t>0.086</a:t>
+                        <a:t>0.020 / 0.000</a:t>
                       </a:r>
                     </a:p>
                   </a:txBody>
@@ -5749,40 +6549,10 @@
                     <a:lstStyle/>
                     <a:p>
                       <a:r>
-                        <a:rPr sz="1250" b="0">
+                        <a:rPr sz="1200" b="0">
                           <a:latin typeface="Meiryo"/>
                         </a:rPr>
-                        <a:t>0.118</a:t>
-                      </a:r>
-                    </a:p>
-                  </a:txBody>
-                  <a:tcPr/>
-                </a:tc>
-                <a:tc>
-                  <a:txBody>
-                    <a:bodyPr/>
-                    <a:lstStyle/>
-                    <a:p>
-                      <a:r>
-                        <a:rPr sz="1250" b="0">
-                          <a:latin typeface="Meiryo"/>
-                        </a:rPr>
-                        <a:t>0.020</a:t>
-                      </a:r>
-                    </a:p>
-                  </a:txBody>
-                  <a:tcPr/>
-                </a:tc>
-                <a:tc>
-                  <a:txBody>
-                    <a:bodyPr/>
-                    <a:lstStyle/>
-                    <a:p>
-                      <a:r>
-                        <a:rPr sz="1250" b="0">
-                          <a:latin typeface="Meiryo"/>
-                        </a:rPr>
-                        <a:t>0.024</a:t>
+                        <a:t>0.024 / 0.002</a:t>
                       </a:r>
                     </a:p>
                   </a:txBody>
@@ -5796,7 +6566,161 @@
                     <a:lstStyle/>
                     <a:p>
                       <a:r>
-                        <a:rPr sz="1250" b="1">
+                        <a:rPr sz="1200" b="1">
+                          <a:latin typeface="Meiryo"/>
+                        </a:rPr>
+                        <a:t>prompting(層共通)</a:t>
+                      </a:r>
+                    </a:p>
+                  </a:txBody>
+                  <a:tcPr/>
+                </a:tc>
+                <a:tc>
+                  <a:txBody>
+                    <a:bodyPr/>
+                    <a:lstStyle/>
+                    <a:p>
+                      <a:r>
+                        <a:rPr sz="1200" b="0">
+                          <a:latin typeface="Meiryo"/>
+                        </a:rPr>
+                        <a:t>0.180 / 0.088</a:t>
+                      </a:r>
+                    </a:p>
+                  </a:txBody>
+                  <a:tcPr/>
+                </a:tc>
+                <a:tc>
+                  <a:txBody>
+                    <a:bodyPr/>
+                    <a:lstStyle/>
+                    <a:p>
+                      <a:r>
+                        <a:rPr sz="1200" b="0">
+                          <a:latin typeface="Meiryo"/>
+                        </a:rPr>
+                        <a:t>0.227 / 0.062</a:t>
+                      </a:r>
+                    </a:p>
+                  </a:txBody>
+                  <a:tcPr/>
+                </a:tc>
+                <a:tc>
+                  <a:txBody>
+                    <a:bodyPr/>
+                    <a:lstStyle/>
+                    <a:p>
+                      <a:r>
+                        <a:rPr sz="1200" b="0">
+                          <a:latin typeface="Meiryo"/>
+                        </a:rPr>
+                        <a:t>0.180 / 0.088</a:t>
+                      </a:r>
+                    </a:p>
+                  </a:txBody>
+                  <a:tcPr/>
+                </a:tc>
+                <a:tc>
+                  <a:txBody>
+                    <a:bodyPr/>
+                    <a:lstStyle/>
+                    <a:p>
+                      <a:r>
+                        <a:rPr sz="1200" b="0">
+                          <a:latin typeface="Meiryo"/>
+                        </a:rPr>
+                        <a:t>0.227 / 0.062</a:t>
+                      </a:r>
+                    </a:p>
+                  </a:txBody>
+                  <a:tcPr/>
+                </a:tc>
+              </a:tr>
+              <a:tr h="444137">
+                <a:tc>
+                  <a:txBody>
+                    <a:bodyPr/>
+                    <a:lstStyle/>
+                    <a:p>
+                      <a:r>
+                        <a:rPr sz="1200" b="1">
+                          <a:latin typeface="Meiryo"/>
+                        </a:rPr>
+                        <a:t>AxBench準拠 steer</a:t>
+                      </a:r>
+                    </a:p>
+                  </a:txBody>
+                  <a:tcPr/>
+                </a:tc>
+                <a:tc>
+                  <a:txBody>
+                    <a:bodyPr/>
+                    <a:lstStyle/>
+                    <a:p>
+                      <a:r>
+                        <a:rPr sz="1200" b="0">
+                          <a:latin typeface="Meiryo"/>
+                        </a:rPr>
+                        <a:t>0.076 / 0.066</a:t>
+                      </a:r>
+                    </a:p>
+                  </a:txBody>
+                  <a:tcPr/>
+                </a:tc>
+                <a:tc>
+                  <a:txBody>
+                    <a:bodyPr/>
+                    <a:lstStyle/>
+                    <a:p>
+                      <a:r>
+                        <a:rPr sz="1200" b="0">
+                          <a:latin typeface="Meiryo"/>
+                        </a:rPr>
+                        <a:t>0.132 / 0.112</a:t>
+                      </a:r>
+                    </a:p>
+                  </a:txBody>
+                  <a:tcPr/>
+                </a:tc>
+                <a:tc>
+                  <a:txBody>
+                    <a:bodyPr/>
+                    <a:lstStyle/>
+                    <a:p>
+                      <a:r>
+                        <a:rPr sz="1200" b="0">
+                          <a:latin typeface="Meiryo"/>
+                        </a:rPr>
+                        <a:t>0.056 / 0.056</a:t>
+                      </a:r>
+                    </a:p>
+                  </a:txBody>
+                  <a:tcPr/>
+                </a:tc>
+                <a:tc>
+                  <a:txBody>
+                    <a:bodyPr/>
+                    <a:lstStyle/>
+                    <a:p>
+                      <a:r>
+                        <a:rPr sz="1200" b="0">
+                          <a:latin typeface="Meiryo"/>
+                        </a:rPr>
+                        <a:t>0.110 / 0.118</a:t>
+                      </a:r>
+                    </a:p>
+                  </a:txBody>
+                  <a:tcPr/>
+                </a:tc>
+              </a:tr>
+              <a:tr h="444137">
+                <a:tc>
+                  <a:txBody>
+                    <a:bodyPr/>
+                    <a:lstStyle/>
+                    <a:p>
+                      <a:r>
+                        <a:rPr sz="1200" b="1">
                           <a:latin typeface="Meiryo"/>
                         </a:rPr>
                         <a:t>LinguaLens準拠</a:t>
@@ -5811,10 +6735,10 @@
                     <a:lstStyle/>
                     <a:p>
                       <a:r>
-                        <a:rPr sz="1250" b="0">
+                        <a:rPr sz="1200" b="0">
                           <a:latin typeface="Meiryo"/>
                         </a:rPr>
-                        <a:t>0.046</a:t>
+                        <a:t>0.046 / 0.030</a:t>
                       </a:r>
                     </a:p>
                   </a:txBody>
@@ -5826,10 +6750,10 @@
                     <a:lstStyle/>
                     <a:p>
                       <a:r>
-                        <a:rPr sz="1250" b="0">
+                        <a:rPr sz="1200" b="0">
                           <a:latin typeface="Meiryo"/>
                         </a:rPr>
-                        <a:t>0.070*</a:t>
+                        <a:t>0.070 / 0.042</a:t>
                       </a:r>
                     </a:p>
                   </a:txBody>
@@ -5841,10 +6765,10 @@
                     <a:lstStyle/>
                     <a:p>
                       <a:r>
-                        <a:rPr sz="1250" b="0">
+                        <a:rPr sz="1200" b="0">
                           <a:latin typeface="Meiryo"/>
                         </a:rPr>
-                        <a:t>0.016</a:t>
+                        <a:t>0.048 / 0.050</a:t>
                       </a:r>
                     </a:p>
                   </a:txBody>
@@ -5856,254 +6780,10 @@
                     <a:lstStyle/>
                     <a:p>
                       <a:r>
-                        <a:rPr sz="1250" b="0">
+                        <a:rPr sz="1200" b="0">
                           <a:latin typeface="Meiryo"/>
                         </a:rPr>
-                        <a:t>0.106*</a:t>
-                      </a:r>
-                    </a:p>
-                  </a:txBody>
-                  <a:tcPr/>
-                </a:tc>
-                <a:tc>
-                  <a:txBody>
-                    <a:bodyPr/>
-                    <a:lstStyle/>
-                    <a:p>
-                      <a:r>
-                        <a:rPr sz="1250" b="0">
-                          <a:latin typeface="Meiryo"/>
-                        </a:rPr>
-                        <a:t>0.048</a:t>
-                      </a:r>
-                    </a:p>
-                  </a:txBody>
-                  <a:tcPr/>
-                </a:tc>
-                <a:tc>
-                  <a:txBody>
-                    <a:bodyPr/>
-                    <a:lstStyle/>
-                    <a:p>
-                      <a:r>
-                        <a:rPr sz="1250" b="0">
-                          <a:latin typeface="Meiryo"/>
-                        </a:rPr>
-                        <a:t>0.108*</a:t>
-                      </a:r>
-                    </a:p>
-                  </a:txBody>
-                  <a:tcPr/>
-                </a:tc>
-              </a:tr>
-              <a:tr h="444137">
-                <a:tc>
-                  <a:txBody>
-                    <a:bodyPr/>
-                    <a:lstStyle/>
-                    <a:p>
-                      <a:r>
-                        <a:rPr sz="1250" b="1">
-                          <a:latin typeface="Meiryo"/>
-                        </a:rPr>
-                        <a:t>AxBench準拠 steer</a:t>
-                      </a:r>
-                    </a:p>
-                  </a:txBody>
-                  <a:tcPr/>
-                </a:tc>
-                <a:tc>
-                  <a:txBody>
-                    <a:bodyPr/>
-                    <a:lstStyle/>
-                    <a:p>
-                      <a:r>
-                        <a:rPr sz="1250" b="0">
-                          <a:latin typeface="Meiryo"/>
-                        </a:rPr>
-                        <a:t>0.076</a:t>
-                      </a:r>
-                    </a:p>
-                  </a:txBody>
-                  <a:tcPr/>
-                </a:tc>
-                <a:tc>
-                  <a:txBody>
-                    <a:bodyPr/>
-                    <a:lstStyle/>
-                    <a:p>
-                      <a:r>
-                        <a:rPr sz="1250" b="0">
-                          <a:latin typeface="Meiryo"/>
-                        </a:rPr>
-                        <a:t>0.132</a:t>
-                      </a:r>
-                    </a:p>
-                  </a:txBody>
-                  <a:tcPr/>
-                </a:tc>
-                <a:tc>
-                  <a:txBody>
-                    <a:bodyPr/>
-                    <a:lstStyle/>
-                    <a:p>
-                      <a:r>
-                        <a:rPr sz="1250" b="0">
-                          <a:latin typeface="Meiryo"/>
-                        </a:rPr>
-                        <a:t>0.070</a:t>
-                      </a:r>
-                    </a:p>
-                  </a:txBody>
-                  <a:tcPr/>
-                </a:tc>
-                <a:tc>
-                  <a:txBody>
-                    <a:bodyPr/>
-                    <a:lstStyle/>
-                    <a:p>
-                      <a:r>
-                        <a:rPr sz="1250" b="0">
-                          <a:latin typeface="Meiryo"/>
-                        </a:rPr>
-                        <a:t>0.148</a:t>
-                      </a:r>
-                    </a:p>
-                  </a:txBody>
-                  <a:tcPr/>
-                </a:tc>
-                <a:tc>
-                  <a:txBody>
-                    <a:bodyPr/>
-                    <a:lstStyle/>
-                    <a:p>
-                      <a:r>
-                        <a:rPr sz="1250" b="0">
-                          <a:latin typeface="Meiryo"/>
-                        </a:rPr>
-                        <a:t>0.056</a:t>
-                      </a:r>
-                    </a:p>
-                  </a:txBody>
-                  <a:tcPr/>
-                </a:tc>
-                <a:tc>
-                  <a:txBody>
-                    <a:bodyPr/>
-                    <a:lstStyle/>
-                    <a:p>
-                      <a:r>
-                        <a:rPr sz="1250" b="0">
-                          <a:latin typeface="Meiryo"/>
-                        </a:rPr>
-                        <a:t>0.110</a:t>
-                      </a:r>
-                    </a:p>
-                  </a:txBody>
-                  <a:tcPr/>
-                </a:tc>
-              </a:tr>
-              <a:tr h="444137">
-                <a:tc>
-                  <a:txBody>
-                    <a:bodyPr/>
-                    <a:lstStyle/>
-                    <a:p>
-                      <a:r>
-                        <a:rPr sz="1250" b="1">
-                          <a:latin typeface="Meiryo"/>
-                        </a:rPr>
-                        <a:t>AxBench準拠 prompting</a:t>
-                      </a:r>
-                    </a:p>
-                  </a:txBody>
-                  <a:tcPr/>
-                </a:tc>
-                <a:tc>
-                  <a:txBody>
-                    <a:bodyPr/>
-                    <a:lstStyle/>
-                    <a:p>
-                      <a:r>
-                        <a:rPr sz="1250" b="0">
-                          <a:latin typeface="Meiryo"/>
-                        </a:rPr>
-                        <a:t>0.180</a:t>
-                      </a:r>
-                    </a:p>
-                  </a:txBody>
-                  <a:tcPr/>
-                </a:tc>
-                <a:tc>
-                  <a:txBody>
-                    <a:bodyPr/>
-                    <a:lstStyle/>
-                    <a:p>
-                      <a:r>
-                        <a:rPr sz="1250" b="0">
-                          <a:latin typeface="Meiryo"/>
-                        </a:rPr>
-                        <a:t>0.227</a:t>
-                      </a:r>
-                    </a:p>
-                  </a:txBody>
-                  <a:tcPr/>
-                </a:tc>
-                <a:tc>
-                  <a:txBody>
-                    <a:bodyPr/>
-                    <a:lstStyle/>
-                    <a:p>
-                      <a:r>
-                        <a:rPr sz="1250" b="0">
-                          <a:latin typeface="Meiryo"/>
-                        </a:rPr>
-                        <a:t>0.180</a:t>
-                      </a:r>
-                    </a:p>
-                  </a:txBody>
-                  <a:tcPr/>
-                </a:tc>
-                <a:tc>
-                  <a:txBody>
-                    <a:bodyPr/>
-                    <a:lstStyle/>
-                    <a:p>
-                      <a:r>
-                        <a:rPr sz="1250" b="0">
-                          <a:latin typeface="Meiryo"/>
-                        </a:rPr>
-                        <a:t>0.227</a:t>
-                      </a:r>
-                    </a:p>
-                  </a:txBody>
-                  <a:tcPr/>
-                </a:tc>
-                <a:tc>
-                  <a:txBody>
-                    <a:bodyPr/>
-                    <a:lstStyle/>
-                    <a:p>
-                      <a:r>
-                        <a:rPr sz="1250" b="0">
-                          <a:latin typeface="Meiryo"/>
-                        </a:rPr>
-                        <a:t>0.180</a:t>
-                      </a:r>
-                    </a:p>
-                  </a:txBody>
-                  <a:tcPr/>
-                </a:tc>
-                <a:tc>
-                  <a:txBody>
-                    <a:bodyPr/>
-                    <a:lstStyle/>
-                    <a:p>
-                      <a:r>
-                        <a:rPr sz="1250" b="0">
-                          <a:latin typeface="Meiryo"/>
-                        </a:rPr>
-                        <a:t>0.227</a:t>
+                        <a:t>0.108 / 0.108</a:t>
                       </a:r>
                     </a:p>
                   </a:txBody>
@@ -6117,10 +6797,10 @@
                     <a:lstStyle/>
                     <a:p>
                       <a:r>
-                        <a:rPr sz="1250" b="1">
+                        <a:rPr sz="1200" b="1">
                           <a:latin typeface="Meiryo"/>
                         </a:rPr>
-                        <a:t>(random統制: 提案)</a:t>
+                        <a:t>(参考)無介入の床</a:t>
                       </a:r>
                     </a:p>
                   </a:txBody>
@@ -6132,10 +6812,10 @@
                     <a:lstStyle/>
                     <a:p>
                       <a:r>
-                        <a:rPr sz="1250" b="0">
+                        <a:rPr sz="1200" b="0">
                           <a:latin typeface="Meiryo"/>
                         </a:rPr>
-                        <a:t>0.002</a:t>
+                        <a:t>0.060* / —</a:t>
                       </a:r>
                     </a:p>
                   </a:txBody>
@@ -6147,10 +6827,10 @@
                     <a:lstStyle/>
                     <a:p>
                       <a:r>
-                        <a:rPr sz="1250" b="0">
+                        <a:rPr sz="1200" b="0">
                           <a:latin typeface="Meiryo"/>
                         </a:rPr>
-                        <a:t>0.032</a:t>
+                        <a:t>0.120* / —</a:t>
                       </a:r>
                     </a:p>
                   </a:txBody>
@@ -6162,10 +6842,10 @@
                     <a:lstStyle/>
                     <a:p>
                       <a:r>
-                        <a:rPr sz="1250" b="0">
+                        <a:rPr sz="1200" b="0">
                           <a:latin typeface="Meiryo"/>
                         </a:rPr>
-                        <a:t>0.000</a:t>
+                        <a:t>0.060* / —</a:t>
                       </a:r>
                     </a:p>
                   </a:txBody>
@@ -6177,40 +6857,10 @@
                     <a:lstStyle/>
                     <a:p>
                       <a:r>
-                        <a:rPr sz="1250" b="0">
+                        <a:rPr sz="1200" b="0">
                           <a:latin typeface="Meiryo"/>
                         </a:rPr>
-                        <a:t>0.054</a:t>
-                      </a:r>
-                    </a:p>
-                  </a:txBody>
-                  <a:tcPr/>
-                </a:tc>
-                <a:tc>
-                  <a:txBody>
-                    <a:bodyPr/>
-                    <a:lstStyle/>
-                    <a:p>
-                      <a:r>
-                        <a:rPr sz="1250" b="0">
-                          <a:latin typeface="Meiryo"/>
-                        </a:rPr>
-                        <a:t>0.002</a:t>
-                      </a:r>
-                    </a:p>
-                  </a:txBody>
-                  <a:tcPr/>
-                </a:tc>
-                <a:tc>
-                  <a:txBody>
-                    <a:bodyPr/>
-                    <a:lstStyle/>
-                    <a:p>
-                      <a:r>
-                        <a:rPr sz="1250" b="0">
-                          <a:latin typeface="Meiryo"/>
-                        </a:rPr>
-                        <a:t>0.030</a:t>
+                        <a:t>0.120* / —</a:t>
                       </a:r>
                     </a:p>
                   </a:txBody>
@@ -6249,13 +6899,13 @@
               </a:lnSpc>
             </a:pPr>
             <a:r>
-              <a:rPr sz="1400" b="0">
+              <a:rPr sz="1350" b="0">
                 <a:solidFill>
                   <a:srgbClr val="5A6472"/>
                 </a:solidFill>
                 <a:latin typeface="Meiryo"/>
               </a:rPr>
-              <a:t>・提案手法はsteer(同スペック)に6セル中5セルで勝つ(例外: L4 sup)。ampは全層で提案手法が最良の介入</a:t>
+              <a:t>・提案のL4 amp 0.172(random 0.032)は全介入手法の最高値。L4 supのみ同スペックsteerが上回る(0.108 vs 0.086)</a:t>
             </a:r>
           </a:p>
           <a:p>
@@ -6265,13 +6915,13 @@
               </a:lnSpc>
             </a:pPr>
             <a:r>
-              <a:rPr sz="1400" b="0">
+              <a:rPr sz="1350" b="0">
                 <a:solidFill>
                   <a:srgbClr val="5A6472"/>
                 </a:solidFill>
                 <a:latin typeface="Meiryo"/>
               </a:rPr>
-              <a:t>・promptingはexactでは最強だが、randomスペックでも0.06-0.09編集する(特異性がない)。提案手法のrandomは≈0</a:t>
+              <a:t>・AxBench準拠・LinguaLens準拠はどの層でもtrue≈random(=正味の効果ほぼなし)。1〜3個の番号選び+固定強度では</a:t>
             </a:r>
           </a:p>
           <a:p>
@@ -6281,13 +6931,13 @@
               </a:lnSpc>
             </a:pPr>
             <a:r>
-              <a:rPr sz="1400" b="0">
+              <a:rPr sz="1350" b="0">
                 <a:solidFill>
                   <a:srgbClr val="5A6472"/>
                 </a:solidFill>
                 <a:latin typeface="Meiryo"/>
               </a:rPr>
-              <a:t>・FIC(L12・判定済み): 消す方向 提案0.94 / steer 0.15 / prompting 0.42 — 介入としての因果効果は提案手法が圧倒</a:t>
+              <a:t>  「特定の文の特定の箇所だけ直し他を保存する」精密編集を駆動できない(考察は04§9f)</a:t>
             </a:r>
           </a:p>
           <a:p>
@@ -6297,13 +6947,13 @@
               </a:lnSpc>
             </a:pPr>
             <a:r>
-              <a:rPr sz="1400" b="0">
+              <a:rPr sz="1350" b="0">
                 <a:solidFill>
                   <a:srgbClr val="5A6472"/>
                 </a:solidFill>
                 <a:latin typeface="Meiryo"/>
               </a:rPr>
-              <a:t>  足す方向は prompting 0.49 / 提案 0.31 / steer −0.00。他層は判定進行中</a:t>
+              <a:t>・L20は全介入が弱い(提案0.036-0.048)— 深層は編集余地そのものが小さい(oracle時代から一貫)</a:t>
             </a:r>
           </a:p>
           <a:p>
@@ -6313,13 +6963,13 @@
               </a:lnSpc>
             </a:pPr>
             <a:r>
-              <a:rPr sz="1400" b="0">
+              <a:rPr sz="1350" b="0">
                 <a:solidFill>
                   <a:srgbClr val="5A6472"/>
                 </a:solidFill>
                 <a:latin typeface="Meiryo"/>
               </a:rPr>
-              <a:t>・* amp書き換え枠の素の床は0.120。LinguaLens準拠ampは全層で床相当=効果なし。AxBench準拠ampはL12のみ床+0.03</a:t>
+              <a:t>・FIC 消す方向: 提案はL4 0.85 / L20 0.85と全層で最良。*床=書き換え枠raw(復唱枠の床はcopy≈0)</a:t>
             </a:r>
           </a:p>
         </p:txBody>
@@ -6332,7 +6982,7 @@
 </p:sld>
 </file>
 
-<file path=ppt/slides/slide16.xml><?xml version="1.0" encoding="utf-8"?>
+<file path=ppt/slides/slide17.xml><?xml version="1.0" encoding="utf-8"?>
 <p:sld xmlns:a="http://schemas.openxmlformats.org/drawingml/2006/main" xmlns:p="http://schemas.openxmlformats.org/presentationml/2006/main" xmlns:r="http://schemas.openxmlformats.org/officeDocument/2006/relationships">
   <p:cSld>
     <p:spTree>
@@ -6904,7 +7554,7 @@
 </p:sld>
 </file>
 
-<file path=ppt/slides/slide17.xml><?xml version="1.0" encoding="utf-8"?>
+<file path=ppt/slides/slide18.xml><?xml version="1.0" encoding="utf-8"?>
 <p:sld xmlns:a="http://schemas.openxmlformats.org/drawingml/2006/main" xmlns:p="http://schemas.openxmlformats.org/presentationml/2006/main" xmlns:r="http://schemas.openxmlformats.org/officeDocument/2006/relationships">
   <p:cSld>
     <p:spTree>

--- a/slides/20260722_progress.pptx
+++ b/slides/20260722_progress.pptx
@@ -23,6 +23,7 @@
     <p:sldId id="271" r:id="rId22"/>
     <p:sldId id="272" r:id="rId23"/>
     <p:sldId id="273" r:id="rId24"/>
+    <p:sldId id="274" r:id="rId25"/>
   </p:sldIdLst>
   <p:sldSz cx="12191695" cy="6858000" type="screen4x3"/>
   <p:notesSz cx="6858000" cy="9144000"/>
@@ -7069,6 +7070,781 @@
                 </a:solidFill>
                 <a:latin typeface="Meiryo"/>
               </a:rPr>
+              <a:t>実験結果 3/3 — FIC(特徴が本当に動いたか、gpt-4o判定)</a:t>
+            </a:r>
+          </a:p>
+        </p:txBody>
+      </p:sp>
+      <p:sp>
+        <p:nvSpPr>
+          <p:cNvPr id="4" name="TextBox 3"/>
+          <p:cNvSpPr txBox="1"/>
+          <p:nvPr/>
+        </p:nvSpPr>
+        <p:spPr>
+          <a:xfrm>
+            <a:off x="502920" y="1051560"/>
+            <a:ext cx="11247120" cy="594360"/>
+          </a:xfrm>
+          <a:prstGeom prst="rect">
+            <a:avLst/>
+          </a:prstGeom>
+          <a:noFill/>
+        </p:spPr>
+        <p:txBody>
+          <a:bodyPr wrap="square">
+            <a:spAutoFit/>
+          </a:bodyPr>
+          <a:lstStyle/>
+          <a:p>
+            <a:pPr algn="l">
+              <a:lnSpc>
+                <a:spcPct val="115000"/>
+              </a:lnSpc>
+            </a:pPr>
+            <a:r>
+              <a:rPr sz="1400" b="0">
+                <a:solidFill>
+                  <a:srgbClr val="5A6472"/>
+                </a:solidFill>
+                <a:latin typeface="Meiryo"/>
+              </a:rPr>
+              <a:t>介入ありの生成を無介入と比べ、対象特徴が「より少ない(消す方向)/より多い(足す方向)」と判定された正味の割合。介入の因果効果を直接測る、本研究の主眼の指標。</a:t>
+            </a:r>
+          </a:p>
+        </p:txBody>
+      </p:sp>
+      <p:graphicFrame>
+        <p:nvGraphicFramePr>
+          <p:cNvPr id="5" name="Table 4"/>
+          <p:cNvGraphicFramePr>
+            <a:graphicFrameLocks noGrp="1"/>
+          </p:cNvGraphicFramePr>
+          <p:nvPr/>
+        </p:nvGraphicFramePr>
+        <p:xfrm>
+          <a:off x="502920" y="1783080"/>
+          <a:ext cx="11155680" cy="3017520"/>
+        </p:xfrm>
+        <a:graphic>
+          <a:graphicData uri="http://schemas.openxmlformats.org/drawingml/2006/table">
+            <a:tbl>
+              <a:tblPr firstRow="1" bandRow="1">
+                <a:tableStyleId>{5C22544A-7EE6-4342-B048-85BDC9FD1C3A}</a:tableStyleId>
+              </a:tblPr>
+              <a:tblGrid>
+                <a:gridCol w="2231136"/>
+                <a:gridCol w="2231136"/>
+                <a:gridCol w="2231136"/>
+                <a:gridCol w="2231136"/>
+                <a:gridCol w="2231136"/>
+              </a:tblGrid>
+              <a:tr h="431074">
+                <a:tc>
+                  <a:txBody>
+                    <a:bodyPr/>
+                    <a:lstStyle/>
+                    <a:p>
+                      <a:r>
+                        <a:rPr sz="1300" b="1">
+                          <a:latin typeface="Meiryo"/>
+                        </a:rPr>
+                        <a:t>手法(消す/足す)</a:t>
+                      </a:r>
+                    </a:p>
+                  </a:txBody>
+                  <a:tcPr/>
+                </a:tc>
+                <a:tc>
+                  <a:txBody>
+                    <a:bodyPr/>
+                    <a:lstStyle/>
+                    <a:p>
+                      <a:r>
+                        <a:rPr sz="1300" b="1">
+                          <a:latin typeface="Meiryo"/>
+                        </a:rPr>
+                        <a:t>L4</a:t>
+                      </a:r>
+                    </a:p>
+                  </a:txBody>
+                  <a:tcPr/>
+                </a:tc>
+                <a:tc>
+                  <a:txBody>
+                    <a:bodyPr/>
+                    <a:lstStyle/>
+                    <a:p>
+                      <a:r>
+                        <a:rPr sz="1300" b="1">
+                          <a:latin typeface="Meiryo"/>
+                        </a:rPr>
+                        <a:t>L12</a:t>
+                      </a:r>
+                    </a:p>
+                  </a:txBody>
+                  <a:tcPr/>
+                </a:tc>
+                <a:tc>
+                  <a:txBody>
+                    <a:bodyPr/>
+                    <a:lstStyle/>
+                    <a:p>
+                      <a:r>
+                        <a:rPr sz="1300" b="1">
+                          <a:latin typeface="Meiryo"/>
+                        </a:rPr>
+                        <a:t>L20</a:t>
+                      </a:r>
+                    </a:p>
+                  </a:txBody>
+                  <a:tcPr/>
+                </a:tc>
+                <a:tc>
+                  <a:txBody>
+                    <a:bodyPr/>
+                    <a:lstStyle/>
+                    <a:p>
+                      <a:r>
+                        <a:rPr sz="1300" b="1">
+                          <a:latin typeface="Meiryo"/>
+                        </a:rPr>
+                        <a:t>まとめ</a:t>
+                      </a:r>
+                    </a:p>
+                  </a:txBody>
+                  <a:tcPr/>
+                </a:tc>
+              </a:tr>
+              <a:tr h="431074">
+                <a:tc>
+                  <a:txBody>
+                    <a:bodyPr/>
+                    <a:lstStyle/>
+                    <a:p>
+                      <a:r>
+                        <a:rPr sz="1250" b="1">
+                          <a:latin typeface="Meiryo"/>
+                        </a:rPr>
+                        <a:t>提案手法</a:t>
+                      </a:r>
+                    </a:p>
+                  </a:txBody>
+                  <a:tcPr/>
+                </a:tc>
+                <a:tc>
+                  <a:txBody>
+                    <a:bodyPr/>
+                    <a:lstStyle/>
+                    <a:p>
+                      <a:r>
+                        <a:rPr sz="1250" b="0">
+                          <a:latin typeface="Meiryo"/>
+                        </a:rPr>
+                        <a:t>0.85 / 0.40</a:t>
+                      </a:r>
+                    </a:p>
+                  </a:txBody>
+                  <a:tcPr/>
+                </a:tc>
+                <a:tc>
+                  <a:txBody>
+                    <a:bodyPr/>
+                    <a:lstStyle/>
+                    <a:p>
+                      <a:r>
+                        <a:rPr sz="1250" b="0">
+                          <a:latin typeface="Meiryo"/>
+                        </a:rPr>
+                        <a:t>0.94 / 0.31</a:t>
+                      </a:r>
+                    </a:p>
+                  </a:txBody>
+                  <a:tcPr/>
+                </a:tc>
+                <a:tc>
+                  <a:txBody>
+                    <a:bodyPr/>
+                    <a:lstStyle/>
+                    <a:p>
+                      <a:r>
+                        <a:rPr sz="1250" b="0">
+                          <a:latin typeface="Meiryo"/>
+                        </a:rPr>
+                        <a:t>0.85 / 0.03</a:t>
+                      </a:r>
+                    </a:p>
+                  </a:txBody>
+                  <a:tcPr/>
+                </a:tc>
+                <a:tc>
+                  <a:txBody>
+                    <a:bodyPr/>
+                    <a:lstStyle/>
+                    <a:p>
+                      <a:r>
+                        <a:rPr sz="1250" b="0">
+                          <a:latin typeface="Meiryo"/>
+                        </a:rPr>
+                        <a:t>消す方向は全層最良</a:t>
+                      </a:r>
+                    </a:p>
+                  </a:txBody>
+                  <a:tcPr/>
+                </a:tc>
+              </a:tr>
+              <a:tr h="431074">
+                <a:tc>
+                  <a:txBody>
+                    <a:bodyPr/>
+                    <a:lstStyle/>
+                    <a:p>
+                      <a:r>
+                        <a:rPr sz="1250" b="1">
+                          <a:latin typeface="Meiryo"/>
+                        </a:rPr>
+                        <a:t>steer(同スペック)※</a:t>
+                      </a:r>
+                    </a:p>
+                  </a:txBody>
+                  <a:tcPr/>
+                </a:tc>
+                <a:tc>
+                  <a:txBody>
+                    <a:bodyPr/>
+                    <a:lstStyle/>
+                    <a:p>
+                      <a:r>
+                        <a:rPr sz="1250" b="0">
+                          <a:latin typeface="Meiryo"/>
+                        </a:rPr>
+                        <a:t>0.25 / −0.06</a:t>
+                      </a:r>
+                    </a:p>
+                  </a:txBody>
+                  <a:tcPr/>
+                </a:tc>
+                <a:tc>
+                  <a:txBody>
+                    <a:bodyPr/>
+                    <a:lstStyle/>
+                    <a:p>
+                      <a:r>
+                        <a:rPr sz="1250" b="0">
+                          <a:latin typeface="Meiryo"/>
+                        </a:rPr>
+                        <a:t>0.15 / −0.00</a:t>
+                      </a:r>
+                    </a:p>
+                  </a:txBody>
+                  <a:tcPr/>
+                </a:tc>
+                <a:tc>
+                  <a:txBody>
+                    <a:bodyPr/>
+                    <a:lstStyle/>
+                    <a:p>
+                      <a:r>
+                        <a:rPr sz="1250" b="0">
+                          <a:latin typeface="Meiryo"/>
+                        </a:rPr>
+                        <a:t>0.84 / 0.21</a:t>
+                      </a:r>
+                    </a:p>
+                  </a:txBody>
+                  <a:tcPr/>
+                </a:tc>
+                <a:tc>
+                  <a:txBody>
+                    <a:bodyPr/>
+                    <a:lstStyle/>
+                    <a:p>
+                      <a:r>
+                        <a:rPr sz="1250" b="0">
+                          <a:latin typeface="Meiryo"/>
+                        </a:rPr>
+                        <a:t>L20以外は弱い</a:t>
+                      </a:r>
+                    </a:p>
+                  </a:txBody>
+                  <a:tcPr/>
+                </a:tc>
+              </a:tr>
+              <a:tr h="431074">
+                <a:tc>
+                  <a:txBody>
+                    <a:bodyPr/>
+                    <a:lstStyle/>
+                    <a:p>
+                      <a:r>
+                        <a:rPr sz="1250" b="1">
+                          <a:latin typeface="Meiryo"/>
+                        </a:rPr>
+                        <a:t>prompting(層共通)</a:t>
+                      </a:r>
+                    </a:p>
+                  </a:txBody>
+                  <a:tcPr/>
+                </a:tc>
+                <a:tc>
+                  <a:txBody>
+                    <a:bodyPr/>
+                    <a:lstStyle/>
+                    <a:p>
+                      <a:r>
+                        <a:rPr sz="1250" b="0">
+                          <a:latin typeface="Meiryo"/>
+                        </a:rPr>
+                        <a:t>0.42 / 0.49</a:t>
+                      </a:r>
+                    </a:p>
+                  </a:txBody>
+                  <a:tcPr/>
+                </a:tc>
+                <a:tc>
+                  <a:txBody>
+                    <a:bodyPr/>
+                    <a:lstStyle/>
+                    <a:p>
+                      <a:r>
+                        <a:rPr sz="1250" b="0">
+                          <a:latin typeface="Meiryo"/>
+                        </a:rPr>
+                        <a:t>0.42 / 0.49</a:t>
+                      </a:r>
+                    </a:p>
+                  </a:txBody>
+                  <a:tcPr/>
+                </a:tc>
+                <a:tc>
+                  <a:txBody>
+                    <a:bodyPr/>
+                    <a:lstStyle/>
+                    <a:p>
+                      <a:r>
+                        <a:rPr sz="1250" b="0">
+                          <a:latin typeface="Meiryo"/>
+                        </a:rPr>
+                        <a:t>0.42 / 0.49</a:t>
+                      </a:r>
+                    </a:p>
+                  </a:txBody>
+                  <a:tcPr/>
+                </a:tc>
+                <a:tc>
+                  <a:txBody>
+                    <a:bodyPr/>
+                    <a:lstStyle/>
+                    <a:p>
+                      <a:r>
+                        <a:rPr sz="1250" b="0">
+                          <a:latin typeface="Meiryo"/>
+                        </a:rPr>
+                        <a:t>足す方向の最良</a:t>
+                      </a:r>
+                    </a:p>
+                  </a:txBody>
+                  <a:tcPr/>
+                </a:tc>
+              </a:tr>
+              <a:tr h="431074">
+                <a:tc>
+                  <a:txBody>
+                    <a:bodyPr/>
+                    <a:lstStyle/>
+                    <a:p>
+                      <a:r>
+                        <a:rPr sz="1250" b="1">
+                          <a:latin typeface="Meiryo"/>
+                        </a:rPr>
+                        <a:t>LinguaLens準拠</a:t>
+                      </a:r>
+                    </a:p>
+                  </a:txBody>
+                  <a:tcPr/>
+                </a:tc>
+                <a:tc>
+                  <a:txBody>
+                    <a:bodyPr/>
+                    <a:lstStyle/>
+                    <a:p>
+                      <a:r>
+                        <a:rPr sz="1250" b="0">
+                          <a:latin typeface="Meiryo"/>
+                        </a:rPr>
+                        <a:t>0.10 / −0.07</a:t>
+                      </a:r>
+                    </a:p>
+                  </a:txBody>
+                  <a:tcPr/>
+                </a:tc>
+                <a:tc>
+                  <a:txBody>
+                    <a:bodyPr/>
+                    <a:lstStyle/>
+                    <a:p>
+                      <a:r>
+                        <a:rPr sz="1250" b="0">
+                          <a:latin typeface="Meiryo"/>
+                        </a:rPr>
+                        <a:t>0.08 / −0.07</a:t>
+                      </a:r>
+                    </a:p>
+                  </a:txBody>
+                  <a:tcPr/>
+                </a:tc>
+                <a:tc>
+                  <a:txBody>
+                    <a:bodyPr/>
+                    <a:lstStyle/>
+                    <a:p>
+                      <a:r>
+                        <a:rPr sz="1250" b="0">
+                          <a:latin typeface="Meiryo"/>
+                        </a:rPr>
+                        <a:t>−0.05 / −0.04</a:t>
+                      </a:r>
+                    </a:p>
+                  </a:txBody>
+                  <a:tcPr/>
+                </a:tc>
+                <a:tc>
+                  <a:txBody>
+                    <a:bodyPr/>
+                    <a:lstStyle/>
+                    <a:p>
+                      <a:r>
+                        <a:rPr sz="1250" b="0">
+                          <a:latin typeface="Meiryo"/>
+                        </a:rPr>
+                        <a:t>全セルほぼゼロ</a:t>
+                      </a:r>
+                    </a:p>
+                  </a:txBody>
+                  <a:tcPr/>
+                </a:tc>
+              </a:tr>
+              <a:tr h="431074">
+                <a:tc>
+                  <a:txBody>
+                    <a:bodyPr/>
+                    <a:lstStyle/>
+                    <a:p>
+                      <a:r>
+                        <a:rPr sz="1250" b="1">
+                          <a:latin typeface="Meiryo"/>
+                        </a:rPr>
+                        <a:t>AxBench準拠</a:t>
+                      </a:r>
+                    </a:p>
+                  </a:txBody>
+                  <a:tcPr/>
+                </a:tc>
+                <a:tc>
+                  <a:txBody>
+                    <a:bodyPr/>
+                    <a:lstStyle/>
+                    <a:p>
+                      <a:r>
+                        <a:rPr sz="1250" b="0">
+                          <a:latin typeface="Meiryo"/>
+                        </a:rPr>
+                        <a:t>判定中</a:t>
+                      </a:r>
+                    </a:p>
+                  </a:txBody>
+                  <a:tcPr/>
+                </a:tc>
+                <a:tc>
+                  <a:txBody>
+                    <a:bodyPr/>
+                    <a:lstStyle/>
+                    <a:p>
+                      <a:r>
+                        <a:rPr sz="1250" b="0">
+                          <a:latin typeface="Meiryo"/>
+                        </a:rPr>
+                        <a:t>判定中</a:t>
+                      </a:r>
+                    </a:p>
+                  </a:txBody>
+                  <a:tcPr/>
+                </a:tc>
+                <a:tc>
+                  <a:txBody>
+                    <a:bodyPr/>
+                    <a:lstStyle/>
+                    <a:p>
+                      <a:r>
+                        <a:rPr sz="1250" b="0">
+                          <a:latin typeface="Meiryo"/>
+                        </a:rPr>
+                        <a:t>判定中</a:t>
+                      </a:r>
+                    </a:p>
+                  </a:txBody>
+                  <a:tcPr/>
+                </a:tc>
+                <a:tc>
+                  <a:txBody>
+                    <a:bodyPr/>
+                    <a:lstStyle/>
+                    <a:p>
+                      <a:r>
+                        <a:rPr sz="1250" b="0">
+                          <a:latin typeface="Meiryo"/>
+                        </a:rPr>
+                        <a:t>追って判定</a:t>
+                      </a:r>
+                    </a:p>
+                  </a:txBody>
+                  <a:tcPr/>
+                </a:tc>
+              </a:tr>
+              <a:tr h="431076">
+                <a:tc>
+                  <a:txBody>
+                    <a:bodyPr/>
+                    <a:lstStyle/>
+                    <a:p/>
+                  </a:txBody>
+                  <a:tcPr/>
+                </a:tc>
+                <a:tc>
+                  <a:txBody>
+                    <a:bodyPr/>
+                    <a:lstStyle/>
+                    <a:p/>
+                  </a:txBody>
+                  <a:tcPr/>
+                </a:tc>
+                <a:tc>
+                  <a:txBody>
+                    <a:bodyPr/>
+                    <a:lstStyle/>
+                    <a:p/>
+                  </a:txBody>
+                  <a:tcPr/>
+                </a:tc>
+                <a:tc>
+                  <a:txBody>
+                    <a:bodyPr/>
+                    <a:lstStyle/>
+                    <a:p/>
+                  </a:txBody>
+                  <a:tcPr/>
+                </a:tc>
+                <a:tc>
+                  <a:txBody>
+                    <a:bodyPr/>
+                    <a:lstStyle/>
+                    <a:p/>
+                  </a:txBody>
+                  <a:tcPr/>
+                </a:tc>
+              </a:tr>
+            </a:tbl>
+          </a:graphicData>
+        </a:graphic>
+      </p:graphicFrame>
+      <p:sp>
+        <p:nvSpPr>
+          <p:cNvPr id="6" name="TextBox 5"/>
+          <p:cNvSpPr txBox="1"/>
+          <p:nvPr/>
+        </p:nvSpPr>
+        <p:spPr>
+          <a:xfrm>
+            <a:off x="502920" y="4983480"/>
+            <a:ext cx="11247120" cy="1554480"/>
+          </a:xfrm>
+          <a:prstGeom prst="rect">
+            <a:avLst/>
+          </a:prstGeom>
+          <a:noFill/>
+        </p:spPr>
+        <p:txBody>
+          <a:bodyPr wrap="square">
+            <a:spAutoFit/>
+          </a:bodyPr>
+          <a:lstStyle/>
+          <a:p>
+            <a:pPr algn="l">
+              <a:lnSpc>
+                <a:spcPct val="115000"/>
+              </a:lnSpc>
+            </a:pPr>
+            <a:r>
+              <a:rPr sz="1350" b="0">
+                <a:solidFill>
+                  <a:srgbClr val="5A6472"/>
+                </a:solidFill>
+                <a:latin typeface="Meiryo"/>
+              </a:rPr>
+              <a:t>・消す方向: 提案 0.85-0.94 で全層最良 — exactの差(1〜2割)より桁違いに大きい因果効果差</a:t>
+            </a:r>
+          </a:p>
+          <a:p>
+            <a:pPr algn="l">
+              <a:lnSpc>
+                <a:spcPct val="115000"/>
+              </a:lnSpc>
+            </a:pPr>
+            <a:r>
+              <a:rPr sz="1350" b="0">
+                <a:solidFill>
+                  <a:srgbClr val="5A6472"/>
+                </a:solidFill>
+                <a:latin typeface="Meiryo"/>
+              </a:rPr>
+              <a:t>・LinguaLens準拠(彼らの介入そのもの)は全セルほぼゼロ — 「単発介入は力不足」という彼ら自身の課題認識を追認</a:t>
+            </a:r>
+          </a:p>
+          <a:p>
+            <a:pPr algn="l">
+              <a:lnSpc>
+                <a:spcPct val="115000"/>
+              </a:lnSpc>
+            </a:pPr>
+            <a:r>
+              <a:rPr sz="1350" b="0">
+                <a:solidFill>
+                  <a:srgbClr val="5A6472"/>
+                </a:solidFill>
+                <a:latin typeface="Meiryo"/>
+              </a:rPr>
+              <a:t>・提案の弱点も明確: L20の足す方向 0.03(steer 0.21に劣る)— 深層amp が改善対象</a:t>
+            </a:r>
+          </a:p>
+          <a:p>
+            <a:pPr algn="l">
+              <a:lnSpc>
+                <a:spcPct val="115000"/>
+              </a:lnSpc>
+            </a:pPr>
+            <a:r>
+              <a:rPr sz="1350" b="0">
+                <a:solidFill>
+                  <a:srgbClr val="5A6472"/>
+                </a:solidFill>
+                <a:latin typeface="Meiryo"/>
+              </a:rPr>
+              <a:t>・※steerは較正前記録による暫定値(較正済み記録の再判定を実行中)。promptingはexact同様「誤指定でも動く」ため</a:t>
+            </a:r>
+          </a:p>
+          <a:p>
+            <a:pPr algn="l">
+              <a:lnSpc>
+                <a:spcPct val="115000"/>
+              </a:lnSpc>
+            </a:pPr>
+            <a:r>
+              <a:rPr sz="1350" b="0">
+                <a:solidFill>
+                  <a:srgbClr val="5A6472"/>
+                </a:solidFill>
+                <a:latin typeface="Meiryo"/>
+              </a:rPr>
+              <a:t>  この表の値は正しい指定時のもの — 特異性の弱さはFICの定義上すでに減点済み(それでも足す方向は最良)</a:t>
+            </a:r>
+          </a:p>
+        </p:txBody>
+      </p:sp>
+    </p:spTree>
+  </p:cSld>
+  <p:clrMapOvr>
+    <a:masterClrMapping/>
+  </p:clrMapOvr>
+</p:sld>
+</file>
+
+<file path=ppt/slides/slide18.xml><?xml version="1.0" encoding="utf-8"?>
+<p:sld xmlns:a="http://schemas.openxmlformats.org/drawingml/2006/main" xmlns:p="http://schemas.openxmlformats.org/presentationml/2006/main" xmlns:r="http://schemas.openxmlformats.org/officeDocument/2006/relationships">
+  <p:cSld>
+    <p:spTree>
+      <p:nvGrpSpPr>
+        <p:cNvPr id="1" name=""/>
+        <p:cNvGrpSpPr/>
+        <p:nvPr/>
+      </p:nvGrpSpPr>
+      <p:grpSpPr/>
+      <p:sp>
+        <p:nvSpPr>
+          <p:cNvPr id="2" name="Rectangle 1"/>
+          <p:cNvSpPr/>
+          <p:nvPr/>
+        </p:nvSpPr>
+        <p:spPr>
+          <a:xfrm>
+            <a:off x="0" y="0"/>
+            <a:ext cx="12191695" cy="146304"/>
+          </a:xfrm>
+          <a:prstGeom prst="rect">
+            <a:avLst/>
+          </a:prstGeom>
+          <a:solidFill>
+            <a:srgbClr val="0E7C66"/>
+          </a:solidFill>
+          <a:ln>
+            <a:noFill/>
+          </a:ln>
+        </p:spPr>
+        <p:style>
+          <a:lnRef idx="1">
+            <a:schemeClr val="accent1"/>
+          </a:lnRef>
+          <a:fillRef idx="3">
+            <a:schemeClr val="accent1"/>
+          </a:fillRef>
+          <a:effectRef idx="2">
+            <a:schemeClr val="accent1"/>
+          </a:effectRef>
+          <a:fontRef idx="minor">
+            <a:schemeClr val="lt1"/>
+          </a:fontRef>
+        </p:style>
+        <p:txBody>
+          <a:bodyPr rtlCol="0" anchor="ctr"/>
+          <a:lstStyle/>
+          <a:p>
+            <a:pPr algn="ctr"/>
+          </a:p>
+        </p:txBody>
+      </p:sp>
+      <p:sp>
+        <p:nvSpPr>
+          <p:cNvPr id="3" name="TextBox 2"/>
+          <p:cNvSpPr txBox="1"/>
+          <p:nvPr/>
+        </p:nvSpPr>
+        <p:spPr>
+          <a:xfrm>
+            <a:off x="502920" y="256032"/>
+            <a:ext cx="11247120" cy="731520"/>
+          </a:xfrm>
+          <a:prstGeom prst="rect">
+            <a:avLst/>
+          </a:prstGeom>
+          <a:noFill/>
+        </p:spPr>
+        <p:txBody>
+          <a:bodyPr wrap="square">
+            <a:spAutoFit/>
+          </a:bodyPr>
+          <a:lstStyle/>
+          <a:p>
+            <a:pPr algn="l">
+              <a:lnSpc>
+                <a:spcPct val="115000"/>
+              </a:lnSpc>
+            </a:pPr>
+            <a:r>
+              <a:rPr sz="2700" b="1">
+                <a:solidFill>
+                  <a:srgbClr val="22272E"/>
+                </a:solidFill>
+                <a:latin typeface="Meiryo"/>
+              </a:rPr>
               <a:t>失敗例 — promptingのFICはなぜ低いか</a:t>
             </a:r>
           </a:p>
@@ -7554,7 +8330,7 @@
 </p:sld>
 </file>
 
-<file path=ppt/slides/slide18.xml><?xml version="1.0" encoding="utf-8"?>
+<file path=ppt/slides/slide19.xml><?xml version="1.0" encoding="utf-8"?>
 <p:sld xmlns:a="http://schemas.openxmlformats.org/drawingml/2006/main" xmlns:p="http://schemas.openxmlformats.org/presentationml/2006/main" xmlns:r="http://schemas.openxmlformats.org/officeDocument/2006/relationships">
   <p:cSld>
     <p:spTree>

--- a/slides/20260722_progress.pptx
+++ b/slides/20260722_progress.pptx
@@ -9155,6 +9155,72 @@
                 </a:solidFill>
                 <a:latin typeface="Meiryo"/>
               </a:rPr>
+              <a:t>扱うタスク: </a:t>
+            </a:r>
+            <a:r>
+              <a:rPr sz="1800">
+                <a:solidFill>
+                  <a:srgbClr val="22272E"/>
+                </a:solidFill>
+                <a:latin typeface="Meiryo"/>
+              </a:rPr>
+              <a:t>500概念(Gemma-2 2B/9B)を対象にした2つのベンチマーク</a:t>
+            </a:r>
+          </a:p>
+          <a:p>
+            <a:pPr lvl="1">
+              <a:lnSpc>
+                <a:spcPct val="116000"/>
+              </a:lnSpc>
+              <a:spcAft>
+                <a:spcPts val="800"/>
+              </a:spcAft>
+            </a:pPr>
+            <a:r>
+              <a:rPr sz="1600">
+                <a:solidFill>
+                  <a:srgbClr val="5A6472"/>
+                </a:solidFill>
+                <a:latin typeface="Meiryo"/>
+              </a:rPr>
+              <a:t>① 概念の検出 — モデル内部の活性から「テキストにその概念が含まれるか」を当てる(AUROC評価)</a:t>
+            </a:r>
+          </a:p>
+          <a:p>
+            <a:pPr lvl="1">
+              <a:lnSpc>
+                <a:spcPct val="116000"/>
+              </a:lnSpc>
+              <a:spcAft>
+                <a:spcPts val="800"/>
+              </a:spcAft>
+            </a:pPr>
+            <a:r>
+              <a:rPr sz="1600">
+                <a:solidFill>
+                  <a:srgbClr val="5A6472"/>
+                </a:solidFill>
+                <a:latin typeface="Meiryo"/>
+              </a:rPr>
+              <a:t>② 概念の操舵(steering) — 一般の指示への応答に目標概念を混ぜ込ませる。gpt-4o-miniが「概念が入ったか・指示に答えているか・流暢か」の3観点で採点</a:t>
+            </a:r>
+          </a:p>
+          <a:p>
+            <a:pPr>
+              <a:lnSpc>
+                <a:spcPct val="116000"/>
+              </a:lnSpc>
+              <a:spcAft>
+                <a:spcPts val="800"/>
+              </a:spcAft>
+            </a:pPr>
+            <a:r>
+              <a:rPr sz="1800" b="1">
+                <a:solidFill>
+                  <a:srgbClr val="0E7C66"/>
+                </a:solidFill>
+                <a:latin typeface="Meiryo"/>
+              </a:rPr>
               <a:t>結論が重要: </a:t>
             </a:r>
             <a:r>
@@ -9164,7 +9230,7 @@
                 </a:solidFill>
                 <a:latin typeface="Meiryo"/>
               </a:rPr>
-              <a:t>概念操舵(steering)の大規模ベンチマークで、既存のSAE介入(特徴を選んで加算)は「指示文で頼むだけのprompting」に勝てない、と報告</a:t>
+              <a:t>操舵タスクで、既存のSAE介入(特徴を選んで加算)は「指示文で頼むだけのprompting」に勝てない、と報告(検出は得意でも操舵は別能力)</a:t>
             </a:r>
           </a:p>
           <a:p>

--- a/slides/20260722_progress.pptx
+++ b/slides/20260722_progress.pptx
@@ -4198,7 +4198,7 @@
                         <a:rPr sz="1300" b="1">
                           <a:latin typeface="Meiryo"/>
                         </a:rPr>
-                        <a:t>steer(同スペック加算)</a:t>
+                        <a:t>ベクトル注入 steer(同スペック)</a:t>
                       </a:r>
                     </a:p>
                   </a:txBody>
@@ -4292,7 +4292,7 @@
                         <a:rPr sz="1300" b="1">
                           <a:latin typeface="Meiryo"/>
                         </a:rPr>
-                        <a:t>AxBench準拠 steer</a:t>
+                        <a:t>AxBench準拠ベクトル注入</a:t>
                       </a:r>
                     </a:p>
                   </a:txBody>
@@ -4414,7 +4414,7 @@
                 </a:solidFill>
                 <a:latin typeface="Meiryo"/>
               </a:rPr>
-              <a:t>介入の強さ(スケール/係数)は各手法とも、評価500ペアに触れない開発用サンプル(同定プール内)で較正。</a:t>
+              <a:t>介入の強さ(スケール/係数)は各手法とも、評価500ペアに触れない開発用サンプル(同定プール内)で較正。以降の表の「steer」=ベクトル注入の略記。</a:t>
             </a:r>
           </a:p>
         </p:txBody>
@@ -9202,7 +9202,7 @@
                 </a:solidFill>
                 <a:latin typeface="Meiryo"/>
               </a:rPr>
-              <a:t>② 概念の操舵(steering) — 一般の指示への応答に目標概念を混ぜ込ませる。gpt-4o-miniが「概念が入ったか・指示に答えているか・流暢か」の3観点で採点</a:t>
+              <a:t>② 概念の誘導(steering) — 一般の指示への応答に目標概念を混ぜ込ませる(手法はベクトル注入・prompting・fine-tuning等)。gpt-4o-miniが「概念が入ったか・指示に答えているか・流暢か」の3観点で採点</a:t>
             </a:r>
           </a:p>
           <a:p>
@@ -9230,7 +9230,7 @@
                 </a:solidFill>
                 <a:latin typeface="Meiryo"/>
               </a:rPr>
-              <a:t>操舵タスクで、既存のSAE介入(特徴を選んで加算)は「指示文で頼むだけのprompting」に勝てない、と報告(検出は得意でも操舵は別能力)</a:t>
+              <a:t>誘導タスクで、既存のSAEベクトル注入(特徴を選んで加算)は「指示文で頼むだけのprompting」に勝てない、と報告(検出は得意でも誘導は別能力)</a:t>
             </a:r>
           </a:p>
           <a:p>

--- a/slides/20260722_progress.pptx
+++ b/slides/20260722_progress.pptx
@@ -6031,7 +6031,7 @@
                         <a:rPr sz="1250" b="1">
                           <a:latin typeface="Meiryo"/>
                         </a:rPr>
-                        <a:t>(参考)無介入の床</a:t>
+                        <a:t>(参考)素のrewrite(無介入の床)</a:t>
                       </a:r>
                     </a:p>
                   </a:txBody>
@@ -6046,7 +6046,7 @@
                         <a:rPr sz="1250" b="0">
                           <a:latin typeface="Meiryo"/>
                         </a:rPr>
-                        <a:t>0.060*</a:t>
+                        <a:t>0.060</a:t>
                       </a:r>
                     </a:p>
                   </a:txBody>
@@ -6076,7 +6076,7 @@
                         <a:rPr sz="1250" b="0">
                           <a:latin typeface="Meiryo"/>
                         </a:rPr>
-                        <a:t>0.120*</a:t>
+                        <a:t>0.120</a:t>
                       </a:r>
                     </a:p>
                   </a:txBody>
@@ -6106,7 +6106,7 @@
                         <a:rPr sz="1250" b="0">
                           <a:latin typeface="Meiryo"/>
                         </a:rPr>
-                        <a:t>*書き換え枠のraw</a:t>
+                        <a:t>特徴情報なしの書き換えだけ</a:t>
                       </a:r>
                     </a:p>
                   </a:txBody>
@@ -6138,6 +6138,38 @@
             <a:spAutoFit/>
           </a:bodyPr>
           <a:lstStyle/>
+          <a:p>
+            <a:pPr algn="l">
+              <a:lnSpc>
+                <a:spcPct val="115000"/>
+              </a:lnSpc>
+            </a:pPr>
+            <a:r>
+              <a:rPr sz="1400" b="0">
+                <a:solidFill>
+                  <a:srgbClr val="5A6472"/>
+                </a:solidFill>
+                <a:latin typeface="Meiryo"/>
+              </a:rPr>
+              <a:t>・プロンプト枠: 提案・steer=復唱枠(床copy≈0)/ LinguaLens準拠・AxBench準拠=書き換え枠(床=素のrewrite行)。</a:t>
+            </a:r>
+          </a:p>
+          <a:p>
+            <a:pPr algn="l">
+              <a:lnSpc>
+                <a:spcPct val="115000"/>
+              </a:lnSpc>
+            </a:pPr>
+            <a:r>
+              <a:rPr sz="1400" b="0">
+                <a:solidFill>
+                  <a:srgbClr val="5A6472"/>
+                </a:solidFill>
+                <a:latin typeface="Meiryo"/>
+              </a:rPr>
+              <a:t>  枠が違う行の直接比較は不可 — 各行は自分の枠の床・randomとの差で読む</a:t>
+            </a:r>
+          </a:p>
           <a:p>
             <a:pPr algn="l">
               <a:lnSpc>
@@ -6801,7 +6833,7 @@
                         <a:rPr sz="1200" b="1">
                           <a:latin typeface="Meiryo"/>
                         </a:rPr>
-                        <a:t>(参考)無介入の床</a:t>
+                        <a:t>(参考)素のrewrite(無介入の床)</a:t>
                       </a:r>
                     </a:p>
                   </a:txBody>
@@ -6816,7 +6848,7 @@
                         <a:rPr sz="1200" b="0">
                           <a:latin typeface="Meiryo"/>
                         </a:rPr>
-                        <a:t>0.060* / —</a:t>
+                        <a:t>0.060 / —</a:t>
                       </a:r>
                     </a:p>
                   </a:txBody>
@@ -6831,7 +6863,7 @@
                         <a:rPr sz="1200" b="0">
                           <a:latin typeface="Meiryo"/>
                         </a:rPr>
-                        <a:t>0.120* / —</a:t>
+                        <a:t>0.120 / —</a:t>
                       </a:r>
                     </a:p>
                   </a:txBody>
@@ -6846,7 +6878,7 @@
                         <a:rPr sz="1200" b="0">
                           <a:latin typeface="Meiryo"/>
                         </a:rPr>
-                        <a:t>0.060* / —</a:t>
+                        <a:t>0.060 / —</a:t>
                       </a:r>
                     </a:p>
                   </a:txBody>
@@ -6861,7 +6893,7 @@
                         <a:rPr sz="1200" b="0">
                           <a:latin typeface="Meiryo"/>
                         </a:rPr>
-                        <a:t>0.120* / —</a:t>
+                        <a:t>0.120 / —</a:t>
                       </a:r>
                     </a:p>
                   </a:txBody>
@@ -6970,7 +7002,23 @@
                 </a:solidFill>
                 <a:latin typeface="Meiryo"/>
               </a:rPr>
-              <a:t>・FIC 消す方向: 提案はL4 0.85 / L20 0.85と全層で最良。*床=書き換え枠raw(復唱枠の床はcopy≈0)</a:t>
+              <a:t>・プロンプト枠: 提案・steer=復唱枠(床copy≈0)/ LL準拠・AxB準拠=書き換え枠(床=素のrewrite行)— 行間の直接比較不可</a:t>
+            </a:r>
+          </a:p>
+          <a:p>
+            <a:pPr algn="l">
+              <a:lnSpc>
+                <a:spcPct val="115000"/>
+              </a:lnSpc>
+            </a:pPr>
+            <a:r>
+              <a:rPr sz="1350" b="0">
+                <a:solidFill>
+                  <a:srgbClr val="5A6472"/>
+                </a:solidFill>
+                <a:latin typeface="Meiryo"/>
+              </a:rPr>
+              <a:t>・FIC 消す方向: 提案はL4 0.85 / L20 0.85と全層で最良</a:t>
             </a:r>
           </a:p>
         </p:txBody>

--- a/slides/20260722_progress.pptx
+++ b/slides/20260722_progress.pptx
@@ -6215,7 +6215,7 @@
                 </a:solidFill>
                 <a:latin typeface="Meiryo"/>
               </a:rPr>
-              <a:t>・FIC(特徴が本当に動いたかのgpt-4o判定、L12): 消す方向 提案0.94 ≫ prompting 0.42 / steer 0.15 / LinguaLens準拠 0.08</a:t>
+              <a:t>・FIC(特徴が本当に動いたかのgpt-4o判定、L12): 消す方向 提案0.94 ≫ steer 0.76 / prompting 0.42 / LinguaLens準拠 0.08</a:t>
             </a:r>
           </a:p>
           <a:p>
@@ -6231,7 +6231,7 @@
                 </a:solidFill>
                 <a:latin typeface="Meiryo"/>
               </a:rPr>
-              <a:t>  足す方向 prompting 0.49 &gt; 提案 0.31 ≫ steer −0.00 / LinguaLens準拠 −0.07 — 因果効果の軸では提案が最有力の介入</a:t>
+              <a:t>  足す方向 prompting 0.49 &gt; steer 0.35 &gt; 提案 0.31 ≫ LinguaLens準拠 −0.07 — 消す方向の因果効果では提案が圧倒</a:t>
             </a:r>
           </a:p>
         </p:txBody>
@@ -7351,7 +7351,7 @@
                         <a:rPr sz="1250" b="1">
                           <a:latin typeface="Meiryo"/>
                         </a:rPr>
-                        <a:t>steer(同スペック)※</a:t>
+                        <a:t>steer(同スペック)</a:t>
                       </a:r>
                     </a:p>
                   </a:txBody>
@@ -7366,7 +7366,7 @@
                         <a:rPr sz="1250" b="0">
                           <a:latin typeface="Meiryo"/>
                         </a:rPr>
-                        <a:t>0.25 / −0.06</a:t>
+                        <a:t>0.41 / 0.10</a:t>
                       </a:r>
                     </a:p>
                   </a:txBody>
@@ -7381,7 +7381,7 @@
                         <a:rPr sz="1250" b="0">
                           <a:latin typeface="Meiryo"/>
                         </a:rPr>
-                        <a:t>0.15 / −0.00</a:t>
+                        <a:t>0.76 / 0.35</a:t>
                       </a:r>
                     </a:p>
                   </a:txBody>
@@ -7396,7 +7396,7 @@
                         <a:rPr sz="1250" b="0">
                           <a:latin typeface="Meiryo"/>
                         </a:rPr>
-                        <a:t>0.84 / 0.21</a:t>
+                        <a:t>0.77 / 0.17</a:t>
                       </a:r>
                     </a:p>
                   </a:txBody>
@@ -7411,7 +7411,7 @@
                         <a:rPr sz="1250" b="0">
                           <a:latin typeface="Meiryo"/>
                         </a:rPr>
-                        <a:t>L20以外は弱い</a:t>
+                        <a:t>supはefに次ぐ、ampはL12/L20でef超え</a:t>
                       </a:r>
                     </a:p>
                   </a:txBody>
@@ -7729,7 +7729,7 @@
                 </a:solidFill>
                 <a:latin typeface="Meiryo"/>
               </a:rPr>
-              <a:t>・消す方向: 提案 0.85-0.94 で全層最良 — exactの差(1〜2割)より桁違いに大きい因果効果差</a:t>
+              <a:t>・消す方向: 提案 0.85-0.94 で全層最良(較正済みsteer 0.41-0.77が次点)— exactの差より桁違いに大きい因果効果差</a:t>
             </a:r>
           </a:p>
           <a:p>
@@ -7761,7 +7761,7 @@
                 </a:solidFill>
                 <a:latin typeface="Meiryo"/>
               </a:rPr>
-              <a:t>・提案の弱点も明確: L20の足す方向 0.03(steer 0.21に劣る)— 深層amp が改善対象</a:t>
+              <a:t>・提案の弱点も明確: 足す方向はL12/L20で同スペックsteerに劣る(0.31 vs 0.35 / 0.03 vs 0.17)— 深層ampが改善対象</a:t>
             </a:r>
           </a:p>
           <a:p>
@@ -7777,23 +7777,7 @@
                 </a:solidFill>
                 <a:latin typeface="Meiryo"/>
               </a:rPr>
-              <a:t>・※steerは較正前記録による暫定値(較正済み記録の再判定を実行中)。promptingはexact同様「誤指定でも動く」ため</a:t>
-            </a:r>
-          </a:p>
-          <a:p>
-            <a:pPr algn="l">
-              <a:lnSpc>
-                <a:spcPct val="115000"/>
-              </a:lnSpc>
-            </a:pPr>
-            <a:r>
-              <a:rPr sz="1350" b="0">
-                <a:solidFill>
-                  <a:srgbClr val="5A6472"/>
-                </a:solidFill>
-                <a:latin typeface="Meiryo"/>
-              </a:rPr>
-              <a:t>  この表の値は正しい指定時のもの — 特異性の弱さはFICの定義上すでに減点済み(それでも足す方向は最良)</a:t>
+              <a:t>・promptingはexact同様「誤指定でも動く」が、FICの定義上その特異性の弱さは減点済み — それでも足す方向は最良0.49</a:t>
             </a:r>
           </a:p>
         </p:txBody>

--- a/slides/20260722_progress.pptx
+++ b/slides/20260722_progress.pptx
@@ -3754,7 +3754,7 @@
         </p:nvSpPr>
         <p:spPr>
           <a:xfrm>
-            <a:off x="640080" y="2743200"/>
+            <a:off x="640080" y="3017520"/>
             <a:ext cx="10972800" cy="457200"/>
           </a:xfrm>
           <a:prstGeom prst="rect">
@@ -3776,11 +3776,11 @@
             <a:r>
               <a:rPr sz="1700" b="1">
                 <a:solidFill>
-                  <a:srgbClr val="5E6E8C"/>
-                </a:solidFill>
-                <a:latin typeface="Meiryo"/>
-              </a:rPr>
-              <a:t>比較手法(書き換え枠): 中立の書き換え指示(特徴名は入れない)</a:t>
+                  <a:srgbClr val="8A929E"/>
+                </a:solidFill>
+                <a:latin typeface="Meiryo"/>
+              </a:rPr>
+              <a:t>LinguaLens原法(参考): 素のプロンプトから自由生成 → GPT-4o判定</a:t>
             </a:r>
           </a:p>
         </p:txBody>
@@ -3793,7 +3793,7 @@
         </p:nvSpPr>
         <p:spPr>
           <a:xfrm>
-            <a:off x="822960" y="3291840"/>
+            <a:off x="822960" y="3566160"/>
             <a:ext cx="10424160" cy="640080"/>
           </a:xfrm>
           <a:prstGeom prst="roundRect">
@@ -3834,7 +3834,7 @@
                 </a:solidFill>
                 <a:latin typeface="Meiryo"/>
               </a:rPr>
-              <a:t>Rewrite the input sentence. …(特徴の情報なし)</a:t>
+              <a:t>User: Sir, tell me a story about you. Assistant:  (過去形の例)</a:t>
             </a:r>
           </a:p>
         </p:txBody>
@@ -3847,100 +3847,7 @@
         </p:nvSpPr>
         <p:spPr>
           <a:xfrm>
-            <a:off x="640080" y="4206240"/>
-            <a:ext cx="10972800" cy="457200"/>
-          </a:xfrm>
-          <a:prstGeom prst="rect">
-            <a:avLst/>
-          </a:prstGeom>
-          <a:noFill/>
-        </p:spPr>
-        <p:txBody>
-          <a:bodyPr wrap="square">
-            <a:spAutoFit/>
-          </a:bodyPr>
-          <a:lstStyle/>
-          <a:p>
-            <a:pPr algn="l">
-              <a:lnSpc>
-                <a:spcPct val="115000"/>
-              </a:lnSpc>
-            </a:pPr>
-            <a:r>
-              <a:rPr sz="1700" b="1">
-                <a:solidFill>
-                  <a:srgbClr val="8A929E"/>
-                </a:solidFill>
-                <a:latin typeface="Meiryo"/>
-              </a:rPr>
-              <a:t>LinguaLens原法(参考): 素のプロンプトから自由生成 → GPT-4o判定</a:t>
-            </a:r>
-          </a:p>
-        </p:txBody>
-      </p:sp>
-      <p:sp>
-        <p:nvSpPr>
-          <p:cNvPr id="9" name="Rounded Rectangle 8"/>
-          <p:cNvSpPr/>
-          <p:nvPr/>
-        </p:nvSpPr>
-        <p:spPr>
-          <a:xfrm>
-            <a:off x="822960" y="4754880"/>
-            <a:ext cx="10424160" cy="640080"/>
-          </a:xfrm>
-          <a:prstGeom prst="roundRect">
-            <a:avLst/>
-          </a:prstGeom>
-          <a:solidFill>
-            <a:srgbClr val="F6F7F8"/>
-          </a:solidFill>
-          <a:ln w="20320">
-            <a:solidFill>
-              <a:srgbClr val="5A6472"/>
-            </a:solidFill>
-          </a:ln>
-        </p:spPr>
-        <p:style>
-          <a:lnRef idx="1">
-            <a:schemeClr val="accent1"/>
-          </a:lnRef>
-          <a:fillRef idx="3">
-            <a:schemeClr val="accent1"/>
-          </a:fillRef>
-          <a:effectRef idx="2">
-            <a:schemeClr val="accent1"/>
-          </a:effectRef>
-          <a:fontRef idx="minor">
-            <a:schemeClr val="lt1"/>
-          </a:fontRef>
-        </p:style>
-        <p:txBody>
-          <a:bodyPr rtlCol="0" anchor="ctr" wrap="square" lIns="54864" rIns="54864" tIns="36576" bIns="36576"/>
-          <a:lstStyle/>
-          <a:p>
-            <a:pPr algn="ctr"/>
-            <a:r>
-              <a:rPr sz="1300" b="0">
-                <a:solidFill>
-                  <a:srgbClr val="22272E"/>
-                </a:solidFill>
-                <a:latin typeface="Meiryo"/>
-              </a:rPr>
-              <a:t>User: Sir, tell me a story about you. Assistant:  (過去形の例)</a:t>
-            </a:r>
-          </a:p>
-        </p:txBody>
-      </p:sp>
-      <p:sp>
-        <p:nvSpPr>
-          <p:cNvPr id="10" name="TextBox 9"/>
-          <p:cNvSpPr txBox="1"/>
-          <p:nvPr/>
-        </p:nvSpPr>
-        <p:spPr>
-          <a:xfrm>
-            <a:off x="640080" y="5577840"/>
+            <a:off x="640080" y="4572000"/>
             <a:ext cx="10972800" cy="822960"/>
           </a:xfrm>
           <a:prstGeom prst="rect">
@@ -5453,7 +5360,7 @@
         </p:nvGraphicFramePr>
         <p:xfrm>
           <a:off x="502920" y="1188720"/>
-          <a:ext cx="11155680" cy="3246120"/>
+          <a:ext cx="11155680" cy="2834640"/>
         </p:xfrm>
         <a:graphic>
           <a:graphicData uri="http://schemas.openxmlformats.org/drawingml/2006/table">
@@ -5469,7 +5376,7 @@
                 <a:gridCol w="1859280"/>
                 <a:gridCol w="1859280"/>
               </a:tblGrid>
-              <a:tr h="463731">
+              <a:tr h="472440">
                 <a:tc>
                   <a:txBody>
                     <a:bodyPr/>
@@ -5561,7 +5468,7 @@
                   <a:tcPr/>
                 </a:tc>
               </a:tr>
-              <a:tr h="463731">
+              <a:tr h="472440">
                 <a:tc>
                   <a:txBody>
                     <a:bodyPr/>
@@ -5653,7 +5560,7 @@
                   <a:tcPr/>
                 </a:tc>
               </a:tr>
-              <a:tr h="463731">
+              <a:tr h="472440">
                 <a:tc>
                   <a:txBody>
                     <a:bodyPr/>
@@ -5745,7 +5652,7 @@
                   <a:tcPr/>
                 </a:tc>
               </a:tr>
-              <a:tr h="463731">
+              <a:tr h="472440">
                 <a:tc>
                   <a:txBody>
                     <a:bodyPr/>
@@ -5837,7 +5744,7 @@
                   <a:tcPr/>
                 </a:tc>
               </a:tr>
-              <a:tr h="463731">
+              <a:tr h="472440">
                 <a:tc>
                   <a:txBody>
                     <a:bodyPr/>
@@ -5929,7 +5836,7 @@
                   <a:tcPr/>
                 </a:tc>
               </a:tr>
-              <a:tr h="463731">
+              <a:tr h="472440">
                 <a:tc>
                   <a:txBody>
                     <a:bodyPr/>
@@ -6015,98 +5922,6 @@
                           <a:latin typeface="Meiryo"/>
                         </a:rPr>
                         <a:t>× 差 ≈0.01</a:t>
-                      </a:r>
-                    </a:p>
-                  </a:txBody>
-                  <a:tcPr/>
-                </a:tc>
-              </a:tr>
-              <a:tr h="463734">
-                <a:tc>
-                  <a:txBody>
-                    <a:bodyPr/>
-                    <a:lstStyle/>
-                    <a:p>
-                      <a:r>
-                        <a:rPr sz="1250" b="1">
-                          <a:latin typeface="Meiryo"/>
-                        </a:rPr>
-                        <a:t>(参考)素のrewrite(無介入の床)</a:t>
-                      </a:r>
-                    </a:p>
-                  </a:txBody>
-                  <a:tcPr/>
-                </a:tc>
-                <a:tc>
-                  <a:txBody>
-                    <a:bodyPr/>
-                    <a:lstStyle/>
-                    <a:p>
-                      <a:r>
-                        <a:rPr sz="1250" b="0">
-                          <a:latin typeface="Meiryo"/>
-                        </a:rPr>
-                        <a:t>0.060</a:t>
-                      </a:r>
-                    </a:p>
-                  </a:txBody>
-                  <a:tcPr/>
-                </a:tc>
-                <a:tc>
-                  <a:txBody>
-                    <a:bodyPr/>
-                    <a:lstStyle/>
-                    <a:p>
-                      <a:r>
-                        <a:rPr sz="1250" b="0">
-                          <a:latin typeface="Meiryo"/>
-                        </a:rPr>
-                        <a:t>—</a:t>
-                      </a:r>
-                    </a:p>
-                  </a:txBody>
-                  <a:tcPr/>
-                </a:tc>
-                <a:tc>
-                  <a:txBody>
-                    <a:bodyPr/>
-                    <a:lstStyle/>
-                    <a:p>
-                      <a:r>
-                        <a:rPr sz="1250" b="0">
-                          <a:latin typeface="Meiryo"/>
-                        </a:rPr>
-                        <a:t>0.120</a:t>
-                      </a:r>
-                    </a:p>
-                  </a:txBody>
-                  <a:tcPr/>
-                </a:tc>
-                <a:tc>
-                  <a:txBody>
-                    <a:bodyPr/>
-                    <a:lstStyle/>
-                    <a:p>
-                      <a:r>
-                        <a:rPr sz="1250" b="0">
-                          <a:latin typeface="Meiryo"/>
-                        </a:rPr>
-                        <a:t>—</a:t>
-                      </a:r>
-                    </a:p>
-                  </a:txBody>
-                  <a:tcPr/>
-                </a:tc>
-                <a:tc>
-                  <a:txBody>
-                    <a:bodyPr/>
-                    <a:lstStyle/>
-                    <a:p>
-                      <a:r>
-                        <a:rPr sz="1250" b="0">
-                          <a:latin typeface="Meiryo"/>
-                        </a:rPr>
-                        <a:t>特徴情報なしの書き換えだけ</a:t>
                       </a:r>
                     </a:p>
                   </a:txBody>
@@ -6138,38 +5953,6 @@
             <a:spAutoFit/>
           </a:bodyPr>
           <a:lstStyle/>
-          <a:p>
-            <a:pPr algn="l">
-              <a:lnSpc>
-                <a:spcPct val="115000"/>
-              </a:lnSpc>
-            </a:pPr>
-            <a:r>
-              <a:rPr sz="1400" b="0">
-                <a:solidFill>
-                  <a:srgbClr val="5A6472"/>
-                </a:solidFill>
-                <a:latin typeface="Meiryo"/>
-              </a:rPr>
-              <a:t>・プロンプト枠: 提案・steer=復唱枠(床copy≈0)/ LinguaLens準拠・AxBench準拠=書き換え枠(床=素のrewrite行)。</a:t>
-            </a:r>
-          </a:p>
-          <a:p>
-            <a:pPr algn="l">
-              <a:lnSpc>
-                <a:spcPct val="115000"/>
-              </a:lnSpc>
-            </a:pPr>
-            <a:r>
-              <a:rPr sz="1400" b="0">
-                <a:solidFill>
-                  <a:srgbClr val="5A6472"/>
-                </a:solidFill>
-                <a:latin typeface="Meiryo"/>
-              </a:rPr>
-              <a:t>  枠が違う行の直接比較は不可 — 各行は自分の枠の床・randomとの差で読む</a:t>
-            </a:r>
-          </a:p>
           <a:p>
             <a:pPr algn="l">
               <a:lnSpc>
@@ -6346,7 +6129,7 @@
         </p:nvGraphicFramePr>
         <p:xfrm>
           <a:off x="502920" y="1143000"/>
-          <a:ext cx="11155680" cy="3108960"/>
+          <a:ext cx="11155680" cy="2697480"/>
         </p:xfrm>
         <a:graphic>
           <a:graphicData uri="http://schemas.openxmlformats.org/drawingml/2006/table">
@@ -6361,7 +6144,7 @@
                 <a:gridCol w="2231136"/>
                 <a:gridCol w="2231136"/>
               </a:tblGrid>
-              <a:tr h="444137">
+              <a:tr h="449580">
                 <a:tc>
                   <a:txBody>
                     <a:bodyPr/>
@@ -6438,7 +6221,7 @@
                   <a:tcPr/>
                 </a:tc>
               </a:tr>
-              <a:tr h="444137">
+              <a:tr h="449580">
                 <a:tc>
                   <a:txBody>
                     <a:bodyPr/>
@@ -6515,7 +6298,7 @@
                   <a:tcPr/>
                 </a:tc>
               </a:tr>
-              <a:tr h="444137">
+              <a:tr h="449580">
                 <a:tc>
                   <a:txBody>
                     <a:bodyPr/>
@@ -6592,7 +6375,7 @@
                   <a:tcPr/>
                 </a:tc>
               </a:tr>
-              <a:tr h="444137">
+              <a:tr h="449580">
                 <a:tc>
                   <a:txBody>
                     <a:bodyPr/>
@@ -6669,7 +6452,7 @@
                   <a:tcPr/>
                 </a:tc>
               </a:tr>
-              <a:tr h="444137">
+              <a:tr h="449580">
                 <a:tc>
                   <a:txBody>
                     <a:bodyPr/>
@@ -6746,7 +6529,7 @@
                   <a:tcPr/>
                 </a:tc>
               </a:tr>
-              <a:tr h="444137">
+              <a:tr h="449580">
                 <a:tc>
                   <a:txBody>
                     <a:bodyPr/>
@@ -6817,83 +6600,6 @@
                           <a:latin typeface="Meiryo"/>
                         </a:rPr>
                         <a:t>0.108 / 0.108</a:t>
-                      </a:r>
-                    </a:p>
-                  </a:txBody>
-                  <a:tcPr/>
-                </a:tc>
-              </a:tr>
-              <a:tr h="444138">
-                <a:tc>
-                  <a:txBody>
-                    <a:bodyPr/>
-                    <a:lstStyle/>
-                    <a:p>
-                      <a:r>
-                        <a:rPr sz="1200" b="1">
-                          <a:latin typeface="Meiryo"/>
-                        </a:rPr>
-                        <a:t>(参考)素のrewrite(無介入の床)</a:t>
-                      </a:r>
-                    </a:p>
-                  </a:txBody>
-                  <a:tcPr/>
-                </a:tc>
-                <a:tc>
-                  <a:txBody>
-                    <a:bodyPr/>
-                    <a:lstStyle/>
-                    <a:p>
-                      <a:r>
-                        <a:rPr sz="1200" b="0">
-                          <a:latin typeface="Meiryo"/>
-                        </a:rPr>
-                        <a:t>0.060 / —</a:t>
-                      </a:r>
-                    </a:p>
-                  </a:txBody>
-                  <a:tcPr/>
-                </a:tc>
-                <a:tc>
-                  <a:txBody>
-                    <a:bodyPr/>
-                    <a:lstStyle/>
-                    <a:p>
-                      <a:r>
-                        <a:rPr sz="1200" b="0">
-                          <a:latin typeface="Meiryo"/>
-                        </a:rPr>
-                        <a:t>0.120 / —</a:t>
-                      </a:r>
-                    </a:p>
-                  </a:txBody>
-                  <a:tcPr/>
-                </a:tc>
-                <a:tc>
-                  <a:txBody>
-                    <a:bodyPr/>
-                    <a:lstStyle/>
-                    <a:p>
-                      <a:r>
-                        <a:rPr sz="1200" b="0">
-                          <a:latin typeface="Meiryo"/>
-                        </a:rPr>
-                        <a:t>0.060 / —</a:t>
-                      </a:r>
-                    </a:p>
-                  </a:txBody>
-                  <a:tcPr/>
-                </a:tc>
-                <a:tc>
-                  <a:txBody>
-                    <a:bodyPr/>
-                    <a:lstStyle/>
-                    <a:p>
-                      <a:r>
-                        <a:rPr sz="1200" b="0">
-                          <a:latin typeface="Meiryo"/>
-                        </a:rPr>
-                        <a:t>0.120 / —</a:t>
                       </a:r>
                     </a:p>
                   </a:txBody>
@@ -6987,22 +6693,6 @@
                 <a:latin typeface="Meiryo"/>
               </a:rPr>
               <a:t>・L20は全介入が弱い(提案0.036-0.048)— 深層は編集余地そのものが小さい(oracle時代から一貫)</a:t>
-            </a:r>
-          </a:p>
-          <a:p>
-            <a:pPr algn="l">
-              <a:lnSpc>
-                <a:spcPct val="115000"/>
-              </a:lnSpc>
-            </a:pPr>
-            <a:r>
-              <a:rPr sz="1350" b="0">
-                <a:solidFill>
-                  <a:srgbClr val="5A6472"/>
-                </a:solidFill>
-                <a:latin typeface="Meiryo"/>
-              </a:rPr>
-              <a:t>・プロンプト枠: 提案・steer=復唱枠(床copy≈0)/ LL準拠・AxB準拠=書き換え枠(床=素のrewrite行)— 行間の直接比較不可</a:t>
             </a:r>
           </a:p>
           <a:p>

--- a/slides/20260722_progress.pptx
+++ b/slides/20260722_progress.pptx
@@ -5050,7 +5050,7 @@
         </p:nvSpPr>
         <p:spPr>
           <a:xfrm>
-            <a:off x="502920" y="1828800"/>
+            <a:off x="502920" y="1783080"/>
             <a:ext cx="11247120" cy="365760"/>
           </a:xfrm>
           <a:prstGeom prst="rect">
@@ -5083,14 +5083,53 @@
       </p:sp>
       <p:sp>
         <p:nvSpPr>
-          <p:cNvPr id="6" name="Rounded Rectangle 5"/>
+          <p:cNvPr id="6" name="TextBox 5"/>
+          <p:cNvSpPr txBox="1"/>
+          <p:nvPr/>
+        </p:nvSpPr>
+        <p:spPr>
+          <a:xfrm>
+            <a:off x="640080" y="2212848"/>
+            <a:ext cx="3017520" cy="365760"/>
+          </a:xfrm>
+          <a:prstGeom prst="rect">
+            <a:avLst/>
+          </a:prstGeom>
+          <a:noFill/>
+        </p:spPr>
+        <p:txBody>
+          <a:bodyPr wrap="square">
+            <a:spAutoFit/>
+          </a:bodyPr>
+          <a:lstStyle/>
+          <a:p>
+            <a:pPr algn="l">
+              <a:lnSpc>
+                <a:spcPct val="115000"/>
+              </a:lnSpc>
+            </a:pPr>
+            <a:r>
+              <a:rPr sz="1300" b="1">
+                <a:solidFill>
+                  <a:srgbClr val="0E7C66"/>
+                </a:solidFill>
+                <a:latin typeface="Meiryo"/>
+              </a:rPr>
+              <a:t>true(正しい特徴名)</a:t>
+            </a:r>
+          </a:p>
+        </p:txBody>
+      </p:sp>
+      <p:sp>
+        <p:nvSpPr>
+          <p:cNvPr id="7" name="Rounded Rectangle 6"/>
           <p:cNvSpPr/>
           <p:nvPr/>
         </p:nvSpPr>
         <p:spPr>
           <a:xfrm>
-            <a:off x="640080" y="2286000"/>
-            <a:ext cx="10881360" cy="1554480"/>
+            <a:off x="3657600" y="2176272"/>
+            <a:ext cx="7863840" cy="502920"/>
           </a:xfrm>
           <a:prstGeom prst="roundRect">
             <a:avLst/>
@@ -5100,7 +5139,7 @@
           </a:solidFill>
           <a:ln w="20320">
             <a:solidFill>
-              <a:srgbClr val="5A6472"/>
+              <a:srgbClr val="0E7C66"/>
             </a:solidFill>
           </a:ln>
         </p:spPr>
@@ -5124,56 +5163,261 @@
           <a:p>
             <a:pPr algn="ctr"/>
             <a:r>
-              <a:rPr sz="1200" b="0">
+              <a:rPr sz="1150" b="0">
                 <a:solidFill>
                   <a:srgbClr val="22272E"/>
                 </a:solidFill>
                 <a:latin typeface="Meiryo"/>
               </a:rPr>
-              <a:t>true(正しい特徴名): Rewrite the input sentence to remove any {特徴名: 例 superlative}. Output only the rewritten sentence.</a:t>
-            </a:r>
-          </a:p>
+              <a:t>Rewrite the input sentence to remove any {特徴名: 例 superlative}. Output only the rewritten sentence.</a:t>
+            </a:r>
+          </a:p>
+        </p:txBody>
+      </p:sp>
+      <p:sp>
+        <p:nvSpPr>
+          <p:cNvPr id="8" name="TextBox 7"/>
+          <p:cNvSpPr txBox="1"/>
+          <p:nvPr/>
+        </p:nvSpPr>
+        <p:spPr>
+          <a:xfrm>
+            <a:off x="640080" y="2852928"/>
+            <a:ext cx="3017520" cy="502920"/>
+          </a:xfrm>
+          <a:prstGeom prst="rect">
+            <a:avLst/>
+          </a:prstGeom>
+          <a:noFill/>
+        </p:spPr>
+        <p:txBody>
+          <a:bodyPr wrap="square">
+            <a:spAutoFit/>
+          </a:bodyPr>
+          <a:lstStyle/>
+          <a:p>
+            <a:pPr algn="l">
+              <a:lnSpc>
+                <a:spcPct val="115000"/>
+              </a:lnSpc>
+            </a:pPr>
+            <a:r>
+              <a:rPr sz="1300" b="1">
+                <a:solidFill>
+                  <a:srgbClr val="5E6E8C"/>
+                </a:solidFill>
+                <a:latin typeface="Meiryo"/>
+              </a:rPr>
+              <a:t>random(無関係な特徴名)</a:t>
+            </a:r>
+          </a:p>
+          <a:p>
+            <a:pPr algn="l">
+              <a:lnSpc>
+                <a:spcPct val="115000"/>
+              </a:lnSpc>
+            </a:pPr>
+            <a:r>
+              <a:rPr sz="1300" b="1">
+                <a:solidFill>
+                  <a:srgbClr val="5E6E8C"/>
+                </a:solidFill>
+                <a:latin typeface="Meiryo"/>
+              </a:rPr>
+              <a:t>= 特異性の検算用</a:t>
+            </a:r>
+          </a:p>
+        </p:txBody>
+      </p:sp>
+      <p:sp>
+        <p:nvSpPr>
+          <p:cNvPr id="9" name="Rounded Rectangle 8"/>
+          <p:cNvSpPr/>
+          <p:nvPr/>
+        </p:nvSpPr>
+        <p:spPr>
+          <a:xfrm>
+            <a:off x="3657600" y="2816352"/>
+            <a:ext cx="7863840" cy="502920"/>
+          </a:xfrm>
+          <a:prstGeom prst="roundRect">
+            <a:avLst/>
+          </a:prstGeom>
+          <a:solidFill>
+            <a:srgbClr val="F6F7F8"/>
+          </a:solidFill>
+          <a:ln w="20320">
+            <a:solidFill>
+              <a:srgbClr val="5E6E8C"/>
+            </a:solidFill>
+          </a:ln>
+        </p:spPr>
+        <p:style>
+          <a:lnRef idx="1">
+            <a:schemeClr val="accent1"/>
+          </a:lnRef>
+          <a:fillRef idx="3">
+            <a:schemeClr val="accent1"/>
+          </a:fillRef>
+          <a:effectRef idx="2">
+            <a:schemeClr val="accent1"/>
+          </a:effectRef>
+          <a:fontRef idx="minor">
+            <a:schemeClr val="lt1"/>
+          </a:fontRef>
+        </p:style>
+        <p:txBody>
+          <a:bodyPr rtlCol="0" anchor="ctr" wrap="square" lIns="54864" rIns="54864" tIns="36576" bIns="36576"/>
+          <a:lstStyle/>
           <a:p>
             <a:pPr algn="ctr"/>
             <a:r>
-              <a:rPr sz="1200" b="0">
+              <a:rPr sz="1150" b="0">
                 <a:solidFill>
                   <a:srgbClr val="22272E"/>
                 </a:solidFill>
                 <a:latin typeface="Meiryo"/>
               </a:rPr>
-              <a:t>random(無関係な特徴名): Rewrite the input sentence to remove any {別の特徴名}. …(特異性の検算用)</a:t>
-            </a:r>
-          </a:p>
+              <a:t>Rewrite the input sentence to remove any {別の特徴名: 例 metaphor}. Output only the rewritten sentence.</a:t>
+            </a:r>
+          </a:p>
+        </p:txBody>
+      </p:sp>
+      <p:sp>
+        <p:nvSpPr>
+          <p:cNvPr id="10" name="TextBox 9"/>
+          <p:cNvSpPr txBox="1"/>
+          <p:nvPr/>
+        </p:nvSpPr>
+        <p:spPr>
+          <a:xfrm>
+            <a:off x="640080" y="3493008"/>
+            <a:ext cx="3017520" cy="365760"/>
+          </a:xfrm>
+          <a:prstGeom prst="rect">
+            <a:avLst/>
+          </a:prstGeom>
+          <a:noFill/>
+        </p:spPr>
+        <p:txBody>
+          <a:bodyPr wrap="square">
+            <a:spAutoFit/>
+          </a:bodyPr>
+          <a:lstStyle/>
+          <a:p>
+            <a:pPr algn="l">
+              <a:lnSpc>
+                <a:spcPct val="115000"/>
+              </a:lnSpc>
+            </a:pPr>
+            <a:r>
+              <a:rPr sz="1300" b="1">
+                <a:solidFill>
+                  <a:srgbClr val="8A929E"/>
+                </a:solidFill>
+                <a:latin typeface="Meiryo"/>
+              </a:rPr>
+              <a:t>empty(特徴名なし)</a:t>
+            </a:r>
+          </a:p>
+        </p:txBody>
+      </p:sp>
+      <p:sp>
+        <p:nvSpPr>
+          <p:cNvPr id="11" name="Rounded Rectangle 10"/>
+          <p:cNvSpPr/>
+          <p:nvPr/>
+        </p:nvSpPr>
+        <p:spPr>
+          <a:xfrm>
+            <a:off x="3657600" y="3456432"/>
+            <a:ext cx="7863840" cy="502920"/>
+          </a:xfrm>
+          <a:prstGeom prst="roundRect">
+            <a:avLst/>
+          </a:prstGeom>
+          <a:solidFill>
+            <a:srgbClr val="F6F7F8"/>
+          </a:solidFill>
+          <a:ln w="20320">
+            <a:solidFill>
+              <a:srgbClr val="8A929E"/>
+            </a:solidFill>
+          </a:ln>
+        </p:spPr>
+        <p:style>
+          <a:lnRef idx="1">
+            <a:schemeClr val="accent1"/>
+          </a:lnRef>
+          <a:fillRef idx="3">
+            <a:schemeClr val="accent1"/>
+          </a:fillRef>
+          <a:effectRef idx="2">
+            <a:schemeClr val="accent1"/>
+          </a:effectRef>
+          <a:fontRef idx="minor">
+            <a:schemeClr val="lt1"/>
+          </a:fontRef>
+        </p:style>
+        <p:txBody>
+          <a:bodyPr rtlCol="0" anchor="ctr" wrap="square" lIns="54864" rIns="54864" tIns="36576" bIns="36576"/>
+          <a:lstStyle/>
           <a:p>
             <a:pPr algn="ctr"/>
             <a:r>
-              <a:rPr sz="1200" b="0">
+              <a:rPr sz="1150" b="0">
                 <a:solidFill>
                   <a:srgbClr val="22272E"/>
                 </a:solidFill>
                 <a:latin typeface="Meiryo"/>
               </a:rPr>
-              <a:t>empty(特徴名なし): Rewrite the input sentence. Output only the rewritten sentence.</a:t>
-            </a:r>
-          </a:p>
-          <a:p>
-            <a:pPr algn="ctr"/>
-            <a:r>
-              <a:rPr sz="1200" b="0">
-                <a:solidFill>
-                  <a:srgbClr val="22272E"/>
-                </a:solidFill>
-                <a:latin typeface="Meiryo"/>
-              </a:rPr>
-              <a:t>※ この後に Input: {src文} を付けてチャット形式で入力。amp方向は remove → add に変わるだけ</a:t>
-            </a:r>
-          </a:p>
-        </p:txBody>
-      </p:sp>
-      <p:sp>
-        <p:nvSpPr>
-          <p:cNvPr id="7" name="TextBox 6"/>
+              <a:t>Rewrite the input sentence. Output only the rewritten sentence.</a:t>
+            </a:r>
+          </a:p>
+        </p:txBody>
+      </p:sp>
+      <p:sp>
+        <p:nvSpPr>
+          <p:cNvPr id="12" name="TextBox 11"/>
+          <p:cNvSpPr txBox="1"/>
+          <p:nvPr/>
+        </p:nvSpPr>
+        <p:spPr>
+          <a:xfrm>
+            <a:off x="640080" y="4069080"/>
+            <a:ext cx="10881360" cy="365760"/>
+          </a:xfrm>
+          <a:prstGeom prst="rect">
+            <a:avLst/>
+          </a:prstGeom>
+          <a:noFill/>
+        </p:spPr>
+        <p:txBody>
+          <a:bodyPr wrap="square">
+            <a:spAutoFit/>
+          </a:bodyPr>
+          <a:lstStyle/>
+          <a:p>
+            <a:pPr algn="l">
+              <a:lnSpc>
+                <a:spcPct val="115000"/>
+              </a:lnSpc>
+            </a:pPr>
+            <a:r>
+              <a:rPr sz="1250" b="0">
+                <a:solidFill>
+                  <a:srgbClr val="5A6472"/>
+                </a:solidFill>
+                <a:latin typeface="Meiryo"/>
+              </a:rPr>
+              <a:t>※ いずれも後ろに Input: {src文} を付けてチャット形式で入力。amp方向は remove → add に変わるだけ</a:t>
+            </a:r>
+          </a:p>
+        </p:txBody>
+      </p:sp>
+      <p:sp>
+        <p:nvSpPr>
+          <p:cNvPr id="13" name="TextBox 12"/>
           <p:cNvSpPr txBox="1"/>
           <p:nvPr/>
         </p:nvSpPr>

--- a/slides/20260722_progress.pptx
+++ b/slides/20260722_progress.pptx
@@ -5423,7 +5423,7 @@
         </p:nvSpPr>
         <p:spPr>
           <a:xfrm>
-            <a:off x="640080" y="4114800"/>
+            <a:off x="640080" y="4572000"/>
             <a:ext cx="10972800" cy="5394960"/>
           </a:xfrm>
           <a:prstGeom prst="rect">
@@ -5446,7 +5446,7 @@
               </a:spcAft>
             </a:pPr>
             <a:r>
-              <a:rPr sz="1600" b="1">
+              <a:rPr sz="1500" b="1">
                 <a:solidFill>
                   <a:srgbClr val="0E7C66"/>
                 </a:solidFill>
@@ -5455,7 +5455,7 @@
               <a:t>randomの意味: </a:t>
             </a:r>
             <a:r>
-              <a:rPr sz="1600">
+              <a:rPr sz="1500">
                 <a:solidFill>
                   <a:srgbClr val="22272E"/>
                 </a:solidFill>
@@ -5474,7 +5474,7 @@
               </a:spcAft>
             </a:pPr>
             <a:r>
-              <a:rPr sz="1600" b="1">
+              <a:rPr sz="1500" b="1">
                 <a:solidFill>
                   <a:srgbClr val="0E7C66"/>
                 </a:solidFill>
@@ -5483,7 +5483,7 @@
               <a:t>参考(付録): </a:t>
             </a:r>
             <a:r>
-              <a:rPr sz="1600">
+              <a:rPr sz="1500">
                 <a:solidFill>
                   <a:srgbClr val="22272E"/>
                 </a:solidFill>

--- a/slides/20260722_progress.pptx
+++ b/slides/20260722_progress.pptx
@@ -3754,7 +3754,7 @@
         </p:nvSpPr>
         <p:spPr>
           <a:xfrm>
-            <a:off x="640080" y="3017520"/>
+            <a:off x="640080" y="2743200"/>
             <a:ext cx="10972800" cy="457200"/>
           </a:xfrm>
           <a:prstGeom prst="rect">
@@ -3774,13 +3774,13 @@
               </a:lnSpc>
             </a:pPr>
             <a:r>
-              <a:rPr sz="1700" b="1">
-                <a:solidFill>
-                  <a:srgbClr val="8A929E"/>
-                </a:solidFill>
-                <a:latin typeface="Meiryo"/>
-              </a:rPr>
-              <a:t>LinguaLens原法(参考): 素のプロンプトから自由生成 → GPT-4o判定</a:t>
+              <a:rPr sz="1600" b="1">
+                <a:solidFill>
+                  <a:srgbClr val="5E6E8C"/>
+                </a:solidFill>
+                <a:latin typeface="Meiryo"/>
+              </a:rPr>
+              <a:t>LinguaLens準拠・AxBench準拠(書き換え枠): 中立の書き換え指示(特徴情報なし — 介入だけが偏らせる)</a:t>
             </a:r>
           </a:p>
         </p:txBody>
@@ -3793,8 +3793,8 @@
         </p:nvSpPr>
         <p:spPr>
           <a:xfrm>
-            <a:off x="822960" y="3566160"/>
-            <a:ext cx="10424160" cy="640080"/>
+            <a:off x="822960" y="3246120"/>
+            <a:ext cx="10424160" cy="548640"/>
           </a:xfrm>
           <a:prstGeom prst="roundRect">
             <a:avLst/>
@@ -3804,7 +3804,7 @@
           </a:solidFill>
           <a:ln w="20320">
             <a:solidFill>
-              <a:srgbClr val="5A6472"/>
+              <a:srgbClr val="5E6E8C"/>
             </a:solidFill>
           </a:ln>
         </p:spPr>
@@ -3834,7 +3834,7 @@
                 </a:solidFill>
                 <a:latin typeface="Meiryo"/>
               </a:rPr>
-              <a:t>User: Sir, tell me a story about you. Assistant:  (過去形の例)</a:t>
+              <a:t>Rewrite the input sentence. Output only the rewritten sentence.</a:t>
             </a:r>
           </a:p>
         </p:txBody>
@@ -3847,8 +3847,8 @@
         </p:nvSpPr>
         <p:spPr>
           <a:xfrm>
-            <a:off x="640080" y="4572000"/>
-            <a:ext cx="10972800" cy="822960"/>
+            <a:off x="640080" y="3977639"/>
+            <a:ext cx="10972800" cy="457200"/>
           </a:xfrm>
           <a:prstGeom prst="rect">
             <a:avLst/>
@@ -3867,13 +3867,122 @@
               </a:lnSpc>
             </a:pPr>
             <a:r>
-              <a:rPr sz="1400" b="0">
+              <a:rPr sz="1600" b="1">
+                <a:solidFill>
+                  <a:srgbClr val="8A929E"/>
+                </a:solidFill>
+                <a:latin typeface="Meiryo"/>
+              </a:rPr>
+              <a:t>LinguaLens原法(参考): 素のプロンプトから自由生成 → GPT-4o判定</a:t>
+            </a:r>
+          </a:p>
+        </p:txBody>
+      </p:sp>
+      <p:sp>
+        <p:nvSpPr>
+          <p:cNvPr id="9" name="Rounded Rectangle 8"/>
+          <p:cNvSpPr/>
+          <p:nvPr/>
+        </p:nvSpPr>
+        <p:spPr>
+          <a:xfrm>
+            <a:off x="822960" y="4480560"/>
+            <a:ext cx="10424160" cy="548640"/>
+          </a:xfrm>
+          <a:prstGeom prst="roundRect">
+            <a:avLst/>
+          </a:prstGeom>
+          <a:solidFill>
+            <a:srgbClr val="F6F7F8"/>
+          </a:solidFill>
+          <a:ln w="20320">
+            <a:solidFill>
+              <a:srgbClr val="8A929E"/>
+            </a:solidFill>
+          </a:ln>
+        </p:spPr>
+        <p:style>
+          <a:lnRef idx="1">
+            <a:schemeClr val="accent1"/>
+          </a:lnRef>
+          <a:fillRef idx="3">
+            <a:schemeClr val="accent1"/>
+          </a:fillRef>
+          <a:effectRef idx="2">
+            <a:schemeClr val="accent1"/>
+          </a:effectRef>
+          <a:fontRef idx="minor">
+            <a:schemeClr val="lt1"/>
+          </a:fontRef>
+        </p:style>
+        <p:txBody>
+          <a:bodyPr rtlCol="0" anchor="ctr" wrap="square" lIns="54864" rIns="54864" tIns="36576" bIns="36576"/>
+          <a:lstStyle/>
+          <a:p>
+            <a:pPr algn="ctr"/>
+            <a:r>
+              <a:rPr sz="1300" b="0">
+                <a:solidFill>
+                  <a:srgbClr val="22272E"/>
+                </a:solidFill>
+                <a:latin typeface="Meiryo"/>
+              </a:rPr>
+              <a:t>User: Sir, tell me a story about you. Assistant:  (過去形の例)</a:t>
+            </a:r>
+          </a:p>
+        </p:txBody>
+      </p:sp>
+      <p:sp>
+        <p:nvSpPr>
+          <p:cNvPr id="10" name="TextBox 9"/>
+          <p:cNvSpPr txBox="1"/>
+          <p:nvPr/>
+        </p:nvSpPr>
+        <p:spPr>
+          <a:xfrm>
+            <a:off x="640080" y="5257800"/>
+            <a:ext cx="10972800" cy="1005840"/>
+          </a:xfrm>
+          <a:prstGeom prst="rect">
+            <a:avLst/>
+          </a:prstGeom>
+          <a:noFill/>
+        </p:spPr>
+        <p:txBody>
+          <a:bodyPr wrap="square">
+            <a:spAutoFit/>
+          </a:bodyPr>
+          <a:lstStyle/>
+          <a:p>
+            <a:pPr algn="l">
+              <a:lnSpc>
+                <a:spcPct val="115000"/>
+              </a:lnSpc>
+            </a:pPr>
+            <a:r>
+              <a:rPr sz="1350" b="0">
                 <a:solidFill>
                   <a:srgbClr val="5A6472"/>
                 </a:solidFill>
                 <a:latin typeface="Meiryo"/>
               </a:rPr>
-              <a:t>prompting腕のみ例外的に指示へ特徴名を入れる(「〜を足して/消して書き換えよ」)。</a:t>
+              <a:t>先行2手法の介入は「自由生成を偏らせる」設計のため、コピー事前の強い復唱枠では不当に不利 — 書き換え枠が</a:t>
+            </a:r>
+          </a:p>
+          <a:p>
+            <a:pPr algn="l">
+              <a:lnSpc>
+                <a:spcPct val="115000"/>
+              </a:lnSpc>
+            </a:pPr>
+            <a:r>
+              <a:rPr sz="1350" b="0">
+                <a:solidFill>
+                  <a:srgbClr val="5A6472"/>
+                </a:solidFill>
+                <a:latin typeface="Meiryo"/>
+              </a:rPr>
+              <a:t>彼らの原設定の最近傍移植。prompting腕のみ指示へ特徴名を入れる(「〜を足して/消して書き換えよ」)。</a:t>
             </a:r>
           </a:p>
         </p:txBody>
@@ -5589,22 +5698,61 @@
                 </a:solidFill>
                 <a:latin typeface="Meiryo"/>
               </a:rPr>
-              <a:t>実験結果 1/2 — L12(random併記: 「指定に従っているか」が見える)</a:t>
+              <a:t>実験結果 1/2 — L12(プロンプト枠ごとに表を分離、random併記)</a:t>
+            </a:r>
+          </a:p>
+        </p:txBody>
+      </p:sp>
+      <p:sp>
+        <p:nvSpPr>
+          <p:cNvPr id="4" name="TextBox 3"/>
+          <p:cNvSpPr txBox="1"/>
+          <p:nvPr/>
+        </p:nvSpPr>
+        <p:spPr>
+          <a:xfrm>
+            <a:off x="502920" y="1051560"/>
+            <a:ext cx="11247120" cy="347472"/>
+          </a:xfrm>
+          <a:prstGeom prst="rect">
+            <a:avLst/>
+          </a:prstGeom>
+          <a:noFill/>
+        </p:spPr>
+        <p:txBody>
+          <a:bodyPr wrap="square">
+            <a:spAutoFit/>
+          </a:bodyPr>
+          <a:lstStyle/>
+          <a:p>
+            <a:pPr algn="l">
+              <a:lnSpc>
+                <a:spcPct val="115000"/>
+              </a:lnSpc>
+            </a:pPr>
+            <a:r>
+              <a:rPr sz="1500" b="1">
+                <a:solidFill>
+                  <a:srgbClr val="0E7C66"/>
+                </a:solidFill>
+                <a:latin typeface="Meiryo"/>
+              </a:rPr>
+              <a:t>復唱枠(無介入=コピー、床0 — 編集情報は介入だけが運ぶ)</a:t>
             </a:r>
           </a:p>
         </p:txBody>
       </p:sp>
       <p:graphicFrame>
         <p:nvGraphicFramePr>
-          <p:cNvPr id="4" name="Table 3"/>
+          <p:cNvPr id="5" name="Table 4"/>
           <p:cNvGraphicFramePr>
             <a:graphicFrameLocks noGrp="1"/>
           </p:cNvGraphicFramePr>
           <p:nvPr/>
         </p:nvGraphicFramePr>
         <p:xfrm>
-          <a:off x="502920" y="1188720"/>
-          <a:ext cx="11155680" cy="2834640"/>
+          <a:off x="502920" y="1435607"/>
+          <a:ext cx="11155680" cy="1152144"/>
         </p:xfrm>
         <a:graphic>
           <a:graphicData uri="http://schemas.openxmlformats.org/drawingml/2006/table">
@@ -5620,14 +5768,14 @@
                 <a:gridCol w="1859280"/>
                 <a:gridCol w="1859280"/>
               </a:tblGrid>
-              <a:tr h="472440">
-                <a:tc>
-                  <a:txBody>
-                    <a:bodyPr/>
-                    <a:lstStyle/>
-                    <a:p>
-                      <a:r>
-                        <a:rPr sz="1300" b="1">
+              <a:tr h="384048">
+                <a:tc>
+                  <a:txBody>
+                    <a:bodyPr/>
+                    <a:lstStyle/>
+                    <a:p>
+                      <a:r>
+                        <a:rPr sz="1250" b="1">
                           <a:latin typeface="Meiryo"/>
                         </a:rPr>
                         <a:t>手法</a:t>
@@ -5642,7 +5790,7 @@
                     <a:lstStyle/>
                     <a:p>
                       <a:r>
-                        <a:rPr sz="1300" b="1">
+                        <a:rPr sz="1250" b="1">
                           <a:latin typeface="Meiryo"/>
                         </a:rPr>
                         <a:t>sup true</a:t>
@@ -5657,7 +5805,7 @@
                     <a:lstStyle/>
                     <a:p>
                       <a:r>
-                        <a:rPr sz="1300" b="1">
+                        <a:rPr sz="1250" b="1">
                           <a:latin typeface="Meiryo"/>
                         </a:rPr>
                         <a:t>sup random</a:t>
@@ -5672,7 +5820,7 @@
                     <a:lstStyle/>
                     <a:p>
                       <a:r>
-                        <a:rPr sz="1300" b="1">
+                        <a:rPr sz="1250" b="1">
                           <a:latin typeface="Meiryo"/>
                         </a:rPr>
                         <a:t>amp true</a:t>
@@ -5687,7 +5835,7 @@
                     <a:lstStyle/>
                     <a:p>
                       <a:r>
-                        <a:rPr sz="1300" b="1">
+                        <a:rPr sz="1250" b="1">
                           <a:latin typeface="Meiryo"/>
                         </a:rPr>
                         <a:t>amp random</a:t>
@@ -5702,7 +5850,7 @@
                     <a:lstStyle/>
                     <a:p>
                       <a:r>
-                        <a:rPr sz="1300" b="1">
+                        <a:rPr sz="1250" b="1">
                           <a:latin typeface="Meiryo"/>
                         </a:rPr>
                         <a:t>特異性</a:t>
@@ -5712,14 +5860,14 @@
                   <a:tcPr/>
                 </a:tc>
               </a:tr>
-              <a:tr h="472440">
-                <a:tc>
-                  <a:txBody>
-                    <a:bodyPr/>
-                    <a:lstStyle/>
-                    <a:p>
-                      <a:r>
-                        <a:rPr sz="1250" b="1">
+              <a:tr h="384048">
+                <a:tc>
+                  <a:txBody>
+                    <a:bodyPr/>
+                    <a:lstStyle/>
+                    <a:p>
+                      <a:r>
+                        <a:rPr sz="1200" b="1">
                           <a:latin typeface="Meiryo"/>
                         </a:rPr>
                         <a:t>提案手法</a:t>
@@ -5734,7 +5882,7 @@
                     <a:lstStyle/>
                     <a:p>
                       <a:r>
-                        <a:rPr sz="1250" b="0">
+                        <a:rPr sz="1200" b="0">
                           <a:latin typeface="Meiryo"/>
                         </a:rPr>
                         <a:t>0.128</a:t>
@@ -5749,7 +5897,7 @@
                     <a:lstStyle/>
                     <a:p>
                       <a:r>
-                        <a:rPr sz="1250" b="0">
+                        <a:rPr sz="1200" b="0">
                           <a:latin typeface="Meiryo"/>
                         </a:rPr>
                         <a:t>0.000</a:t>
@@ -5764,7 +5912,7 @@
                     <a:lstStyle/>
                     <a:p>
                       <a:r>
-                        <a:rPr sz="1250" b="0">
+                        <a:rPr sz="1200" b="0">
                           <a:latin typeface="Meiryo"/>
                         </a:rPr>
                         <a:t>0.148</a:t>
@@ -5779,7 +5927,7 @@
                     <a:lstStyle/>
                     <a:p>
                       <a:r>
-                        <a:rPr sz="1250" b="0">
+                        <a:rPr sz="1200" b="0">
                           <a:latin typeface="Meiryo"/>
                         </a:rPr>
                         <a:t>0.054</a:t>
@@ -5794,24 +5942,24 @@
                     <a:lstStyle/>
                     <a:p>
                       <a:r>
-                        <a:rPr sz="1250" b="0">
-                          <a:latin typeface="Meiryo"/>
-                        </a:rPr>
-                        <a:t>◎ randomでは編集しない</a:t>
+                        <a:rPr sz="1200" b="0">
+                          <a:latin typeface="Meiryo"/>
+                        </a:rPr>
+                        <a:t>◎ 誤specでは編集しない(copy 0.95)</a:t>
                       </a:r>
                     </a:p>
                   </a:txBody>
                   <a:tcPr/>
                 </a:tc>
               </a:tr>
-              <a:tr h="472440">
-                <a:tc>
-                  <a:txBody>
-                    <a:bodyPr/>
-                    <a:lstStyle/>
-                    <a:p>
-                      <a:r>
-                        <a:rPr sz="1250" b="1">
+              <a:tr h="384048">
+                <a:tc>
+                  <a:txBody>
+                    <a:bodyPr/>
+                    <a:lstStyle/>
+                    <a:p>
+                      <a:r>
+                        <a:rPr sz="1200" b="1">
                           <a:latin typeface="Meiryo"/>
                         </a:rPr>
                         <a:t>steer(同スペック)</a:t>
@@ -5826,7 +5974,7 @@
                     <a:lstStyle/>
                     <a:p>
                       <a:r>
-                        <a:rPr sz="1250" b="0">
+                        <a:rPr sz="1200" b="0">
                           <a:latin typeface="Meiryo"/>
                         </a:rPr>
                         <a:t>0.086</a:t>
@@ -5841,7 +5989,7 @@
                     <a:lstStyle/>
                     <a:p>
                       <a:r>
-                        <a:rPr sz="1250" b="0">
+                        <a:rPr sz="1200" b="0">
                           <a:latin typeface="Meiryo"/>
                         </a:rPr>
                         <a:t>0.000</a:t>
@@ -5856,7 +6004,7 @@
                     <a:lstStyle/>
                     <a:p>
                       <a:r>
-                        <a:rPr sz="1250" b="0">
+                        <a:rPr sz="1200" b="0">
                           <a:latin typeface="Meiryo"/>
                         </a:rPr>
                         <a:t>0.118</a:t>
@@ -5871,7 +6019,7 @@
                     <a:lstStyle/>
                     <a:p>
                       <a:r>
-                        <a:rPr sz="1250" b="0">
+                        <a:rPr sz="1200" b="0">
                           <a:latin typeface="Meiryo"/>
                         </a:rPr>
                         <a:t>0.000</a:t>
@@ -5886,286 +6034,10 @@
                     <a:lstStyle/>
                     <a:p>
                       <a:r>
-                        <a:rPr sz="1250" b="0">
-                          <a:latin typeface="Meiryo"/>
-                        </a:rPr>
-                        <a:t>◎</a:t>
-                      </a:r>
-                    </a:p>
-                  </a:txBody>
-                  <a:tcPr/>
-                </a:tc>
-              </a:tr>
-              <a:tr h="472440">
-                <a:tc>
-                  <a:txBody>
-                    <a:bodyPr/>
-                    <a:lstStyle/>
-                    <a:p>
-                      <a:r>
-                        <a:rPr sz="1250" b="1">
-                          <a:latin typeface="Meiryo"/>
-                        </a:rPr>
-                        <a:t>prompting</a:t>
-                      </a:r>
-                    </a:p>
-                  </a:txBody>
-                  <a:tcPr/>
-                </a:tc>
-                <a:tc>
-                  <a:txBody>
-                    <a:bodyPr/>
-                    <a:lstStyle/>
-                    <a:p>
-                      <a:r>
-                        <a:rPr sz="1250" b="0">
-                          <a:latin typeface="Meiryo"/>
-                        </a:rPr>
-                        <a:t>0.180</a:t>
-                      </a:r>
-                    </a:p>
-                  </a:txBody>
-                  <a:tcPr/>
-                </a:tc>
-                <a:tc>
-                  <a:txBody>
-                    <a:bodyPr/>
-                    <a:lstStyle/>
-                    <a:p>
-                      <a:r>
-                        <a:rPr sz="1250" b="0">
-                          <a:latin typeface="Meiryo"/>
-                        </a:rPr>
-                        <a:t>0.088</a:t>
-                      </a:r>
-                    </a:p>
-                  </a:txBody>
-                  <a:tcPr/>
-                </a:tc>
-                <a:tc>
-                  <a:txBody>
-                    <a:bodyPr/>
-                    <a:lstStyle/>
-                    <a:p>
-                      <a:r>
-                        <a:rPr sz="1250" b="0">
-                          <a:latin typeface="Meiryo"/>
-                        </a:rPr>
-                        <a:t>0.227</a:t>
-                      </a:r>
-                    </a:p>
-                  </a:txBody>
-                  <a:tcPr/>
-                </a:tc>
-                <a:tc>
-                  <a:txBody>
-                    <a:bodyPr/>
-                    <a:lstStyle/>
-                    <a:p>
-                      <a:r>
-                        <a:rPr sz="1250" b="0">
-                          <a:latin typeface="Meiryo"/>
-                        </a:rPr>
-                        <a:t>0.062</a:t>
-                      </a:r>
-                    </a:p>
-                  </a:txBody>
-                  <a:tcPr/>
-                </a:tc>
-                <a:tc>
-                  <a:txBody>
-                    <a:bodyPr/>
-                    <a:lstStyle/>
-                    <a:p>
-                      <a:r>
-                        <a:rPr sz="1250" b="0">
-                          <a:latin typeface="Meiryo"/>
-                        </a:rPr>
-                        <a:t>× 誤指定でも編集</a:t>
-                      </a:r>
-                    </a:p>
-                  </a:txBody>
-                  <a:tcPr/>
-                </a:tc>
-              </a:tr>
-              <a:tr h="472440">
-                <a:tc>
-                  <a:txBody>
-                    <a:bodyPr/>
-                    <a:lstStyle/>
-                    <a:p>
-                      <a:r>
-                        <a:rPr sz="1250" b="1">
-                          <a:latin typeface="Meiryo"/>
-                        </a:rPr>
-                        <a:t>AxBench準拠 steer</a:t>
-                      </a:r>
-                    </a:p>
-                  </a:txBody>
-                  <a:tcPr/>
-                </a:tc>
-                <a:tc>
-                  <a:txBody>
-                    <a:bodyPr/>
-                    <a:lstStyle/>
-                    <a:p>
-                      <a:r>
-                        <a:rPr sz="1250" b="0">
-                          <a:latin typeface="Meiryo"/>
-                        </a:rPr>
-                        <a:t>0.070</a:t>
-                      </a:r>
-                    </a:p>
-                  </a:txBody>
-                  <a:tcPr/>
-                </a:tc>
-                <a:tc>
-                  <a:txBody>
-                    <a:bodyPr/>
-                    <a:lstStyle/>
-                    <a:p>
-                      <a:r>
-                        <a:rPr sz="1250" b="0">
-                          <a:latin typeface="Meiryo"/>
-                        </a:rPr>
-                        <a:t>0.052</a:t>
-                      </a:r>
-                    </a:p>
-                  </a:txBody>
-                  <a:tcPr/>
-                </a:tc>
-                <a:tc>
-                  <a:txBody>
-                    <a:bodyPr/>
-                    <a:lstStyle/>
-                    <a:p>
-                      <a:r>
-                        <a:rPr sz="1250" b="0">
-                          <a:latin typeface="Meiryo"/>
-                        </a:rPr>
-                        <a:t>0.148</a:t>
-                      </a:r>
-                    </a:p>
-                  </a:txBody>
-                  <a:tcPr/>
-                </a:tc>
-                <a:tc>
-                  <a:txBody>
-                    <a:bodyPr/>
-                    <a:lstStyle/>
-                    <a:p>
-                      <a:r>
-                        <a:rPr sz="1250" b="0">
-                          <a:latin typeface="Meiryo"/>
-                        </a:rPr>
-                        <a:t>0.120</a:t>
-                      </a:r>
-                    </a:p>
-                  </a:txBody>
-                  <a:tcPr/>
-                </a:tc>
-                <a:tc>
-                  <a:txBody>
-                    <a:bodyPr/>
-                    <a:lstStyle/>
-                    <a:p>
-                      <a:r>
-                        <a:rPr sz="1250" b="0">
-                          <a:latin typeface="Meiryo"/>
-                        </a:rPr>
-                        <a:t>× randomとの差 ≈0.02-0.03</a:t>
-                      </a:r>
-                    </a:p>
-                  </a:txBody>
-                  <a:tcPr/>
-                </a:tc>
-              </a:tr>
-              <a:tr h="472440">
-                <a:tc>
-                  <a:txBody>
-                    <a:bodyPr/>
-                    <a:lstStyle/>
-                    <a:p>
-                      <a:r>
-                        <a:rPr sz="1250" b="1">
-                          <a:latin typeface="Meiryo"/>
-                        </a:rPr>
-                        <a:t>LinguaLens準拠</a:t>
-                      </a:r>
-                    </a:p>
-                  </a:txBody>
-                  <a:tcPr/>
-                </a:tc>
-                <a:tc>
-                  <a:txBody>
-                    <a:bodyPr/>
-                    <a:lstStyle/>
-                    <a:p>
-                      <a:r>
-                        <a:rPr sz="1250" b="0">
-                          <a:latin typeface="Meiryo"/>
-                        </a:rPr>
-                        <a:t>0.016</a:t>
-                      </a:r>
-                    </a:p>
-                  </a:txBody>
-                  <a:tcPr/>
-                </a:tc>
-                <a:tc>
-                  <a:txBody>
-                    <a:bodyPr/>
-                    <a:lstStyle/>
-                    <a:p>
-                      <a:r>
-                        <a:rPr sz="1250" b="0">
-                          <a:latin typeface="Meiryo"/>
-                        </a:rPr>
-                        <a:t>0.010</a:t>
-                      </a:r>
-                    </a:p>
-                  </a:txBody>
-                  <a:tcPr/>
-                </a:tc>
-                <a:tc>
-                  <a:txBody>
-                    <a:bodyPr/>
-                    <a:lstStyle/>
-                    <a:p>
-                      <a:r>
-                        <a:rPr sz="1250" b="0">
-                          <a:latin typeface="Meiryo"/>
-                        </a:rPr>
-                        <a:t>0.106</a:t>
-                      </a:r>
-                    </a:p>
-                  </a:txBody>
-                  <a:tcPr/>
-                </a:tc>
-                <a:tc>
-                  <a:txBody>
-                    <a:bodyPr/>
-                    <a:lstStyle/>
-                    <a:p>
-                      <a:r>
-                        <a:rPr sz="1250" b="0">
-                          <a:latin typeface="Meiryo"/>
-                        </a:rPr>
-                        <a:t>0.094</a:t>
-                      </a:r>
-                    </a:p>
-                  </a:txBody>
-                  <a:tcPr/>
-                </a:tc>
-                <a:tc>
-                  <a:txBody>
-                    <a:bodyPr/>
-                    <a:lstStyle/>
-                    <a:p>
-                      <a:r>
-                        <a:rPr sz="1250" b="0">
-                          <a:latin typeface="Meiryo"/>
-                        </a:rPr>
-                        <a:t>× 差 ≈0.01</a:t>
+                        <a:rPr sz="1200" b="0">
+                          <a:latin typeface="Meiryo"/>
+                        </a:rPr>
+                        <a:t>○ 誤specは文を乱すが正解に一致せず</a:t>
                       </a:r>
                     </a:p>
                   </a:txBody>
@@ -6178,14 +6050,14 @@
       </p:graphicFrame>
       <p:sp>
         <p:nvSpPr>
-          <p:cNvPr id="5" name="TextBox 4"/>
+          <p:cNvPr id="6" name="TextBox 5"/>
           <p:cNvSpPr txBox="1"/>
           <p:nvPr/>
         </p:nvSpPr>
         <p:spPr>
           <a:xfrm>
-            <a:off x="502920" y="4663440"/>
-            <a:ext cx="11247120" cy="1828800"/>
+            <a:off x="502920" y="2788920"/>
+            <a:ext cx="11247120" cy="347472"/>
           </a:xfrm>
           <a:prstGeom prst="rect">
             <a:avLst/>
@@ -6204,13 +6076,542 @@
               </a:lnSpc>
             </a:pPr>
             <a:r>
-              <a:rPr sz="1400" b="0">
+              <a:rPr sz="1500" b="1">
+                <a:solidFill>
+                  <a:srgbClr val="5E6E8C"/>
+                </a:solidFill>
+                <a:latin typeface="Meiryo"/>
+              </a:rPr>
+              <a:t>書き換え枠(無介入でも自発編集 — randomが床相当になるのは介入が不活性なため)</a:t>
+            </a:r>
+          </a:p>
+        </p:txBody>
+      </p:sp>
+      <p:graphicFrame>
+        <p:nvGraphicFramePr>
+          <p:cNvPr id="7" name="Table 6"/>
+          <p:cNvGraphicFramePr>
+            <a:graphicFrameLocks noGrp="1"/>
+          </p:cNvGraphicFramePr>
+          <p:nvPr/>
+        </p:nvGraphicFramePr>
+        <p:xfrm>
+          <a:off x="502920" y="3172968"/>
+          <a:ext cx="11155680" cy="1920240"/>
+        </p:xfrm>
+        <a:graphic>
+          <a:graphicData uri="http://schemas.openxmlformats.org/drawingml/2006/table">
+            <a:tbl>
+              <a:tblPr firstRow="1" bandRow="1">
+                <a:tableStyleId>{5C22544A-7EE6-4342-B048-85BDC9FD1C3A}</a:tableStyleId>
+              </a:tblPr>
+              <a:tblGrid>
+                <a:gridCol w="1859280"/>
+                <a:gridCol w="1859280"/>
+                <a:gridCol w="1859280"/>
+                <a:gridCol w="1859280"/>
+                <a:gridCol w="1859280"/>
+                <a:gridCol w="1859280"/>
+              </a:tblGrid>
+              <a:tr h="384048">
+                <a:tc>
+                  <a:txBody>
+                    <a:bodyPr/>
+                    <a:lstStyle/>
+                    <a:p>
+                      <a:r>
+                        <a:rPr sz="1250" b="1">
+                          <a:latin typeface="Meiryo"/>
+                        </a:rPr>
+                        <a:t>手法</a:t>
+                      </a:r>
+                    </a:p>
+                  </a:txBody>
+                  <a:tcPr/>
+                </a:tc>
+                <a:tc>
+                  <a:txBody>
+                    <a:bodyPr/>
+                    <a:lstStyle/>
+                    <a:p>
+                      <a:r>
+                        <a:rPr sz="1250" b="1">
+                          <a:latin typeface="Meiryo"/>
+                        </a:rPr>
+                        <a:t>sup true</a:t>
+                      </a:r>
+                    </a:p>
+                  </a:txBody>
+                  <a:tcPr/>
+                </a:tc>
+                <a:tc>
+                  <a:txBody>
+                    <a:bodyPr/>
+                    <a:lstStyle/>
+                    <a:p>
+                      <a:r>
+                        <a:rPr sz="1250" b="1">
+                          <a:latin typeface="Meiryo"/>
+                        </a:rPr>
+                        <a:t>sup random</a:t>
+                      </a:r>
+                    </a:p>
+                  </a:txBody>
+                  <a:tcPr/>
+                </a:tc>
+                <a:tc>
+                  <a:txBody>
+                    <a:bodyPr/>
+                    <a:lstStyle/>
+                    <a:p>
+                      <a:r>
+                        <a:rPr sz="1250" b="1">
+                          <a:latin typeface="Meiryo"/>
+                        </a:rPr>
+                        <a:t>amp true</a:t>
+                      </a:r>
+                    </a:p>
+                  </a:txBody>
+                  <a:tcPr/>
+                </a:tc>
+                <a:tc>
+                  <a:txBody>
+                    <a:bodyPr/>
+                    <a:lstStyle/>
+                    <a:p>
+                      <a:r>
+                        <a:rPr sz="1250" b="1">
+                          <a:latin typeface="Meiryo"/>
+                        </a:rPr>
+                        <a:t>amp random</a:t>
+                      </a:r>
+                    </a:p>
+                  </a:txBody>
+                  <a:tcPr/>
+                </a:tc>
+                <a:tc>
+                  <a:txBody>
+                    <a:bodyPr/>
+                    <a:lstStyle/>
+                    <a:p>
+                      <a:r>
+                        <a:rPr sz="1250" b="1">
+                          <a:latin typeface="Meiryo"/>
+                        </a:rPr>
+                        <a:t>備考</a:t>
+                      </a:r>
+                    </a:p>
+                  </a:txBody>
+                  <a:tcPr/>
+                </a:tc>
+              </a:tr>
+              <a:tr h="384048">
+                <a:tc>
+                  <a:txBody>
+                    <a:bodyPr/>
+                    <a:lstStyle/>
+                    <a:p>
+                      <a:r>
+                        <a:rPr sz="1200" b="1">
+                          <a:latin typeface="Meiryo"/>
+                        </a:rPr>
+                        <a:t>prompting(特徴名入り指示)</a:t>
+                      </a:r>
+                    </a:p>
+                  </a:txBody>
+                  <a:tcPr/>
+                </a:tc>
+                <a:tc>
+                  <a:txBody>
+                    <a:bodyPr/>
+                    <a:lstStyle/>
+                    <a:p>
+                      <a:r>
+                        <a:rPr sz="1200" b="0">
+                          <a:latin typeface="Meiryo"/>
+                        </a:rPr>
+                        <a:t>0.180</a:t>
+                      </a:r>
+                    </a:p>
+                  </a:txBody>
+                  <a:tcPr/>
+                </a:tc>
+                <a:tc>
+                  <a:txBody>
+                    <a:bodyPr/>
+                    <a:lstStyle/>
+                    <a:p>
+                      <a:r>
+                        <a:rPr sz="1200" b="0">
+                          <a:latin typeface="Meiryo"/>
+                        </a:rPr>
+                        <a:t>0.088</a:t>
+                      </a:r>
+                    </a:p>
+                  </a:txBody>
+                  <a:tcPr/>
+                </a:tc>
+                <a:tc>
+                  <a:txBody>
+                    <a:bodyPr/>
+                    <a:lstStyle/>
+                    <a:p>
+                      <a:r>
+                        <a:rPr sz="1200" b="0">
+                          <a:latin typeface="Meiryo"/>
+                        </a:rPr>
+                        <a:t>0.227</a:t>
+                      </a:r>
+                    </a:p>
+                  </a:txBody>
+                  <a:tcPr/>
+                </a:tc>
+                <a:tc>
+                  <a:txBody>
+                    <a:bodyPr/>
+                    <a:lstStyle/>
+                    <a:p>
+                      <a:r>
+                        <a:rPr sz="1200" b="0">
+                          <a:latin typeface="Meiryo"/>
+                        </a:rPr>
+                        <a:t>0.062</a:t>
+                      </a:r>
+                    </a:p>
+                  </a:txBody>
+                  <a:tcPr/>
+                </a:tc>
+                <a:tc>
+                  <a:txBody>
+                    <a:bodyPr/>
+                    <a:lstStyle/>
+                    <a:p>
+                      <a:r>
+                        <a:rPr sz="1200" b="0">
+                          <a:latin typeface="Meiryo"/>
+                        </a:rPr>
+                        <a:t>randomでも編集=特異性なし</a:t>
+                      </a:r>
+                    </a:p>
+                  </a:txBody>
+                  <a:tcPr/>
+                </a:tc>
+              </a:tr>
+              <a:tr h="384048">
+                <a:tc>
+                  <a:txBody>
+                    <a:bodyPr/>
+                    <a:lstStyle/>
+                    <a:p>
+                      <a:r>
+                        <a:rPr sz="1200" b="1">
+                          <a:latin typeface="Meiryo"/>
+                        </a:rPr>
+                        <a:t>AxBench準拠ベクトル注入</a:t>
+                      </a:r>
+                    </a:p>
+                  </a:txBody>
+                  <a:tcPr/>
+                </a:tc>
+                <a:tc>
+                  <a:txBody>
+                    <a:bodyPr/>
+                    <a:lstStyle/>
+                    <a:p>
+                      <a:r>
+                        <a:rPr sz="1200" b="0">
+                          <a:latin typeface="Meiryo"/>
+                        </a:rPr>
+                        <a:t>0.070</a:t>
+                      </a:r>
+                    </a:p>
+                  </a:txBody>
+                  <a:tcPr/>
+                </a:tc>
+                <a:tc>
+                  <a:txBody>
+                    <a:bodyPr/>
+                    <a:lstStyle/>
+                    <a:p>
+                      <a:r>
+                        <a:rPr sz="1200" b="0">
+                          <a:latin typeface="Meiryo"/>
+                        </a:rPr>
+                        <a:t>0.052</a:t>
+                      </a:r>
+                    </a:p>
+                  </a:txBody>
+                  <a:tcPr/>
+                </a:tc>
+                <a:tc>
+                  <a:txBody>
+                    <a:bodyPr/>
+                    <a:lstStyle/>
+                    <a:p>
+                      <a:r>
+                        <a:rPr sz="1200" b="0">
+                          <a:latin typeface="Meiryo"/>
+                        </a:rPr>
+                        <a:t>0.148</a:t>
+                      </a:r>
+                    </a:p>
+                  </a:txBody>
+                  <a:tcPr/>
+                </a:tc>
+                <a:tc>
+                  <a:txBody>
+                    <a:bodyPr/>
+                    <a:lstStyle/>
+                    <a:p>
+                      <a:r>
+                        <a:rPr sz="1200" b="0">
+                          <a:latin typeface="Meiryo"/>
+                        </a:rPr>
+                        <a:t>0.120</a:t>
+                      </a:r>
+                    </a:p>
+                  </a:txBody>
+                  <a:tcPr/>
+                </a:tc>
+                <a:tc>
+                  <a:txBody>
+                    <a:bodyPr/>
+                    <a:lstStyle/>
+                    <a:p>
+                      <a:r>
+                        <a:rPr sz="1200" b="0">
+                          <a:latin typeface="Meiryo"/>
+                        </a:rPr>
+                        <a:t>random≈床</a:t>
+                      </a:r>
+                    </a:p>
+                  </a:txBody>
+                  <a:tcPr/>
+                </a:tc>
+              </a:tr>
+              <a:tr h="384048">
+                <a:tc>
+                  <a:txBody>
+                    <a:bodyPr/>
+                    <a:lstStyle/>
+                    <a:p>
+                      <a:r>
+                        <a:rPr sz="1200" b="1">
+                          <a:latin typeface="Meiryo"/>
+                        </a:rPr>
+                        <a:t>LinguaLens準拠クランプ</a:t>
+                      </a:r>
+                    </a:p>
+                  </a:txBody>
+                  <a:tcPr/>
+                </a:tc>
+                <a:tc>
+                  <a:txBody>
+                    <a:bodyPr/>
+                    <a:lstStyle/>
+                    <a:p>
+                      <a:r>
+                        <a:rPr sz="1200" b="0">
+                          <a:latin typeface="Meiryo"/>
+                        </a:rPr>
+                        <a:t>0.016</a:t>
+                      </a:r>
+                    </a:p>
+                  </a:txBody>
+                  <a:tcPr/>
+                </a:tc>
+                <a:tc>
+                  <a:txBody>
+                    <a:bodyPr/>
+                    <a:lstStyle/>
+                    <a:p>
+                      <a:r>
+                        <a:rPr sz="1200" b="0">
+                          <a:latin typeface="Meiryo"/>
+                        </a:rPr>
+                        <a:t>0.010</a:t>
+                      </a:r>
+                    </a:p>
+                  </a:txBody>
+                  <a:tcPr/>
+                </a:tc>
+                <a:tc>
+                  <a:txBody>
+                    <a:bodyPr/>
+                    <a:lstStyle/>
+                    <a:p>
+                      <a:r>
+                        <a:rPr sz="1200" b="0">
+                          <a:latin typeface="Meiryo"/>
+                        </a:rPr>
+                        <a:t>0.106</a:t>
+                      </a:r>
+                    </a:p>
+                  </a:txBody>
+                  <a:tcPr/>
+                </a:tc>
+                <a:tc>
+                  <a:txBody>
+                    <a:bodyPr/>
+                    <a:lstStyle/>
+                    <a:p>
+                      <a:r>
+                        <a:rPr sz="1200" b="0">
+                          <a:latin typeface="Meiryo"/>
+                        </a:rPr>
+                        <a:t>0.094</a:t>
+                      </a:r>
+                    </a:p>
+                  </a:txBody>
+                  <a:tcPr/>
+                </a:tc>
+                <a:tc>
+                  <a:txBody>
+                    <a:bodyPr/>
+                    <a:lstStyle/>
+                    <a:p>
+                      <a:r>
+                        <a:rPr sz="1200" b="0">
+                          <a:latin typeface="Meiryo"/>
+                        </a:rPr>
+                        <a:t>random≈床(recon)</a:t>
+                      </a:r>
+                    </a:p>
+                  </a:txBody>
+                  <a:tcPr/>
+                </a:tc>
+              </a:tr>
+              <a:tr h="384048">
+                <a:tc>
+                  <a:txBody>
+                    <a:bodyPr/>
+                    <a:lstStyle/>
+                    <a:p>
+                      <a:r>
+                        <a:rPr sz="1200" b="1">
+                          <a:latin typeface="Meiryo"/>
+                        </a:rPr>
+                        <a:t>素のrewrite(無介入の床)</a:t>
+                      </a:r>
+                    </a:p>
+                  </a:txBody>
+                  <a:tcPr/>
+                </a:tc>
+                <a:tc>
+                  <a:txBody>
+                    <a:bodyPr/>
+                    <a:lstStyle/>
+                    <a:p>
+                      <a:r>
+                        <a:rPr sz="1200" b="0">
+                          <a:latin typeface="Meiryo"/>
+                        </a:rPr>
+                        <a:t>0.060</a:t>
+                      </a:r>
+                    </a:p>
+                  </a:txBody>
+                  <a:tcPr/>
+                </a:tc>
+                <a:tc>
+                  <a:txBody>
+                    <a:bodyPr/>
+                    <a:lstStyle/>
+                    <a:p>
+                      <a:r>
+                        <a:rPr sz="1200" b="0">
+                          <a:latin typeface="Meiryo"/>
+                        </a:rPr>
+                        <a:t>—</a:t>
+                      </a:r>
+                    </a:p>
+                  </a:txBody>
+                  <a:tcPr/>
+                </a:tc>
+                <a:tc>
+                  <a:txBody>
+                    <a:bodyPr/>
+                    <a:lstStyle/>
+                    <a:p>
+                      <a:r>
+                        <a:rPr sz="1200" b="0">
+                          <a:latin typeface="Meiryo"/>
+                        </a:rPr>
+                        <a:t>0.120</a:t>
+                      </a:r>
+                    </a:p>
+                  </a:txBody>
+                  <a:tcPr/>
+                </a:tc>
+                <a:tc>
+                  <a:txBody>
+                    <a:bodyPr/>
+                    <a:lstStyle/>
+                    <a:p>
+                      <a:r>
+                        <a:rPr sz="1200" b="0">
+                          <a:latin typeface="Meiryo"/>
+                        </a:rPr>
+                        <a:t>—</a:t>
+                      </a:r>
+                    </a:p>
+                  </a:txBody>
+                  <a:tcPr/>
+                </a:tc>
+                <a:tc>
+                  <a:txBody>
+                    <a:bodyPr/>
+                    <a:lstStyle/>
+                    <a:p>
+                      <a:r>
+                        <a:rPr sz="1200" b="0">
+                          <a:latin typeface="Meiryo"/>
+                        </a:rPr>
+                        <a:t>指示だけの自発編集</a:t>
+                      </a:r>
+                    </a:p>
+                  </a:txBody>
+                  <a:tcPr/>
+                </a:tc>
+              </a:tr>
+            </a:tbl>
+          </a:graphicData>
+        </a:graphic>
+      </p:graphicFrame>
+      <p:sp>
+        <p:nvSpPr>
+          <p:cNvPr id="8" name="TextBox 7"/>
+          <p:cNvSpPr txBox="1"/>
+          <p:nvPr/>
+        </p:nvSpPr>
+        <p:spPr>
+          <a:xfrm>
+            <a:off x="502920" y="5257800"/>
+            <a:ext cx="11247120" cy="1554480"/>
+          </a:xfrm>
+          <a:prstGeom prst="rect">
+            <a:avLst/>
+          </a:prstGeom>
+          <a:noFill/>
+        </p:spPr>
+        <p:txBody>
+          <a:bodyPr wrap="square">
+            <a:spAutoFit/>
+          </a:bodyPr>
+          <a:lstStyle/>
+          <a:p>
+            <a:pPr algn="l">
+              <a:lnSpc>
+                <a:spcPct val="115000"/>
+              </a:lnSpc>
+            </a:pPr>
+            <a:r>
+              <a:rPr sz="1350" b="0">
                 <a:solidFill>
                   <a:srgbClr val="5A6472"/>
                 </a:solidFill>
                 <a:latin typeface="Meiryo"/>
               </a:rPr>
-              <a:t>・true−random(正味の介入効果)では: 提案 0.128/0.094 ≧ prompting 0.092/0.165 で消す方向は提案が上回る</a:t>
+              <a:t>・枠が違う表同士の生の数値比較は不可 — 各行は「true − 自分のrandom(床)」で読む</a:t>
             </a:r>
           </a:p>
           <a:p>
@@ -6220,13 +6621,13 @@
               </a:lnSpc>
             </a:pPr>
             <a:r>
-              <a:rPr sz="1400" b="0">
+              <a:rPr sz="1350" b="0">
                 <a:solidFill>
                   <a:srgbClr val="5A6472"/>
                 </a:solidFill>
                 <a:latin typeface="Meiryo"/>
               </a:rPr>
-              <a:t>・promptingのtrueの高さの一部は「指示なら何でも編集する」性質(random 0.088)による — 介入としての特異性がない</a:t>
+              <a:t>・正味: 提案 0.128/0.094、prompting 0.092/0.165、AxB準拠 0.018/0.028、LL準拠 0.006/0.012</a:t>
             </a:r>
           </a:p>
           <a:p>
@@ -6236,13 +6637,13 @@
               </a:lnSpc>
             </a:pPr>
             <a:r>
-              <a:rPr sz="1400" b="0">
+              <a:rPr sz="1350" b="0">
                 <a:solidFill>
                   <a:srgbClr val="5A6472"/>
                 </a:solidFill>
                 <a:latin typeface="Meiryo"/>
               </a:rPr>
-              <a:t>・FIC(特徴が本当に動いたかのgpt-4o判定、L12): 消す方向 提案0.94 ≫ steer 0.76 / prompting 0.42 / LinguaLens準拠 0.08</a:t>
+              <a:t>・FIC(gpt-4o因果判定、L12): 消す方向 提案0.94 ≫ steer 0.76 / prompting 0.42 / LL準拠 0.08</a:t>
             </a:r>
           </a:p>
           <a:p>
@@ -6252,13 +6653,13 @@
               </a:lnSpc>
             </a:pPr>
             <a:r>
-              <a:rPr sz="1400" b="0">
+              <a:rPr sz="1350" b="0">
                 <a:solidFill>
                   <a:srgbClr val="5A6472"/>
                 </a:solidFill>
                 <a:latin typeface="Meiryo"/>
               </a:rPr>
-              <a:t>  足す方向 prompting 0.49 &gt; steer 0.35 &gt; 提案 0.31 ≫ LinguaLens準拠 −0.07 — 消す方向の因果効果では提案が圧倒</a:t>
+              <a:t>  足す方向 prompting 0.49 &gt; steer 0.35 &gt; 提案 0.31 — 消す方向の因果効果では提案が圧倒</a:t>
             </a:r>
           </a:p>
         </p:txBody>
@@ -6358,22 +6759,61 @@
                 </a:solidFill>
                 <a:latin typeface="Meiryo"/>
               </a:rPr>
-              <a:t>実験結果 2/2 — L4・L20(random併記)</a:t>
+              <a:t>実験結果 2/2 — L4・L20(true / random、枠ごとに分離)</a:t>
+            </a:r>
+          </a:p>
+        </p:txBody>
+      </p:sp>
+      <p:sp>
+        <p:nvSpPr>
+          <p:cNvPr id="4" name="TextBox 3"/>
+          <p:cNvSpPr txBox="1"/>
+          <p:nvPr/>
+        </p:nvSpPr>
+        <p:spPr>
+          <a:xfrm>
+            <a:off x="502920" y="1051560"/>
+            <a:ext cx="11247120" cy="347472"/>
+          </a:xfrm>
+          <a:prstGeom prst="rect">
+            <a:avLst/>
+          </a:prstGeom>
+          <a:noFill/>
+        </p:spPr>
+        <p:txBody>
+          <a:bodyPr wrap="square">
+            <a:spAutoFit/>
+          </a:bodyPr>
+          <a:lstStyle/>
+          <a:p>
+            <a:pPr algn="l">
+              <a:lnSpc>
+                <a:spcPct val="115000"/>
+              </a:lnSpc>
+            </a:pPr>
+            <a:r>
+              <a:rPr sz="1500" b="1">
+                <a:solidFill>
+                  <a:srgbClr val="0E7C66"/>
+                </a:solidFill>
+                <a:latin typeface="Meiryo"/>
+              </a:rPr>
+              <a:t>復唱枠</a:t>
             </a:r>
           </a:p>
         </p:txBody>
       </p:sp>
       <p:graphicFrame>
         <p:nvGraphicFramePr>
-          <p:cNvPr id="4" name="Table 3"/>
+          <p:cNvPr id="5" name="Table 4"/>
           <p:cNvGraphicFramePr>
             <a:graphicFrameLocks noGrp="1"/>
           </p:cNvGraphicFramePr>
           <p:nvPr/>
         </p:nvGraphicFramePr>
         <p:xfrm>
-          <a:off x="502920" y="1143000"/>
-          <a:ext cx="11155680" cy="2697480"/>
+          <a:off x="502920" y="1435607"/>
+          <a:ext cx="11155680" cy="1152144"/>
         </p:xfrm>
         <a:graphic>
           <a:graphicData uri="http://schemas.openxmlformats.org/drawingml/2006/table">
@@ -6388,14 +6828,14 @@
                 <a:gridCol w="2231136"/>
                 <a:gridCol w="2231136"/>
               </a:tblGrid>
-              <a:tr h="449580">
-                <a:tc>
-                  <a:txBody>
-                    <a:bodyPr/>
-                    <a:lstStyle/>
-                    <a:p>
-                      <a:r>
-                        <a:rPr sz="1300" b="1">
+              <a:tr h="384048">
+                <a:tc>
+                  <a:txBody>
+                    <a:bodyPr/>
+                    <a:lstStyle/>
+                    <a:p>
+                      <a:r>
+                        <a:rPr sz="1250" b="1">
                           <a:latin typeface="Meiryo"/>
                         </a:rPr>
                         <a:t>手法(true/random)</a:t>
@@ -6410,7 +6850,7 @@
                     <a:lstStyle/>
                     <a:p>
                       <a:r>
-                        <a:rPr sz="1300" b="1">
+                        <a:rPr sz="1250" b="1">
                           <a:latin typeface="Meiryo"/>
                         </a:rPr>
                         <a:t>L4 sup</a:t>
@@ -6425,7 +6865,7 @@
                     <a:lstStyle/>
                     <a:p>
                       <a:r>
-                        <a:rPr sz="1300" b="1">
+                        <a:rPr sz="1250" b="1">
                           <a:latin typeface="Meiryo"/>
                         </a:rPr>
                         <a:t>L4 amp</a:t>
@@ -6440,7 +6880,7 @@
                     <a:lstStyle/>
                     <a:p>
                       <a:r>
-                        <a:rPr sz="1300" b="1">
+                        <a:rPr sz="1250" b="1">
                           <a:latin typeface="Meiryo"/>
                         </a:rPr>
                         <a:t>L20 sup</a:t>
@@ -6455,7 +6895,7 @@
                     <a:lstStyle/>
                     <a:p>
                       <a:r>
-                        <a:rPr sz="1300" b="1">
+                        <a:rPr sz="1250" b="1">
                           <a:latin typeface="Meiryo"/>
                         </a:rPr>
                         <a:t>L20 amp</a:t>
@@ -6465,7 +6905,7 @@
                   <a:tcPr/>
                 </a:tc>
               </a:tr>
-              <a:tr h="449580">
+              <a:tr h="384048">
                 <a:tc>
                   <a:txBody>
                     <a:bodyPr/>
@@ -6542,7 +6982,7 @@
                   <a:tcPr/>
                 </a:tc>
               </a:tr>
-              <a:tr h="449580">
+              <a:tr h="384048">
                 <a:tc>
                   <a:txBody>
                     <a:bodyPr/>
@@ -6613,237 +7053,6 @@
                           <a:latin typeface="Meiryo"/>
                         </a:rPr>
                         <a:t>0.024 / 0.002</a:t>
-                      </a:r>
-                    </a:p>
-                  </a:txBody>
-                  <a:tcPr/>
-                </a:tc>
-              </a:tr>
-              <a:tr h="449580">
-                <a:tc>
-                  <a:txBody>
-                    <a:bodyPr/>
-                    <a:lstStyle/>
-                    <a:p>
-                      <a:r>
-                        <a:rPr sz="1200" b="1">
-                          <a:latin typeface="Meiryo"/>
-                        </a:rPr>
-                        <a:t>prompting(層共通)</a:t>
-                      </a:r>
-                    </a:p>
-                  </a:txBody>
-                  <a:tcPr/>
-                </a:tc>
-                <a:tc>
-                  <a:txBody>
-                    <a:bodyPr/>
-                    <a:lstStyle/>
-                    <a:p>
-                      <a:r>
-                        <a:rPr sz="1200" b="0">
-                          <a:latin typeface="Meiryo"/>
-                        </a:rPr>
-                        <a:t>0.180 / 0.088</a:t>
-                      </a:r>
-                    </a:p>
-                  </a:txBody>
-                  <a:tcPr/>
-                </a:tc>
-                <a:tc>
-                  <a:txBody>
-                    <a:bodyPr/>
-                    <a:lstStyle/>
-                    <a:p>
-                      <a:r>
-                        <a:rPr sz="1200" b="0">
-                          <a:latin typeface="Meiryo"/>
-                        </a:rPr>
-                        <a:t>0.227 / 0.062</a:t>
-                      </a:r>
-                    </a:p>
-                  </a:txBody>
-                  <a:tcPr/>
-                </a:tc>
-                <a:tc>
-                  <a:txBody>
-                    <a:bodyPr/>
-                    <a:lstStyle/>
-                    <a:p>
-                      <a:r>
-                        <a:rPr sz="1200" b="0">
-                          <a:latin typeface="Meiryo"/>
-                        </a:rPr>
-                        <a:t>0.180 / 0.088</a:t>
-                      </a:r>
-                    </a:p>
-                  </a:txBody>
-                  <a:tcPr/>
-                </a:tc>
-                <a:tc>
-                  <a:txBody>
-                    <a:bodyPr/>
-                    <a:lstStyle/>
-                    <a:p>
-                      <a:r>
-                        <a:rPr sz="1200" b="0">
-                          <a:latin typeface="Meiryo"/>
-                        </a:rPr>
-                        <a:t>0.227 / 0.062</a:t>
-                      </a:r>
-                    </a:p>
-                  </a:txBody>
-                  <a:tcPr/>
-                </a:tc>
-              </a:tr>
-              <a:tr h="449580">
-                <a:tc>
-                  <a:txBody>
-                    <a:bodyPr/>
-                    <a:lstStyle/>
-                    <a:p>
-                      <a:r>
-                        <a:rPr sz="1200" b="1">
-                          <a:latin typeface="Meiryo"/>
-                        </a:rPr>
-                        <a:t>AxBench準拠 steer</a:t>
-                      </a:r>
-                    </a:p>
-                  </a:txBody>
-                  <a:tcPr/>
-                </a:tc>
-                <a:tc>
-                  <a:txBody>
-                    <a:bodyPr/>
-                    <a:lstStyle/>
-                    <a:p>
-                      <a:r>
-                        <a:rPr sz="1200" b="0">
-                          <a:latin typeface="Meiryo"/>
-                        </a:rPr>
-                        <a:t>0.076 / 0.066</a:t>
-                      </a:r>
-                    </a:p>
-                  </a:txBody>
-                  <a:tcPr/>
-                </a:tc>
-                <a:tc>
-                  <a:txBody>
-                    <a:bodyPr/>
-                    <a:lstStyle/>
-                    <a:p>
-                      <a:r>
-                        <a:rPr sz="1200" b="0">
-                          <a:latin typeface="Meiryo"/>
-                        </a:rPr>
-                        <a:t>0.132 / 0.112</a:t>
-                      </a:r>
-                    </a:p>
-                  </a:txBody>
-                  <a:tcPr/>
-                </a:tc>
-                <a:tc>
-                  <a:txBody>
-                    <a:bodyPr/>
-                    <a:lstStyle/>
-                    <a:p>
-                      <a:r>
-                        <a:rPr sz="1200" b="0">
-                          <a:latin typeface="Meiryo"/>
-                        </a:rPr>
-                        <a:t>0.056 / 0.056</a:t>
-                      </a:r>
-                    </a:p>
-                  </a:txBody>
-                  <a:tcPr/>
-                </a:tc>
-                <a:tc>
-                  <a:txBody>
-                    <a:bodyPr/>
-                    <a:lstStyle/>
-                    <a:p>
-                      <a:r>
-                        <a:rPr sz="1200" b="0">
-                          <a:latin typeface="Meiryo"/>
-                        </a:rPr>
-                        <a:t>0.110 / 0.118</a:t>
-                      </a:r>
-                    </a:p>
-                  </a:txBody>
-                  <a:tcPr/>
-                </a:tc>
-              </a:tr>
-              <a:tr h="449580">
-                <a:tc>
-                  <a:txBody>
-                    <a:bodyPr/>
-                    <a:lstStyle/>
-                    <a:p>
-                      <a:r>
-                        <a:rPr sz="1200" b="1">
-                          <a:latin typeface="Meiryo"/>
-                        </a:rPr>
-                        <a:t>LinguaLens準拠</a:t>
-                      </a:r>
-                    </a:p>
-                  </a:txBody>
-                  <a:tcPr/>
-                </a:tc>
-                <a:tc>
-                  <a:txBody>
-                    <a:bodyPr/>
-                    <a:lstStyle/>
-                    <a:p>
-                      <a:r>
-                        <a:rPr sz="1200" b="0">
-                          <a:latin typeface="Meiryo"/>
-                        </a:rPr>
-                        <a:t>0.046 / 0.030</a:t>
-                      </a:r>
-                    </a:p>
-                  </a:txBody>
-                  <a:tcPr/>
-                </a:tc>
-                <a:tc>
-                  <a:txBody>
-                    <a:bodyPr/>
-                    <a:lstStyle/>
-                    <a:p>
-                      <a:r>
-                        <a:rPr sz="1200" b="0">
-                          <a:latin typeface="Meiryo"/>
-                        </a:rPr>
-                        <a:t>0.070 / 0.042</a:t>
-                      </a:r>
-                    </a:p>
-                  </a:txBody>
-                  <a:tcPr/>
-                </a:tc>
-                <a:tc>
-                  <a:txBody>
-                    <a:bodyPr/>
-                    <a:lstStyle/>
-                    <a:p>
-                      <a:r>
-                        <a:rPr sz="1200" b="0">
-                          <a:latin typeface="Meiryo"/>
-                        </a:rPr>
-                        <a:t>0.048 / 0.050</a:t>
-                      </a:r>
-                    </a:p>
-                  </a:txBody>
-                  <a:tcPr/>
-                </a:tc>
-                <a:tc>
-                  <a:txBody>
-                    <a:bodyPr/>
-                    <a:lstStyle/>
-                    <a:p>
-                      <a:r>
-                        <a:rPr sz="1200" b="0">
-                          <a:latin typeface="Meiryo"/>
-                        </a:rPr>
-                        <a:t>0.108 / 0.108</a:t>
                       </a:r>
                     </a:p>
                   </a:txBody>
@@ -6856,14 +7065,14 @@
       </p:graphicFrame>
       <p:sp>
         <p:nvSpPr>
-          <p:cNvPr id="5" name="TextBox 4"/>
+          <p:cNvPr id="6" name="TextBox 5"/>
           <p:cNvSpPr txBox="1"/>
           <p:nvPr/>
         </p:nvSpPr>
         <p:spPr>
           <a:xfrm>
-            <a:off x="502920" y="4526280"/>
-            <a:ext cx="11247120" cy="2011680"/>
+            <a:off x="502920" y="2788920"/>
+            <a:ext cx="11247120" cy="347472"/>
           </a:xfrm>
           <a:prstGeom prst="rect">
             <a:avLst/>
@@ -6882,6 +7091,459 @@
               </a:lnSpc>
             </a:pPr>
             <a:r>
+              <a:rPr sz="1500" b="1">
+                <a:solidFill>
+                  <a:srgbClr val="5E6E8C"/>
+                </a:solidFill>
+                <a:latin typeface="Meiryo"/>
+              </a:rPr>
+              <a:t>書き換え枠</a:t>
+            </a:r>
+          </a:p>
+        </p:txBody>
+      </p:sp>
+      <p:graphicFrame>
+        <p:nvGraphicFramePr>
+          <p:cNvPr id="7" name="Table 6"/>
+          <p:cNvGraphicFramePr>
+            <a:graphicFrameLocks noGrp="1"/>
+          </p:cNvGraphicFramePr>
+          <p:nvPr/>
+        </p:nvGraphicFramePr>
+        <p:xfrm>
+          <a:off x="502920" y="3172968"/>
+          <a:ext cx="11155680" cy="1920240"/>
+        </p:xfrm>
+        <a:graphic>
+          <a:graphicData uri="http://schemas.openxmlformats.org/drawingml/2006/table">
+            <a:tbl>
+              <a:tblPr firstRow="1" bandRow="1">
+                <a:tableStyleId>{5C22544A-7EE6-4342-B048-85BDC9FD1C3A}</a:tableStyleId>
+              </a:tblPr>
+              <a:tblGrid>
+                <a:gridCol w="2231136"/>
+                <a:gridCol w="2231136"/>
+                <a:gridCol w="2231136"/>
+                <a:gridCol w="2231136"/>
+                <a:gridCol w="2231136"/>
+              </a:tblGrid>
+              <a:tr h="384048">
+                <a:tc>
+                  <a:txBody>
+                    <a:bodyPr/>
+                    <a:lstStyle/>
+                    <a:p>
+                      <a:r>
+                        <a:rPr sz="1250" b="1">
+                          <a:latin typeface="Meiryo"/>
+                        </a:rPr>
+                        <a:t>手法(true/random)</a:t>
+                      </a:r>
+                    </a:p>
+                  </a:txBody>
+                  <a:tcPr/>
+                </a:tc>
+                <a:tc>
+                  <a:txBody>
+                    <a:bodyPr/>
+                    <a:lstStyle/>
+                    <a:p>
+                      <a:r>
+                        <a:rPr sz="1250" b="1">
+                          <a:latin typeface="Meiryo"/>
+                        </a:rPr>
+                        <a:t>L4 sup</a:t>
+                      </a:r>
+                    </a:p>
+                  </a:txBody>
+                  <a:tcPr/>
+                </a:tc>
+                <a:tc>
+                  <a:txBody>
+                    <a:bodyPr/>
+                    <a:lstStyle/>
+                    <a:p>
+                      <a:r>
+                        <a:rPr sz="1250" b="1">
+                          <a:latin typeface="Meiryo"/>
+                        </a:rPr>
+                        <a:t>L4 amp</a:t>
+                      </a:r>
+                    </a:p>
+                  </a:txBody>
+                  <a:tcPr/>
+                </a:tc>
+                <a:tc>
+                  <a:txBody>
+                    <a:bodyPr/>
+                    <a:lstStyle/>
+                    <a:p>
+                      <a:r>
+                        <a:rPr sz="1250" b="1">
+                          <a:latin typeface="Meiryo"/>
+                        </a:rPr>
+                        <a:t>L20 sup</a:t>
+                      </a:r>
+                    </a:p>
+                  </a:txBody>
+                  <a:tcPr/>
+                </a:tc>
+                <a:tc>
+                  <a:txBody>
+                    <a:bodyPr/>
+                    <a:lstStyle/>
+                    <a:p>
+                      <a:r>
+                        <a:rPr sz="1250" b="1">
+                          <a:latin typeface="Meiryo"/>
+                        </a:rPr>
+                        <a:t>L20 amp</a:t>
+                      </a:r>
+                    </a:p>
+                  </a:txBody>
+                  <a:tcPr/>
+                </a:tc>
+              </a:tr>
+              <a:tr h="384048">
+                <a:tc>
+                  <a:txBody>
+                    <a:bodyPr/>
+                    <a:lstStyle/>
+                    <a:p>
+                      <a:r>
+                        <a:rPr sz="1200" b="1">
+                          <a:latin typeface="Meiryo"/>
+                        </a:rPr>
+                        <a:t>prompting(層共通)</a:t>
+                      </a:r>
+                    </a:p>
+                  </a:txBody>
+                  <a:tcPr/>
+                </a:tc>
+                <a:tc>
+                  <a:txBody>
+                    <a:bodyPr/>
+                    <a:lstStyle/>
+                    <a:p>
+                      <a:r>
+                        <a:rPr sz="1200" b="0">
+                          <a:latin typeface="Meiryo"/>
+                        </a:rPr>
+                        <a:t>0.180 / 0.088</a:t>
+                      </a:r>
+                    </a:p>
+                  </a:txBody>
+                  <a:tcPr/>
+                </a:tc>
+                <a:tc>
+                  <a:txBody>
+                    <a:bodyPr/>
+                    <a:lstStyle/>
+                    <a:p>
+                      <a:r>
+                        <a:rPr sz="1200" b="0">
+                          <a:latin typeface="Meiryo"/>
+                        </a:rPr>
+                        <a:t>0.227 / 0.062</a:t>
+                      </a:r>
+                    </a:p>
+                  </a:txBody>
+                  <a:tcPr/>
+                </a:tc>
+                <a:tc>
+                  <a:txBody>
+                    <a:bodyPr/>
+                    <a:lstStyle/>
+                    <a:p>
+                      <a:r>
+                        <a:rPr sz="1200" b="0">
+                          <a:latin typeface="Meiryo"/>
+                        </a:rPr>
+                        <a:t>0.180 / 0.088</a:t>
+                      </a:r>
+                    </a:p>
+                  </a:txBody>
+                  <a:tcPr/>
+                </a:tc>
+                <a:tc>
+                  <a:txBody>
+                    <a:bodyPr/>
+                    <a:lstStyle/>
+                    <a:p>
+                      <a:r>
+                        <a:rPr sz="1200" b="0">
+                          <a:latin typeface="Meiryo"/>
+                        </a:rPr>
+                        <a:t>0.227 / 0.062</a:t>
+                      </a:r>
+                    </a:p>
+                  </a:txBody>
+                  <a:tcPr/>
+                </a:tc>
+              </a:tr>
+              <a:tr h="384048">
+                <a:tc>
+                  <a:txBody>
+                    <a:bodyPr/>
+                    <a:lstStyle/>
+                    <a:p>
+                      <a:r>
+                        <a:rPr sz="1200" b="1">
+                          <a:latin typeface="Meiryo"/>
+                        </a:rPr>
+                        <a:t>AxBench準拠ベクトル注入</a:t>
+                      </a:r>
+                    </a:p>
+                  </a:txBody>
+                  <a:tcPr/>
+                </a:tc>
+                <a:tc>
+                  <a:txBody>
+                    <a:bodyPr/>
+                    <a:lstStyle/>
+                    <a:p>
+                      <a:r>
+                        <a:rPr sz="1200" b="0">
+                          <a:latin typeface="Meiryo"/>
+                        </a:rPr>
+                        <a:t>0.076 / 0.066</a:t>
+                      </a:r>
+                    </a:p>
+                  </a:txBody>
+                  <a:tcPr/>
+                </a:tc>
+                <a:tc>
+                  <a:txBody>
+                    <a:bodyPr/>
+                    <a:lstStyle/>
+                    <a:p>
+                      <a:r>
+                        <a:rPr sz="1200" b="0">
+                          <a:latin typeface="Meiryo"/>
+                        </a:rPr>
+                        <a:t>0.132 / 0.112</a:t>
+                      </a:r>
+                    </a:p>
+                  </a:txBody>
+                  <a:tcPr/>
+                </a:tc>
+                <a:tc>
+                  <a:txBody>
+                    <a:bodyPr/>
+                    <a:lstStyle/>
+                    <a:p>
+                      <a:r>
+                        <a:rPr sz="1200" b="0">
+                          <a:latin typeface="Meiryo"/>
+                        </a:rPr>
+                        <a:t>0.056 / 0.056</a:t>
+                      </a:r>
+                    </a:p>
+                  </a:txBody>
+                  <a:tcPr/>
+                </a:tc>
+                <a:tc>
+                  <a:txBody>
+                    <a:bodyPr/>
+                    <a:lstStyle/>
+                    <a:p>
+                      <a:r>
+                        <a:rPr sz="1200" b="0">
+                          <a:latin typeface="Meiryo"/>
+                        </a:rPr>
+                        <a:t>0.110 / 0.118</a:t>
+                      </a:r>
+                    </a:p>
+                  </a:txBody>
+                  <a:tcPr/>
+                </a:tc>
+              </a:tr>
+              <a:tr h="384048">
+                <a:tc>
+                  <a:txBody>
+                    <a:bodyPr/>
+                    <a:lstStyle/>
+                    <a:p>
+                      <a:r>
+                        <a:rPr sz="1200" b="1">
+                          <a:latin typeface="Meiryo"/>
+                        </a:rPr>
+                        <a:t>LinguaLens準拠クランプ</a:t>
+                      </a:r>
+                    </a:p>
+                  </a:txBody>
+                  <a:tcPr/>
+                </a:tc>
+                <a:tc>
+                  <a:txBody>
+                    <a:bodyPr/>
+                    <a:lstStyle/>
+                    <a:p>
+                      <a:r>
+                        <a:rPr sz="1200" b="0">
+                          <a:latin typeface="Meiryo"/>
+                        </a:rPr>
+                        <a:t>0.046 / 0.030</a:t>
+                      </a:r>
+                    </a:p>
+                  </a:txBody>
+                  <a:tcPr/>
+                </a:tc>
+                <a:tc>
+                  <a:txBody>
+                    <a:bodyPr/>
+                    <a:lstStyle/>
+                    <a:p>
+                      <a:r>
+                        <a:rPr sz="1200" b="0">
+                          <a:latin typeface="Meiryo"/>
+                        </a:rPr>
+                        <a:t>0.070 / 0.042</a:t>
+                      </a:r>
+                    </a:p>
+                  </a:txBody>
+                  <a:tcPr/>
+                </a:tc>
+                <a:tc>
+                  <a:txBody>
+                    <a:bodyPr/>
+                    <a:lstStyle/>
+                    <a:p>
+                      <a:r>
+                        <a:rPr sz="1200" b="0">
+                          <a:latin typeface="Meiryo"/>
+                        </a:rPr>
+                        <a:t>0.048 / 0.050</a:t>
+                      </a:r>
+                    </a:p>
+                  </a:txBody>
+                  <a:tcPr/>
+                </a:tc>
+                <a:tc>
+                  <a:txBody>
+                    <a:bodyPr/>
+                    <a:lstStyle/>
+                    <a:p>
+                      <a:r>
+                        <a:rPr sz="1200" b="0">
+                          <a:latin typeface="Meiryo"/>
+                        </a:rPr>
+                        <a:t>0.108 / 0.108</a:t>
+                      </a:r>
+                    </a:p>
+                  </a:txBody>
+                  <a:tcPr/>
+                </a:tc>
+              </a:tr>
+              <a:tr h="384048">
+                <a:tc>
+                  <a:txBody>
+                    <a:bodyPr/>
+                    <a:lstStyle/>
+                    <a:p>
+                      <a:r>
+                        <a:rPr sz="1200" b="1">
+                          <a:latin typeface="Meiryo"/>
+                        </a:rPr>
+                        <a:t>素のrewrite(無介入の床)</a:t>
+                      </a:r>
+                    </a:p>
+                  </a:txBody>
+                  <a:tcPr/>
+                </a:tc>
+                <a:tc>
+                  <a:txBody>
+                    <a:bodyPr/>
+                    <a:lstStyle/>
+                    <a:p>
+                      <a:r>
+                        <a:rPr sz="1200" b="0">
+                          <a:latin typeface="Meiryo"/>
+                        </a:rPr>
+                        <a:t>0.060 / —</a:t>
+                      </a:r>
+                    </a:p>
+                  </a:txBody>
+                  <a:tcPr/>
+                </a:tc>
+                <a:tc>
+                  <a:txBody>
+                    <a:bodyPr/>
+                    <a:lstStyle/>
+                    <a:p>
+                      <a:r>
+                        <a:rPr sz="1200" b="0">
+                          <a:latin typeface="Meiryo"/>
+                        </a:rPr>
+                        <a:t>0.120 / —</a:t>
+                      </a:r>
+                    </a:p>
+                  </a:txBody>
+                  <a:tcPr/>
+                </a:tc>
+                <a:tc>
+                  <a:txBody>
+                    <a:bodyPr/>
+                    <a:lstStyle/>
+                    <a:p>
+                      <a:r>
+                        <a:rPr sz="1200" b="0">
+                          <a:latin typeface="Meiryo"/>
+                        </a:rPr>
+                        <a:t>0.060 / —</a:t>
+                      </a:r>
+                    </a:p>
+                  </a:txBody>
+                  <a:tcPr/>
+                </a:tc>
+                <a:tc>
+                  <a:txBody>
+                    <a:bodyPr/>
+                    <a:lstStyle/>
+                    <a:p>
+                      <a:r>
+                        <a:rPr sz="1200" b="0">
+                          <a:latin typeface="Meiryo"/>
+                        </a:rPr>
+                        <a:t>0.120 / —</a:t>
+                      </a:r>
+                    </a:p>
+                  </a:txBody>
+                  <a:tcPr/>
+                </a:tc>
+              </a:tr>
+            </a:tbl>
+          </a:graphicData>
+        </a:graphic>
+      </p:graphicFrame>
+      <p:sp>
+        <p:nvSpPr>
+          <p:cNvPr id="8" name="TextBox 7"/>
+          <p:cNvSpPr txBox="1"/>
+          <p:nvPr/>
+        </p:nvSpPr>
+        <p:spPr>
+          <a:xfrm>
+            <a:off x="502920" y="5257800"/>
+            <a:ext cx="11247120" cy="1737360"/>
+          </a:xfrm>
+          <a:prstGeom prst="rect">
+            <a:avLst/>
+          </a:prstGeom>
+          <a:noFill/>
+        </p:spPr>
+        <p:txBody>
+          <a:bodyPr wrap="square">
+            <a:spAutoFit/>
+          </a:bodyPr>
+          <a:lstStyle/>
+          <a:p>
+            <a:pPr algn="l">
+              <a:lnSpc>
+                <a:spcPct val="115000"/>
+              </a:lnSpc>
+            </a:pPr>
+            <a:r>
               <a:rPr sz="1350" b="0">
                 <a:solidFill>
                   <a:srgbClr val="5A6472"/>
@@ -6904,7 +7566,7 @@
                 </a:solidFill>
                 <a:latin typeface="Meiryo"/>
               </a:rPr>
-              <a:t>・AxBench準拠・LinguaLens準拠はどの層でもtrue≈random(=正味の効果ほぼなし)。1〜3個の番号選び+固定強度では</a:t>
+              <a:t>・AxBench準拠・LinguaLens準拠はどの層でもtrue≈random(正味の効果ほぼなし)— 1〜3個の番号選び+固定強度では</a:t>
             </a:r>
           </a:p>
           <a:p>
@@ -6920,23 +7582,7 @@
                 </a:solidFill>
                 <a:latin typeface="Meiryo"/>
               </a:rPr>
-              <a:t>  「特定の文の特定の箇所だけ直し他を保存する」精密編集を駆動できない(考察は04§9f)</a:t>
-            </a:r>
-          </a:p>
-          <a:p>
-            <a:pPr algn="l">
-              <a:lnSpc>
-                <a:spcPct val="115000"/>
-              </a:lnSpc>
-            </a:pPr>
-            <a:r>
-              <a:rPr sz="1350" b="0">
-                <a:solidFill>
-                  <a:srgbClr val="5A6472"/>
-                </a:solidFill>
-                <a:latin typeface="Meiryo"/>
-              </a:rPr>
-              <a:t>・L20は全介入が弱い(提案0.036-0.048)— 深層は編集余地そのものが小さい(oracle時代から一貫)</a:t>
+              <a:t>  精密編集を駆動できない(考察は04§9f)。L20は全介入が弱い(深層は編集余地が小さい)</a:t>
             </a:r>
           </a:p>
           <a:p>

--- a/slides/20260722_progress.pptx
+++ b/slides/20260722_progress.pptx
@@ -24,6 +24,7 @@
     <p:sldId id="272" r:id="rId23"/>
     <p:sldId id="273" r:id="rId24"/>
     <p:sldId id="274" r:id="rId25"/>
+    <p:sldId id="275" r:id="rId26"/>
   </p:sldIdLst>
   <p:sldSz cx="12191695" cy="6858000" type="screen4x3"/>
   <p:notesSz cx="6858000" cy="9144000"/>
@@ -8457,7 +8458,7 @@
                 </a:solidFill>
                 <a:latin typeface="Meiryo"/>
               </a:rPr>
-              <a:t>失敗例 — promptingのFICはなぜ低いか</a:t>
+              <a:t>FIC成功の中身 — 「exactではないがFICで正解」の実例と検証(L12 sup)</a:t>
             </a:r>
           </a:p>
         </p:txBody>
@@ -8470,8 +8471,8 @@
         </p:nvSpPr>
         <p:spPr>
           <a:xfrm>
-            <a:off x="502920" y="1051560"/>
-            <a:ext cx="11247120" cy="685800"/>
+            <a:off x="502920" y="1024128"/>
+            <a:ext cx="11247120" cy="777240"/>
           </a:xfrm>
           <a:prstGeom prst="rect">
             <a:avLst/>
@@ -8490,13 +8491,13 @@
               </a:lnSpc>
             </a:pPr>
             <a:r>
-              <a:rPr sz="1500" b="0">
+              <a:rPr sz="1350" b="0">
                 <a:solidFill>
                   <a:srgbClr val="5A6472"/>
                 </a:solidFill>
                 <a:latin typeface="Meiryo"/>
               </a:rPr>
-              <a:t>FICは「正しい指定のときだけ特徴が動くか」を測る(間違った指定でも動くと減点)。promptingは指示が間違っていても編集してしまうため、exactが高くてもFICが下がる。</a:t>
+              <a:t>まずFICの読み方: 提案の0.94は「94%成功」ではない。true specで特徴が消えた率PT=39%、random specでは2% — (PT−PB)/PT=0.94 は「効果のほぼ全てが正しいspecに起因する」という特異性の値。</a:t>
             </a:r>
           </a:p>
         </p:txBody>
@@ -8509,8 +8510,8 @@
         </p:nvSpPr>
         <p:spPr>
           <a:xfrm>
-            <a:off x="502920" y="1828800"/>
-            <a:ext cx="5577840" cy="365760"/>
+            <a:off x="502920" y="1874519"/>
+            <a:ext cx="5669280" cy="365760"/>
           </a:xfrm>
           <a:prstGeom prst="rect">
             <a:avLst/>
@@ -8529,13 +8530,13 @@
               </a:lnSpc>
             </a:pPr>
             <a:r>
-              <a:rPr sz="1600" b="1">
-                <a:solidFill>
-                  <a:srgbClr val="5E6E8C"/>
-                </a:solidFill>
-                <a:latin typeface="Meiryo"/>
-              </a:rPr>
-              <a:t>prompting: 無関係な特徴の指示でも消してしまう</a:t>
+              <a:rPr sz="1400" b="1">
+                <a:solidFill>
+                  <a:srgbClr val="0E7C66"/>
+                </a:solidFill>
+                <a:latin typeface="Meiryo"/>
+              </a:rPr>
+              <a:t>提案手法: 成功195件 = exact 63 + 言い換え132(壊れ文2%・コピー0)</a:t>
             </a:r>
           </a:p>
         </p:txBody>
@@ -8549,7 +8550,7 @@
         <p:spPr>
           <a:xfrm>
             <a:off x="502920" y="2286000"/>
-            <a:ext cx="5577840" cy="2834640"/>
+            <a:ext cx="5669280" cy="2377440"/>
           </a:xfrm>
           <a:prstGeom prst="roundRect">
             <a:avLst/>
@@ -8559,7 +8560,7 @@
           </a:solidFill>
           <a:ln w="20320">
             <a:solidFill>
-              <a:srgbClr val="5E6E8C"/>
+              <a:srgbClr val="0E7C66"/>
             </a:solidFill>
           </a:ln>
         </p:spPr>
@@ -8583,43 +8584,43 @@
           <a:p>
             <a:pPr algn="ctr"/>
             <a:r>
-              <a:rPr sz="1200" b="0">
+              <a:rPr sz="1150" b="0">
                 <a:solidFill>
                   <a:srgbClr val="22272E"/>
                 </a:solidFill>
                 <a:latin typeface="Meiryo"/>
               </a:rPr>
-              <a:t>src:  He is the most respectful student here.</a:t>
+              <a:t>src: He wanted to slowly walk through …</a:t>
             </a:r>
           </a:p>
           <a:p>
             <a:pPr algn="ctr"/>
             <a:r>
-              <a:rPr sz="1200" b="0">
+              <a:rPr sz="1150" b="0">
                 <a:solidFill>
                   <a:srgbClr val="22272E"/>
                 </a:solidFill>
                 <a:latin typeface="Meiryo"/>
               </a:rPr>
-              <a:t>無関係指示: → He is the respectful student here.</a:t>
+              <a:t>out: He wanted to walk slowly through …</a:t>
             </a:r>
           </a:p>
           <a:p>
             <a:pPr algn="ctr"/>
             <a:r>
-              <a:rPr sz="1200" b="0">
+              <a:rPr sz="1150" b="0">
                 <a:solidFill>
                   <a:srgbClr val="22272E"/>
                 </a:solidFill>
                 <a:latin typeface="Meiryo"/>
               </a:rPr>
-              <a:t>(頼んでいない最上級が消える=正解と同じ編集)</a:t>
+              <a:t>(不定詞分割は解消 — 正解と副詞位置が違うだけ)</a:t>
             </a:r>
           </a:p>
           <a:p>
             <a:pPr algn="ctr"/>
             <a:r>
-              <a:rPr sz="1200" b="0">
+              <a:rPr sz="1150" b="0">
                 <a:solidFill>
                   <a:srgbClr val="22272E"/>
                 </a:solidFill>
@@ -8631,61 +8632,73 @@
           <a:p>
             <a:pPr algn="ctr"/>
             <a:r>
-              <a:rPr sz="1200" b="0">
+              <a:rPr sz="1150" b="0">
                 <a:solidFill>
                   <a:srgbClr val="22272E"/>
                 </a:solidFill>
                 <a:latin typeface="Meiryo"/>
               </a:rPr>
-              <a:t>src:  May I interject, the mobile app needs …</a:t>
+              <a:t>src: The songs are popular.(複数を消す課題)</a:t>
             </a:r>
           </a:p>
           <a:p>
             <a:pPr algn="ctr"/>
             <a:r>
-              <a:rPr sz="1200" b="0">
+              <a:rPr sz="1150" b="0">
                 <a:solidFill>
                   <a:srgbClr val="22272E"/>
                 </a:solidFill>
                 <a:latin typeface="Meiryo"/>
               </a:rPr>
-              <a:t>無関係指示: → The mobile app needs …(間投句が消える)</a:t>
+              <a:t>tgt: The song are popular.(正解の対事実は非文)</a:t>
             </a:r>
           </a:p>
           <a:p>
             <a:pPr algn="ctr"/>
             <a:r>
-              <a:rPr sz="1200" b="0">
+              <a:rPr sz="1150" b="0">
                 <a:solidFill>
                   <a:srgbClr val="22272E"/>
                 </a:solidFill>
                 <a:latin typeface="Meiryo"/>
               </a:rPr>
+              <a:t>out: The song is popular.(文法的な正しい編集)</a:t>
+            </a:r>
+          </a:p>
+          <a:p>
+            <a:pPr algn="ctr"/>
+            <a:r>
+              <a:rPr sz="1150" b="0">
+                <a:solidFill>
+                  <a:srgbClr val="22272E"/>
+                </a:solidFill>
+                <a:latin typeface="Meiryo"/>
+              </a:rPr>
               <a:t/>
             </a:r>
           </a:p>
           <a:p>
             <a:pPr algn="ctr"/>
             <a:r>
-              <a:rPr sz="1200" b="0">
+              <a:rPr sz="1150" b="0">
                 <a:solidFill>
                   <a:srgbClr val="22272E"/>
                 </a:solidFill>
                 <a:latin typeface="Meiryo"/>
               </a:rPr>
-              <a:t>src:  He wanted to slowly walk through …</a:t>
+              <a:t>src: Stand up. → out: You should stand up.</a:t>
             </a:r>
           </a:p>
           <a:p>
             <a:pPr algn="ctr"/>
             <a:r>
-              <a:rPr sz="1200" b="0">
+              <a:rPr sz="1150" b="0">
                 <a:solidFill>
                   <a:srgbClr val="22272E"/>
                 </a:solidFill>
                 <a:latin typeface="Meiryo"/>
               </a:rPr>
-              <a:t>無関係指示: → He wanted to leisurely explore …(大幅書換)</a:t>
+              <a:t>(命令文は解消 — 正解 You are required to… と別表現)</a:t>
             </a:r>
           </a:p>
         </p:txBody>
@@ -8698,8 +8711,8 @@
         </p:nvSpPr>
         <p:spPr>
           <a:xfrm>
-            <a:off x="6355080" y="1828800"/>
-            <a:ext cx="5486400" cy="365760"/>
+            <a:off x="6400800" y="1874519"/>
+            <a:ext cx="5303520" cy="365760"/>
           </a:xfrm>
           <a:prstGeom prst="rect">
             <a:avLst/>
@@ -8718,13 +8731,13 @@
               </a:lnSpc>
             </a:pPr>
             <a:r>
-              <a:rPr sz="1600" b="1">
-                <a:solidFill>
-                  <a:srgbClr val="0E7C66"/>
-                </a:solidFill>
-                <a:latin typeface="Meiryo"/>
-              </a:rPr>
-              <a:t>本手法: 正しいスペックでも編集が出ないことがある</a:t>
+              <a:rPr sz="1400" b="1">
+                <a:solidFill>
+                  <a:srgbClr val="5E6E8C"/>
+                </a:solidFill>
+                <a:latin typeface="Meiryo"/>
+              </a:rPr>
+              <a:t>steer: 成功225件のうち壊れ文19%(要割引)</a:t>
             </a:r>
           </a:p>
         </p:txBody>
@@ -8737,8 +8750,8 @@
         </p:nvSpPr>
         <p:spPr>
           <a:xfrm>
-            <a:off x="6355080" y="2286000"/>
-            <a:ext cx="5394960" cy="2834640"/>
+            <a:off x="6400800" y="2286000"/>
+            <a:ext cx="5349240" cy="1234440"/>
           </a:xfrm>
           <a:prstGeom prst="roundRect">
             <a:avLst/>
@@ -8748,7 +8761,7 @@
           </a:solidFill>
           <a:ln w="20320">
             <a:solidFill>
-              <a:srgbClr val="0E7C66"/>
+              <a:srgbClr val="5E6E8C"/>
             </a:solidFill>
           </a:ln>
         </p:spPr>
@@ -8772,109 +8785,37 @@
           <a:p>
             <a:pPr algn="ctr"/>
             <a:r>
-              <a:rPr sz="1200" b="0">
+              <a:rPr sz="1150" b="0">
                 <a:solidFill>
                   <a:srgbClr val="22272E"/>
                 </a:solidFill>
                 <a:latin typeface="Meiryo"/>
               </a:rPr>
-              <a:t>src:  He is the most respectful student here.</a:t>
+              <a:t>out: May May Interject the mobile app needs …</a:t>
             </a:r>
           </a:p>
           <a:p>
             <a:pPr algn="ctr"/>
             <a:r>
-              <a:rPr sz="1200" b="0">
+              <a:rPr sz="1150" b="0">
                 <a:solidFill>
                   <a:srgbClr val="22272E"/>
                 </a:solidFill>
                 <a:latin typeface="Meiryo"/>
               </a:rPr>
-              <a:t>出力 = src のまま(最上級を消せず)</a:t>
+              <a:t>out: rowspan rowspan rowspan rowspan …</a:t>
             </a:r>
           </a:p>
           <a:p>
             <a:pPr algn="ctr"/>
             <a:r>
-              <a:rPr sz="1200" b="0">
+              <a:rPr sz="1150" b="0">
                 <a:solidFill>
                   <a:srgbClr val="22272E"/>
                 </a:solidFill>
                 <a:latin typeface="Meiryo"/>
               </a:rPr>
-              <a:t/>
-            </a:r>
-          </a:p>
-          <a:p>
-            <a:pPr algn="ctr"/>
-            <a:r>
-              <a:rPr sz="1200" b="0">
-                <a:solidFill>
-                  <a:srgbClr val="22272E"/>
-                </a:solidFill>
-                <a:latin typeface="Meiryo"/>
-              </a:rPr>
-              <a:t>src:  A clock ticks without pause.</a:t>
-            </a:r>
-          </a:p>
-          <a:p>
-            <a:pPr algn="ctr"/>
-            <a:r>
-              <a:rPr sz="1200" b="0">
-                <a:solidFill>
-                  <a:srgbClr val="22272E"/>
-                </a:solidFill>
-                <a:latin typeface="Meiryo"/>
-              </a:rPr>
-              <a:t>出力 = src のまま(without pauseを削除できず)</a:t>
-            </a:r>
-          </a:p>
-          <a:p>
-            <a:pPr algn="ctr"/>
-            <a:r>
-              <a:rPr sz="1200" b="0">
-                <a:solidFill>
-                  <a:srgbClr val="22272E"/>
-                </a:solidFill>
-                <a:latin typeface="Meiryo"/>
-              </a:rPr>
-              <a:t/>
-            </a:r>
-          </a:p>
-          <a:p>
-            <a:pPr algn="ctr"/>
-            <a:r>
-              <a:rPr sz="1200" b="0">
-                <a:solidFill>
-                  <a:srgbClr val="22272E"/>
-                </a:solidFill>
-                <a:latin typeface="Meiryo"/>
-              </a:rPr>
-              <a:t>src:  Biologists studied green slime in …</a:t>
-            </a:r>
-          </a:p>
-          <a:p>
-            <a:pPr algn="ctr"/>
-            <a:r>
-              <a:rPr sz="1200" b="0">
-                <a:solidFill>
-                  <a:srgbClr val="22272E"/>
-                </a:solidFill>
-                <a:latin typeface="Meiryo"/>
-              </a:rPr>
-              <a:t>出力 = src のまま(algaeへの語彙置換 —</a:t>
-            </a:r>
-          </a:p>
-          <a:p>
-            <a:pPr algn="ctr"/>
-            <a:r>
-              <a:rPr sz="1200" b="0">
-                <a:solidFill>
-                  <a:srgbClr val="22272E"/>
-                </a:solidFill>
-                <a:latin typeface="Meiryo"/>
-              </a:rPr>
-              <a:t> 特徴平均のスペックでは単語の中身まで運べない)</a:t>
+              <a:t>(文を壊せば特徴も消える — LESS判定で加点)</a:t>
             </a:r>
           </a:p>
         </p:txBody>
@@ -8887,8 +8828,8 @@
         </p:nvSpPr>
         <p:spPr>
           <a:xfrm>
-            <a:off x="502920" y="5349240"/>
-            <a:ext cx="11247120" cy="1188720"/>
+            <a:off x="6400800" y="3657600"/>
+            <a:ext cx="5303520" cy="365760"/>
           </a:xfrm>
           <a:prstGeom prst="rect">
             <a:avLst/>
@@ -8907,13 +8848,118 @@
               </a:lnSpc>
             </a:pPr>
             <a:r>
-              <a:rPr sz="1400" b="0">
+              <a:rPr sz="1400" b="1">
+                <a:solidFill>
+                  <a:srgbClr val="8A929E"/>
+                </a:solidFill>
+                <a:latin typeface="Meiryo"/>
+              </a:rPr>
+              <a:t>prompting: 壊れ文1%だが過剰編集</a:t>
+            </a:r>
+          </a:p>
+        </p:txBody>
+      </p:sp>
+      <p:sp>
+        <p:nvSpPr>
+          <p:cNvPr id="10" name="Rounded Rectangle 9"/>
+          <p:cNvSpPr/>
+          <p:nvPr/>
+        </p:nvSpPr>
+        <p:spPr>
+          <a:xfrm>
+            <a:off x="6400800" y="4069080"/>
+            <a:ext cx="5349240" cy="868680"/>
+          </a:xfrm>
+          <a:prstGeom prst="roundRect">
+            <a:avLst/>
+          </a:prstGeom>
+          <a:solidFill>
+            <a:srgbClr val="F6F7F8"/>
+          </a:solidFill>
+          <a:ln w="20320">
+            <a:solidFill>
+              <a:srgbClr val="8A929E"/>
+            </a:solidFill>
+          </a:ln>
+        </p:spPr>
+        <p:style>
+          <a:lnRef idx="1">
+            <a:schemeClr val="accent1"/>
+          </a:lnRef>
+          <a:fillRef idx="3">
+            <a:schemeClr val="accent1"/>
+          </a:fillRef>
+          <a:effectRef idx="2">
+            <a:schemeClr val="accent1"/>
+          </a:effectRef>
+          <a:fontRef idx="minor">
+            <a:schemeClr val="lt1"/>
+          </a:fontRef>
+        </p:style>
+        <p:txBody>
+          <a:bodyPr rtlCol="0" anchor="ctr" wrap="square" lIns="54864" rIns="54864" tIns="36576" bIns="36576"/>
+          <a:lstStyle/>
+          <a:p>
+            <a:pPr algn="ctr"/>
+            <a:r>
+              <a:rPr sz="1150" b="0">
+                <a:solidFill>
+                  <a:srgbClr val="22272E"/>
+                </a:solidFill>
+                <a:latin typeface="Meiryo"/>
+              </a:rPr>
+              <a:t>src: …the most respectful student…</a:t>
+            </a:r>
+          </a:p>
+          <a:p>
+            <a:pPr algn="ctr"/>
+            <a:r>
+              <a:rPr sz="1150" b="0">
+                <a:solidFill>
+                  <a:srgbClr val="22272E"/>
+                </a:solidFill>
+                <a:latin typeface="Meiryo"/>
+              </a:rPr>
+              <a:t>out: He is a respectful student here.(冠詞まで変更)</a:t>
+            </a:r>
+          </a:p>
+        </p:txBody>
+      </p:sp>
+      <p:sp>
+        <p:nvSpPr>
+          <p:cNvPr id="11" name="TextBox 10"/>
+          <p:cNvSpPr txBox="1"/>
+          <p:nvPr/>
+        </p:nvSpPr>
+        <p:spPr>
+          <a:xfrm>
+            <a:off x="502920" y="5074920"/>
+            <a:ext cx="11247120" cy="1463040"/>
+          </a:xfrm>
+          <a:prstGeom prst="rect">
+            <a:avLst/>
+          </a:prstGeom>
+          <a:noFill/>
+        </p:spPr>
+        <p:txBody>
+          <a:bodyPr wrap="square">
+            <a:spAutoFit/>
+          </a:bodyPr>
+          <a:lstStyle/>
+          <a:p>
+            <a:pPr algn="l">
+              <a:lnSpc>
+                <a:spcPct val="115000"/>
+              </a:lnSpc>
+            </a:pPr>
+            <a:r>
+              <a:rPr sz="1350" b="0">
                 <a:solidFill>
                   <a:srgbClr val="5A6472"/>
                 </a:solidFill>
                 <a:latin typeface="Meiryo"/>
               </a:rPr>
-              <a:t>まとめ: promptingの失敗=「効きすぎ」(指定に従わない編集 → 介入としての特異性がない)。</a:t>
+              <a:t>検証(非exact成功の品質): 提案 = 壊れ文2%・対正解類似0.57・コピー起因0件 — 高FICは「文を壊して消す」得点ではなく、流暢な言い換えによる本物の特徴除去。</a:t>
             </a:r>
           </a:p>
           <a:p>
@@ -8923,13 +8969,13 @@
               </a:lnSpc>
             </a:pPr>
             <a:r>
-              <a:rPr sz="1400" b="0">
+              <a:rPr sz="1350" b="0">
                 <a:solidFill>
                   <a:srgbClr val="5A6472"/>
                 </a:solidFill>
                 <a:latin typeface="Meiryo"/>
               </a:rPr>
-              <a:t>本手法の失敗=「効かなさすぎ」(発火不足・語彙固有の編集)。改善はToDo②のスペック較正と追加学習が対応。</a:t>
+              <a:t>steerの0.76は壊れ文19%を含み割引が必要(本文に明記)。promptingは流暢だが指定外も変える(exact低の主因)。</a:t>
             </a:r>
           </a:p>
         </p:txBody>
@@ -9029,7 +9075,7 @@
                 </a:solidFill>
                 <a:latin typeface="Meiryo"/>
               </a:rPr>
-              <a:t>残り1週間のToDo</a:t>
+              <a:t>失敗例 — promptingのFICはなぜ低いか</a:t>
             </a:r>
           </a:p>
         </p:txBody>
@@ -9042,8 +9088,8 @@
         </p:nvSpPr>
         <p:spPr>
           <a:xfrm>
-            <a:off x="640080" y="1143000"/>
-            <a:ext cx="10972800" cy="5394960"/>
+            <a:off x="502920" y="1051560"/>
+            <a:ext cx="11247120" cy="685800"/>
           </a:xfrm>
           <a:prstGeom prst="rect">
             <a:avLst/>
@@ -9056,115 +9102,452 @@
           </a:bodyPr>
           <a:lstStyle/>
           <a:p>
-            <a:pPr>
-              <a:lnSpc>
-                <a:spcPct val="116000"/>
-              </a:lnSpc>
-              <a:spcAft>
-                <a:spcPts val="800"/>
-              </a:spcAft>
-            </a:pPr>
-            <a:r>
-              <a:rPr sz="1900" b="1">
+            <a:pPr algn="l">
+              <a:lnSpc>
+                <a:spcPct val="115000"/>
+              </a:lnSpc>
+            </a:pPr>
+            <a:r>
+              <a:rPr sz="1500" b="0">
+                <a:solidFill>
+                  <a:srgbClr val="5A6472"/>
+                </a:solidFill>
+                <a:latin typeface="Meiryo"/>
+              </a:rPr>
+              <a:t>FICは「正しい指定のときだけ特徴が動くか」を測る(間違った指定でも動くと減点)。promptingは指示が間違っていても編集してしまうため、exactが高くてもFICが下がる。</a:t>
+            </a:r>
+          </a:p>
+        </p:txBody>
+      </p:sp>
+      <p:sp>
+        <p:nvSpPr>
+          <p:cNvPr id="5" name="TextBox 4"/>
+          <p:cNvSpPr txBox="1"/>
+          <p:nvPr/>
+        </p:nvSpPr>
+        <p:spPr>
+          <a:xfrm>
+            <a:off x="502920" y="1828800"/>
+            <a:ext cx="5577840" cy="365760"/>
+          </a:xfrm>
+          <a:prstGeom prst="rect">
+            <a:avLst/>
+          </a:prstGeom>
+          <a:noFill/>
+        </p:spPr>
+        <p:txBody>
+          <a:bodyPr wrap="square">
+            <a:spAutoFit/>
+          </a:bodyPr>
+          <a:lstStyle/>
+          <a:p>
+            <a:pPr algn="l">
+              <a:lnSpc>
+                <a:spcPct val="115000"/>
+              </a:lnSpc>
+            </a:pPr>
+            <a:r>
+              <a:rPr sz="1600" b="1">
+                <a:solidFill>
+                  <a:srgbClr val="5E6E8C"/>
+                </a:solidFill>
+                <a:latin typeface="Meiryo"/>
+              </a:rPr>
+              <a:t>prompting: 無関係な特徴の指示でも消してしまう</a:t>
+            </a:r>
+          </a:p>
+        </p:txBody>
+      </p:sp>
+      <p:sp>
+        <p:nvSpPr>
+          <p:cNvPr id="6" name="Rounded Rectangle 5"/>
+          <p:cNvSpPr/>
+          <p:nvPr/>
+        </p:nvSpPr>
+        <p:spPr>
+          <a:xfrm>
+            <a:off x="502920" y="2286000"/>
+            <a:ext cx="5577840" cy="2834640"/>
+          </a:xfrm>
+          <a:prstGeom prst="roundRect">
+            <a:avLst/>
+          </a:prstGeom>
+          <a:solidFill>
+            <a:srgbClr val="F6F7F8"/>
+          </a:solidFill>
+          <a:ln w="20320">
+            <a:solidFill>
+              <a:srgbClr val="5E6E8C"/>
+            </a:solidFill>
+          </a:ln>
+        </p:spPr>
+        <p:style>
+          <a:lnRef idx="1">
+            <a:schemeClr val="accent1"/>
+          </a:lnRef>
+          <a:fillRef idx="3">
+            <a:schemeClr val="accent1"/>
+          </a:fillRef>
+          <a:effectRef idx="2">
+            <a:schemeClr val="accent1"/>
+          </a:effectRef>
+          <a:fontRef idx="minor">
+            <a:schemeClr val="lt1"/>
+          </a:fontRef>
+        </p:style>
+        <p:txBody>
+          <a:bodyPr rtlCol="0" anchor="ctr" wrap="square" lIns="54864" rIns="54864" tIns="36576" bIns="36576"/>
+          <a:lstStyle/>
+          <a:p>
+            <a:pPr algn="ctr"/>
+            <a:r>
+              <a:rPr sz="1200" b="0">
+                <a:solidFill>
+                  <a:srgbClr val="22272E"/>
+                </a:solidFill>
+                <a:latin typeface="Meiryo"/>
+              </a:rPr>
+              <a:t>src:  He is the most respectful student here.</a:t>
+            </a:r>
+          </a:p>
+          <a:p>
+            <a:pPr algn="ctr"/>
+            <a:r>
+              <a:rPr sz="1200" b="0">
+                <a:solidFill>
+                  <a:srgbClr val="22272E"/>
+                </a:solidFill>
+                <a:latin typeface="Meiryo"/>
+              </a:rPr>
+              <a:t>無関係指示: → He is the respectful student here.</a:t>
+            </a:r>
+          </a:p>
+          <a:p>
+            <a:pPr algn="ctr"/>
+            <a:r>
+              <a:rPr sz="1200" b="0">
+                <a:solidFill>
+                  <a:srgbClr val="22272E"/>
+                </a:solidFill>
+                <a:latin typeface="Meiryo"/>
+              </a:rPr>
+              <a:t>(頼んでいない最上級が消える=正解と同じ編集)</a:t>
+            </a:r>
+          </a:p>
+          <a:p>
+            <a:pPr algn="ctr"/>
+            <a:r>
+              <a:rPr sz="1200" b="0">
+                <a:solidFill>
+                  <a:srgbClr val="22272E"/>
+                </a:solidFill>
+                <a:latin typeface="Meiryo"/>
+              </a:rPr>
+              <a:t/>
+            </a:r>
+          </a:p>
+          <a:p>
+            <a:pPr algn="ctr"/>
+            <a:r>
+              <a:rPr sz="1200" b="0">
+                <a:solidFill>
+                  <a:srgbClr val="22272E"/>
+                </a:solidFill>
+                <a:latin typeface="Meiryo"/>
+              </a:rPr>
+              <a:t>src:  May I interject, the mobile app needs …</a:t>
+            </a:r>
+          </a:p>
+          <a:p>
+            <a:pPr algn="ctr"/>
+            <a:r>
+              <a:rPr sz="1200" b="0">
+                <a:solidFill>
+                  <a:srgbClr val="22272E"/>
+                </a:solidFill>
+                <a:latin typeface="Meiryo"/>
+              </a:rPr>
+              <a:t>無関係指示: → The mobile app needs …(間投句が消える)</a:t>
+            </a:r>
+          </a:p>
+          <a:p>
+            <a:pPr algn="ctr"/>
+            <a:r>
+              <a:rPr sz="1200" b="0">
+                <a:solidFill>
+                  <a:srgbClr val="22272E"/>
+                </a:solidFill>
+                <a:latin typeface="Meiryo"/>
+              </a:rPr>
+              <a:t/>
+            </a:r>
+          </a:p>
+          <a:p>
+            <a:pPr algn="ctr"/>
+            <a:r>
+              <a:rPr sz="1200" b="0">
+                <a:solidFill>
+                  <a:srgbClr val="22272E"/>
+                </a:solidFill>
+                <a:latin typeface="Meiryo"/>
+              </a:rPr>
+              <a:t>src:  He wanted to slowly walk through …</a:t>
+            </a:r>
+          </a:p>
+          <a:p>
+            <a:pPr algn="ctr"/>
+            <a:r>
+              <a:rPr sz="1200" b="0">
+                <a:solidFill>
+                  <a:srgbClr val="22272E"/>
+                </a:solidFill>
+                <a:latin typeface="Meiryo"/>
+              </a:rPr>
+              <a:t>無関係指示: → He wanted to leisurely explore …(大幅書換)</a:t>
+            </a:r>
+          </a:p>
+        </p:txBody>
+      </p:sp>
+      <p:sp>
+        <p:nvSpPr>
+          <p:cNvPr id="7" name="TextBox 6"/>
+          <p:cNvSpPr txBox="1"/>
+          <p:nvPr/>
+        </p:nvSpPr>
+        <p:spPr>
+          <a:xfrm>
+            <a:off x="6355080" y="1828800"/>
+            <a:ext cx="5486400" cy="365760"/>
+          </a:xfrm>
+          <a:prstGeom prst="rect">
+            <a:avLst/>
+          </a:prstGeom>
+          <a:noFill/>
+        </p:spPr>
+        <p:txBody>
+          <a:bodyPr wrap="square">
+            <a:spAutoFit/>
+          </a:bodyPr>
+          <a:lstStyle/>
+          <a:p>
+            <a:pPr algn="l">
+              <a:lnSpc>
+                <a:spcPct val="115000"/>
+              </a:lnSpc>
+            </a:pPr>
+            <a:r>
+              <a:rPr sz="1600" b="1">
                 <a:solidFill>
                   <a:srgbClr val="0E7C66"/>
                 </a:solidFill>
                 <a:latin typeface="Meiryo"/>
               </a:rPr>
-              <a:t>① 活性数の絞り込み分析(L12): </a:t>
-            </a:r>
-            <a:r>
-              <a:rPr sz="1900">
+              <a:t>本手法: 正しいスペックでも編集が出ないことがある</a:t>
+            </a:r>
+          </a:p>
+        </p:txBody>
+      </p:sp>
+      <p:sp>
+        <p:nvSpPr>
+          <p:cNvPr id="8" name="Rounded Rectangle 7"/>
+          <p:cNvSpPr/>
+          <p:nvPr/>
+        </p:nvSpPr>
+        <p:spPr>
+          <a:xfrm>
+            <a:off x="6355080" y="2286000"/>
+            <a:ext cx="5394960" cy="2834640"/>
+          </a:xfrm>
+          <a:prstGeom prst="roundRect">
+            <a:avLst/>
+          </a:prstGeom>
+          <a:solidFill>
+            <a:srgbClr val="F6F7F8"/>
+          </a:solidFill>
+          <a:ln w="20320">
+            <a:solidFill>
+              <a:srgbClr val="0E7C66"/>
+            </a:solidFill>
+          </a:ln>
+        </p:spPr>
+        <p:style>
+          <a:lnRef idx="1">
+            <a:schemeClr val="accent1"/>
+          </a:lnRef>
+          <a:fillRef idx="3">
+            <a:schemeClr val="accent1"/>
+          </a:fillRef>
+          <a:effectRef idx="2">
+            <a:schemeClr val="accent1"/>
+          </a:effectRef>
+          <a:fontRef idx="minor">
+            <a:schemeClr val="lt1"/>
+          </a:fontRef>
+        </p:style>
+        <p:txBody>
+          <a:bodyPr rtlCol="0" anchor="ctr" wrap="square" lIns="54864" rIns="54864" tIns="36576" bIns="36576"/>
+          <a:lstStyle/>
+          <a:p>
+            <a:pPr algn="ctr"/>
+            <a:r>
+              <a:rPr sz="1200" b="0">
                 <a:solidFill>
                   <a:srgbClr val="22272E"/>
                 </a:solidFill>
                 <a:latin typeface="Meiryo"/>
               </a:rPr>
-              <a:t>現在の64個は多すぎる可能性。上位から絞り込んだときの精度変化を、特徴4分類(形態・統語・意味・語用)ごとに測定 — 「何個の活性で特徴を担えるか」の実証</a:t>
-            </a:r>
-          </a:p>
-          <a:p>
-            <a:pPr>
-              <a:lnSpc>
-                <a:spcPct val="116000"/>
-              </a:lnSpc>
-              <a:spcAft>
-                <a:spcPts val="800"/>
-              </a:spcAft>
-            </a:pPr>
-            <a:r>
-              <a:rPr sz="1900" b="1">
-                <a:solidFill>
-                  <a:srgbClr val="0E7C66"/>
-                </a:solidFill>
-                <a:latin typeface="Meiryo"/>
-              </a:rPr>
-              <a:t>② 精度改善案の実施: </a:t>
-            </a:r>
-            <a:r>
-              <a:rPr sz="1900">
+              <a:t>src:  He is the most respectful student here.</a:t>
+            </a:r>
+          </a:p>
+          <a:p>
+            <a:pPr algn="ctr"/>
+            <a:r>
+              <a:rPr sz="1200" b="0">
                 <a:solidFill>
                   <a:srgbClr val="22272E"/>
                 </a:solidFill>
                 <a:latin typeface="Meiryo"/>
               </a:rPr>
-              <a:t>スペックの整形(大きさの較正・雑音除去)、編集器を集約スペック入りで追加学習、方向別の較正 など</a:t>
-            </a:r>
-          </a:p>
-          <a:p>
-            <a:pPr>
-              <a:lnSpc>
-                <a:spcPct val="116000"/>
-              </a:lnSpc>
-              <a:spcAft>
-                <a:spcPts val="800"/>
-              </a:spcAft>
-            </a:pPr>
-            <a:r>
-              <a:rPr sz="1900" b="1">
-                <a:solidFill>
-                  <a:srgbClr val="0E7C66"/>
-                </a:solidFill>
-                <a:latin typeface="Meiryo"/>
-              </a:rPr>
-              <a:t>③ 活性特定の自動化の検討: </a:t>
-            </a:r>
-            <a:r>
-              <a:rPr sz="1900">
+              <a:t>出力 = src のまま(最上級を消せず)</a:t>
+            </a:r>
+          </a:p>
+          <a:p>
+            <a:pPr algn="ctr"/>
+            <a:r>
+              <a:rPr sz="1200" b="0">
                 <a:solidFill>
                   <a:srgbClr val="22272E"/>
                 </a:solidFill>
                 <a:latin typeface="Meiryo"/>
               </a:rPr>
-              <a:t>LinguaLens-Dataの一部で編集器ごと学習し、「どの活性を動かすべきか」自体をモデルに特定させる手法を設計できないか検討</a:t>
-            </a:r>
-          </a:p>
-          <a:p>
-            <a:pPr>
-              <a:lnSpc>
-                <a:spcPct val="116000"/>
-              </a:lnSpc>
-              <a:spcAft>
-                <a:spcPts val="800"/>
-              </a:spcAft>
-            </a:pPr>
-            <a:r>
-              <a:rPr sz="1900" b="1">
-                <a:solidFill>
-                  <a:srgbClr val="0E7C66"/>
-                </a:solidFill>
-                <a:latin typeface="Meiryo"/>
-              </a:rPr>
-              <a:t>(継続) </a:t>
-            </a:r>
-            <a:r>
-              <a:rPr sz="1900">
+              <a:t/>
+            </a:r>
+          </a:p>
+          <a:p>
+            <a:pPr algn="ctr"/>
+            <a:r>
+              <a:rPr sz="1200" b="0">
                 <a:solidFill>
                   <a:srgbClr val="22272E"/>
                 </a:solidFill>
                 <a:latin typeface="Meiryo"/>
               </a:rPr>
-              <a:t>全セルの計測完了・FIC判定完了 → 4分類別の完全な表に更新</a:t>
+              <a:t>src:  A clock ticks without pause.</a:t>
+            </a:r>
+          </a:p>
+          <a:p>
+            <a:pPr algn="ctr"/>
+            <a:r>
+              <a:rPr sz="1200" b="0">
+                <a:solidFill>
+                  <a:srgbClr val="22272E"/>
+                </a:solidFill>
+                <a:latin typeface="Meiryo"/>
+              </a:rPr>
+              <a:t>出力 = src のまま(without pauseを削除できず)</a:t>
+            </a:r>
+          </a:p>
+          <a:p>
+            <a:pPr algn="ctr"/>
+            <a:r>
+              <a:rPr sz="1200" b="0">
+                <a:solidFill>
+                  <a:srgbClr val="22272E"/>
+                </a:solidFill>
+                <a:latin typeface="Meiryo"/>
+              </a:rPr>
+              <a:t/>
+            </a:r>
+          </a:p>
+          <a:p>
+            <a:pPr algn="ctr"/>
+            <a:r>
+              <a:rPr sz="1200" b="0">
+                <a:solidFill>
+                  <a:srgbClr val="22272E"/>
+                </a:solidFill>
+                <a:latin typeface="Meiryo"/>
+              </a:rPr>
+              <a:t>src:  Biologists studied green slime in …</a:t>
+            </a:r>
+          </a:p>
+          <a:p>
+            <a:pPr algn="ctr"/>
+            <a:r>
+              <a:rPr sz="1200" b="0">
+                <a:solidFill>
+                  <a:srgbClr val="22272E"/>
+                </a:solidFill>
+                <a:latin typeface="Meiryo"/>
+              </a:rPr>
+              <a:t>出力 = src のまま(algaeへの語彙置換 —</a:t>
+            </a:r>
+          </a:p>
+          <a:p>
+            <a:pPr algn="ctr"/>
+            <a:r>
+              <a:rPr sz="1200" b="0">
+                <a:solidFill>
+                  <a:srgbClr val="22272E"/>
+                </a:solidFill>
+                <a:latin typeface="Meiryo"/>
+              </a:rPr>
+              <a:t> 特徴平均のスペックでは単語の中身まで運べない)</a:t>
+            </a:r>
+          </a:p>
+        </p:txBody>
+      </p:sp>
+      <p:sp>
+        <p:nvSpPr>
+          <p:cNvPr id="9" name="TextBox 8"/>
+          <p:cNvSpPr txBox="1"/>
+          <p:nvPr/>
+        </p:nvSpPr>
+        <p:spPr>
+          <a:xfrm>
+            <a:off x="502920" y="5349240"/>
+            <a:ext cx="11247120" cy="1188720"/>
+          </a:xfrm>
+          <a:prstGeom prst="rect">
+            <a:avLst/>
+          </a:prstGeom>
+          <a:noFill/>
+        </p:spPr>
+        <p:txBody>
+          <a:bodyPr wrap="square">
+            <a:spAutoFit/>
+          </a:bodyPr>
+          <a:lstStyle/>
+          <a:p>
+            <a:pPr algn="l">
+              <a:lnSpc>
+                <a:spcPct val="115000"/>
+              </a:lnSpc>
+            </a:pPr>
+            <a:r>
+              <a:rPr sz="1400" b="0">
+                <a:solidFill>
+                  <a:srgbClr val="5A6472"/>
+                </a:solidFill>
+                <a:latin typeface="Meiryo"/>
+              </a:rPr>
+              <a:t>まとめ: promptingの失敗=「効きすぎ」(指定に従わない編集 → 介入としての特異性がない)。</a:t>
+            </a:r>
+          </a:p>
+          <a:p>
+            <a:pPr algn="l">
+              <a:lnSpc>
+                <a:spcPct val="115000"/>
+              </a:lnSpc>
+            </a:pPr>
+            <a:r>
+              <a:rPr sz="1400" b="0">
+                <a:solidFill>
+                  <a:srgbClr val="5A6472"/>
+                </a:solidFill>
+                <a:latin typeface="Meiryo"/>
+              </a:rPr>
+              <a:t>本手法の失敗=「効かなさすぎ」(発火不足・語彙固有の編集)。改善はToDo②のスペック較正と追加学習が対応。</a:t>
             </a:r>
           </a:p>
         </p:txBody>
@@ -9372,6 +9755,241 @@
                 <a:latin typeface="Meiryo"/>
               </a:rPr>
               <a:t>介入を固定ルールではなく「学習した編集器」に生成させる。編集器はSAE活性の指定(スペック)を読み、凍結LMの内部状態に加える編集ベクトルΔhを出力する。最小対(1点だけ違う文のペア)の編集が成功するかで、活性の対応を因果的に検証する</a:t>
+            </a:r>
+          </a:p>
+        </p:txBody>
+      </p:sp>
+    </p:spTree>
+  </p:cSld>
+  <p:clrMapOvr>
+    <a:masterClrMapping/>
+  </p:clrMapOvr>
+</p:sld>
+</file>
+
+<file path=ppt/slides/slide20.xml><?xml version="1.0" encoding="utf-8"?>
+<p:sld xmlns:a="http://schemas.openxmlformats.org/drawingml/2006/main" xmlns:p="http://schemas.openxmlformats.org/presentationml/2006/main" xmlns:r="http://schemas.openxmlformats.org/officeDocument/2006/relationships">
+  <p:cSld>
+    <p:spTree>
+      <p:nvGrpSpPr>
+        <p:cNvPr id="1" name=""/>
+        <p:cNvGrpSpPr/>
+        <p:nvPr/>
+      </p:nvGrpSpPr>
+      <p:grpSpPr/>
+      <p:sp>
+        <p:nvSpPr>
+          <p:cNvPr id="2" name="Rectangle 1"/>
+          <p:cNvSpPr/>
+          <p:nvPr/>
+        </p:nvSpPr>
+        <p:spPr>
+          <a:xfrm>
+            <a:off x="0" y="0"/>
+            <a:ext cx="12191695" cy="146304"/>
+          </a:xfrm>
+          <a:prstGeom prst="rect">
+            <a:avLst/>
+          </a:prstGeom>
+          <a:solidFill>
+            <a:srgbClr val="0E7C66"/>
+          </a:solidFill>
+          <a:ln>
+            <a:noFill/>
+          </a:ln>
+        </p:spPr>
+        <p:style>
+          <a:lnRef idx="1">
+            <a:schemeClr val="accent1"/>
+          </a:lnRef>
+          <a:fillRef idx="3">
+            <a:schemeClr val="accent1"/>
+          </a:fillRef>
+          <a:effectRef idx="2">
+            <a:schemeClr val="accent1"/>
+          </a:effectRef>
+          <a:fontRef idx="minor">
+            <a:schemeClr val="lt1"/>
+          </a:fontRef>
+        </p:style>
+        <p:txBody>
+          <a:bodyPr rtlCol="0" anchor="ctr"/>
+          <a:lstStyle/>
+          <a:p>
+            <a:pPr algn="ctr"/>
+          </a:p>
+        </p:txBody>
+      </p:sp>
+      <p:sp>
+        <p:nvSpPr>
+          <p:cNvPr id="3" name="TextBox 2"/>
+          <p:cNvSpPr txBox="1"/>
+          <p:nvPr/>
+        </p:nvSpPr>
+        <p:spPr>
+          <a:xfrm>
+            <a:off x="502920" y="256032"/>
+            <a:ext cx="11247120" cy="731520"/>
+          </a:xfrm>
+          <a:prstGeom prst="rect">
+            <a:avLst/>
+          </a:prstGeom>
+          <a:noFill/>
+        </p:spPr>
+        <p:txBody>
+          <a:bodyPr wrap="square">
+            <a:spAutoFit/>
+          </a:bodyPr>
+          <a:lstStyle/>
+          <a:p>
+            <a:pPr algn="l">
+              <a:lnSpc>
+                <a:spcPct val="115000"/>
+              </a:lnSpc>
+            </a:pPr>
+            <a:r>
+              <a:rPr sz="2700" b="1">
+                <a:solidFill>
+                  <a:srgbClr val="22272E"/>
+                </a:solidFill>
+                <a:latin typeface="Meiryo"/>
+              </a:rPr>
+              <a:t>残り1週間のToDo</a:t>
+            </a:r>
+          </a:p>
+        </p:txBody>
+      </p:sp>
+      <p:sp>
+        <p:nvSpPr>
+          <p:cNvPr id="4" name="TextBox 3"/>
+          <p:cNvSpPr txBox="1"/>
+          <p:nvPr/>
+        </p:nvSpPr>
+        <p:spPr>
+          <a:xfrm>
+            <a:off x="640080" y="1143000"/>
+            <a:ext cx="10972800" cy="5394960"/>
+          </a:xfrm>
+          <a:prstGeom prst="rect">
+            <a:avLst/>
+          </a:prstGeom>
+          <a:noFill/>
+        </p:spPr>
+        <p:txBody>
+          <a:bodyPr wrap="square">
+            <a:spAutoFit/>
+          </a:bodyPr>
+          <a:lstStyle/>
+          <a:p>
+            <a:pPr>
+              <a:lnSpc>
+                <a:spcPct val="116000"/>
+              </a:lnSpc>
+              <a:spcAft>
+                <a:spcPts val="800"/>
+              </a:spcAft>
+            </a:pPr>
+            <a:r>
+              <a:rPr sz="1900" b="1">
+                <a:solidFill>
+                  <a:srgbClr val="0E7C66"/>
+                </a:solidFill>
+                <a:latin typeface="Meiryo"/>
+              </a:rPr>
+              <a:t>① 活性数の絞り込み分析(L12): </a:t>
+            </a:r>
+            <a:r>
+              <a:rPr sz="1900">
+                <a:solidFill>
+                  <a:srgbClr val="22272E"/>
+                </a:solidFill>
+                <a:latin typeface="Meiryo"/>
+              </a:rPr>
+              <a:t>現在の64個は多すぎる可能性。上位から絞り込んだときの精度変化を、特徴4分類(形態・統語・意味・語用)ごとに測定 — 「何個の活性で特徴を担えるか」の実証</a:t>
+            </a:r>
+          </a:p>
+          <a:p>
+            <a:pPr>
+              <a:lnSpc>
+                <a:spcPct val="116000"/>
+              </a:lnSpc>
+              <a:spcAft>
+                <a:spcPts val="800"/>
+              </a:spcAft>
+            </a:pPr>
+            <a:r>
+              <a:rPr sz="1900" b="1">
+                <a:solidFill>
+                  <a:srgbClr val="0E7C66"/>
+                </a:solidFill>
+                <a:latin typeface="Meiryo"/>
+              </a:rPr>
+              <a:t>② 精度改善案の実施: </a:t>
+            </a:r>
+            <a:r>
+              <a:rPr sz="1900">
+                <a:solidFill>
+                  <a:srgbClr val="22272E"/>
+                </a:solidFill>
+                <a:latin typeface="Meiryo"/>
+              </a:rPr>
+              <a:t>スペックの整形(大きさの較正・雑音除去)、編集器を集約スペック入りで追加学習、方向別の較正 など</a:t>
+            </a:r>
+          </a:p>
+          <a:p>
+            <a:pPr>
+              <a:lnSpc>
+                <a:spcPct val="116000"/>
+              </a:lnSpc>
+              <a:spcAft>
+                <a:spcPts val="800"/>
+              </a:spcAft>
+            </a:pPr>
+            <a:r>
+              <a:rPr sz="1900" b="1">
+                <a:solidFill>
+                  <a:srgbClr val="0E7C66"/>
+                </a:solidFill>
+                <a:latin typeface="Meiryo"/>
+              </a:rPr>
+              <a:t>③ 活性特定の自動化の検討: </a:t>
+            </a:r>
+            <a:r>
+              <a:rPr sz="1900">
+                <a:solidFill>
+                  <a:srgbClr val="22272E"/>
+                </a:solidFill>
+                <a:latin typeface="Meiryo"/>
+              </a:rPr>
+              <a:t>LinguaLens-Dataの一部で編集器ごと学習し、「どの活性を動かすべきか」自体をモデルに特定させる手法を設計できないか検討</a:t>
+            </a:r>
+          </a:p>
+          <a:p>
+            <a:pPr>
+              <a:lnSpc>
+                <a:spcPct val="116000"/>
+              </a:lnSpc>
+              <a:spcAft>
+                <a:spcPts val="800"/>
+              </a:spcAft>
+            </a:pPr>
+            <a:r>
+              <a:rPr sz="1900" b="1">
+                <a:solidFill>
+                  <a:srgbClr val="0E7C66"/>
+                </a:solidFill>
+                <a:latin typeface="Meiryo"/>
+              </a:rPr>
+              <a:t>(継続) </a:t>
+            </a:r>
+            <a:r>
+              <a:rPr sz="1900">
+                <a:solidFill>
+                  <a:srgbClr val="22272E"/>
+                </a:solidFill>
+                <a:latin typeface="Meiryo"/>
+              </a:rPr>
+              <a:t>全セルの計測完了・FIC判定完了 → 4分類別の完全な表に更新</a:t>
             </a:r>
           </a:p>
         </p:txBody>

--- a/slides/20260722_progress.pptx
+++ b/slides/20260722_progress.pptx
@@ -25,6 +25,7 @@
     <p:sldId id="273" r:id="rId24"/>
     <p:sldId id="274" r:id="rId25"/>
     <p:sldId id="275" r:id="rId26"/>
+    <p:sldId id="276" r:id="rId27"/>
   </p:sldIdLst>
   <p:sldSz cx="12191695" cy="6858000" type="screen4x3"/>
   <p:notesSz cx="6858000" cy="9144000"/>
@@ -7699,6 +7700,473 @@
                 </a:solidFill>
                 <a:latin typeface="Meiryo"/>
               </a:rPr>
+              <a:t>FICの計算方法(平易版)</a:t>
+            </a:r>
+          </a:p>
+        </p:txBody>
+      </p:sp>
+      <p:sp>
+        <p:nvSpPr>
+          <p:cNvPr id="4" name="TextBox 3"/>
+          <p:cNvSpPr txBox="1"/>
+          <p:nvPr/>
+        </p:nvSpPr>
+        <p:spPr>
+          <a:xfrm>
+            <a:off x="548640" y="1097280"/>
+            <a:ext cx="11155680" cy="365760"/>
+          </a:xfrm>
+          <a:prstGeom prst="rect">
+            <a:avLst/>
+          </a:prstGeom>
+          <a:noFill/>
+        </p:spPr>
+        <p:txBody>
+          <a:bodyPr wrap="square">
+            <a:spAutoFit/>
+          </a:bodyPr>
+          <a:lstStyle/>
+          <a:p>
+            <a:pPr algn="l">
+              <a:lnSpc>
+                <a:spcPct val="115000"/>
+              </a:lnSpc>
+            </a:pPr>
+            <a:r>
+              <a:rPr sz="1600" b="1">
+                <a:solidFill>
+                  <a:srgbClr val="0E7C66"/>
+                </a:solidFill>
+                <a:latin typeface="Meiryo"/>
+              </a:rPr>
+              <a:t>手順① 2つの生成を用意する</a:t>
+            </a:r>
+          </a:p>
+        </p:txBody>
+      </p:sp>
+      <p:sp>
+        <p:nvSpPr>
+          <p:cNvPr id="5" name="TextBox 4"/>
+          <p:cNvSpPr txBox="1"/>
+          <p:nvPr/>
+        </p:nvSpPr>
+        <p:spPr>
+          <a:xfrm>
+            <a:off x="822960" y="1499616"/>
+            <a:ext cx="10789920" cy="685800"/>
+          </a:xfrm>
+          <a:prstGeom prst="rect">
+            <a:avLst/>
+          </a:prstGeom>
+          <a:noFill/>
+        </p:spPr>
+        <p:txBody>
+          <a:bodyPr wrap="square">
+            <a:spAutoFit/>
+          </a:bodyPr>
+          <a:lstStyle/>
+          <a:p>
+            <a:pPr algn="l">
+              <a:lnSpc>
+                <a:spcPct val="115000"/>
+              </a:lnSpc>
+            </a:pPr>
+            <a:r>
+              <a:rPr sz="1350" b="0">
+                <a:solidFill>
+                  <a:srgbClr val="22272E"/>
+                </a:solidFill>
+                <a:latin typeface="Meiryo"/>
+              </a:rPr>
+              <a:t>同じ入力文から「介入あり」と「介入なし(復唱だけ)」の2つの生成を作る。違いは介入の有無だけ — 差が出れば介入のせいと言える。</a:t>
+            </a:r>
+          </a:p>
+        </p:txBody>
+      </p:sp>
+      <p:sp>
+        <p:nvSpPr>
+          <p:cNvPr id="6" name="TextBox 5"/>
+          <p:cNvSpPr txBox="1"/>
+          <p:nvPr/>
+        </p:nvSpPr>
+        <p:spPr>
+          <a:xfrm>
+            <a:off x="548640" y="2176272"/>
+            <a:ext cx="11155680" cy="365760"/>
+          </a:xfrm>
+          <a:prstGeom prst="rect">
+            <a:avLst/>
+          </a:prstGeom>
+          <a:noFill/>
+        </p:spPr>
+        <p:txBody>
+          <a:bodyPr wrap="square">
+            <a:spAutoFit/>
+          </a:bodyPr>
+          <a:lstStyle/>
+          <a:p>
+            <a:pPr algn="l">
+              <a:lnSpc>
+                <a:spcPct val="115000"/>
+              </a:lnSpc>
+            </a:pPr>
+            <a:r>
+              <a:rPr sz="1600" b="1">
+                <a:solidFill>
+                  <a:srgbClr val="0E7C66"/>
+                </a:solidFill>
+                <a:latin typeface="Meiryo"/>
+              </a:rPr>
+              <a:t>手順② GPT-4oが見比べる</a:t>
+            </a:r>
+          </a:p>
+        </p:txBody>
+      </p:sp>
+      <p:sp>
+        <p:nvSpPr>
+          <p:cNvPr id="7" name="TextBox 6"/>
+          <p:cNvSpPr txBox="1"/>
+          <p:nvPr/>
+        </p:nvSpPr>
+        <p:spPr>
+          <a:xfrm>
+            <a:off x="822960" y="2578608"/>
+            <a:ext cx="10789920" cy="685800"/>
+          </a:xfrm>
+          <a:prstGeom prst="rect">
+            <a:avLst/>
+          </a:prstGeom>
+          <a:noFill/>
+        </p:spPr>
+        <p:txBody>
+          <a:bodyPr wrap="square">
+            <a:spAutoFit/>
+          </a:bodyPr>
+          <a:lstStyle/>
+          <a:p>
+            <a:pPr algn="l">
+              <a:lnSpc>
+                <a:spcPct val="115000"/>
+              </a:lnSpc>
+            </a:pPr>
+            <a:r>
+              <a:rPr sz="1350" b="0">
+                <a:solidFill>
+                  <a:srgbClr val="22272E"/>
+                </a:solidFill>
+                <a:latin typeface="Meiryo"/>
+              </a:rPr>
+              <a:t>2つの文を見せて「対象の特徴(例: 過去形)がより多いのはどちらか? MORE / LESS / SAME で答えよ」と聞く。どちらが介入ありかは伏せ、提示順もランダム化(当てずっぽう・位置バイアス対策)。</a:t>
+            </a:r>
+          </a:p>
+        </p:txBody>
+      </p:sp>
+      <p:sp>
+        <p:nvSpPr>
+          <p:cNvPr id="8" name="TextBox 7"/>
+          <p:cNvSpPr txBox="1"/>
+          <p:nvPr/>
+        </p:nvSpPr>
+        <p:spPr>
+          <a:xfrm>
+            <a:off x="548640" y="3255263"/>
+            <a:ext cx="11155680" cy="365760"/>
+          </a:xfrm>
+          <a:prstGeom prst="rect">
+            <a:avLst/>
+          </a:prstGeom>
+          <a:noFill/>
+        </p:spPr>
+        <p:txBody>
+          <a:bodyPr wrap="square">
+            <a:spAutoFit/>
+          </a:bodyPr>
+          <a:lstStyle/>
+          <a:p>
+            <a:pPr algn="l">
+              <a:lnSpc>
+                <a:spcPct val="115000"/>
+              </a:lnSpc>
+            </a:pPr>
+            <a:r>
+              <a:rPr sz="1600" b="1">
+                <a:solidFill>
+                  <a:srgbClr val="0E7C66"/>
+                </a:solidFill>
+                <a:latin typeface="Meiryo"/>
+              </a:rPr>
+              <a:t>手順③ 割合を2つ数える</a:t>
+            </a:r>
+          </a:p>
+        </p:txBody>
+      </p:sp>
+      <p:sp>
+        <p:nvSpPr>
+          <p:cNvPr id="9" name="TextBox 8"/>
+          <p:cNvSpPr txBox="1"/>
+          <p:nvPr/>
+        </p:nvSpPr>
+        <p:spPr>
+          <a:xfrm>
+            <a:off x="822960" y="3657599"/>
+            <a:ext cx="10789920" cy="685800"/>
+          </a:xfrm>
+          <a:prstGeom prst="rect">
+            <a:avLst/>
+          </a:prstGeom>
+          <a:noFill/>
+        </p:spPr>
+        <p:txBody>
+          <a:bodyPr wrap="square">
+            <a:spAutoFit/>
+          </a:bodyPr>
+          <a:lstStyle/>
+          <a:p>
+            <a:pPr algn="l">
+              <a:lnSpc>
+                <a:spcPct val="115000"/>
+              </a:lnSpc>
+            </a:pPr>
+            <a:r>
+              <a:rPr sz="1350" b="0">
+                <a:solidFill>
+                  <a:srgbClr val="22272E"/>
+                </a:solidFill>
+                <a:latin typeface="Meiryo"/>
+              </a:rPr>
+              <a:t>PT = 正しいspecで狙い通りに動いた割合(消す方向ならLESS判定の率)。PB = でたらめ(random)specで同じことが起きた割合 — 「介入の中身と無関係に起きる分」の基準線。</a:t>
+            </a:r>
+          </a:p>
+        </p:txBody>
+      </p:sp>
+      <p:sp>
+        <p:nvSpPr>
+          <p:cNvPr id="10" name="TextBox 9"/>
+          <p:cNvSpPr txBox="1"/>
+          <p:nvPr/>
+        </p:nvSpPr>
+        <p:spPr>
+          <a:xfrm>
+            <a:off x="548640" y="4334255"/>
+            <a:ext cx="11155680" cy="365760"/>
+          </a:xfrm>
+          <a:prstGeom prst="rect">
+            <a:avLst/>
+          </a:prstGeom>
+          <a:noFill/>
+        </p:spPr>
+        <p:txBody>
+          <a:bodyPr wrap="square">
+            <a:spAutoFit/>
+          </a:bodyPr>
+          <a:lstStyle/>
+          <a:p>
+            <a:pPr algn="l">
+              <a:lnSpc>
+                <a:spcPct val="115000"/>
+              </a:lnSpc>
+            </a:pPr>
+            <a:r>
+              <a:rPr sz="1600" b="1">
+                <a:solidFill>
+                  <a:srgbClr val="0E7C66"/>
+                </a:solidFill>
+                <a:latin typeface="Meiryo"/>
+              </a:rPr>
+              <a:t>手順④ スコア = (PT − PB) / PT   ※足す方向は (PT − PB) / (1 − PB)</a:t>
+            </a:r>
+          </a:p>
+        </p:txBody>
+      </p:sp>
+      <p:sp>
+        <p:nvSpPr>
+          <p:cNvPr id="11" name="TextBox 10"/>
+          <p:cNvSpPr txBox="1"/>
+          <p:nvPr/>
+        </p:nvSpPr>
+        <p:spPr>
+          <a:xfrm>
+            <a:off x="822960" y="4736592"/>
+            <a:ext cx="10789920" cy="685800"/>
+          </a:xfrm>
+          <a:prstGeom prst="rect">
+            <a:avLst/>
+          </a:prstGeom>
+          <a:noFill/>
+        </p:spPr>
+        <p:txBody>
+          <a:bodyPr wrap="square">
+            <a:spAutoFit/>
+          </a:bodyPr>
+          <a:lstStyle/>
+          <a:p>
+            <a:pPr algn="l">
+              <a:lnSpc>
+                <a:spcPct val="115000"/>
+              </a:lnSpc>
+            </a:pPr>
+            <a:r>
+              <a:rPr sz="1350" b="0">
+                <a:solidFill>
+                  <a:srgbClr val="22272E"/>
+                </a:solidFill>
+                <a:latin typeface="Meiryo"/>
+              </a:rPr>
+              <a:t>「観測された効果のうち、正しい指定に起因する部分の割合」。0 = でたらめspecと変わらない(特異性なし)、1 = 効果が全てspec由来。</a:t>
+            </a:r>
+          </a:p>
+        </p:txBody>
+      </p:sp>
+      <p:sp>
+        <p:nvSpPr>
+          <p:cNvPr id="12" name="TextBox 11"/>
+          <p:cNvSpPr txBox="1"/>
+          <p:nvPr/>
+        </p:nvSpPr>
+        <p:spPr>
+          <a:xfrm>
+            <a:off x="548640" y="5458967"/>
+            <a:ext cx="11155680" cy="777240"/>
+          </a:xfrm>
+          <a:prstGeom prst="rect">
+            <a:avLst/>
+          </a:prstGeom>
+          <a:noFill/>
+        </p:spPr>
+        <p:txBody>
+          <a:bodyPr wrap="square">
+            <a:spAutoFit/>
+          </a:bodyPr>
+          <a:lstStyle/>
+          <a:p>
+            <a:pPr algn="l">
+              <a:lnSpc>
+                <a:spcPct val="115000"/>
+              </a:lnSpc>
+            </a:pPr>
+            <a:r>
+              <a:rPr sz="1300" b="0">
+                <a:solidFill>
+                  <a:srgbClr val="5A6472"/>
+                </a:solidFill>
+                <a:latin typeface="Meiryo"/>
+              </a:rPr>
+              <a:t>例(提案手法・L12・消す方向): PT=39%、PB=2% → (0.39−0.02)/0.39 = 0.94。「94%のペアで成功」ではなく「除去効果のほぼ全てが正しいspecに起因する」という特異性の値。</a:t>
+            </a:r>
+          </a:p>
+          <a:p>
+            <a:pPr algn="l">
+              <a:lnSpc>
+                <a:spcPct val="115000"/>
+              </a:lnSpc>
+            </a:pPr>
+            <a:r>
+              <a:rPr sz="1300" b="0">
+                <a:solidFill>
+                  <a:srgbClr val="5A6472"/>
+                </a:solidFill>
+                <a:latin typeface="Meiryo"/>
+              </a:rPr>
+              <a:t>式はLinguaLens公式(App. E.2)そのまま。負値はw=0.5のペナルティで算入、両方向が揃うfeatureは調和平均がFIC。</a:t>
+            </a:r>
+          </a:p>
+        </p:txBody>
+      </p:sp>
+    </p:spTree>
+  </p:cSld>
+  <p:clrMapOvr>
+    <a:masterClrMapping/>
+  </p:clrMapOvr>
+</p:sld>
+</file>
+
+<file path=ppt/slides/slide18.xml><?xml version="1.0" encoding="utf-8"?>
+<p:sld xmlns:a="http://schemas.openxmlformats.org/drawingml/2006/main" xmlns:p="http://schemas.openxmlformats.org/presentationml/2006/main" xmlns:r="http://schemas.openxmlformats.org/officeDocument/2006/relationships">
+  <p:cSld>
+    <p:spTree>
+      <p:nvGrpSpPr>
+        <p:cNvPr id="1" name=""/>
+        <p:cNvGrpSpPr/>
+        <p:nvPr/>
+      </p:nvGrpSpPr>
+      <p:grpSpPr/>
+      <p:sp>
+        <p:nvSpPr>
+          <p:cNvPr id="2" name="Rectangle 1"/>
+          <p:cNvSpPr/>
+          <p:nvPr/>
+        </p:nvSpPr>
+        <p:spPr>
+          <a:xfrm>
+            <a:off x="0" y="0"/>
+            <a:ext cx="12191695" cy="146304"/>
+          </a:xfrm>
+          <a:prstGeom prst="rect">
+            <a:avLst/>
+          </a:prstGeom>
+          <a:solidFill>
+            <a:srgbClr val="0E7C66"/>
+          </a:solidFill>
+          <a:ln>
+            <a:noFill/>
+          </a:ln>
+        </p:spPr>
+        <p:style>
+          <a:lnRef idx="1">
+            <a:schemeClr val="accent1"/>
+          </a:lnRef>
+          <a:fillRef idx="3">
+            <a:schemeClr val="accent1"/>
+          </a:fillRef>
+          <a:effectRef idx="2">
+            <a:schemeClr val="accent1"/>
+          </a:effectRef>
+          <a:fontRef idx="minor">
+            <a:schemeClr val="lt1"/>
+          </a:fontRef>
+        </p:style>
+        <p:txBody>
+          <a:bodyPr rtlCol="0" anchor="ctr"/>
+          <a:lstStyle/>
+          <a:p>
+            <a:pPr algn="ctr"/>
+          </a:p>
+        </p:txBody>
+      </p:sp>
+      <p:sp>
+        <p:nvSpPr>
+          <p:cNvPr id="3" name="TextBox 2"/>
+          <p:cNvSpPr txBox="1"/>
+          <p:nvPr/>
+        </p:nvSpPr>
+        <p:spPr>
+          <a:xfrm>
+            <a:off x="502920" y="256032"/>
+            <a:ext cx="11247120" cy="731520"/>
+          </a:xfrm>
+          <a:prstGeom prst="rect">
+            <a:avLst/>
+          </a:prstGeom>
+          <a:noFill/>
+        </p:spPr>
+        <p:txBody>
+          <a:bodyPr wrap="square">
+            <a:spAutoFit/>
+          </a:bodyPr>
+          <a:lstStyle/>
+          <a:p>
+            <a:pPr algn="l">
+              <a:lnSpc>
+                <a:spcPct val="115000"/>
+              </a:lnSpc>
+            </a:pPr>
+            <a:r>
+              <a:rPr sz="2700" b="1">
+                <a:solidFill>
+                  <a:srgbClr val="22272E"/>
+                </a:solidFill>
+                <a:latin typeface="Meiryo"/>
+              </a:rPr>
               <a:t>実験結果 3/3 — FIC(特徴が本当に動いたか、gpt-4o判定)</a:t>
             </a:r>
           </a:p>
@@ -8371,7 +8839,7 @@
 </p:sld>
 </file>
 
-<file path=ppt/slides/slide18.xml><?xml version="1.0" encoding="utf-8"?>
+<file path=ppt/slides/slide19.xml><?xml version="1.0" encoding="utf-8"?>
 <p:sld xmlns:a="http://schemas.openxmlformats.org/drawingml/2006/main" xmlns:p="http://schemas.openxmlformats.org/presentationml/2006/main" xmlns:r="http://schemas.openxmlformats.org/officeDocument/2006/relationships">
   <p:cSld>
     <p:spTree>
@@ -8976,578 +9444,6 @@
                 <a:latin typeface="Meiryo"/>
               </a:rPr>
               <a:t>steerの0.76は壊れ文19%を含み割引が必要(本文に明記)。promptingは流暢だが指定外も変える(exact低の主因)。</a:t>
-            </a:r>
-          </a:p>
-        </p:txBody>
-      </p:sp>
-    </p:spTree>
-  </p:cSld>
-  <p:clrMapOvr>
-    <a:masterClrMapping/>
-  </p:clrMapOvr>
-</p:sld>
-</file>
-
-<file path=ppt/slides/slide19.xml><?xml version="1.0" encoding="utf-8"?>
-<p:sld xmlns:a="http://schemas.openxmlformats.org/drawingml/2006/main" xmlns:p="http://schemas.openxmlformats.org/presentationml/2006/main" xmlns:r="http://schemas.openxmlformats.org/officeDocument/2006/relationships">
-  <p:cSld>
-    <p:spTree>
-      <p:nvGrpSpPr>
-        <p:cNvPr id="1" name=""/>
-        <p:cNvGrpSpPr/>
-        <p:nvPr/>
-      </p:nvGrpSpPr>
-      <p:grpSpPr/>
-      <p:sp>
-        <p:nvSpPr>
-          <p:cNvPr id="2" name="Rectangle 1"/>
-          <p:cNvSpPr/>
-          <p:nvPr/>
-        </p:nvSpPr>
-        <p:spPr>
-          <a:xfrm>
-            <a:off x="0" y="0"/>
-            <a:ext cx="12191695" cy="146304"/>
-          </a:xfrm>
-          <a:prstGeom prst="rect">
-            <a:avLst/>
-          </a:prstGeom>
-          <a:solidFill>
-            <a:srgbClr val="0E7C66"/>
-          </a:solidFill>
-          <a:ln>
-            <a:noFill/>
-          </a:ln>
-        </p:spPr>
-        <p:style>
-          <a:lnRef idx="1">
-            <a:schemeClr val="accent1"/>
-          </a:lnRef>
-          <a:fillRef idx="3">
-            <a:schemeClr val="accent1"/>
-          </a:fillRef>
-          <a:effectRef idx="2">
-            <a:schemeClr val="accent1"/>
-          </a:effectRef>
-          <a:fontRef idx="minor">
-            <a:schemeClr val="lt1"/>
-          </a:fontRef>
-        </p:style>
-        <p:txBody>
-          <a:bodyPr rtlCol="0" anchor="ctr"/>
-          <a:lstStyle/>
-          <a:p>
-            <a:pPr algn="ctr"/>
-          </a:p>
-        </p:txBody>
-      </p:sp>
-      <p:sp>
-        <p:nvSpPr>
-          <p:cNvPr id="3" name="TextBox 2"/>
-          <p:cNvSpPr txBox="1"/>
-          <p:nvPr/>
-        </p:nvSpPr>
-        <p:spPr>
-          <a:xfrm>
-            <a:off x="502920" y="256032"/>
-            <a:ext cx="11247120" cy="731520"/>
-          </a:xfrm>
-          <a:prstGeom prst="rect">
-            <a:avLst/>
-          </a:prstGeom>
-          <a:noFill/>
-        </p:spPr>
-        <p:txBody>
-          <a:bodyPr wrap="square">
-            <a:spAutoFit/>
-          </a:bodyPr>
-          <a:lstStyle/>
-          <a:p>
-            <a:pPr algn="l">
-              <a:lnSpc>
-                <a:spcPct val="115000"/>
-              </a:lnSpc>
-            </a:pPr>
-            <a:r>
-              <a:rPr sz="2700" b="1">
-                <a:solidFill>
-                  <a:srgbClr val="22272E"/>
-                </a:solidFill>
-                <a:latin typeface="Meiryo"/>
-              </a:rPr>
-              <a:t>失敗例 — promptingのFICはなぜ低いか</a:t>
-            </a:r>
-          </a:p>
-        </p:txBody>
-      </p:sp>
-      <p:sp>
-        <p:nvSpPr>
-          <p:cNvPr id="4" name="TextBox 3"/>
-          <p:cNvSpPr txBox="1"/>
-          <p:nvPr/>
-        </p:nvSpPr>
-        <p:spPr>
-          <a:xfrm>
-            <a:off x="502920" y="1051560"/>
-            <a:ext cx="11247120" cy="685800"/>
-          </a:xfrm>
-          <a:prstGeom prst="rect">
-            <a:avLst/>
-          </a:prstGeom>
-          <a:noFill/>
-        </p:spPr>
-        <p:txBody>
-          <a:bodyPr wrap="square">
-            <a:spAutoFit/>
-          </a:bodyPr>
-          <a:lstStyle/>
-          <a:p>
-            <a:pPr algn="l">
-              <a:lnSpc>
-                <a:spcPct val="115000"/>
-              </a:lnSpc>
-            </a:pPr>
-            <a:r>
-              <a:rPr sz="1500" b="0">
-                <a:solidFill>
-                  <a:srgbClr val="5A6472"/>
-                </a:solidFill>
-                <a:latin typeface="Meiryo"/>
-              </a:rPr>
-              <a:t>FICは「正しい指定のときだけ特徴が動くか」を測る(間違った指定でも動くと減点)。promptingは指示が間違っていても編集してしまうため、exactが高くてもFICが下がる。</a:t>
-            </a:r>
-          </a:p>
-        </p:txBody>
-      </p:sp>
-      <p:sp>
-        <p:nvSpPr>
-          <p:cNvPr id="5" name="TextBox 4"/>
-          <p:cNvSpPr txBox="1"/>
-          <p:nvPr/>
-        </p:nvSpPr>
-        <p:spPr>
-          <a:xfrm>
-            <a:off x="502920" y="1828800"/>
-            <a:ext cx="5577840" cy="365760"/>
-          </a:xfrm>
-          <a:prstGeom prst="rect">
-            <a:avLst/>
-          </a:prstGeom>
-          <a:noFill/>
-        </p:spPr>
-        <p:txBody>
-          <a:bodyPr wrap="square">
-            <a:spAutoFit/>
-          </a:bodyPr>
-          <a:lstStyle/>
-          <a:p>
-            <a:pPr algn="l">
-              <a:lnSpc>
-                <a:spcPct val="115000"/>
-              </a:lnSpc>
-            </a:pPr>
-            <a:r>
-              <a:rPr sz="1600" b="1">
-                <a:solidFill>
-                  <a:srgbClr val="5E6E8C"/>
-                </a:solidFill>
-                <a:latin typeface="Meiryo"/>
-              </a:rPr>
-              <a:t>prompting: 無関係な特徴の指示でも消してしまう</a:t>
-            </a:r>
-          </a:p>
-        </p:txBody>
-      </p:sp>
-      <p:sp>
-        <p:nvSpPr>
-          <p:cNvPr id="6" name="Rounded Rectangle 5"/>
-          <p:cNvSpPr/>
-          <p:nvPr/>
-        </p:nvSpPr>
-        <p:spPr>
-          <a:xfrm>
-            <a:off x="502920" y="2286000"/>
-            <a:ext cx="5577840" cy="2834640"/>
-          </a:xfrm>
-          <a:prstGeom prst="roundRect">
-            <a:avLst/>
-          </a:prstGeom>
-          <a:solidFill>
-            <a:srgbClr val="F6F7F8"/>
-          </a:solidFill>
-          <a:ln w="20320">
-            <a:solidFill>
-              <a:srgbClr val="5E6E8C"/>
-            </a:solidFill>
-          </a:ln>
-        </p:spPr>
-        <p:style>
-          <a:lnRef idx="1">
-            <a:schemeClr val="accent1"/>
-          </a:lnRef>
-          <a:fillRef idx="3">
-            <a:schemeClr val="accent1"/>
-          </a:fillRef>
-          <a:effectRef idx="2">
-            <a:schemeClr val="accent1"/>
-          </a:effectRef>
-          <a:fontRef idx="minor">
-            <a:schemeClr val="lt1"/>
-          </a:fontRef>
-        </p:style>
-        <p:txBody>
-          <a:bodyPr rtlCol="0" anchor="ctr" wrap="square" lIns="54864" rIns="54864" tIns="36576" bIns="36576"/>
-          <a:lstStyle/>
-          <a:p>
-            <a:pPr algn="ctr"/>
-            <a:r>
-              <a:rPr sz="1200" b="0">
-                <a:solidFill>
-                  <a:srgbClr val="22272E"/>
-                </a:solidFill>
-                <a:latin typeface="Meiryo"/>
-              </a:rPr>
-              <a:t>src:  He is the most respectful student here.</a:t>
-            </a:r>
-          </a:p>
-          <a:p>
-            <a:pPr algn="ctr"/>
-            <a:r>
-              <a:rPr sz="1200" b="0">
-                <a:solidFill>
-                  <a:srgbClr val="22272E"/>
-                </a:solidFill>
-                <a:latin typeface="Meiryo"/>
-              </a:rPr>
-              <a:t>無関係指示: → He is the respectful student here.</a:t>
-            </a:r>
-          </a:p>
-          <a:p>
-            <a:pPr algn="ctr"/>
-            <a:r>
-              <a:rPr sz="1200" b="0">
-                <a:solidFill>
-                  <a:srgbClr val="22272E"/>
-                </a:solidFill>
-                <a:latin typeface="Meiryo"/>
-              </a:rPr>
-              <a:t>(頼んでいない最上級が消える=正解と同じ編集)</a:t>
-            </a:r>
-          </a:p>
-          <a:p>
-            <a:pPr algn="ctr"/>
-            <a:r>
-              <a:rPr sz="1200" b="0">
-                <a:solidFill>
-                  <a:srgbClr val="22272E"/>
-                </a:solidFill>
-                <a:latin typeface="Meiryo"/>
-              </a:rPr>
-              <a:t/>
-            </a:r>
-          </a:p>
-          <a:p>
-            <a:pPr algn="ctr"/>
-            <a:r>
-              <a:rPr sz="1200" b="0">
-                <a:solidFill>
-                  <a:srgbClr val="22272E"/>
-                </a:solidFill>
-                <a:latin typeface="Meiryo"/>
-              </a:rPr>
-              <a:t>src:  May I interject, the mobile app needs …</a:t>
-            </a:r>
-          </a:p>
-          <a:p>
-            <a:pPr algn="ctr"/>
-            <a:r>
-              <a:rPr sz="1200" b="0">
-                <a:solidFill>
-                  <a:srgbClr val="22272E"/>
-                </a:solidFill>
-                <a:latin typeface="Meiryo"/>
-              </a:rPr>
-              <a:t>無関係指示: → The mobile app needs …(間投句が消える)</a:t>
-            </a:r>
-          </a:p>
-          <a:p>
-            <a:pPr algn="ctr"/>
-            <a:r>
-              <a:rPr sz="1200" b="0">
-                <a:solidFill>
-                  <a:srgbClr val="22272E"/>
-                </a:solidFill>
-                <a:latin typeface="Meiryo"/>
-              </a:rPr>
-              <a:t/>
-            </a:r>
-          </a:p>
-          <a:p>
-            <a:pPr algn="ctr"/>
-            <a:r>
-              <a:rPr sz="1200" b="0">
-                <a:solidFill>
-                  <a:srgbClr val="22272E"/>
-                </a:solidFill>
-                <a:latin typeface="Meiryo"/>
-              </a:rPr>
-              <a:t>src:  He wanted to slowly walk through …</a:t>
-            </a:r>
-          </a:p>
-          <a:p>
-            <a:pPr algn="ctr"/>
-            <a:r>
-              <a:rPr sz="1200" b="0">
-                <a:solidFill>
-                  <a:srgbClr val="22272E"/>
-                </a:solidFill>
-                <a:latin typeface="Meiryo"/>
-              </a:rPr>
-              <a:t>無関係指示: → He wanted to leisurely explore …(大幅書換)</a:t>
-            </a:r>
-          </a:p>
-        </p:txBody>
-      </p:sp>
-      <p:sp>
-        <p:nvSpPr>
-          <p:cNvPr id="7" name="TextBox 6"/>
-          <p:cNvSpPr txBox="1"/>
-          <p:nvPr/>
-        </p:nvSpPr>
-        <p:spPr>
-          <a:xfrm>
-            <a:off x="6355080" y="1828800"/>
-            <a:ext cx="5486400" cy="365760"/>
-          </a:xfrm>
-          <a:prstGeom prst="rect">
-            <a:avLst/>
-          </a:prstGeom>
-          <a:noFill/>
-        </p:spPr>
-        <p:txBody>
-          <a:bodyPr wrap="square">
-            <a:spAutoFit/>
-          </a:bodyPr>
-          <a:lstStyle/>
-          <a:p>
-            <a:pPr algn="l">
-              <a:lnSpc>
-                <a:spcPct val="115000"/>
-              </a:lnSpc>
-            </a:pPr>
-            <a:r>
-              <a:rPr sz="1600" b="1">
-                <a:solidFill>
-                  <a:srgbClr val="0E7C66"/>
-                </a:solidFill>
-                <a:latin typeface="Meiryo"/>
-              </a:rPr>
-              <a:t>本手法: 正しいスペックでも編集が出ないことがある</a:t>
-            </a:r>
-          </a:p>
-        </p:txBody>
-      </p:sp>
-      <p:sp>
-        <p:nvSpPr>
-          <p:cNvPr id="8" name="Rounded Rectangle 7"/>
-          <p:cNvSpPr/>
-          <p:nvPr/>
-        </p:nvSpPr>
-        <p:spPr>
-          <a:xfrm>
-            <a:off x="6355080" y="2286000"/>
-            <a:ext cx="5394960" cy="2834640"/>
-          </a:xfrm>
-          <a:prstGeom prst="roundRect">
-            <a:avLst/>
-          </a:prstGeom>
-          <a:solidFill>
-            <a:srgbClr val="F6F7F8"/>
-          </a:solidFill>
-          <a:ln w="20320">
-            <a:solidFill>
-              <a:srgbClr val="0E7C66"/>
-            </a:solidFill>
-          </a:ln>
-        </p:spPr>
-        <p:style>
-          <a:lnRef idx="1">
-            <a:schemeClr val="accent1"/>
-          </a:lnRef>
-          <a:fillRef idx="3">
-            <a:schemeClr val="accent1"/>
-          </a:fillRef>
-          <a:effectRef idx="2">
-            <a:schemeClr val="accent1"/>
-          </a:effectRef>
-          <a:fontRef idx="minor">
-            <a:schemeClr val="lt1"/>
-          </a:fontRef>
-        </p:style>
-        <p:txBody>
-          <a:bodyPr rtlCol="0" anchor="ctr" wrap="square" lIns="54864" rIns="54864" tIns="36576" bIns="36576"/>
-          <a:lstStyle/>
-          <a:p>
-            <a:pPr algn="ctr"/>
-            <a:r>
-              <a:rPr sz="1200" b="0">
-                <a:solidFill>
-                  <a:srgbClr val="22272E"/>
-                </a:solidFill>
-                <a:latin typeface="Meiryo"/>
-              </a:rPr>
-              <a:t>src:  He is the most respectful student here.</a:t>
-            </a:r>
-          </a:p>
-          <a:p>
-            <a:pPr algn="ctr"/>
-            <a:r>
-              <a:rPr sz="1200" b="0">
-                <a:solidFill>
-                  <a:srgbClr val="22272E"/>
-                </a:solidFill>
-                <a:latin typeface="Meiryo"/>
-              </a:rPr>
-              <a:t>出力 = src のまま(最上級を消せず)</a:t>
-            </a:r>
-          </a:p>
-          <a:p>
-            <a:pPr algn="ctr"/>
-            <a:r>
-              <a:rPr sz="1200" b="0">
-                <a:solidFill>
-                  <a:srgbClr val="22272E"/>
-                </a:solidFill>
-                <a:latin typeface="Meiryo"/>
-              </a:rPr>
-              <a:t/>
-            </a:r>
-          </a:p>
-          <a:p>
-            <a:pPr algn="ctr"/>
-            <a:r>
-              <a:rPr sz="1200" b="0">
-                <a:solidFill>
-                  <a:srgbClr val="22272E"/>
-                </a:solidFill>
-                <a:latin typeface="Meiryo"/>
-              </a:rPr>
-              <a:t>src:  A clock ticks without pause.</a:t>
-            </a:r>
-          </a:p>
-          <a:p>
-            <a:pPr algn="ctr"/>
-            <a:r>
-              <a:rPr sz="1200" b="0">
-                <a:solidFill>
-                  <a:srgbClr val="22272E"/>
-                </a:solidFill>
-                <a:latin typeface="Meiryo"/>
-              </a:rPr>
-              <a:t>出力 = src のまま(without pauseを削除できず)</a:t>
-            </a:r>
-          </a:p>
-          <a:p>
-            <a:pPr algn="ctr"/>
-            <a:r>
-              <a:rPr sz="1200" b="0">
-                <a:solidFill>
-                  <a:srgbClr val="22272E"/>
-                </a:solidFill>
-                <a:latin typeface="Meiryo"/>
-              </a:rPr>
-              <a:t/>
-            </a:r>
-          </a:p>
-          <a:p>
-            <a:pPr algn="ctr"/>
-            <a:r>
-              <a:rPr sz="1200" b="0">
-                <a:solidFill>
-                  <a:srgbClr val="22272E"/>
-                </a:solidFill>
-                <a:latin typeface="Meiryo"/>
-              </a:rPr>
-              <a:t>src:  Biologists studied green slime in …</a:t>
-            </a:r>
-          </a:p>
-          <a:p>
-            <a:pPr algn="ctr"/>
-            <a:r>
-              <a:rPr sz="1200" b="0">
-                <a:solidFill>
-                  <a:srgbClr val="22272E"/>
-                </a:solidFill>
-                <a:latin typeface="Meiryo"/>
-              </a:rPr>
-              <a:t>出力 = src のまま(algaeへの語彙置換 —</a:t>
-            </a:r>
-          </a:p>
-          <a:p>
-            <a:pPr algn="ctr"/>
-            <a:r>
-              <a:rPr sz="1200" b="0">
-                <a:solidFill>
-                  <a:srgbClr val="22272E"/>
-                </a:solidFill>
-                <a:latin typeface="Meiryo"/>
-              </a:rPr>
-              <a:t> 特徴平均のスペックでは単語の中身まで運べない)</a:t>
-            </a:r>
-          </a:p>
-        </p:txBody>
-      </p:sp>
-      <p:sp>
-        <p:nvSpPr>
-          <p:cNvPr id="9" name="TextBox 8"/>
-          <p:cNvSpPr txBox="1"/>
-          <p:nvPr/>
-        </p:nvSpPr>
-        <p:spPr>
-          <a:xfrm>
-            <a:off x="502920" y="5349240"/>
-            <a:ext cx="11247120" cy="1188720"/>
-          </a:xfrm>
-          <a:prstGeom prst="rect">
-            <a:avLst/>
-          </a:prstGeom>
-          <a:noFill/>
-        </p:spPr>
-        <p:txBody>
-          <a:bodyPr wrap="square">
-            <a:spAutoFit/>
-          </a:bodyPr>
-          <a:lstStyle/>
-          <a:p>
-            <a:pPr algn="l">
-              <a:lnSpc>
-                <a:spcPct val="115000"/>
-              </a:lnSpc>
-            </a:pPr>
-            <a:r>
-              <a:rPr sz="1400" b="0">
-                <a:solidFill>
-                  <a:srgbClr val="5A6472"/>
-                </a:solidFill>
-                <a:latin typeface="Meiryo"/>
-              </a:rPr>
-              <a:t>まとめ: promptingの失敗=「効きすぎ」(指定に従わない編集 → 介入としての特異性がない)。</a:t>
-            </a:r>
-          </a:p>
-          <a:p>
-            <a:pPr algn="l">
-              <a:lnSpc>
-                <a:spcPct val="115000"/>
-              </a:lnSpc>
-            </a:pPr>
-            <a:r>
-              <a:rPr sz="1400" b="0">
-                <a:solidFill>
-                  <a:srgbClr val="5A6472"/>
-                </a:solidFill>
-                <a:latin typeface="Meiryo"/>
-              </a:rPr>
-              <a:t>本手法の失敗=「効かなさすぎ」(発火不足・語彙固有の編集)。改善はToDo②のスペック較正と追加学習が対応。</a:t>
             </a:r>
           </a:p>
         </p:txBody>
@@ -9768,6 +9664,578 @@
 </file>
 
 <file path=ppt/slides/slide20.xml><?xml version="1.0" encoding="utf-8"?>
+<p:sld xmlns:a="http://schemas.openxmlformats.org/drawingml/2006/main" xmlns:p="http://schemas.openxmlformats.org/presentationml/2006/main" xmlns:r="http://schemas.openxmlformats.org/officeDocument/2006/relationships">
+  <p:cSld>
+    <p:spTree>
+      <p:nvGrpSpPr>
+        <p:cNvPr id="1" name=""/>
+        <p:cNvGrpSpPr/>
+        <p:nvPr/>
+      </p:nvGrpSpPr>
+      <p:grpSpPr/>
+      <p:sp>
+        <p:nvSpPr>
+          <p:cNvPr id="2" name="Rectangle 1"/>
+          <p:cNvSpPr/>
+          <p:nvPr/>
+        </p:nvSpPr>
+        <p:spPr>
+          <a:xfrm>
+            <a:off x="0" y="0"/>
+            <a:ext cx="12191695" cy="146304"/>
+          </a:xfrm>
+          <a:prstGeom prst="rect">
+            <a:avLst/>
+          </a:prstGeom>
+          <a:solidFill>
+            <a:srgbClr val="0E7C66"/>
+          </a:solidFill>
+          <a:ln>
+            <a:noFill/>
+          </a:ln>
+        </p:spPr>
+        <p:style>
+          <a:lnRef idx="1">
+            <a:schemeClr val="accent1"/>
+          </a:lnRef>
+          <a:fillRef idx="3">
+            <a:schemeClr val="accent1"/>
+          </a:fillRef>
+          <a:effectRef idx="2">
+            <a:schemeClr val="accent1"/>
+          </a:effectRef>
+          <a:fontRef idx="minor">
+            <a:schemeClr val="lt1"/>
+          </a:fontRef>
+        </p:style>
+        <p:txBody>
+          <a:bodyPr rtlCol="0" anchor="ctr"/>
+          <a:lstStyle/>
+          <a:p>
+            <a:pPr algn="ctr"/>
+          </a:p>
+        </p:txBody>
+      </p:sp>
+      <p:sp>
+        <p:nvSpPr>
+          <p:cNvPr id="3" name="TextBox 2"/>
+          <p:cNvSpPr txBox="1"/>
+          <p:nvPr/>
+        </p:nvSpPr>
+        <p:spPr>
+          <a:xfrm>
+            <a:off x="502920" y="256032"/>
+            <a:ext cx="11247120" cy="731520"/>
+          </a:xfrm>
+          <a:prstGeom prst="rect">
+            <a:avLst/>
+          </a:prstGeom>
+          <a:noFill/>
+        </p:spPr>
+        <p:txBody>
+          <a:bodyPr wrap="square">
+            <a:spAutoFit/>
+          </a:bodyPr>
+          <a:lstStyle/>
+          <a:p>
+            <a:pPr algn="l">
+              <a:lnSpc>
+                <a:spcPct val="115000"/>
+              </a:lnSpc>
+            </a:pPr>
+            <a:r>
+              <a:rPr sz="2700" b="1">
+                <a:solidFill>
+                  <a:srgbClr val="22272E"/>
+                </a:solidFill>
+                <a:latin typeface="Meiryo"/>
+              </a:rPr>
+              <a:t>失敗例 — promptingのFICはなぜ低いか</a:t>
+            </a:r>
+          </a:p>
+        </p:txBody>
+      </p:sp>
+      <p:sp>
+        <p:nvSpPr>
+          <p:cNvPr id="4" name="TextBox 3"/>
+          <p:cNvSpPr txBox="1"/>
+          <p:nvPr/>
+        </p:nvSpPr>
+        <p:spPr>
+          <a:xfrm>
+            <a:off x="502920" y="1051560"/>
+            <a:ext cx="11247120" cy="685800"/>
+          </a:xfrm>
+          <a:prstGeom prst="rect">
+            <a:avLst/>
+          </a:prstGeom>
+          <a:noFill/>
+        </p:spPr>
+        <p:txBody>
+          <a:bodyPr wrap="square">
+            <a:spAutoFit/>
+          </a:bodyPr>
+          <a:lstStyle/>
+          <a:p>
+            <a:pPr algn="l">
+              <a:lnSpc>
+                <a:spcPct val="115000"/>
+              </a:lnSpc>
+            </a:pPr>
+            <a:r>
+              <a:rPr sz="1500" b="0">
+                <a:solidFill>
+                  <a:srgbClr val="5A6472"/>
+                </a:solidFill>
+                <a:latin typeface="Meiryo"/>
+              </a:rPr>
+              <a:t>FICは「正しい指定のときだけ特徴が動くか」を測る(間違った指定でも動くと減点)。promptingは指示が間違っていても編集してしまうため、exactが高くてもFICが下がる。</a:t>
+            </a:r>
+          </a:p>
+        </p:txBody>
+      </p:sp>
+      <p:sp>
+        <p:nvSpPr>
+          <p:cNvPr id="5" name="TextBox 4"/>
+          <p:cNvSpPr txBox="1"/>
+          <p:nvPr/>
+        </p:nvSpPr>
+        <p:spPr>
+          <a:xfrm>
+            <a:off x="502920" y="1828800"/>
+            <a:ext cx="5577840" cy="365760"/>
+          </a:xfrm>
+          <a:prstGeom prst="rect">
+            <a:avLst/>
+          </a:prstGeom>
+          <a:noFill/>
+        </p:spPr>
+        <p:txBody>
+          <a:bodyPr wrap="square">
+            <a:spAutoFit/>
+          </a:bodyPr>
+          <a:lstStyle/>
+          <a:p>
+            <a:pPr algn="l">
+              <a:lnSpc>
+                <a:spcPct val="115000"/>
+              </a:lnSpc>
+            </a:pPr>
+            <a:r>
+              <a:rPr sz="1600" b="1">
+                <a:solidFill>
+                  <a:srgbClr val="5E6E8C"/>
+                </a:solidFill>
+                <a:latin typeface="Meiryo"/>
+              </a:rPr>
+              <a:t>prompting: 無関係な特徴の指示でも消してしまう</a:t>
+            </a:r>
+          </a:p>
+        </p:txBody>
+      </p:sp>
+      <p:sp>
+        <p:nvSpPr>
+          <p:cNvPr id="6" name="Rounded Rectangle 5"/>
+          <p:cNvSpPr/>
+          <p:nvPr/>
+        </p:nvSpPr>
+        <p:spPr>
+          <a:xfrm>
+            <a:off x="502920" y="2286000"/>
+            <a:ext cx="5577840" cy="2834640"/>
+          </a:xfrm>
+          <a:prstGeom prst="roundRect">
+            <a:avLst/>
+          </a:prstGeom>
+          <a:solidFill>
+            <a:srgbClr val="F6F7F8"/>
+          </a:solidFill>
+          <a:ln w="20320">
+            <a:solidFill>
+              <a:srgbClr val="5E6E8C"/>
+            </a:solidFill>
+          </a:ln>
+        </p:spPr>
+        <p:style>
+          <a:lnRef idx="1">
+            <a:schemeClr val="accent1"/>
+          </a:lnRef>
+          <a:fillRef idx="3">
+            <a:schemeClr val="accent1"/>
+          </a:fillRef>
+          <a:effectRef idx="2">
+            <a:schemeClr val="accent1"/>
+          </a:effectRef>
+          <a:fontRef idx="minor">
+            <a:schemeClr val="lt1"/>
+          </a:fontRef>
+        </p:style>
+        <p:txBody>
+          <a:bodyPr rtlCol="0" anchor="ctr" wrap="square" lIns="54864" rIns="54864" tIns="36576" bIns="36576"/>
+          <a:lstStyle/>
+          <a:p>
+            <a:pPr algn="ctr"/>
+            <a:r>
+              <a:rPr sz="1200" b="0">
+                <a:solidFill>
+                  <a:srgbClr val="22272E"/>
+                </a:solidFill>
+                <a:latin typeface="Meiryo"/>
+              </a:rPr>
+              <a:t>src:  He is the most respectful student here.</a:t>
+            </a:r>
+          </a:p>
+          <a:p>
+            <a:pPr algn="ctr"/>
+            <a:r>
+              <a:rPr sz="1200" b="0">
+                <a:solidFill>
+                  <a:srgbClr val="22272E"/>
+                </a:solidFill>
+                <a:latin typeface="Meiryo"/>
+              </a:rPr>
+              <a:t>無関係指示: → He is the respectful student here.</a:t>
+            </a:r>
+          </a:p>
+          <a:p>
+            <a:pPr algn="ctr"/>
+            <a:r>
+              <a:rPr sz="1200" b="0">
+                <a:solidFill>
+                  <a:srgbClr val="22272E"/>
+                </a:solidFill>
+                <a:latin typeface="Meiryo"/>
+              </a:rPr>
+              <a:t>(頼んでいない最上級が消える=正解と同じ編集)</a:t>
+            </a:r>
+          </a:p>
+          <a:p>
+            <a:pPr algn="ctr"/>
+            <a:r>
+              <a:rPr sz="1200" b="0">
+                <a:solidFill>
+                  <a:srgbClr val="22272E"/>
+                </a:solidFill>
+                <a:latin typeface="Meiryo"/>
+              </a:rPr>
+              <a:t/>
+            </a:r>
+          </a:p>
+          <a:p>
+            <a:pPr algn="ctr"/>
+            <a:r>
+              <a:rPr sz="1200" b="0">
+                <a:solidFill>
+                  <a:srgbClr val="22272E"/>
+                </a:solidFill>
+                <a:latin typeface="Meiryo"/>
+              </a:rPr>
+              <a:t>src:  May I interject, the mobile app needs …</a:t>
+            </a:r>
+          </a:p>
+          <a:p>
+            <a:pPr algn="ctr"/>
+            <a:r>
+              <a:rPr sz="1200" b="0">
+                <a:solidFill>
+                  <a:srgbClr val="22272E"/>
+                </a:solidFill>
+                <a:latin typeface="Meiryo"/>
+              </a:rPr>
+              <a:t>無関係指示: → The mobile app needs …(間投句が消える)</a:t>
+            </a:r>
+          </a:p>
+          <a:p>
+            <a:pPr algn="ctr"/>
+            <a:r>
+              <a:rPr sz="1200" b="0">
+                <a:solidFill>
+                  <a:srgbClr val="22272E"/>
+                </a:solidFill>
+                <a:latin typeface="Meiryo"/>
+              </a:rPr>
+              <a:t/>
+            </a:r>
+          </a:p>
+          <a:p>
+            <a:pPr algn="ctr"/>
+            <a:r>
+              <a:rPr sz="1200" b="0">
+                <a:solidFill>
+                  <a:srgbClr val="22272E"/>
+                </a:solidFill>
+                <a:latin typeface="Meiryo"/>
+              </a:rPr>
+              <a:t>src:  He wanted to slowly walk through …</a:t>
+            </a:r>
+          </a:p>
+          <a:p>
+            <a:pPr algn="ctr"/>
+            <a:r>
+              <a:rPr sz="1200" b="0">
+                <a:solidFill>
+                  <a:srgbClr val="22272E"/>
+                </a:solidFill>
+                <a:latin typeface="Meiryo"/>
+              </a:rPr>
+              <a:t>無関係指示: → He wanted to leisurely explore …(大幅書換)</a:t>
+            </a:r>
+          </a:p>
+        </p:txBody>
+      </p:sp>
+      <p:sp>
+        <p:nvSpPr>
+          <p:cNvPr id="7" name="TextBox 6"/>
+          <p:cNvSpPr txBox="1"/>
+          <p:nvPr/>
+        </p:nvSpPr>
+        <p:spPr>
+          <a:xfrm>
+            <a:off x="6355080" y="1828800"/>
+            <a:ext cx="5486400" cy="365760"/>
+          </a:xfrm>
+          <a:prstGeom prst="rect">
+            <a:avLst/>
+          </a:prstGeom>
+          <a:noFill/>
+        </p:spPr>
+        <p:txBody>
+          <a:bodyPr wrap="square">
+            <a:spAutoFit/>
+          </a:bodyPr>
+          <a:lstStyle/>
+          <a:p>
+            <a:pPr algn="l">
+              <a:lnSpc>
+                <a:spcPct val="115000"/>
+              </a:lnSpc>
+            </a:pPr>
+            <a:r>
+              <a:rPr sz="1600" b="1">
+                <a:solidFill>
+                  <a:srgbClr val="0E7C66"/>
+                </a:solidFill>
+                <a:latin typeface="Meiryo"/>
+              </a:rPr>
+              <a:t>本手法: 正しいスペックでも編集が出ないことがある</a:t>
+            </a:r>
+          </a:p>
+        </p:txBody>
+      </p:sp>
+      <p:sp>
+        <p:nvSpPr>
+          <p:cNvPr id="8" name="Rounded Rectangle 7"/>
+          <p:cNvSpPr/>
+          <p:nvPr/>
+        </p:nvSpPr>
+        <p:spPr>
+          <a:xfrm>
+            <a:off x="6355080" y="2286000"/>
+            <a:ext cx="5394960" cy="2834640"/>
+          </a:xfrm>
+          <a:prstGeom prst="roundRect">
+            <a:avLst/>
+          </a:prstGeom>
+          <a:solidFill>
+            <a:srgbClr val="F6F7F8"/>
+          </a:solidFill>
+          <a:ln w="20320">
+            <a:solidFill>
+              <a:srgbClr val="0E7C66"/>
+            </a:solidFill>
+          </a:ln>
+        </p:spPr>
+        <p:style>
+          <a:lnRef idx="1">
+            <a:schemeClr val="accent1"/>
+          </a:lnRef>
+          <a:fillRef idx="3">
+            <a:schemeClr val="accent1"/>
+          </a:fillRef>
+          <a:effectRef idx="2">
+            <a:schemeClr val="accent1"/>
+          </a:effectRef>
+          <a:fontRef idx="minor">
+            <a:schemeClr val="lt1"/>
+          </a:fontRef>
+        </p:style>
+        <p:txBody>
+          <a:bodyPr rtlCol="0" anchor="ctr" wrap="square" lIns="54864" rIns="54864" tIns="36576" bIns="36576"/>
+          <a:lstStyle/>
+          <a:p>
+            <a:pPr algn="ctr"/>
+            <a:r>
+              <a:rPr sz="1200" b="0">
+                <a:solidFill>
+                  <a:srgbClr val="22272E"/>
+                </a:solidFill>
+                <a:latin typeface="Meiryo"/>
+              </a:rPr>
+              <a:t>src:  He is the most respectful student here.</a:t>
+            </a:r>
+          </a:p>
+          <a:p>
+            <a:pPr algn="ctr"/>
+            <a:r>
+              <a:rPr sz="1200" b="0">
+                <a:solidFill>
+                  <a:srgbClr val="22272E"/>
+                </a:solidFill>
+                <a:latin typeface="Meiryo"/>
+              </a:rPr>
+              <a:t>出力 = src のまま(最上級を消せず)</a:t>
+            </a:r>
+          </a:p>
+          <a:p>
+            <a:pPr algn="ctr"/>
+            <a:r>
+              <a:rPr sz="1200" b="0">
+                <a:solidFill>
+                  <a:srgbClr val="22272E"/>
+                </a:solidFill>
+                <a:latin typeface="Meiryo"/>
+              </a:rPr>
+              <a:t/>
+            </a:r>
+          </a:p>
+          <a:p>
+            <a:pPr algn="ctr"/>
+            <a:r>
+              <a:rPr sz="1200" b="0">
+                <a:solidFill>
+                  <a:srgbClr val="22272E"/>
+                </a:solidFill>
+                <a:latin typeface="Meiryo"/>
+              </a:rPr>
+              <a:t>src:  A clock ticks without pause.</a:t>
+            </a:r>
+          </a:p>
+          <a:p>
+            <a:pPr algn="ctr"/>
+            <a:r>
+              <a:rPr sz="1200" b="0">
+                <a:solidFill>
+                  <a:srgbClr val="22272E"/>
+                </a:solidFill>
+                <a:latin typeface="Meiryo"/>
+              </a:rPr>
+              <a:t>出力 = src のまま(without pauseを削除できず)</a:t>
+            </a:r>
+          </a:p>
+          <a:p>
+            <a:pPr algn="ctr"/>
+            <a:r>
+              <a:rPr sz="1200" b="0">
+                <a:solidFill>
+                  <a:srgbClr val="22272E"/>
+                </a:solidFill>
+                <a:latin typeface="Meiryo"/>
+              </a:rPr>
+              <a:t/>
+            </a:r>
+          </a:p>
+          <a:p>
+            <a:pPr algn="ctr"/>
+            <a:r>
+              <a:rPr sz="1200" b="0">
+                <a:solidFill>
+                  <a:srgbClr val="22272E"/>
+                </a:solidFill>
+                <a:latin typeface="Meiryo"/>
+              </a:rPr>
+              <a:t>src:  Biologists studied green slime in …</a:t>
+            </a:r>
+          </a:p>
+          <a:p>
+            <a:pPr algn="ctr"/>
+            <a:r>
+              <a:rPr sz="1200" b="0">
+                <a:solidFill>
+                  <a:srgbClr val="22272E"/>
+                </a:solidFill>
+                <a:latin typeface="Meiryo"/>
+              </a:rPr>
+              <a:t>出力 = src のまま(algaeへの語彙置換 —</a:t>
+            </a:r>
+          </a:p>
+          <a:p>
+            <a:pPr algn="ctr"/>
+            <a:r>
+              <a:rPr sz="1200" b="0">
+                <a:solidFill>
+                  <a:srgbClr val="22272E"/>
+                </a:solidFill>
+                <a:latin typeface="Meiryo"/>
+              </a:rPr>
+              <a:t> 特徴平均のスペックでは単語の中身まで運べない)</a:t>
+            </a:r>
+          </a:p>
+        </p:txBody>
+      </p:sp>
+      <p:sp>
+        <p:nvSpPr>
+          <p:cNvPr id="9" name="TextBox 8"/>
+          <p:cNvSpPr txBox="1"/>
+          <p:nvPr/>
+        </p:nvSpPr>
+        <p:spPr>
+          <a:xfrm>
+            <a:off x="502920" y="5349240"/>
+            <a:ext cx="11247120" cy="1188720"/>
+          </a:xfrm>
+          <a:prstGeom prst="rect">
+            <a:avLst/>
+          </a:prstGeom>
+          <a:noFill/>
+        </p:spPr>
+        <p:txBody>
+          <a:bodyPr wrap="square">
+            <a:spAutoFit/>
+          </a:bodyPr>
+          <a:lstStyle/>
+          <a:p>
+            <a:pPr algn="l">
+              <a:lnSpc>
+                <a:spcPct val="115000"/>
+              </a:lnSpc>
+            </a:pPr>
+            <a:r>
+              <a:rPr sz="1400" b="0">
+                <a:solidFill>
+                  <a:srgbClr val="5A6472"/>
+                </a:solidFill>
+                <a:latin typeface="Meiryo"/>
+              </a:rPr>
+              <a:t>まとめ: promptingの失敗=「効きすぎ」(指定に従わない編集 → 介入としての特異性がない)。</a:t>
+            </a:r>
+          </a:p>
+          <a:p>
+            <a:pPr algn="l">
+              <a:lnSpc>
+                <a:spcPct val="115000"/>
+              </a:lnSpc>
+            </a:pPr>
+            <a:r>
+              <a:rPr sz="1400" b="0">
+                <a:solidFill>
+                  <a:srgbClr val="5A6472"/>
+                </a:solidFill>
+                <a:latin typeface="Meiryo"/>
+              </a:rPr>
+              <a:t>本手法の失敗=「効かなさすぎ」(発火不足・語彙固有の編集)。改善はToDo②のスペック較正と追加学習が対応。</a:t>
+            </a:r>
+          </a:p>
+        </p:txBody>
+      </p:sp>
+    </p:spTree>
+  </p:cSld>
+  <p:clrMapOvr>
+    <a:masterClrMapping/>
+  </p:clrMapOvr>
+</p:sld>
+</file>
+
+<file path=ppt/slides/slide21.xml><?xml version="1.0" encoding="utf-8"?>
 <p:sld xmlns:a="http://schemas.openxmlformats.org/drawingml/2006/main" xmlns:p="http://schemas.openxmlformats.org/presentationml/2006/main" xmlns:r="http://schemas.openxmlformats.org/officeDocument/2006/relationships">
   <p:cSld>
     <p:spTree>

--- a/slides/20260722_progress.pptx
+++ b/slides/20260722_progress.pptx
@@ -3426,7 +3426,7 @@
                 </a:solidFill>
                 <a:latin typeface="Meiryo"/>
               </a:rPr>
-              <a:t>「この文を復唱せよ」というプロンプト下で介入し、出力が正解文(最小対のもう片方)と完全一致した率。編集の精密さを測る</a:t>
+              <a:t>「この文を復唱せよ」というプロンプト下で介入し、出力が正解文(最小対のもう片方)と完全一致した率。編集の精密さを測る。生成はgreedy — 厳格な復唱が前提のためで、温度を上げると復唱自体が崩れる(実測: temp1.0でexact約半減)</a:t>
             </a:r>
           </a:p>
           <a:p>

--- a/slides/20260722_progress.pptx
+++ b/slides/20260722_progress.pptx
@@ -3510,7 +3510,7 @@
                 </a:solidFill>
                 <a:latin typeface="Meiryo"/>
               </a:rPr>
-              <a:t>方向2分類(amp=足す / sup=消す)× 特徴4分類(形態・統語・意味・語用)</a:t>
+              <a:t>方向2分類(enhancement=足す / ablation=消す — LinguaLensの用語に準拠)× 特徴4分類(形態・統語・意味・語用)</a:t>
             </a:r>
           </a:p>
           <a:p>
@@ -5795,7 +5795,7 @@
                         <a:rPr sz="1250" b="1">
                           <a:latin typeface="Meiryo"/>
                         </a:rPr>
-                        <a:t>sup true</a:t>
+                        <a:t>ablation true</a:t>
                       </a:r>
                     </a:p>
                   </a:txBody>
@@ -5810,7 +5810,7 @@
                         <a:rPr sz="1250" b="1">
                           <a:latin typeface="Meiryo"/>
                         </a:rPr>
-                        <a:t>sup random</a:t>
+                        <a:t>random</a:t>
                       </a:r>
                     </a:p>
                   </a:txBody>
@@ -5825,7 +5825,7 @@
                         <a:rPr sz="1250" b="1">
                           <a:latin typeface="Meiryo"/>
                         </a:rPr>
-                        <a:t>amp true</a:t>
+                        <a:t>enhancement true</a:t>
                       </a:r>
                     </a:p>
                   </a:txBody>
@@ -5840,7 +5840,7 @@
                         <a:rPr sz="1250" b="1">
                           <a:latin typeface="Meiryo"/>
                         </a:rPr>
-                        <a:t>amp random</a:t>
+                        <a:t>random</a:t>
                       </a:r>
                     </a:p>
                   </a:txBody>
@@ -6140,7 +6140,7 @@
                         <a:rPr sz="1250" b="1">
                           <a:latin typeface="Meiryo"/>
                         </a:rPr>
-                        <a:t>sup true</a:t>
+                        <a:t>ablation true</a:t>
                       </a:r>
                     </a:p>
                   </a:txBody>
@@ -6155,7 +6155,7 @@
                         <a:rPr sz="1250" b="1">
                           <a:latin typeface="Meiryo"/>
                         </a:rPr>
-                        <a:t>sup random</a:t>
+                        <a:t>random</a:t>
                       </a:r>
                     </a:p>
                   </a:txBody>
@@ -6170,7 +6170,7 @@
                         <a:rPr sz="1250" b="1">
                           <a:latin typeface="Meiryo"/>
                         </a:rPr>
-                        <a:t>amp true</a:t>
+                        <a:t>enhancement true</a:t>
                       </a:r>
                     </a:p>
                   </a:txBody>
@@ -6185,7 +6185,7 @@
                         <a:rPr sz="1250" b="1">
                           <a:latin typeface="Meiryo"/>
                         </a:rPr>
-                        <a:t>amp random</a:t>
+                        <a:t>random</a:t>
                       </a:r>
                     </a:p>
                   </a:txBody>
@@ -6855,7 +6855,7 @@
                         <a:rPr sz="1250" b="1">
                           <a:latin typeface="Meiryo"/>
                         </a:rPr>
-                        <a:t>L4 sup</a:t>
+                        <a:t>L4 abl</a:t>
                       </a:r>
                     </a:p>
                   </a:txBody>
@@ -6870,7 +6870,7 @@
                         <a:rPr sz="1250" b="1">
                           <a:latin typeface="Meiryo"/>
                         </a:rPr>
-                        <a:t>L4 amp</a:t>
+                        <a:t>L4 enh</a:t>
                       </a:r>
                     </a:p>
                   </a:txBody>
@@ -6885,7 +6885,7 @@
                         <a:rPr sz="1250" b="1">
                           <a:latin typeface="Meiryo"/>
                         </a:rPr>
-                        <a:t>L20 sup</a:t>
+                        <a:t>L20 abl</a:t>
                       </a:r>
                     </a:p>
                   </a:txBody>
@@ -6900,7 +6900,7 @@
                         <a:rPr sz="1250" b="1">
                           <a:latin typeface="Meiryo"/>
                         </a:rPr>
-                        <a:t>L20 amp</a:t>
+                        <a:t>L20 enh</a:t>
                       </a:r>
                     </a:p>
                   </a:txBody>
@@ -7154,7 +7154,7 @@
                         <a:rPr sz="1250" b="1">
                           <a:latin typeface="Meiryo"/>
                         </a:rPr>
-                        <a:t>L4 sup</a:t>
+                        <a:t>L4 abl</a:t>
                       </a:r>
                     </a:p>
                   </a:txBody>
@@ -7169,7 +7169,7 @@
                         <a:rPr sz="1250" b="1">
                           <a:latin typeface="Meiryo"/>
                         </a:rPr>
-                        <a:t>L4 amp</a:t>
+                        <a:t>L4 enh</a:t>
                       </a:r>
                     </a:p>
                   </a:txBody>
@@ -7184,7 +7184,7 @@
                         <a:rPr sz="1250" b="1">
                           <a:latin typeface="Meiryo"/>
                         </a:rPr>
-                        <a:t>L20 sup</a:t>
+                        <a:t>L20 abl</a:t>
                       </a:r>
                     </a:p>
                   </a:txBody>
@@ -7199,7 +7199,7 @@
                         <a:rPr sz="1250" b="1">
                           <a:latin typeface="Meiryo"/>
                         </a:rPr>
-                        <a:t>L20 amp</a:t>
+                        <a:t>L20 enh</a:t>
                       </a:r>
                     </a:p>
                   </a:txBody>
@@ -7552,7 +7552,7 @@
                 </a:solidFill>
                 <a:latin typeface="Meiryo"/>
               </a:rPr>
-              <a:t>・提案のL4 amp 0.172(random 0.032)は全介入手法の最高値。L4 supのみ同スペックsteerが上回る(0.108 vs 0.086)</a:t>
+              <a:t>・提案のL4 enhancement 0.172(random 0.032)は全介入手法の最高値。L4 ablationのみ同スペックsteerが上回る(0.108 vs 0.086)</a:t>
             </a:r>
           </a:p>
           <a:p>
@@ -8246,7 +8246,7 @@
                         <a:rPr sz="1300" b="1">
                           <a:latin typeface="Meiryo"/>
                         </a:rPr>
-                        <a:t>手法(消す/足す)</a:t>
+                        <a:t>手法(ablation/enhancement)</a:t>
                       </a:r>
                     </a:p>
                   </a:txBody>
@@ -8460,7 +8460,7 @@
                         <a:rPr sz="1250" b="0">
                           <a:latin typeface="Meiryo"/>
                         </a:rPr>
-                        <a:t>supはefに次ぐ、ampはL12/L20でef超え</a:t>
+                        <a:t>ablationはefに次ぐ、enhancementはL12/L20でef超え</a:t>
                       </a:r>
                     </a:p>
                   </a:txBody>
@@ -8810,7 +8810,7 @@
                 </a:solidFill>
                 <a:latin typeface="Meiryo"/>
               </a:rPr>
-              <a:t>・提案の弱点も明確: 足す方向はL12/L20で同スペックsteerに劣る(0.31 vs 0.35 / 0.03 vs 0.17)— 深層ampが改善対象</a:t>
+              <a:t>・提案の弱点も明確: enhancementはL12/L20で同スペックsteerに劣る(0.31 vs 0.35 / 0.03 vs 0.17)— 深層のenhancementが改善対象</a:t>
             </a:r>
           </a:p>
           <a:p>
@@ -12147,7 +12147,7 @@
                 </a:solidFill>
                 <a:latin typeface="Meiryo"/>
               </a:rPr>
-              <a:t>各最小対は「特徴を消す(sup)」「特徴を足す(amp)」の両方向で評価できる(逆向き変換)</a:t>
+              <a:t>各最小対は「特徴を消す(ablation)」「特徴を足す(enhancement)」の両方向で評価できる(逆向き変換)</a:t>
             </a:r>
           </a:p>
         </p:txBody>

--- a/slides/20260722_progress.pptx
+++ b/slides/20260722_progress.pptx
@@ -8167,7 +8167,7 @@
                 </a:solidFill>
                 <a:latin typeface="Meiryo"/>
               </a:rPr>
-              <a:t>実験結果 3/3 — FIC(特徴が本当に動いたか、gpt-4o判定)</a:t>
+              <a:t>実験結果 3/3 — FIC(方向別成分 E_abl / E_enh と統合値)</a:t>
             </a:r>
           </a:p>
         </p:txBody>
@@ -8826,7 +8826,23 @@
                 </a:solidFill>
                 <a:latin typeface="Meiryo"/>
               </a:rPr>
-              <a:t>・promptingはexact同様「誤指定でも動く」が、FICの定義上その特異性の弱さは減点済み — それでも足す方向は最良0.49</a:t>
+              <a:t>・統合FIC(両成分の調和平均・LinguaLens公式): ef L4 0.55 / L12 0.46 / L20 0.12、steer L12 0.57、prompting 0.41、</a:t>
+            </a:r>
+          </a:p>
+          <a:p>
+            <a:pPr algn="l">
+              <a:lnSpc>
+                <a:spcPct val="115000"/>
+              </a:lnSpc>
+            </a:pPr>
+            <a:r>
+              <a:rPr sz="1350" b="0">
+                <a:solidFill>
+                  <a:srgbClr val="5A6472"/>
+                </a:solidFill>
+                <a:latin typeface="Meiryo"/>
+              </a:rPr>
+              <a:t>  LinguaLens準拠 0.05-0.07 — L12ではefのenhancement弱さが律速し同スペックsteerに逆転される(改善実験が進行中)</a:t>
             </a:r>
           </a:p>
         </p:txBody>

--- a/slides/20260722_progress.pptx
+++ b/slides/20260722_progress.pptx
@@ -8646,7 +8646,7 @@
                         <a:rPr sz="1250" b="0">
                           <a:latin typeface="Meiryo"/>
                         </a:rPr>
-                        <a:t>判定中</a:t>
+                        <a:t>0.20 / −0.03</a:t>
                       </a:r>
                     </a:p>
                   </a:txBody>
@@ -8661,7 +8661,7 @@
                         <a:rPr sz="1250" b="0">
                           <a:latin typeface="Meiryo"/>
                         </a:rPr>
-                        <a:t>判定中</a:t>
+                        <a:t>−0.01 / −0.06</a:t>
                       </a:r>
                     </a:p>
                   </a:txBody>
@@ -8676,7 +8676,7 @@
                         <a:rPr sz="1250" b="0">
                           <a:latin typeface="Meiryo"/>
                         </a:rPr>
-                        <a:t>判定中</a:t>
+                        <a:t>−0.02 / −0.07</a:t>
                       </a:r>
                     </a:p>
                   </a:txBody>
@@ -8691,7 +8691,7 @@
                         <a:rPr sz="1250" b="0">
                           <a:latin typeface="Meiryo"/>
                         </a:rPr>
-                        <a:t>追って判定</a:t>
+                        <a:t>因果効果ほぼなし(L4 ablのみ弱い効果)</a:t>
                       </a:r>
                     </a:p>
                   </a:txBody>
